--- a/_strategy/Dexter_Sports_Investor_Deck_INTERNAL.pptx
+++ b/_strategy/Dexter_Sports_Investor_Deck_INTERNAL.pptx
@@ -4,6 +4,9 @@
   <p:sldMasterIdLst>
     <p:sldMasterId id="2147483648" r:id="rId1"/>
   </p:sldMasterIdLst>
+  <p:notesMasterIdLst>
+    <p:notesMasterId r:id="rId17"/>
+  </p:notesMasterIdLst>
   <p:sldIdLst>
     <p:sldId id="256" r:id="rId2"/>
     <p:sldId id="257" r:id="rId3"/>
@@ -21,9 +24,6 @@
     <p:sldId id="269" r:id="rId15"/>
     <p:sldId id="270" r:id="rId16"/>
   </p:sldIdLst>
-  <p:notesMasterIdLst>
-    <p:notesMasterId r:id="rId17"/>
-  </p:notesMasterIdLst>
   <p:sldSz cx="12192000" cy="6858000"/>
   <p:notesSz cx="6858000" cy="12192000"/>
   <p:defaultTextStyle>
@@ -118,13 +118,20 @@
       </a:defRPr>
     </a:lvl9pPr>
   </p:defaultTextStyle>
+  <p:extLst>
+    <p:ext uri="{EFAFB233-063F-42B5-8137-9DF3F51BA10A}">
+      <p15:sldGuideLst xmlns:p15="http://schemas.microsoft.com/office/powerpoint/2012/main"/>
+    </p:ext>
+  </p:extLst>
 </p:presentation>
 </file>
 
 <file path=ppt/charts/chart1.xml><?xml version="1.0" encoding="utf-8"?>
-<c:chartSpace xmlns:c="http://schemas.openxmlformats.org/drawingml/2006/chart" xmlns:a="http://schemas.openxmlformats.org/drawingml/2006/main" xmlns:r="http://schemas.openxmlformats.org/officeDocument/2006/relationships">
+<c:chartSpace xmlns:c="http://schemas.openxmlformats.org/drawingml/2006/chart" xmlns:a="http://schemas.openxmlformats.org/drawingml/2006/main" xmlns:r="http://schemas.openxmlformats.org/officeDocument/2006/relationships" xmlns:c16r2="http://schemas.microsoft.com/office/drawing/2015/06/chart">
   <c:date1904 val="0"/>
+  <c:lang val="en-US"/>
   <c:roundedCorners val="1"/>
+  <c:style val="2"/>
   <c:chart>
     <c:title>
       <c:tx>
@@ -152,7 +159,6 @@
           </a:p>
         </c:rich>
       </c:tx>
-      <c:layout/>
       <c:overlay val="0"/>
     </c:title>
     <c:autoTitleDeleted val="0"/>
@@ -183,54 +189,28 @@
             <a:effectLst/>
           </c:spPr>
           <c:invertIfNegative val="0"/>
-          <c:dLbls>
-            <c:numFmt formatCode="#,##0" sourceLinked="0"/>
-            <c:txPr>
-              <a:bodyPr/>
-              <a:lstStyle/>
-              <a:p>
-                <a:pPr>
-                  <a:defRPr b="0" i="0" strike="noStrike" sz="1200" u="none">
-                    <a:solidFill>
-                      <a:srgbClr val="000000"/>
-                    </a:solidFill>
-                    <a:latin typeface="Arial"/>
-                  </a:defRPr>
-                </a:pPr>
-              </a:p>
-            </c:txPr>
-            <c:showLegendKey val="0"/>
-            <c:showVal val="0"/>
-            <c:showCatName val="0"/>
-            <c:showSerName val="0"/>
-            <c:showPercent val="0"/>
-            <c:showBubbleSize val="0"/>
-            <c:showLeaderLines val="0"/>
-          </c:dLbls>
           <c:cat>
-            <c:multiLvlStrRef>
+            <c:strRef>
               <c:f>Sheet1!$A$2:$A$6</c:f>
-              <c:multiLvlStrCache>
+              <c:strCache>
                 <c:ptCount val="5"/>
-                <c:lvl>
-                  <c:pt idx="0">
-                    <c:v>Y1</c:v>
-                  </c:pt>
-                  <c:pt idx="1">
-                    <c:v>Y2</c:v>
-                  </c:pt>
-                  <c:pt idx="2">
-                    <c:v>Y3</c:v>
-                  </c:pt>
-                  <c:pt idx="3">
-                    <c:v>Y4</c:v>
-                  </c:pt>
-                  <c:pt idx="4">
-                    <c:v>Y5</c:v>
-                  </c:pt>
-                </c:lvl>
-              </c:multiLvlStrCache>
-            </c:multiLvlStrRef>
+                <c:pt idx="0">
+                  <c:v>Y1</c:v>
+                </c:pt>
+                <c:pt idx="1">
+                  <c:v>Y2</c:v>
+                </c:pt>
+                <c:pt idx="2">
+                  <c:v>Y3</c:v>
+                </c:pt>
+                <c:pt idx="3">
+                  <c:v>Y4</c:v>
+                </c:pt>
+                <c:pt idx="4">
+                  <c:v>Y5</c:v>
+                </c:pt>
+              </c:strCache>
+            </c:strRef>
           </c:cat>
           <c:val>
             <c:numRef>
@@ -256,6 +236,11 @@
               </c:numCache>
             </c:numRef>
           </c:val>
+          <c:extLst>
+            <c:ext xmlns:c16="http://schemas.microsoft.com/office/drawing/2014/chart" uri="{C3380CC4-5D6E-409C-BE32-E72D297353CC}">
+              <c16:uniqueId val="{00000000-1B8E-4488-B1BE-CBDAF7BD622E}"/>
+            </c:ext>
+          </c:extLst>
         </c:ser>
         <c:ser>
           <c:idx val="1"/>
@@ -278,54 +263,28 @@
             <a:effectLst/>
           </c:spPr>
           <c:invertIfNegative val="0"/>
-          <c:dLbls>
-            <c:numFmt formatCode="#,##0" sourceLinked="0"/>
-            <c:txPr>
-              <a:bodyPr/>
-              <a:lstStyle/>
-              <a:p>
-                <a:pPr>
-                  <a:defRPr b="0" i="0" strike="noStrike" sz="1200" u="none">
-                    <a:solidFill>
-                      <a:srgbClr val="000000"/>
-                    </a:solidFill>
-                    <a:latin typeface="Arial"/>
-                  </a:defRPr>
-                </a:pPr>
-              </a:p>
-            </c:txPr>
-            <c:showLegendKey val="0"/>
-            <c:showVal val="0"/>
-            <c:showCatName val="0"/>
-            <c:showSerName val="0"/>
-            <c:showPercent val="0"/>
-            <c:showBubbleSize val="0"/>
-            <c:showLeaderLines val="0"/>
-          </c:dLbls>
           <c:cat>
-            <c:multiLvlStrRef>
+            <c:strRef>
               <c:f>Sheet1!$A$2:$A$6</c:f>
-              <c:multiLvlStrCache>
+              <c:strCache>
                 <c:ptCount val="5"/>
-                <c:lvl>
-                  <c:pt idx="0">
-                    <c:v>Y1</c:v>
-                  </c:pt>
-                  <c:pt idx="1">
-                    <c:v>Y2</c:v>
-                  </c:pt>
-                  <c:pt idx="2">
-                    <c:v>Y3</c:v>
-                  </c:pt>
-                  <c:pt idx="3">
-                    <c:v>Y4</c:v>
-                  </c:pt>
-                  <c:pt idx="4">
-                    <c:v>Y5</c:v>
-                  </c:pt>
-                </c:lvl>
-              </c:multiLvlStrCache>
-            </c:multiLvlStrRef>
+                <c:pt idx="0">
+                  <c:v>Y1</c:v>
+                </c:pt>
+                <c:pt idx="1">
+                  <c:v>Y2</c:v>
+                </c:pt>
+                <c:pt idx="2">
+                  <c:v>Y3</c:v>
+                </c:pt>
+                <c:pt idx="3">
+                  <c:v>Y4</c:v>
+                </c:pt>
+                <c:pt idx="4">
+                  <c:v>Y5</c:v>
+                </c:pt>
+              </c:strCache>
+            </c:strRef>
           </c:cat>
           <c:val>
             <c:numRef>
@@ -351,36 +310,23 @@
               </c:numCache>
             </c:numRef>
           </c:val>
+          <c:extLst>
+            <c:ext xmlns:c16="http://schemas.microsoft.com/office/drawing/2014/chart" uri="{C3380CC4-5D6E-409C-BE32-E72D297353CC}">
+              <c16:uniqueId val="{00000001-1B8E-4488-B1BE-CBDAF7BD622E}"/>
+            </c:ext>
+          </c:extLst>
         </c:ser>
         <c:dLbls>
-          <c:numFmt formatCode="#,##0" sourceLinked="0"/>
-          <c:txPr>
-            <a:bodyPr/>
-            <a:lstStyle/>
-            <a:p>
-              <a:pPr>
-                <a:defRPr b="0" i="0" strike="noStrike" sz="1200" u="none">
-                  <a:solidFill>
-                    <a:srgbClr val="000000"/>
-                  </a:solidFill>
-                  <a:latin typeface="Arial"/>
-                </a:defRPr>
-              </a:pPr>
-            </a:p>
-          </c:txPr>
           <c:showLegendKey val="0"/>
           <c:showVal val="0"/>
           <c:showCatName val="0"/>
           <c:showSerName val="0"/>
           <c:showPercent val="0"/>
           <c:showBubbleSize val="0"/>
-          <c:showLeaderLines val="0"/>
         </c:dLbls>
         <c:gapWidth val="150"/>
-        <c:overlap val="0"/>
         <c:axId val="2094734554"/>
         <c:axId val="2094734552"/>
-        <c:axId val="2094734556"/>
       </c:barChart>
       <c:catAx>
         <c:axId val="2094734554"/>
@@ -421,6 +367,7 @@
         <c:crosses val="autoZero"/>
         <c:auto val="1"/>
         <c:lblAlgn val="ctr"/>
+        <c:lblOffset val="100"/>
         <c:noMultiLvlLbl val="1"/>
       </c:catAx>
       <c:valAx>
@@ -467,7 +414,6 @@
               </a:p>
             </c:rich>
           </c:tx>
-          <c:layout/>
           <c:overlay val="0"/>
         </c:title>
         <c:numFmt formatCode="General" sourceLinked="0"/>
@@ -530,6 +476,7 @@
     </c:legend>
     <c:plotVisOnly val="1"/>
     <c:dispBlanksAs val="span"/>
+    <c:showDLblsOverMax val="1"/>
   </c:chart>
   <c:spPr>
     <a:noFill/>
@@ -566,234 +513,10 @@
           <a:chExt cx="0" cy="0"/>
         </a:xfrm>
       </p:grpSpPr>
-      <p:sp>
-        <p:nvSpPr>
-          <p:cNvPr id="2" name="Header Placeholder 1"/>
-          <p:cNvSpPr>
-            <a:spLocks noGrp="1"/>
-          </p:cNvSpPr>
-          <p:nvPr>
-            <p:ph type="hdr" sz="quarter"/>
-          </p:nvPr>
-        </p:nvSpPr>
-        <p:spPr>
-          <a:xfrm>
-            <a:off x="0" y="0"/>
-            <a:ext cx="2971800" cy="458788"/>
-          </a:xfrm>
-          <a:prstGeom prst="rect">
-            <a:avLst/>
-          </a:prstGeom>
-        </p:spPr>
-        <p:txBody>
-          <a:bodyPr vert="horz" lIns="91440" tIns="45720" rIns="91440" bIns="45720" rtlCol="0"/>
-          <a:lstStyle>
-            <a:lvl1pPr algn="l">
-              <a:defRPr sz="1200"/>
-            </a:lvl1pPr>
-          </a:lstStyle>
-          <a:p>
-            <a:endParaRPr lang="en-US"/>
-          </a:p>
-        </p:txBody>
-      </p:sp>
-      <p:sp>
-        <p:nvSpPr>
-          <p:cNvPr id="3" name="Date Placeholder 2"/>
-          <p:cNvSpPr>
-            <a:spLocks noGrp="1"/>
-          </p:cNvSpPr>
-          <p:nvPr>
-            <p:ph type="dt" idx="1"/>
-          </p:nvPr>
-        </p:nvSpPr>
-        <p:spPr>
-          <a:xfrm>
-            <a:off x="3884613" y="0"/>
-            <a:ext cx="2971800" cy="458788"/>
-          </a:xfrm>
-          <a:prstGeom prst="rect">
-            <a:avLst/>
-          </a:prstGeom>
-        </p:spPr>
-        <p:txBody>
-          <a:bodyPr vert="horz" lIns="91440" tIns="45720" rIns="91440" bIns="45720" rtlCol="0"/>
-          <a:lstStyle>
-            <a:lvl1pPr algn="r">
-              <a:defRPr sz="1200"/>
-            </a:lvl1pPr>
-          </a:lstStyle>
-          <a:p>
-            <a:fld id="{5282F153-3F37-0F45-9E97-73ACFA13230C}" type="datetimeFigureOut">
-              <a:rPr lang="en-US"/>
-              <a:t>7/23/19</a:t>
-            </a:fld>
-            <a:endParaRPr lang="en-US"/>
-          </a:p>
-        </p:txBody>
-      </p:sp>
-      <p:sp>
-        <p:nvSpPr>
-          <p:cNvPr id="4" name="Slide Image Placeholder 3"/>
-          <p:cNvSpPr>
-            <a:spLocks noGrp="1" noRot="1" noChangeAspect="1"/>
-          </p:cNvSpPr>
-          <p:nvPr>
-            <p:ph type="sldImg" idx="2"/>
-          </p:nvPr>
-        </p:nvSpPr>
-        <p:spPr>
-          <a:xfrm>
-            <a:off x="685800" y="1143000"/>
-            <a:ext cx="5486400" cy="3086100"/>
-          </a:xfrm>
-          <a:prstGeom prst="rect">
-            <a:avLst/>
-          </a:prstGeom>
-          <a:noFill/>
-          <a:ln w="12700">
-            <a:solidFill>
-              <a:prstClr val="black"/>
-            </a:solidFill>
-          </a:ln>
-        </p:spPr>
-        <p:txBody>
-          <a:bodyPr vert="horz" lIns="91440" tIns="45720" rIns="91440" bIns="45720" rtlCol="0" anchor="ctr"/>
-          <a:lstStyle/>
-          <a:p>
-            <a:endParaRPr lang="en-US"/>
-          </a:p>
-        </p:txBody>
-      </p:sp>
-      <p:sp>
-        <p:nvSpPr>
-          <p:cNvPr id="5" name="Notes Placeholder 4"/>
-          <p:cNvSpPr>
-            <a:spLocks noGrp="1"/>
-          </p:cNvSpPr>
-          <p:nvPr>
-            <p:ph type="body" sz="quarter" idx="3"/>
-          </p:nvPr>
-        </p:nvSpPr>
-        <p:spPr>
-          <a:xfrm>
-            <a:off x="685800" y="4400550"/>
-            <a:ext cx="5486400" cy="3600450"/>
-          </a:xfrm>
-          <a:prstGeom prst="rect">
-            <a:avLst/>
-          </a:prstGeom>
-        </p:spPr>
-        <p:txBody>
-          <a:bodyPr vert="horz" lIns="91440" tIns="45720" rIns="91440" bIns="45720" rtlCol="0"/>
-          <a:lstStyle/>
-          <a:p>
-            <a:pPr lvl="0"/>
-            <a:r>
-              <a:rPr lang="en-US"/>
-              <a:t>Click to edit Master text styles</a:t>
-            </a:r>
-          </a:p>
-          <a:p>
-            <a:pPr lvl="1"/>
-            <a:r>
-              <a:rPr lang="en-US"/>
-              <a:t>Second level</a:t>
-            </a:r>
-          </a:p>
-          <a:p>
-            <a:pPr lvl="2"/>
-            <a:r>
-              <a:rPr lang="en-US"/>
-              <a:t>Third level</a:t>
-            </a:r>
-          </a:p>
-          <a:p>
-            <a:pPr lvl="3"/>
-            <a:r>
-              <a:rPr lang="en-US"/>
-              <a:t>Fourth level</a:t>
-            </a:r>
-          </a:p>
-          <a:p>
-            <a:pPr lvl="4"/>
-            <a:r>
-              <a:rPr lang="en-US"/>
-              <a:t>Fifth level</a:t>
-            </a:r>
-          </a:p>
-        </p:txBody>
-      </p:sp>
-      <p:sp>
-        <p:nvSpPr>
-          <p:cNvPr id="6" name="Footer Placeholder 5"/>
-          <p:cNvSpPr>
-            <a:spLocks noGrp="1"/>
-          </p:cNvSpPr>
-          <p:nvPr>
-            <p:ph type="ftr" sz="quarter" idx="4"/>
-          </p:nvPr>
-        </p:nvSpPr>
-        <p:spPr>
-          <a:xfrm>
-            <a:off x="0" y="8685213"/>
-            <a:ext cx="2971800" cy="458787"/>
-          </a:xfrm>
-          <a:prstGeom prst="rect">
-            <a:avLst/>
-          </a:prstGeom>
-        </p:spPr>
-        <p:txBody>
-          <a:bodyPr vert="horz" lIns="91440" tIns="45720" rIns="91440" bIns="45720" rtlCol="0" anchor="b"/>
-          <a:lstStyle>
-            <a:lvl1pPr algn="l">
-              <a:defRPr sz="1200"/>
-            </a:lvl1pPr>
-          </a:lstStyle>
-          <a:p>
-            <a:endParaRPr lang="en-US"/>
-          </a:p>
-        </p:txBody>
-      </p:sp>
-      <p:sp>
-        <p:nvSpPr>
-          <p:cNvPr id="7" name="Slide Number Placeholder 6"/>
-          <p:cNvSpPr>
-            <a:spLocks noGrp="1"/>
-          </p:cNvSpPr>
-          <p:nvPr>
-            <p:ph type="sldNum" sz="quarter" idx="5"/>
-          </p:nvPr>
-        </p:nvSpPr>
-        <p:spPr>
-          <a:xfrm>
-            <a:off x="3884613" y="8685213"/>
-            <a:ext cx="2971800" cy="458787"/>
-          </a:xfrm>
-          <a:prstGeom prst="rect">
-            <a:avLst/>
-          </a:prstGeom>
-        </p:spPr>
-        <p:txBody>
-          <a:bodyPr vert="horz" lIns="91440" tIns="45720" rIns="91440" bIns="45720" rtlCol="0" anchor="b"/>
-          <a:lstStyle>
-            <a:lvl1pPr algn="r">
-              <a:defRPr sz="1200"/>
-            </a:lvl1pPr>
-          </a:lstStyle>
-          <a:p>
-            <a:fld id="{CE5E9CC1-C706-0F49-92D6-E571CC5EEA8F}" type="slidenum">
-              <a:rPr lang="en-US"/>
-              <a:t>‹#›</a:t>
-            </a:fld>
-            <a:endParaRPr lang="en-US"/>
-          </a:p>
-        </p:txBody>
-      </p:sp>
     </p:spTree>
     <p:extLst>
       <p:ext uri="{BB962C8B-B14F-4D97-AF65-F5344CB8AC3E}">
-        <p14:creationId xmlns:p14="http://schemas.microsoft.com/office/powerpoint/2010/main" val="1024086991"/>
+        <p14:creationId xmlns:p14="http://schemas.microsoft.com/office/powerpoint/2010/main" val="788519264"/>
       </p:ext>
     </p:extLst>
   </p:cSld>
@@ -937,10 +660,6 @@
           <a:bodyPr/>
           <a:lstStyle/>
           <a:p>
-            <a:r>
-              <a:rPr lang="en-US" dirty="0"/>
-              <a:t/>
-            </a:r>
             <a:endParaRPr lang="en-US" dirty="0"/>
           </a:p>
         </p:txBody>
@@ -1025,10 +744,6 @@
           <a:bodyPr/>
           <a:lstStyle/>
           <a:p>
-            <a:r>
-              <a:rPr lang="en-US" dirty="0"/>
-              <a:t/>
-            </a:r>
             <a:endParaRPr lang="en-US" dirty="0"/>
           </a:p>
         </p:txBody>
@@ -1113,10 +828,6 @@
           <a:bodyPr/>
           <a:lstStyle/>
           <a:p>
-            <a:r>
-              <a:rPr lang="en-US" dirty="0"/>
-              <a:t/>
-            </a:r>
             <a:endParaRPr lang="en-US" dirty="0"/>
           </a:p>
         </p:txBody>
@@ -1201,10 +912,6 @@
           <a:bodyPr/>
           <a:lstStyle/>
           <a:p>
-            <a:r>
-              <a:rPr lang="en-US" dirty="0"/>
-              <a:t/>
-            </a:r>
             <a:endParaRPr lang="en-US" dirty="0"/>
           </a:p>
         </p:txBody>
@@ -1289,10 +996,6 @@
           <a:bodyPr/>
           <a:lstStyle/>
           <a:p>
-            <a:r>
-              <a:rPr lang="en-US" dirty="0"/>
-              <a:t/>
-            </a:r>
             <a:endParaRPr lang="en-US" dirty="0"/>
           </a:p>
         </p:txBody>
@@ -1377,10 +1080,6 @@
           <a:bodyPr/>
           <a:lstStyle/>
           <a:p>
-            <a:r>
-              <a:rPr lang="en-US" dirty="0"/>
-              <a:t/>
-            </a:r>
             <a:endParaRPr lang="en-US" dirty="0"/>
           </a:p>
         </p:txBody>
@@ -1465,10 +1164,6 @@
           <a:bodyPr/>
           <a:lstStyle/>
           <a:p>
-            <a:r>
-              <a:rPr lang="en-US" dirty="0"/>
-              <a:t/>
-            </a:r>
             <a:endParaRPr lang="en-US" dirty="0"/>
           </a:p>
         </p:txBody>
@@ -1553,10 +1248,6 @@
           <a:bodyPr/>
           <a:lstStyle/>
           <a:p>
-            <a:r>
-              <a:rPr lang="en-US" dirty="0"/>
-              <a:t/>
-            </a:r>
             <a:endParaRPr lang="en-US" dirty="0"/>
           </a:p>
         </p:txBody>
@@ -1641,10 +1332,6 @@
           <a:bodyPr/>
           <a:lstStyle/>
           <a:p>
-            <a:r>
-              <a:rPr lang="en-US" dirty="0"/>
-              <a:t/>
-            </a:r>
             <a:endParaRPr lang="en-US" dirty="0"/>
           </a:p>
         </p:txBody>
@@ -1729,10 +1416,6 @@
           <a:bodyPr/>
           <a:lstStyle/>
           <a:p>
-            <a:r>
-              <a:rPr lang="en-US" dirty="0"/>
-              <a:t/>
-            </a:r>
             <a:endParaRPr lang="en-US" dirty="0"/>
           </a:p>
         </p:txBody>
@@ -1817,10 +1500,6 @@
           <a:bodyPr/>
           <a:lstStyle/>
           <a:p>
-            <a:r>
-              <a:rPr lang="en-US" dirty="0"/>
-              <a:t/>
-            </a:r>
             <a:endParaRPr lang="en-US" dirty="0"/>
           </a:p>
         </p:txBody>
@@ -1905,10 +1584,6 @@
           <a:bodyPr/>
           <a:lstStyle/>
           <a:p>
-            <a:r>
-              <a:rPr lang="en-US" dirty="0"/>
-              <a:t/>
-            </a:r>
             <a:endParaRPr lang="en-US" dirty="0"/>
           </a:p>
         </p:txBody>
@@ -1993,10 +1668,6 @@
           <a:bodyPr/>
           <a:lstStyle/>
           <a:p>
-            <a:r>
-              <a:rPr lang="en-US" dirty="0"/>
-              <a:t/>
-            </a:r>
             <a:endParaRPr lang="en-US" dirty="0"/>
           </a:p>
         </p:txBody>
@@ -2081,10 +1752,6 @@
           <a:bodyPr/>
           <a:lstStyle/>
           <a:p>
-            <a:r>
-              <a:rPr lang="en-US" dirty="0"/>
-              <a:t/>
-            </a:r>
             <a:endParaRPr lang="en-US" dirty="0"/>
           </a:p>
         </p:txBody>
@@ -2169,10 +1836,6 @@
           <a:bodyPr/>
           <a:lstStyle/>
           <a:p>
-            <a:r>
-              <a:rPr lang="en-US" dirty="0"/>
-              <a:t/>
-            </a:r>
             <a:endParaRPr lang="en-US" dirty="0"/>
           </a:p>
         </p:txBody>
@@ -2246,6 +1909,11 @@
 <file path=ppt/slideMasters/slideMaster1.xml><?xml version="1.0" encoding="utf-8"?>
 <p:sldMaster xmlns:a="http://schemas.openxmlformats.org/drawingml/2006/main" xmlns:r="http://schemas.openxmlformats.org/officeDocument/2006/relationships" xmlns:p="http://schemas.openxmlformats.org/presentationml/2006/main">
   <p:cSld>
+    <p:bg>
+      <p:bgRef idx="1001">
+        <a:schemeClr val="bg1"/>
+      </p:bgRef>
+    </p:bg>
     <p:spTree>
       <p:nvGrpSpPr>
         <p:cNvPr id="1" name=""/>
@@ -2528,6 +2196,7 @@
         <a:solidFill>
           <a:srgbClr val="0B1220"/>
         </a:solidFill>
+        <a:effectLst/>
       </p:bgPr>
     </p:bg>
     <p:spTree>
@@ -2565,7 +2234,7 @@
           <a:bodyPr wrap="square" rtlCol="0" anchor="ctr"/>
           <a:lstStyle/>
           <a:p>
-            <a:pPr algn="ctr" indent="0" marL="0">
+            <a:pPr marL="0" indent="0" algn="ctr">
               <a:buNone/>
             </a:pPr>
             <a:r>
@@ -2626,7 +2295,7 @@
           <a:bodyPr wrap="square" rtlCol="0" anchor="ctr"/>
           <a:lstStyle/>
           <a:p>
-            <a:pPr algn="ctr" indent="0" marL="0">
+            <a:pPr marL="0" indent="0" algn="ctr">
               <a:buNone/>
             </a:pPr>
             <a:r>
@@ -2665,7 +2334,7 @@
           <a:bodyPr wrap="square" rtlCol="0" anchor="ctr"/>
           <a:lstStyle/>
           <a:p>
-            <a:pPr indent="0" marL="0">
+            <a:pPr marL="0" indent="0">
               <a:buNone/>
             </a:pPr>
             <a:r>
@@ -2679,9 +2348,6 @@
               </a:rPr>
               <a:t>Dexter </a:t>
             </a:r>
-            <a:pPr indent="0" marL="0">
-              <a:buNone/>
-            </a:pPr>
             <a:r>
               <a:rPr lang="en-US" sz="1300" i="1" dirty="0">
                 <a:solidFill>
@@ -2718,7 +2384,7 @@
           <a:bodyPr wrap="square" rtlCol="0" anchor="ctr"/>
           <a:lstStyle/>
           <a:p>
-            <a:pPr indent="0" marL="0">
+            <a:pPr marL="0" indent="0">
               <a:buNone/>
             </a:pPr>
             <a:r>
@@ -2732,11 +2398,8 @@
               </a:rPr>
               <a:t>● </a:t>
             </a:r>
-            <a:pPr indent="0" marL="0">
-              <a:buNone/>
-            </a:pPr>
-            <a:r>
-              <a:rPr lang="en-US" sz="1200" b="1" spc="200" kern="0" dirty="0">
+            <a:r>
+              <a:rPr lang="en-US" sz="1200" b="1" kern="0" spc="200" dirty="0">
                 <a:solidFill>
                   <a:srgbClr val="93B4FF"/>
                 </a:solidFill>
@@ -2746,9 +2409,6 @@
               </a:rPr>
               <a:t>COACH REPRESENTATION</a:t>
             </a:r>
-            <a:pPr indent="0" marL="0">
-              <a:buNone/>
-            </a:pPr>
             <a:r>
               <a:rPr lang="en-US" sz="1200" dirty="0">
                 <a:solidFill>
@@ -2760,11 +2420,8 @@
               </a:rPr>
               <a:t>   ·   </a:t>
             </a:r>
-            <a:pPr indent="0" marL="0">
-              <a:buNone/>
-            </a:pPr>
-            <a:r>
-              <a:rPr lang="en-US" sz="1200" b="1" spc="200" kern="0" dirty="0">
+            <a:r>
+              <a:rPr lang="en-US" sz="1200" b="1" kern="0" spc="200" dirty="0">
                 <a:solidFill>
                   <a:srgbClr val="93B4FF"/>
                 </a:solidFill>
@@ -2799,7 +2456,7 @@
           <a:bodyPr wrap="square" rtlCol="0" anchor="ctr"/>
           <a:lstStyle/>
           <a:p>
-            <a:pPr indent="0" marL="0">
+            <a:pPr marL="0" indent="0">
               <a:lnSpc>
                 <a:spcPct val="102000"/>
               </a:lnSpc>
@@ -2815,32 +2472,9 @@
                 <a:cs typeface="Arial" pitchFamily="34" charset="-120"/>
               </a:rPr>
               <a:t>Protect the talent.
+Shape the opportunity.
 </a:t>
             </a:r>
-            <a:pPr indent="0" marL="0">
-              <a:lnSpc>
-                <a:spcPct val="102000"/>
-              </a:lnSpc>
-              <a:buNone/>
-            </a:pPr>
-            <a:r>
-              <a:rPr lang="en-US" sz="4600" b="1" dirty="0">
-                <a:solidFill>
-                  <a:srgbClr val="FFFFFF"/>
-                </a:solidFill>
-                <a:latin typeface="Arial" pitchFamily="34" charset="0"/>
-                <a:ea typeface="Arial" pitchFamily="34" charset="-122"/>
-                <a:cs typeface="Arial" pitchFamily="34" charset="-120"/>
-              </a:rPr>
-              <a:t>Shape the opportunity.
-</a:t>
-            </a:r>
-            <a:pPr indent="0" marL="0">
-              <a:lnSpc>
-                <a:spcPct val="102000"/>
-              </a:lnSpc>
-              <a:buNone/>
-            </a:pPr>
             <a:r>
               <a:rPr lang="en-US" sz="4600" i="1" dirty="0">
                 <a:solidFill>
@@ -2877,7 +2511,7 @@
           <a:bodyPr wrap="square" rtlCol="0" anchor="ctr"/>
           <a:lstStyle/>
           <a:p>
-            <a:pPr indent="0" marL="0">
+            <a:pPr marL="0" indent="0">
               <a:lnSpc>
                 <a:spcPct val="120000"/>
               </a:lnSpc>
@@ -2919,11 +2553,11 @@
           <a:bodyPr wrap="square" rtlCol="0" anchor="ctr"/>
           <a:lstStyle/>
           <a:p>
-            <a:pPr indent="0" marL="0">
-              <a:buNone/>
-            </a:pPr>
-            <a:r>
-              <a:rPr lang="en-US" sz="1050" b="1" spc="200" kern="0" dirty="0">
+            <a:pPr marL="0" indent="0">
+              <a:buNone/>
+            </a:pPr>
+            <a:r>
+              <a:rPr lang="en-US" sz="1050" b="1" kern="0" spc="200" dirty="0">
                 <a:solidFill>
                   <a:srgbClr val="FFFFFF"/>
                 </a:solidFill>
@@ -2958,7 +2592,7 @@
           <a:bodyPr wrap="square" rtlCol="0" anchor="ctr"/>
           <a:lstStyle/>
           <a:p>
-            <a:pPr indent="0" marL="0">
+            <a:pPr marL="0" indent="0">
               <a:buNone/>
             </a:pPr>
             <a:r>
@@ -2997,11 +2631,11 @@
           <a:bodyPr wrap="square" rtlCol="0" anchor="ctr"/>
           <a:lstStyle/>
           <a:p>
-            <a:pPr algn="r" indent="0" marL="0">
-              <a:buNone/>
-            </a:pPr>
-            <a:r>
-              <a:rPr lang="en-US" sz="750" b="1" spc="100" kern="0" dirty="0">
+            <a:pPr marL="0" indent="0" algn="r">
+              <a:buNone/>
+            </a:pPr>
+            <a:r>
+              <a:rPr lang="en-US" sz="750" b="1" kern="0" spc="100" dirty="0">
                 <a:solidFill>
                   <a:srgbClr val="D4A62A"/>
                 </a:solidFill>
@@ -3031,6 +2665,7 @@
         <a:solidFill>
           <a:srgbClr val="0B1220"/>
         </a:solidFill>
+        <a:effectLst/>
       </p:bgPr>
     </p:bg>
     <p:spTree>
@@ -3068,7 +2703,7 @@
           <a:bodyPr wrap="square" rtlCol="0" anchor="ctr"/>
           <a:lstStyle/>
           <a:p>
-            <a:pPr indent="0" marL="0">
+            <a:pPr marL="0" indent="0">
               <a:buNone/>
             </a:pPr>
             <a:r>
@@ -3082,11 +2717,8 @@
               </a:rPr>
               <a:t>● </a:t>
             </a:r>
-            <a:pPr indent="0" marL="0">
-              <a:buNone/>
-            </a:pPr>
-            <a:r>
-              <a:rPr lang="en-US" sz="1100" b="1" spc="300" kern="0" dirty="0">
+            <a:r>
+              <a:rPr lang="en-US" sz="1100" b="1" kern="0" spc="300" dirty="0">
                 <a:solidFill>
                   <a:srgbClr val="93B4FF"/>
                 </a:solidFill>
@@ -3121,7 +2753,7 @@
           <a:bodyPr wrap="square" rtlCol="0" anchor="ctr"/>
           <a:lstStyle/>
           <a:p>
-            <a:pPr indent="0" marL="0">
+            <a:pPr marL="0" indent="0">
               <a:buNone/>
             </a:pPr>
             <a:r>
@@ -3135,9 +2767,6 @@
               </a:rPr>
               <a:t>Mission and margin, </a:t>
             </a:r>
-            <a:pPr indent="0" marL="0">
-              <a:buNone/>
-            </a:pPr>
             <a:r>
               <a:rPr lang="en-US" sz="2900" i="1" dirty="0">
                 <a:solidFill>
@@ -3174,7 +2803,7 @@
           <a:bodyPr wrap="square" rtlCol="0" anchor="ctr"/>
           <a:lstStyle/>
           <a:p>
-            <a:pPr indent="0" marL="0">
+            <a:pPr marL="0" indent="0">
               <a:buNone/>
             </a:pPr>
             <a:r>
@@ -3216,261 +2845,7 @@
       </p:sp>
       <p:pic>
         <p:nvPicPr>
-          <p:cNvPr id="6" name="Image 0" descr="preencoded.png">    </p:cNvPr>
-          <p:cNvPicPr>
-            <a:picLocks noChangeAspect="1"/>
-          </p:cNvPicPr>
-          <p:nvPr/>
-        </p:nvPicPr>
-        <p:blipFill>
-          <a:blip r:embed="rId1"/>
-          <a:stretch>
-            <a:fillRect/>
-          </a:stretch>
-        </p:blipFill>
-        <p:spPr>
-          <a:xfrm>
-            <a:off x="1005840" y="2697480"/>
-            <a:ext cx="548640" cy="548640"/>
-          </a:xfrm>
-          <a:prstGeom prst="rect">
-            <a:avLst/>
-          </a:prstGeom>
-        </p:spPr>
-      </p:pic>
-      <p:sp>
-        <p:nvSpPr>
-          <p:cNvPr id="7" name="Text 4"/>
-          <p:cNvSpPr/>
-          <p:nvPr/>
-        </p:nvSpPr>
-        <p:spPr>
-          <a:xfrm>
-            <a:off x="1005840" y="3429000"/>
-            <a:ext cx="1965960" cy="640080"/>
-          </a:xfrm>
-          <a:prstGeom prst="rect">
-            <a:avLst/>
-          </a:prstGeom>
-          <a:noFill/>
-          <a:ln/>
-        </p:spPr>
-        <p:txBody>
-          <a:bodyPr wrap="square" rtlCol="0" anchor="t"/>
-          <a:lstStyle/>
-          <a:p>
-            <a:pPr indent="0" marL="0">
-              <a:buNone/>
-            </a:pPr>
-            <a:r>
-              <a:rPr lang="en-US" sz="1600" b="1" dirty="0">
-                <a:solidFill>
-                  <a:srgbClr val="93B4FF"/>
-                </a:solidFill>
-                <a:latin typeface="Arial" pitchFamily="34" charset="0"/>
-                <a:ea typeface="Arial" pitchFamily="34" charset="-122"/>
-                <a:cs typeface="Arial" pitchFamily="34" charset="-120"/>
-              </a:rPr>
-              <a:t>Women-owned</a:t>
-            </a:r>
-            <a:endParaRPr lang="en-US" sz="1600" dirty="0"/>
-          </a:p>
-        </p:txBody>
-      </p:sp>
-      <p:sp>
-        <p:nvSpPr>
-          <p:cNvPr id="8" name="Text 5"/>
-          <p:cNvSpPr/>
-          <p:nvPr/>
-        </p:nvSpPr>
-        <p:spPr>
-          <a:xfrm>
-            <a:off x="1005840" y="4114800"/>
-            <a:ext cx="1965960" cy="1280160"/>
-          </a:xfrm>
-          <a:prstGeom prst="rect">
-            <a:avLst/>
-          </a:prstGeom>
-          <a:noFill/>
-          <a:ln/>
-        </p:spPr>
-        <p:txBody>
-          <a:bodyPr wrap="square" rtlCol="0" anchor="t"/>
-          <a:lstStyle/>
-          <a:p>
-            <a:pPr indent="0" marL="0">
-              <a:lnSpc>
-                <a:spcPct val="110000"/>
-              </a:lnSpc>
-              <a:buNone/>
-            </a:pPr>
-            <a:r>
-              <a:rPr lang="en-US" sz="1150" dirty="0">
-                <a:solidFill>
-                  <a:srgbClr val="C3CAD6"/>
-                </a:solidFill>
-                <a:latin typeface="Arial" pitchFamily="34" charset="0"/>
-                <a:ea typeface="Arial" pitchFamily="34" charset="-122"/>
-                <a:cs typeface="Arial" pitchFamily="34" charset="-120"/>
-              </a:rPr>
-              <a:t>Founded and led by Kim Dexter — ownership and decisions rest with a woman operator in a male-dominated field.</a:t>
-            </a:r>
-            <a:endParaRPr lang="en-US" sz="1150" dirty="0"/>
-          </a:p>
-        </p:txBody>
-      </p:sp>
-      <p:sp>
-        <p:nvSpPr>
-          <p:cNvPr id="9" name="Shape 6"/>
-          <p:cNvSpPr/>
-          <p:nvPr/>
-        </p:nvSpPr>
-        <p:spPr>
-          <a:xfrm>
-            <a:off x="3529584" y="2331720"/>
-            <a:ext cx="2606040" cy="3200400"/>
-          </a:xfrm>
-          <a:prstGeom prst="roundRect">
-            <a:avLst>
-              <a:gd name="adj" fmla="val 4211"/>
-            </a:avLst>
-          </a:prstGeom>
-          <a:solidFill>
-            <a:srgbClr val="121A2B"/>
-          </a:solidFill>
-          <a:ln/>
-        </p:spPr>
-      </p:sp>
-      <p:pic>
-        <p:nvPicPr>
-          <p:cNvPr id="10" name="Image 1" descr="preencoded.png">    </p:cNvPr>
-          <p:cNvPicPr>
-            <a:picLocks noChangeAspect="1"/>
-          </p:cNvPicPr>
-          <p:nvPr/>
-        </p:nvPicPr>
-        <p:blipFill>
-          <a:blip r:embed="rId2"/>
-          <a:stretch>
-            <a:fillRect/>
-          </a:stretch>
-        </p:blipFill>
-        <p:spPr>
-          <a:xfrm>
-            <a:off x="3849624" y="2697480"/>
-            <a:ext cx="548640" cy="548640"/>
-          </a:xfrm>
-          <a:prstGeom prst="rect">
-            <a:avLst/>
-          </a:prstGeom>
-        </p:spPr>
-      </p:pic>
-      <p:sp>
-        <p:nvSpPr>
-          <p:cNvPr id="11" name="Text 7"/>
-          <p:cNvSpPr/>
-          <p:nvPr/>
-        </p:nvSpPr>
-        <p:spPr>
-          <a:xfrm>
-            <a:off x="3849624" y="3429000"/>
-            <a:ext cx="1965960" cy="640080"/>
-          </a:xfrm>
-          <a:prstGeom prst="rect">
-            <a:avLst/>
-          </a:prstGeom>
-          <a:noFill/>
-          <a:ln/>
-        </p:spPr>
-        <p:txBody>
-          <a:bodyPr wrap="square" rtlCol="0" anchor="t"/>
-          <a:lstStyle/>
-          <a:p>
-            <a:pPr indent="0" marL="0">
-              <a:buNone/>
-            </a:pPr>
-            <a:r>
-              <a:rPr lang="en-US" sz="1600" b="1" dirty="0">
-                <a:solidFill>
-                  <a:srgbClr val="93B4FF"/>
-                </a:solidFill>
-                <a:latin typeface="Arial" pitchFamily="34" charset="0"/>
-                <a:ea typeface="Arial" pitchFamily="34" charset="-122"/>
-                <a:cs typeface="Arial" pitchFamily="34" charset="-120"/>
-              </a:rPr>
-              <a:t>Female-coach outcomes</a:t>
-            </a:r>
-            <a:endParaRPr lang="en-US" sz="1600" dirty="0"/>
-          </a:p>
-        </p:txBody>
-      </p:sp>
-      <p:sp>
-        <p:nvSpPr>
-          <p:cNvPr id="12" name="Text 8"/>
-          <p:cNvSpPr/>
-          <p:nvPr/>
-        </p:nvSpPr>
-        <p:spPr>
-          <a:xfrm>
-            <a:off x="3849624" y="4114800"/>
-            <a:ext cx="1965960" cy="1280160"/>
-          </a:xfrm>
-          <a:prstGeom prst="rect">
-            <a:avLst/>
-          </a:prstGeom>
-          <a:noFill/>
-          <a:ln/>
-        </p:spPr>
-        <p:txBody>
-          <a:bodyPr wrap="square" rtlCol="0" anchor="t"/>
-          <a:lstStyle/>
-          <a:p>
-            <a:pPr indent="0" marL="0">
-              <a:lnSpc>
-                <a:spcPct val="110000"/>
-              </a:lnSpc>
-              <a:buNone/>
-            </a:pPr>
-            <a:r>
-              <a:rPr lang="en-US" sz="1150" dirty="0">
-                <a:solidFill>
-                  <a:srgbClr val="C3CAD6"/>
-                </a:solidFill>
-                <a:latin typeface="Arial" pitchFamily="34" charset="0"/>
-                <a:ea typeface="Arial" pitchFamily="34" charset="-122"/>
-                <a:cs typeface="Arial" pitchFamily="34" charset="-120"/>
-              </a:rPr>
-              <a:t>We prioritize placing and advancing women into higher-paid, higher-visibility roles.</a:t>
-            </a:r>
-            <a:endParaRPr lang="en-US" sz="1150" dirty="0"/>
-          </a:p>
-        </p:txBody>
-      </p:sp>
-      <p:sp>
-        <p:nvSpPr>
-          <p:cNvPr id="13" name="Shape 9"/>
-          <p:cNvSpPr/>
-          <p:nvPr/>
-        </p:nvSpPr>
-        <p:spPr>
-          <a:xfrm>
-            <a:off x="6373368" y="2331720"/>
-            <a:ext cx="2606040" cy="3200400"/>
-          </a:xfrm>
-          <a:prstGeom prst="roundRect">
-            <a:avLst>
-              <a:gd name="adj" fmla="val 4211"/>
-            </a:avLst>
-          </a:prstGeom>
-          <a:solidFill>
-            <a:srgbClr val="121A2B"/>
-          </a:solidFill>
-          <a:ln/>
-        </p:spPr>
-      </p:sp>
-      <p:pic>
-        <p:nvPicPr>
-          <p:cNvPr id="14" name="Image 2" descr="preencoded.png">    </p:cNvPr>
+          <p:cNvPr id="6" name="Image 0" descr="preencoded.png"/>
           <p:cNvPicPr>
             <a:picLocks noChangeAspect="1"/>
           </p:cNvPicPr>
@@ -3484,7 +2859,7 @@
         </p:blipFill>
         <p:spPr>
           <a:xfrm>
-            <a:off x="6693408" y="2697480"/>
+            <a:off x="1005840" y="2697480"/>
             <a:ext cx="548640" cy="548640"/>
           </a:xfrm>
           <a:prstGeom prst="rect">
@@ -3494,13 +2869,13 @@
       </p:pic>
       <p:sp>
         <p:nvSpPr>
-          <p:cNvPr id="15" name="Text 10"/>
-          <p:cNvSpPr/>
-          <p:nvPr/>
-        </p:nvSpPr>
-        <p:spPr>
-          <a:xfrm>
-            <a:off x="6693408" y="3429000"/>
+          <p:cNvPr id="7" name="Text 4"/>
+          <p:cNvSpPr/>
+          <p:nvPr/>
+        </p:nvSpPr>
+        <p:spPr>
+          <a:xfrm>
+            <a:off x="1005840" y="3429000"/>
             <a:ext cx="1965960" cy="640080"/>
           </a:xfrm>
           <a:prstGeom prst="rect">
@@ -3513,7 +2888,7 @@
           <a:bodyPr wrap="square" rtlCol="0" anchor="t"/>
           <a:lstStyle/>
           <a:p>
-            <a:pPr indent="0" marL="0">
+            <a:pPr marL="0" indent="0">
               <a:buNone/>
             </a:pPr>
             <a:r>
@@ -3525,7 +2900,7 @@
                 <a:ea typeface="Arial" pitchFamily="34" charset="-122"/>
                 <a:cs typeface="Arial" pitchFamily="34" charset="-120"/>
               </a:rPr>
-              <a:t>Youth opportunity</a:t>
+              <a:t>Women-owned</a:t>
             </a:r>
             <a:endParaRPr lang="en-US" sz="1600" dirty="0"/>
           </a:p>
@@ -3533,13 +2908,13 @@
       </p:sp>
       <p:sp>
         <p:nvSpPr>
-          <p:cNvPr id="16" name="Text 11"/>
-          <p:cNvSpPr/>
-          <p:nvPr/>
-        </p:nvSpPr>
-        <p:spPr>
-          <a:xfrm>
-            <a:off x="6693408" y="4114800"/>
+          <p:cNvPr id="8" name="Text 5"/>
+          <p:cNvSpPr/>
+          <p:nvPr/>
+        </p:nvSpPr>
+        <p:spPr>
+          <a:xfrm>
+            <a:off x="1005840" y="4114800"/>
             <a:ext cx="1965960" cy="1280160"/>
           </a:xfrm>
           <a:prstGeom prst="rect">
@@ -3552,7 +2927,7 @@
           <a:bodyPr wrap="square" rtlCol="0" anchor="t"/>
           <a:lstStyle/>
           <a:p>
-            <a:pPr indent="0" marL="0">
+            <a:pPr marL="0" indent="0">
               <a:lnSpc>
                 <a:spcPct val="110000"/>
               </a:lnSpc>
@@ -3567,7 +2942,7 @@
                 <a:ea typeface="Arial" pitchFamily="34" charset="-122"/>
                 <a:cs typeface="Arial" pitchFamily="34" charset="-120"/>
               </a:rPr>
-              <a:t>NIL guidance helps Carolina athletes and families — including young women — build value early and equitably.</a:t>
+              <a:t>Founded and led by Kim Dexter — ownership and decisions rest with a woman operator in a male-dominated field.</a:t>
             </a:r>
             <a:endParaRPr lang="en-US" sz="1150" dirty="0"/>
           </a:p>
@@ -3575,13 +2950,13 @@
       </p:sp>
       <p:sp>
         <p:nvSpPr>
-          <p:cNvPr id="17" name="Shape 12"/>
-          <p:cNvSpPr/>
-          <p:nvPr/>
-        </p:nvSpPr>
-        <p:spPr>
-          <a:xfrm>
-            <a:off x="9217152" y="2331720"/>
+          <p:cNvPr id="9" name="Shape 6"/>
+          <p:cNvSpPr/>
+          <p:nvPr/>
+        </p:nvSpPr>
+        <p:spPr>
+          <a:xfrm>
+            <a:off x="3529584" y="2331720"/>
             <a:ext cx="2606040" cy="3200400"/>
           </a:xfrm>
           <a:prstGeom prst="roundRect">
@@ -3597,7 +2972,7 @@
       </p:sp>
       <p:pic>
         <p:nvPicPr>
-          <p:cNvPr id="18" name="Image 3" descr="preencoded.png">    </p:cNvPr>
+          <p:cNvPr id="10" name="Image 1" descr="preencoded.png"/>
           <p:cNvPicPr>
             <a:picLocks noChangeAspect="1"/>
           </p:cNvPicPr>
@@ -3611,7 +2986,7 @@
         </p:blipFill>
         <p:spPr>
           <a:xfrm>
-            <a:off x="9537192" y="2697480"/>
+            <a:off x="3849624" y="2697480"/>
             <a:ext cx="548640" cy="548640"/>
           </a:xfrm>
           <a:prstGeom prst="rect">
@@ -3621,13 +2996,13 @@
       </p:pic>
       <p:sp>
         <p:nvSpPr>
-          <p:cNvPr id="19" name="Text 13"/>
-          <p:cNvSpPr/>
-          <p:nvPr/>
-        </p:nvSpPr>
-        <p:spPr>
-          <a:xfrm>
-            <a:off x="9537192" y="3429000"/>
+          <p:cNvPr id="11" name="Text 7"/>
+          <p:cNvSpPr/>
+          <p:nvPr/>
+        </p:nvSpPr>
+        <p:spPr>
+          <a:xfrm>
+            <a:off x="3849624" y="3429000"/>
             <a:ext cx="1965960" cy="640080"/>
           </a:xfrm>
           <a:prstGeom prst="rect">
@@ -3640,7 +3015,7 @@
           <a:bodyPr wrap="square" rtlCol="0" anchor="t"/>
           <a:lstStyle/>
           <a:p>
-            <a:pPr indent="0" marL="0">
+            <a:pPr marL="0" indent="0">
               <a:buNone/>
             </a:pPr>
             <a:r>
@@ -3652,7 +3027,7 @@
                 <a:ea typeface="Arial" pitchFamily="34" charset="-122"/>
                 <a:cs typeface="Arial" pitchFamily="34" charset="-120"/>
               </a:rPr>
-              <a:t>Aligned economics</a:t>
+              <a:t>Female-coach outcomes</a:t>
             </a:r>
             <a:endParaRPr lang="en-US" sz="1600" dirty="0"/>
           </a:p>
@@ -3660,13 +3035,13 @@
       </p:sp>
       <p:sp>
         <p:nvSpPr>
-          <p:cNvPr id="20" name="Text 14"/>
-          <p:cNvSpPr/>
-          <p:nvPr/>
-        </p:nvSpPr>
-        <p:spPr>
-          <a:xfrm>
-            <a:off x="9537192" y="4114800"/>
+          <p:cNvPr id="12" name="Text 8"/>
+          <p:cNvSpPr/>
+          <p:nvPr/>
+        </p:nvSpPr>
+        <p:spPr>
+          <a:xfrm>
+            <a:off x="3849624" y="4114800"/>
             <a:ext cx="1965960" cy="1280160"/>
           </a:xfrm>
           <a:prstGeom prst="rect">
@@ -3679,7 +3054,7 @@
           <a:bodyPr wrap="square" rtlCol="0" anchor="t"/>
           <a:lstStyle/>
           <a:p>
-            <a:pPr indent="0" marL="0">
+            <a:pPr marL="0" indent="0">
               <a:lnSpc>
                 <a:spcPct val="110000"/>
               </a:lnSpc>
@@ -3694,6 +3069,260 @@
                 <a:ea typeface="Arial" pitchFamily="34" charset="-122"/>
                 <a:cs typeface="Arial" pitchFamily="34" charset="-120"/>
               </a:rPr>
+              <a:t>We prioritize placing and advancing women into higher-paid, higher-visibility roles.</a:t>
+            </a:r>
+            <a:endParaRPr lang="en-US" sz="1150" dirty="0"/>
+          </a:p>
+        </p:txBody>
+      </p:sp>
+      <p:sp>
+        <p:nvSpPr>
+          <p:cNvPr id="13" name="Shape 9"/>
+          <p:cNvSpPr/>
+          <p:nvPr/>
+        </p:nvSpPr>
+        <p:spPr>
+          <a:xfrm>
+            <a:off x="6373368" y="2331720"/>
+            <a:ext cx="2606040" cy="3200400"/>
+          </a:xfrm>
+          <a:prstGeom prst="roundRect">
+            <a:avLst>
+              <a:gd name="adj" fmla="val 4211"/>
+            </a:avLst>
+          </a:prstGeom>
+          <a:solidFill>
+            <a:srgbClr val="121A2B"/>
+          </a:solidFill>
+          <a:ln/>
+        </p:spPr>
+      </p:sp>
+      <p:pic>
+        <p:nvPicPr>
+          <p:cNvPr id="14" name="Image 2" descr="preencoded.png"/>
+          <p:cNvPicPr>
+            <a:picLocks noChangeAspect="1"/>
+          </p:cNvPicPr>
+          <p:nvPr/>
+        </p:nvPicPr>
+        <p:blipFill>
+          <a:blip r:embed="rId5"/>
+          <a:stretch>
+            <a:fillRect/>
+          </a:stretch>
+        </p:blipFill>
+        <p:spPr>
+          <a:xfrm>
+            <a:off x="6693408" y="2697480"/>
+            <a:ext cx="548640" cy="548640"/>
+          </a:xfrm>
+          <a:prstGeom prst="rect">
+            <a:avLst/>
+          </a:prstGeom>
+        </p:spPr>
+      </p:pic>
+      <p:sp>
+        <p:nvSpPr>
+          <p:cNvPr id="15" name="Text 10"/>
+          <p:cNvSpPr/>
+          <p:nvPr/>
+        </p:nvSpPr>
+        <p:spPr>
+          <a:xfrm>
+            <a:off x="6693408" y="3429000"/>
+            <a:ext cx="1965960" cy="640080"/>
+          </a:xfrm>
+          <a:prstGeom prst="rect">
+            <a:avLst/>
+          </a:prstGeom>
+          <a:noFill/>
+          <a:ln/>
+        </p:spPr>
+        <p:txBody>
+          <a:bodyPr wrap="square" rtlCol="0" anchor="t"/>
+          <a:lstStyle/>
+          <a:p>
+            <a:pPr marL="0" indent="0">
+              <a:buNone/>
+            </a:pPr>
+            <a:r>
+              <a:rPr lang="en-US" sz="1600" b="1" dirty="0">
+                <a:solidFill>
+                  <a:srgbClr val="93B4FF"/>
+                </a:solidFill>
+                <a:latin typeface="Arial" pitchFamily="34" charset="0"/>
+                <a:ea typeface="Arial" pitchFamily="34" charset="-122"/>
+                <a:cs typeface="Arial" pitchFamily="34" charset="-120"/>
+              </a:rPr>
+              <a:t>Youth opportunity</a:t>
+            </a:r>
+            <a:endParaRPr lang="en-US" sz="1600" dirty="0"/>
+          </a:p>
+        </p:txBody>
+      </p:sp>
+      <p:sp>
+        <p:nvSpPr>
+          <p:cNvPr id="16" name="Text 11"/>
+          <p:cNvSpPr/>
+          <p:nvPr/>
+        </p:nvSpPr>
+        <p:spPr>
+          <a:xfrm>
+            <a:off x="6693408" y="4114800"/>
+            <a:ext cx="1965960" cy="1280160"/>
+          </a:xfrm>
+          <a:prstGeom prst="rect">
+            <a:avLst/>
+          </a:prstGeom>
+          <a:noFill/>
+          <a:ln/>
+        </p:spPr>
+        <p:txBody>
+          <a:bodyPr wrap="square" rtlCol="0" anchor="t"/>
+          <a:lstStyle/>
+          <a:p>
+            <a:pPr marL="0" indent="0">
+              <a:lnSpc>
+                <a:spcPct val="110000"/>
+              </a:lnSpc>
+              <a:buNone/>
+            </a:pPr>
+            <a:r>
+              <a:rPr lang="en-US" sz="1150" dirty="0">
+                <a:solidFill>
+                  <a:srgbClr val="C3CAD6"/>
+                </a:solidFill>
+                <a:latin typeface="Arial" pitchFamily="34" charset="0"/>
+                <a:ea typeface="Arial" pitchFamily="34" charset="-122"/>
+                <a:cs typeface="Arial" pitchFamily="34" charset="-120"/>
+              </a:rPr>
+              <a:t>NIL guidance helps Carolina athletes and families — including young women — build value early and equitably.</a:t>
+            </a:r>
+            <a:endParaRPr lang="en-US" sz="1150" dirty="0"/>
+          </a:p>
+        </p:txBody>
+      </p:sp>
+      <p:sp>
+        <p:nvSpPr>
+          <p:cNvPr id="17" name="Shape 12"/>
+          <p:cNvSpPr/>
+          <p:nvPr/>
+        </p:nvSpPr>
+        <p:spPr>
+          <a:xfrm>
+            <a:off x="9217152" y="2331720"/>
+            <a:ext cx="2606040" cy="3200400"/>
+          </a:xfrm>
+          <a:prstGeom prst="roundRect">
+            <a:avLst>
+              <a:gd name="adj" fmla="val 4211"/>
+            </a:avLst>
+          </a:prstGeom>
+          <a:solidFill>
+            <a:srgbClr val="121A2B"/>
+          </a:solidFill>
+          <a:ln/>
+        </p:spPr>
+      </p:sp>
+      <p:pic>
+        <p:nvPicPr>
+          <p:cNvPr id="18" name="Image 3" descr="preencoded.png"/>
+          <p:cNvPicPr>
+            <a:picLocks noChangeAspect="1"/>
+          </p:cNvPicPr>
+          <p:nvPr/>
+        </p:nvPicPr>
+        <p:blipFill>
+          <a:blip r:embed="rId6"/>
+          <a:stretch>
+            <a:fillRect/>
+          </a:stretch>
+        </p:blipFill>
+        <p:spPr>
+          <a:xfrm>
+            <a:off x="9537192" y="2697480"/>
+            <a:ext cx="548640" cy="548640"/>
+          </a:xfrm>
+          <a:prstGeom prst="rect">
+            <a:avLst/>
+          </a:prstGeom>
+        </p:spPr>
+      </p:pic>
+      <p:sp>
+        <p:nvSpPr>
+          <p:cNvPr id="19" name="Text 13"/>
+          <p:cNvSpPr/>
+          <p:nvPr/>
+        </p:nvSpPr>
+        <p:spPr>
+          <a:xfrm>
+            <a:off x="9537192" y="3429000"/>
+            <a:ext cx="1965960" cy="640080"/>
+          </a:xfrm>
+          <a:prstGeom prst="rect">
+            <a:avLst/>
+          </a:prstGeom>
+          <a:noFill/>
+          <a:ln/>
+        </p:spPr>
+        <p:txBody>
+          <a:bodyPr wrap="square" rtlCol="0" anchor="t"/>
+          <a:lstStyle/>
+          <a:p>
+            <a:pPr marL="0" indent="0">
+              <a:buNone/>
+            </a:pPr>
+            <a:r>
+              <a:rPr lang="en-US" sz="1600" b="1" dirty="0">
+                <a:solidFill>
+                  <a:srgbClr val="93B4FF"/>
+                </a:solidFill>
+                <a:latin typeface="Arial" pitchFamily="34" charset="0"/>
+                <a:ea typeface="Arial" pitchFamily="34" charset="-122"/>
+                <a:cs typeface="Arial" pitchFamily="34" charset="-120"/>
+              </a:rPr>
+              <a:t>Aligned economics</a:t>
+            </a:r>
+            <a:endParaRPr lang="en-US" sz="1600" dirty="0"/>
+          </a:p>
+        </p:txBody>
+      </p:sp>
+      <p:sp>
+        <p:nvSpPr>
+          <p:cNvPr id="20" name="Text 14"/>
+          <p:cNvSpPr/>
+          <p:nvPr/>
+        </p:nvSpPr>
+        <p:spPr>
+          <a:xfrm>
+            <a:off x="9537192" y="4114800"/>
+            <a:ext cx="1965960" cy="1280160"/>
+          </a:xfrm>
+          <a:prstGeom prst="rect">
+            <a:avLst/>
+          </a:prstGeom>
+          <a:noFill/>
+          <a:ln/>
+        </p:spPr>
+        <p:txBody>
+          <a:bodyPr wrap="square" rtlCol="0" anchor="t"/>
+          <a:lstStyle/>
+          <a:p>
+            <a:pPr marL="0" indent="0">
+              <a:lnSpc>
+                <a:spcPct val="110000"/>
+              </a:lnSpc>
+              <a:buNone/>
+            </a:pPr>
+            <a:r>
+              <a:rPr lang="en-US" sz="1150" dirty="0">
+                <a:solidFill>
+                  <a:srgbClr val="C3CAD6"/>
+                </a:solidFill>
+                <a:latin typeface="Arial" pitchFamily="34" charset="0"/>
+                <a:ea typeface="Arial" pitchFamily="34" charset="-122"/>
+                <a:cs typeface="Arial" pitchFamily="34" charset="-120"/>
+              </a:rPr>
               <a:t>Success-based fees mean we win only when clients win. No conflict between doing well and doing good.</a:t>
             </a:r>
             <a:endParaRPr lang="en-US" sz="1150" dirty="0"/>
@@ -3721,7 +3350,7 @@
           <a:bodyPr wrap="square" rtlCol="0" anchor="ctr"/>
           <a:lstStyle/>
           <a:p>
-            <a:pPr indent="0" marL="0">
+            <a:pPr marL="0" indent="0">
               <a:buNone/>
             </a:pPr>
             <a:r>
@@ -3735,9 +3364,6 @@
               </a:rPr>
               <a:t>Dexter Sports Co.</a:t>
             </a:r>
-            <a:pPr indent="0" marL="0">
-              <a:buNone/>
-            </a:pPr>
             <a:r>
               <a:rPr lang="en-US" sz="850" dirty="0">
                 <a:solidFill>
@@ -3774,11 +3400,11 @@
           <a:bodyPr wrap="square" rtlCol="0" anchor="ctr"/>
           <a:lstStyle/>
           <a:p>
-            <a:pPr algn="r" indent="0" marL="0">
-              <a:buNone/>
-            </a:pPr>
-            <a:r>
-              <a:rPr lang="en-US" sz="750" b="1" spc="100" kern="0" dirty="0">
+            <a:pPr marL="0" indent="0" algn="r">
+              <a:buNone/>
+            </a:pPr>
+            <a:r>
+              <a:rPr lang="en-US" sz="750" b="1" kern="0" spc="100" dirty="0">
                 <a:solidFill>
                   <a:srgbClr val="D4A62A"/>
                 </a:solidFill>
@@ -3808,6 +3434,7 @@
         <a:solidFill>
           <a:srgbClr val="FFFFFF"/>
         </a:solidFill>
+        <a:effectLst/>
       </p:bgPr>
     </p:bg>
     <p:spTree>
@@ -3845,7 +3472,7 @@
           <a:bodyPr wrap="square" rtlCol="0" anchor="ctr"/>
           <a:lstStyle/>
           <a:p>
-            <a:pPr indent="0" marL="0">
+            <a:pPr marL="0" indent="0">
               <a:buNone/>
             </a:pPr>
             <a:r>
@@ -3859,11 +3486,8 @@
               </a:rPr>
               <a:t>● </a:t>
             </a:r>
-            <a:pPr indent="0" marL="0">
-              <a:buNone/>
-            </a:pPr>
-            <a:r>
-              <a:rPr lang="en-US" sz="1100" b="1" spc="300" kern="0" dirty="0">
+            <a:r>
+              <a:rPr lang="en-US" sz="1100" b="1" kern="0" spc="300" dirty="0">
                 <a:solidFill>
                   <a:srgbClr val="2563EB"/>
                 </a:solidFill>
@@ -3898,7 +3522,7 @@
           <a:bodyPr wrap="square" rtlCol="0" anchor="ctr"/>
           <a:lstStyle/>
           <a:p>
-            <a:pPr indent="0" marL="0">
+            <a:pPr marL="0" indent="0">
               <a:buNone/>
             </a:pPr>
             <a:r>
@@ -3912,9 +3536,6 @@
               </a:rPr>
               <a:t>Four success-based </a:t>
             </a:r>
-            <a:pPr indent="0" marL="0">
-              <a:buNone/>
-            </a:pPr>
             <a:r>
               <a:rPr lang="en-US" sz="2900" i="1" dirty="0">
                 <a:solidFill>
@@ -3951,7 +3572,7 @@
           <a:bodyPr wrap="square" rtlCol="0" anchor="ctr"/>
           <a:lstStyle/>
           <a:p>
-            <a:pPr indent="0" marL="0">
+            <a:pPr marL="0" indent="0">
               <a:buNone/>
             </a:pPr>
             <a:r>
@@ -4020,14 +3641,14 @@
       </p:sp>
       <p:pic>
         <p:nvPicPr>
-          <p:cNvPr id="7" name="Image 0" descr="preencoded.png">    </p:cNvPr>
+          <p:cNvPr id="7" name="Image 0" descr="preencoded.png"/>
           <p:cNvPicPr>
             <a:picLocks noChangeAspect="1"/>
           </p:cNvPicPr>
           <p:nvPr/>
         </p:nvPicPr>
         <p:blipFill>
-          <a:blip r:embed="rId1"/>
+          <a:blip r:embed="rId3"/>
           <a:stretch>
             <a:fillRect/>
           </a:stretch>
@@ -4063,7 +3684,7 @@
           <a:bodyPr wrap="square" rtlCol="0" anchor="ctr"/>
           <a:lstStyle/>
           <a:p>
-            <a:pPr indent="0" marL="0">
+            <a:pPr marL="0" indent="0">
               <a:buNone/>
             </a:pPr>
             <a:r>
@@ -4102,7 +3723,7 @@
           <a:bodyPr wrap="square" rtlCol="0" anchor="t"/>
           <a:lstStyle/>
           <a:p>
-            <a:pPr indent="0" marL="0">
+            <a:pPr marL="0" indent="0">
               <a:buNone/>
             </a:pPr>
             <a:r>
@@ -4141,7 +3762,7 @@
           <a:bodyPr wrap="square" rtlCol="0" anchor="ctr"/>
           <a:lstStyle/>
           <a:p>
-            <a:pPr algn="ctr" indent="0" marL="0">
+            <a:pPr marL="0" indent="0" algn="ctr">
               <a:buNone/>
             </a:pPr>
             <a:r>
@@ -4202,7 +3823,7 @@
           <a:bodyPr wrap="square" rtlCol="0" anchor="ctr"/>
           <a:lstStyle/>
           <a:p>
-            <a:pPr algn="ctr" indent="0" marL="0">
+            <a:pPr marL="0" indent="0" algn="ctr">
               <a:buNone/>
             </a:pPr>
             <a:r>
@@ -4271,14 +3892,14 @@
       </p:sp>
       <p:pic>
         <p:nvPicPr>
-          <p:cNvPr id="15" name="Image 1" descr="preencoded.png">    </p:cNvPr>
+          <p:cNvPr id="15" name="Image 1" descr="preencoded.png"/>
           <p:cNvPicPr>
             <a:picLocks noChangeAspect="1"/>
           </p:cNvPicPr>
           <p:nvPr/>
         </p:nvPicPr>
         <p:blipFill>
-          <a:blip r:embed="rId2"/>
+          <a:blip r:embed="rId4"/>
           <a:stretch>
             <a:fillRect/>
           </a:stretch>
@@ -4314,7 +3935,7 @@
           <a:bodyPr wrap="square" rtlCol="0" anchor="ctr"/>
           <a:lstStyle/>
           <a:p>
-            <a:pPr indent="0" marL="0">
+            <a:pPr marL="0" indent="0">
               <a:buNone/>
             </a:pPr>
             <a:r>
@@ -4353,7 +3974,7 @@
           <a:bodyPr wrap="square" rtlCol="0" anchor="t"/>
           <a:lstStyle/>
           <a:p>
-            <a:pPr indent="0" marL="0">
+            <a:pPr marL="0" indent="0">
               <a:buNone/>
             </a:pPr>
             <a:r>
@@ -4392,7 +4013,7 @@
           <a:bodyPr wrap="square" rtlCol="0" anchor="ctr"/>
           <a:lstStyle/>
           <a:p>
-            <a:pPr algn="ctr" indent="0" marL="0">
+            <a:pPr marL="0" indent="0" algn="ctr">
               <a:buNone/>
             </a:pPr>
             <a:r>
@@ -4453,7 +4074,7 @@
           <a:bodyPr wrap="square" rtlCol="0" anchor="ctr"/>
           <a:lstStyle/>
           <a:p>
-            <a:pPr algn="ctr" indent="0" marL="0">
+            <a:pPr marL="0" indent="0" algn="ctr">
               <a:buNone/>
             </a:pPr>
             <a:r>
@@ -4522,14 +4143,14 @@
       </p:sp>
       <p:pic>
         <p:nvPicPr>
-          <p:cNvPr id="23" name="Image 2" descr="preencoded.png">    </p:cNvPr>
+          <p:cNvPr id="23" name="Image 2" descr="preencoded.png"/>
           <p:cNvPicPr>
             <a:picLocks noChangeAspect="1"/>
           </p:cNvPicPr>
           <p:nvPr/>
         </p:nvPicPr>
         <p:blipFill>
-          <a:blip r:embed="rId3"/>
+          <a:blip r:embed="rId5"/>
           <a:stretch>
             <a:fillRect/>
           </a:stretch>
@@ -4565,7 +4186,7 @@
           <a:bodyPr wrap="square" rtlCol="0" anchor="ctr"/>
           <a:lstStyle/>
           <a:p>
-            <a:pPr indent="0" marL="0">
+            <a:pPr marL="0" indent="0">
               <a:buNone/>
             </a:pPr>
             <a:r>
@@ -4604,7 +4225,7 @@
           <a:bodyPr wrap="square" rtlCol="0" anchor="t"/>
           <a:lstStyle/>
           <a:p>
-            <a:pPr indent="0" marL="0">
+            <a:pPr marL="0" indent="0">
               <a:buNone/>
             </a:pPr>
             <a:r>
@@ -4643,7 +4264,7 @@
           <a:bodyPr wrap="square" rtlCol="0" anchor="ctr"/>
           <a:lstStyle/>
           <a:p>
-            <a:pPr algn="ctr" indent="0" marL="0">
+            <a:pPr marL="0" indent="0" algn="ctr">
               <a:buNone/>
             </a:pPr>
             <a:r>
@@ -4709,7 +4330,7 @@
           <a:bodyPr wrap="square" rtlCol="0" anchor="ctr"/>
           <a:lstStyle/>
           <a:p>
-            <a:pPr algn="ctr" indent="0" marL="0">
+            <a:pPr marL="0" indent="0" algn="ctr">
               <a:buNone/>
             </a:pPr>
             <a:r>
@@ -4778,14 +4399,14 @@
       </p:sp>
       <p:pic>
         <p:nvPicPr>
-          <p:cNvPr id="31" name="Image 3" descr="preencoded.png">    </p:cNvPr>
+          <p:cNvPr id="31" name="Image 3" descr="preencoded.png"/>
           <p:cNvPicPr>
             <a:picLocks noChangeAspect="1"/>
           </p:cNvPicPr>
           <p:nvPr/>
         </p:nvPicPr>
         <p:blipFill>
-          <a:blip r:embed="rId4"/>
+          <a:blip r:embed="rId6"/>
           <a:stretch>
             <a:fillRect/>
           </a:stretch>
@@ -4821,7 +4442,7 @@
           <a:bodyPr wrap="square" rtlCol="0" anchor="ctr"/>
           <a:lstStyle/>
           <a:p>
-            <a:pPr indent="0" marL="0">
+            <a:pPr marL="0" indent="0">
               <a:buNone/>
             </a:pPr>
             <a:r>
@@ -4860,7 +4481,7 @@
           <a:bodyPr wrap="square" rtlCol="0" anchor="t"/>
           <a:lstStyle/>
           <a:p>
-            <a:pPr indent="0" marL="0">
+            <a:pPr marL="0" indent="0">
               <a:buNone/>
             </a:pPr>
             <a:r>
@@ -4899,7 +4520,7 @@
           <a:bodyPr wrap="square" rtlCol="0" anchor="ctr"/>
           <a:lstStyle/>
           <a:p>
-            <a:pPr algn="ctr" indent="0" marL="0">
+            <a:pPr marL="0" indent="0" algn="ctr">
               <a:buNone/>
             </a:pPr>
             <a:r>
@@ -4965,7 +4586,7 @@
           <a:bodyPr wrap="square" rtlCol="0" anchor="ctr"/>
           <a:lstStyle/>
           <a:p>
-            <a:pPr algn="ctr" indent="0" marL="0">
+            <a:pPr marL="0" indent="0" algn="ctr">
               <a:buNone/>
             </a:pPr>
             <a:r>
@@ -5004,7 +4625,7 @@
           <a:bodyPr wrap="square" rtlCol="0" anchor="ctr"/>
           <a:lstStyle/>
           <a:p>
-            <a:pPr indent="0" marL="0">
+            <a:pPr marL="0" indent="0">
               <a:buNone/>
             </a:pPr>
             <a:r>
@@ -5018,9 +4639,6 @@
               </a:rPr>
               <a:t>Dexter Sports Co.</a:t>
             </a:r>
-            <a:pPr indent="0" marL="0">
-              <a:buNone/>
-            </a:pPr>
             <a:r>
               <a:rPr lang="en-US" sz="850" dirty="0">
                 <a:solidFill>
@@ -5057,11 +4675,11 @@
           <a:bodyPr wrap="square" rtlCol="0" anchor="ctr"/>
           <a:lstStyle/>
           <a:p>
-            <a:pPr algn="r" indent="0" marL="0">
-              <a:buNone/>
-            </a:pPr>
-            <a:r>
-              <a:rPr lang="en-US" sz="750" b="1" spc="100" kern="0" dirty="0">
+            <a:pPr marL="0" indent="0" algn="r">
+              <a:buNone/>
+            </a:pPr>
+            <a:r>
+              <a:rPr lang="en-US" sz="750" b="1" kern="0" spc="100" dirty="0">
                 <a:solidFill>
                   <a:srgbClr val="D4A62A"/>
                 </a:solidFill>
@@ -5091,6 +4709,7 @@
         <a:solidFill>
           <a:srgbClr val="FFFFFF"/>
         </a:solidFill>
+        <a:effectLst/>
       </p:bgPr>
     </p:bg>
     <p:spTree>
@@ -5128,7 +4747,7 @@
           <a:bodyPr wrap="square" rtlCol="0" anchor="ctr"/>
           <a:lstStyle/>
           <a:p>
-            <a:pPr indent="0" marL="0">
+            <a:pPr marL="0" indent="0">
               <a:buNone/>
             </a:pPr>
             <a:r>
@@ -5142,11 +4761,8 @@
               </a:rPr>
               <a:t>● </a:t>
             </a:r>
-            <a:pPr indent="0" marL="0">
-              <a:buNone/>
-            </a:pPr>
-            <a:r>
-              <a:rPr lang="en-US" sz="1100" b="1" spc="300" kern="0" dirty="0">
+            <a:r>
+              <a:rPr lang="en-US" sz="1100" b="1" kern="0" spc="300" dirty="0">
                 <a:solidFill>
                   <a:srgbClr val="2563EB"/>
                 </a:solidFill>
@@ -5181,7 +4797,7 @@
           <a:bodyPr wrap="square" rtlCol="0" anchor="ctr"/>
           <a:lstStyle/>
           <a:p>
-            <a:pPr indent="0" marL="0">
+            <a:pPr marL="0" indent="0">
               <a:buNone/>
             </a:pPr>
             <a:r>
@@ -5195,9 +4811,6 @@
               </a:rPr>
               <a:t>Each phase </a:t>
             </a:r>
-            <a:pPr indent="0" marL="0">
-              <a:buNone/>
-            </a:pPr>
             <a:r>
               <a:rPr lang="en-US" sz="2900" i="1" dirty="0">
                 <a:solidFill>
@@ -5234,7 +4847,7 @@
           <a:bodyPr wrap="square" rtlCol="0" anchor="ctr"/>
           <a:lstStyle/>
           <a:p>
-            <a:pPr indent="0" marL="0">
+            <a:pPr marL="0" indent="0">
               <a:buNone/>
             </a:pPr>
             <a:r>
@@ -5294,7 +4907,7 @@
           </a:solidFill>
           <a:ln/>
           <a:effectLst>
-            <a:outerShdw sx="100000" sy="100000" kx="0" ky="0" algn="bl" rotWithShape="0" blurRad="101600" dist="25400" dir="5400000">
+            <a:outerShdw blurRad="101600" dist="25400" dir="5400000" algn="bl" rotWithShape="0">
               <a:srgbClr val="CDD2D8">
                 <a:alpha val="50000"/>
               </a:srgbClr>
@@ -5304,349 +4917,7 @@
       </p:sp>
       <p:pic>
         <p:nvPicPr>
-          <p:cNvPr id="7" name="Image 0" descr="preencoded.png">    </p:cNvPr>
-          <p:cNvPicPr>
-            <a:picLocks noChangeAspect="1"/>
-          </p:cNvPicPr>
-          <p:nvPr/>
-        </p:nvPicPr>
-        <p:blipFill>
-          <a:blip r:embed="rId1"/>
-          <a:stretch>
-            <a:fillRect/>
-          </a:stretch>
-        </p:blipFill>
-        <p:spPr>
-          <a:xfrm>
-            <a:off x="2221992" y="2807208"/>
-            <a:ext cx="512064" cy="512064"/>
-          </a:xfrm>
-          <a:prstGeom prst="rect">
-            <a:avLst/>
-          </a:prstGeom>
-        </p:spPr>
-      </p:pic>
-      <p:sp>
-        <p:nvSpPr>
-          <p:cNvPr id="8" name="Text 5"/>
-          <p:cNvSpPr/>
-          <p:nvPr/>
-        </p:nvSpPr>
-        <p:spPr>
-          <a:xfrm>
-            <a:off x="685800" y="3749040"/>
-            <a:ext cx="3584448" cy="320040"/>
-          </a:xfrm>
-          <a:prstGeom prst="rect">
-            <a:avLst/>
-          </a:prstGeom>
-          <a:noFill/>
-          <a:ln/>
-        </p:spPr>
-        <p:txBody>
-          <a:bodyPr wrap="square" rtlCol="0" anchor="ctr"/>
-          <a:lstStyle/>
-          <a:p>
-            <a:pPr algn="ctr" indent="0" marL="0">
-              <a:buNone/>
-            </a:pPr>
-            <a:r>
-              <a:rPr lang="en-US" sz="1100" b="1" spc="200" kern="0" dirty="0">
-                <a:solidFill>
-                  <a:srgbClr val="2563EB"/>
-                </a:solidFill>
-                <a:latin typeface="Arial" pitchFamily="34" charset="0"/>
-                <a:ea typeface="Arial" pitchFamily="34" charset="-122"/>
-                <a:cs typeface="Arial" pitchFamily="34" charset="-120"/>
-              </a:rPr>
-              <a:t>PHASE 1</a:t>
-            </a:r>
-            <a:endParaRPr lang="en-US" sz="1100" dirty="0"/>
-          </a:p>
-        </p:txBody>
-      </p:sp>
-      <p:sp>
-        <p:nvSpPr>
-          <p:cNvPr id="9" name="Text 6"/>
-          <p:cNvSpPr/>
-          <p:nvPr/>
-        </p:nvSpPr>
-        <p:spPr>
-          <a:xfrm>
-            <a:off x="685800" y="4069080"/>
-            <a:ext cx="3584448" cy="457200"/>
-          </a:xfrm>
-          <a:prstGeom prst="rect">
-            <a:avLst/>
-          </a:prstGeom>
-          <a:noFill/>
-          <a:ln/>
-        </p:spPr>
-        <p:txBody>
-          <a:bodyPr wrap="square" rtlCol="0" anchor="ctr"/>
-          <a:lstStyle/>
-          <a:p>
-            <a:pPr algn="ctr" indent="0" marL="0">
-              <a:buNone/>
-            </a:pPr>
-            <a:r>
-              <a:rPr lang="en-US" sz="1700" b="1" dirty="0">
-                <a:solidFill>
-                  <a:srgbClr val="141A24"/>
-                </a:solidFill>
-                <a:latin typeface="Arial" pitchFamily="34" charset="0"/>
-                <a:ea typeface="Arial" pitchFamily="34" charset="-122"/>
-                <a:cs typeface="Arial" pitchFamily="34" charset="-120"/>
-              </a:rPr>
-              <a:t>Representation + NIL</a:t>
-            </a:r>
-            <a:endParaRPr lang="en-US" sz="1700" dirty="0"/>
-          </a:p>
-        </p:txBody>
-      </p:sp>
-      <p:sp>
-        <p:nvSpPr>
-          <p:cNvPr id="10" name="Text 7"/>
-          <p:cNvSpPr/>
-          <p:nvPr/>
-        </p:nvSpPr>
-        <p:spPr>
-          <a:xfrm>
-            <a:off x="960120" y="4572000"/>
-            <a:ext cx="3035808" cy="1005840"/>
-          </a:xfrm>
-          <a:prstGeom prst="rect">
-            <a:avLst/>
-          </a:prstGeom>
-          <a:noFill/>
-          <a:ln/>
-        </p:spPr>
-        <p:txBody>
-          <a:bodyPr wrap="square" rtlCol="0" anchor="t"/>
-          <a:lstStyle/>
-          <a:p>
-            <a:pPr algn="ctr" indent="0" marL="0">
-              <a:lnSpc>
-                <a:spcPct val="110000"/>
-              </a:lnSpc>
-              <a:buNone/>
-            </a:pPr>
-            <a:r>
-              <a:rPr lang="en-US" sz="1150" dirty="0">
-                <a:solidFill>
-                  <a:srgbClr val="141A24"/>
-                </a:solidFill>
-                <a:latin typeface="Arial" pitchFamily="34" charset="0"/>
-                <a:ea typeface="Arial" pitchFamily="34" charset="-122"/>
-                <a:cs typeface="Arial" pitchFamily="34" charset="-120"/>
-              </a:rPr>
-              <a:t>Launch the two core specialties; build the coach roster and the NIL newsletter funnel.</a:t>
-            </a:r>
-            <a:endParaRPr lang="en-US" sz="1150" dirty="0"/>
-          </a:p>
-        </p:txBody>
-      </p:sp>
-      <p:sp>
-        <p:nvSpPr>
-          <p:cNvPr id="11" name="Shape 8"/>
-          <p:cNvSpPr/>
-          <p:nvPr/>
-        </p:nvSpPr>
-        <p:spPr>
-          <a:xfrm>
-            <a:off x="5916168" y="2560320"/>
-            <a:ext cx="1005840" cy="1005840"/>
-          </a:xfrm>
-          <a:prstGeom prst="ellipse">
-            <a:avLst/>
-          </a:prstGeom>
-          <a:solidFill>
-            <a:srgbClr val="0B1220"/>
-          </a:solidFill>
-          <a:ln/>
-          <a:effectLst>
-            <a:outerShdw sx="100000" sy="100000" kx="0" ky="0" algn="bl" rotWithShape="0" blurRad="101600" dist="25400" dir="5400000">
-              <a:srgbClr val="CDD2D8">
-                <a:alpha val="50000"/>
-              </a:srgbClr>
-            </a:outerShdw>
-          </a:effectLst>
-        </p:spPr>
-      </p:sp>
-      <p:pic>
-        <p:nvPicPr>
-          <p:cNvPr id="12" name="Image 1" descr="preencoded.png">    </p:cNvPr>
-          <p:cNvPicPr>
-            <a:picLocks noChangeAspect="1"/>
-          </p:cNvPicPr>
-          <p:nvPr/>
-        </p:nvPicPr>
-        <p:blipFill>
-          <a:blip r:embed="rId2"/>
-          <a:stretch>
-            <a:fillRect/>
-          </a:stretch>
-        </p:blipFill>
-        <p:spPr>
-          <a:xfrm>
-            <a:off x="6163056" y="2807208"/>
-            <a:ext cx="512064" cy="512064"/>
-          </a:xfrm>
-          <a:prstGeom prst="rect">
-            <a:avLst/>
-          </a:prstGeom>
-        </p:spPr>
-      </p:pic>
-      <p:sp>
-        <p:nvSpPr>
-          <p:cNvPr id="13" name="Text 9"/>
-          <p:cNvSpPr/>
-          <p:nvPr/>
-        </p:nvSpPr>
-        <p:spPr>
-          <a:xfrm>
-            <a:off x="4626864" y="3749040"/>
-            <a:ext cx="3584448" cy="320040"/>
-          </a:xfrm>
-          <a:prstGeom prst="rect">
-            <a:avLst/>
-          </a:prstGeom>
-          <a:noFill/>
-          <a:ln/>
-        </p:spPr>
-        <p:txBody>
-          <a:bodyPr wrap="square" rtlCol="0" anchor="ctr"/>
-          <a:lstStyle/>
-          <a:p>
-            <a:pPr algn="ctr" indent="0" marL="0">
-              <a:buNone/>
-            </a:pPr>
-            <a:r>
-              <a:rPr lang="en-US" sz="1100" b="1" spc="200" kern="0" dirty="0">
-                <a:solidFill>
-                  <a:srgbClr val="141A24"/>
-                </a:solidFill>
-                <a:latin typeface="Arial" pitchFamily="34" charset="0"/>
-                <a:ea typeface="Arial" pitchFamily="34" charset="-122"/>
-                <a:cs typeface="Arial" pitchFamily="34" charset="-120"/>
-              </a:rPr>
-              <a:t>PHASE 2</a:t>
-            </a:r>
-            <a:endParaRPr lang="en-US" sz="1100" dirty="0"/>
-          </a:p>
-        </p:txBody>
-      </p:sp>
-      <p:sp>
-        <p:nvSpPr>
-          <p:cNvPr id="14" name="Text 10"/>
-          <p:cNvSpPr/>
-          <p:nvPr/>
-        </p:nvSpPr>
-        <p:spPr>
-          <a:xfrm>
-            <a:off x="4626864" y="4069080"/>
-            <a:ext cx="3584448" cy="457200"/>
-          </a:xfrm>
-          <a:prstGeom prst="rect">
-            <a:avLst/>
-          </a:prstGeom>
-          <a:noFill/>
-          <a:ln/>
-        </p:spPr>
-        <p:txBody>
-          <a:bodyPr wrap="square" rtlCol="0" anchor="ctr"/>
-          <a:lstStyle/>
-          <a:p>
-            <a:pPr algn="ctr" indent="0" marL="0">
-              <a:buNone/>
-            </a:pPr>
-            <a:r>
-              <a:rPr lang="en-US" sz="1700" b="1" dirty="0">
-                <a:solidFill>
-                  <a:srgbClr val="141A24"/>
-                </a:solidFill>
-                <a:latin typeface="Arial" pitchFamily="34" charset="0"/>
-                <a:ea typeface="Arial" pitchFamily="34" charset="-122"/>
-                <a:cs typeface="Arial" pitchFamily="34" charset="-120"/>
-              </a:rPr>
-              <a:t>Search Desk</a:t>
-            </a:r>
-            <a:endParaRPr lang="en-US" sz="1700" dirty="0"/>
-          </a:p>
-        </p:txBody>
-      </p:sp>
-      <p:sp>
-        <p:nvSpPr>
-          <p:cNvPr id="15" name="Text 11"/>
-          <p:cNvSpPr/>
-          <p:nvPr/>
-        </p:nvSpPr>
-        <p:spPr>
-          <a:xfrm>
-            <a:off x="4901184" y="4572000"/>
-            <a:ext cx="3035808" cy="1005840"/>
-          </a:xfrm>
-          <a:prstGeom prst="rect">
-            <a:avLst/>
-          </a:prstGeom>
-          <a:noFill/>
-          <a:ln/>
-        </p:spPr>
-        <p:txBody>
-          <a:bodyPr wrap="square" rtlCol="0" anchor="t"/>
-          <a:lstStyle/>
-          <a:p>
-            <a:pPr algn="ctr" indent="0" marL="0">
-              <a:lnSpc>
-                <a:spcPct val="110000"/>
-              </a:lnSpc>
-              <a:buNone/>
-            </a:pPr>
-            <a:r>
-              <a:rPr lang="en-US" sz="1150" dirty="0">
-                <a:solidFill>
-                  <a:srgbClr val="141A24"/>
-                </a:solidFill>
-                <a:latin typeface="Arial" pitchFamily="34" charset="0"/>
-                <a:ea typeface="Arial" pitchFamily="34" charset="-122"/>
-                <a:cs typeface="Arial" pitchFamily="34" charset="-120"/>
-              </a:rPr>
-              <a:t>Add school-paid searches for mid-major &amp; D-II/III — revenue on both sides of the market.</a:t>
-            </a:r>
-            <a:endParaRPr lang="en-US" sz="1150" dirty="0"/>
-          </a:p>
-        </p:txBody>
-      </p:sp>
-      <p:sp>
-        <p:nvSpPr>
-          <p:cNvPr id="16" name="Shape 12"/>
-          <p:cNvSpPr/>
-          <p:nvPr/>
-        </p:nvSpPr>
-        <p:spPr>
-          <a:xfrm>
-            <a:off x="9857232" y="2560320"/>
-            <a:ext cx="1005840" cy="1005840"/>
-          </a:xfrm>
-          <a:prstGeom prst="ellipse">
-            <a:avLst/>
-          </a:prstGeom>
-          <a:solidFill>
-            <a:srgbClr val="D4A62A"/>
-          </a:solidFill>
-          <a:ln/>
-          <a:effectLst>
-            <a:outerShdw sx="100000" sy="100000" kx="0" ky="0" algn="bl" rotWithShape="0" blurRad="101600" dist="25400" dir="5400000">
-              <a:srgbClr val="CDD2D8">
-                <a:alpha val="50000"/>
-              </a:srgbClr>
-            </a:outerShdw>
-          </a:effectLst>
-        </p:spPr>
-      </p:sp>
-      <p:pic>
-        <p:nvPicPr>
-          <p:cNvPr id="17" name="Image 2" descr="preencoded.png">    </p:cNvPr>
+          <p:cNvPr id="7" name="Image 0" descr="preencoded.png"/>
           <p:cNvPicPr>
             <a:picLocks noChangeAspect="1"/>
           </p:cNvPicPr>
@@ -5660,7 +4931,7 @@
         </p:blipFill>
         <p:spPr>
           <a:xfrm>
-            <a:off x="10104120" y="2807208"/>
+            <a:off x="2221992" y="2807208"/>
             <a:ext cx="512064" cy="512064"/>
           </a:xfrm>
           <a:prstGeom prst="rect">
@@ -5670,13 +4941,13 @@
       </p:pic>
       <p:sp>
         <p:nvSpPr>
-          <p:cNvPr id="18" name="Text 13"/>
-          <p:cNvSpPr/>
-          <p:nvPr/>
-        </p:nvSpPr>
-        <p:spPr>
-          <a:xfrm>
-            <a:off x="8567928" y="3749040"/>
+          <p:cNvPr id="8" name="Text 5"/>
+          <p:cNvSpPr/>
+          <p:nvPr/>
+        </p:nvSpPr>
+        <p:spPr>
+          <a:xfrm>
+            <a:off x="685800" y="3749040"/>
             <a:ext cx="3584448" cy="320040"/>
           </a:xfrm>
           <a:prstGeom prst="rect">
@@ -5689,19 +4960,19 @@
           <a:bodyPr wrap="square" rtlCol="0" anchor="ctr"/>
           <a:lstStyle/>
           <a:p>
-            <a:pPr algn="ctr" indent="0" marL="0">
-              <a:buNone/>
-            </a:pPr>
-            <a:r>
-              <a:rPr lang="en-US" sz="1100" b="1" spc="200" kern="0" dirty="0">
-                <a:solidFill>
-                  <a:srgbClr val="D4A62A"/>
-                </a:solidFill>
-                <a:latin typeface="Arial" pitchFamily="34" charset="0"/>
-                <a:ea typeface="Arial" pitchFamily="34" charset="-122"/>
-                <a:cs typeface="Arial" pitchFamily="34" charset="-120"/>
-              </a:rPr>
-              <a:t>PHASE 3</a:t>
+            <a:pPr marL="0" indent="0" algn="ctr">
+              <a:buNone/>
+            </a:pPr>
+            <a:r>
+              <a:rPr lang="en-US" sz="1100" b="1" kern="0" spc="200" dirty="0">
+                <a:solidFill>
+                  <a:srgbClr val="2563EB"/>
+                </a:solidFill>
+                <a:latin typeface="Arial" pitchFamily="34" charset="0"/>
+                <a:ea typeface="Arial" pitchFamily="34" charset="-122"/>
+                <a:cs typeface="Arial" pitchFamily="34" charset="-120"/>
+              </a:rPr>
+              <a:t>PHASE 1</a:t>
             </a:r>
             <a:endParaRPr lang="en-US" sz="1100" dirty="0"/>
           </a:p>
@@ -5709,13 +4980,13 @@
       </p:sp>
       <p:sp>
         <p:nvSpPr>
-          <p:cNvPr id="19" name="Text 14"/>
-          <p:cNvSpPr/>
-          <p:nvPr/>
-        </p:nvSpPr>
-        <p:spPr>
-          <a:xfrm>
-            <a:off x="8567928" y="4069080"/>
+          <p:cNvPr id="9" name="Text 6"/>
+          <p:cNvSpPr/>
+          <p:nvPr/>
+        </p:nvSpPr>
+        <p:spPr>
+          <a:xfrm>
+            <a:off x="685800" y="4069080"/>
             <a:ext cx="3584448" cy="457200"/>
           </a:xfrm>
           <a:prstGeom prst="rect">
@@ -5728,7 +4999,7 @@
           <a:bodyPr wrap="square" rtlCol="0" anchor="ctr"/>
           <a:lstStyle/>
           <a:p>
-            <a:pPr algn="ctr" indent="0" marL="0">
+            <a:pPr marL="0" indent="0" algn="ctr">
               <a:buNone/>
             </a:pPr>
             <a:r>
@@ -5740,7 +5011,7 @@
                 <a:ea typeface="Arial" pitchFamily="34" charset="-122"/>
                 <a:cs typeface="Arial" pitchFamily="34" charset="-120"/>
               </a:rPr>
-              <a:t>NFLPA Agent Rep</a:t>
+              <a:t>Representation + NIL</a:t>
             </a:r>
             <a:endParaRPr lang="en-US" sz="1700" dirty="0"/>
           </a:p>
@@ -5748,13 +5019,13 @@
       </p:sp>
       <p:sp>
         <p:nvSpPr>
-          <p:cNvPr id="20" name="Text 15"/>
-          <p:cNvSpPr/>
-          <p:nvPr/>
-        </p:nvSpPr>
-        <p:spPr>
-          <a:xfrm>
-            <a:off x="8842248" y="4572000"/>
+          <p:cNvPr id="10" name="Text 7"/>
+          <p:cNvSpPr/>
+          <p:nvPr/>
+        </p:nvSpPr>
+        <p:spPr>
+          <a:xfrm>
+            <a:off x="960120" y="4572000"/>
             <a:ext cx="3035808" cy="1005840"/>
           </a:xfrm>
           <a:prstGeom prst="rect">
@@ -5767,7 +5038,7 @@
           <a:bodyPr wrap="square" rtlCol="0" anchor="t"/>
           <a:lstStyle/>
           <a:p>
-            <a:pPr algn="ctr" indent="0" marL="0">
+            <a:pPr marL="0" indent="0" algn="ctr">
               <a:lnSpc>
                 <a:spcPct val="110000"/>
               </a:lnSpc>
@@ -5782,6 +5053,348 @@
                 <a:ea typeface="Arial" pitchFamily="34" charset="-122"/>
                 <a:cs typeface="Arial" pitchFamily="34" charset="-120"/>
               </a:rPr>
+              <a:t>Launch the two core specialties; build the coach roster and the NIL newsletter funnel.</a:t>
+            </a:r>
+            <a:endParaRPr lang="en-US" sz="1150" dirty="0"/>
+          </a:p>
+        </p:txBody>
+      </p:sp>
+      <p:sp>
+        <p:nvSpPr>
+          <p:cNvPr id="11" name="Shape 8"/>
+          <p:cNvSpPr/>
+          <p:nvPr/>
+        </p:nvSpPr>
+        <p:spPr>
+          <a:xfrm>
+            <a:off x="5916168" y="2560320"/>
+            <a:ext cx="1005840" cy="1005840"/>
+          </a:xfrm>
+          <a:prstGeom prst="ellipse">
+            <a:avLst/>
+          </a:prstGeom>
+          <a:solidFill>
+            <a:srgbClr val="0B1220"/>
+          </a:solidFill>
+          <a:ln/>
+          <a:effectLst>
+            <a:outerShdw blurRad="101600" dist="25400" dir="5400000" algn="bl" rotWithShape="0">
+              <a:srgbClr val="CDD2D8">
+                <a:alpha val="50000"/>
+              </a:srgbClr>
+            </a:outerShdw>
+          </a:effectLst>
+        </p:spPr>
+      </p:sp>
+      <p:pic>
+        <p:nvPicPr>
+          <p:cNvPr id="12" name="Image 1" descr="preencoded.png"/>
+          <p:cNvPicPr>
+            <a:picLocks noChangeAspect="1"/>
+          </p:cNvPicPr>
+          <p:nvPr/>
+        </p:nvPicPr>
+        <p:blipFill>
+          <a:blip r:embed="rId4"/>
+          <a:stretch>
+            <a:fillRect/>
+          </a:stretch>
+        </p:blipFill>
+        <p:spPr>
+          <a:xfrm>
+            <a:off x="6163056" y="2807208"/>
+            <a:ext cx="512064" cy="512064"/>
+          </a:xfrm>
+          <a:prstGeom prst="rect">
+            <a:avLst/>
+          </a:prstGeom>
+        </p:spPr>
+      </p:pic>
+      <p:sp>
+        <p:nvSpPr>
+          <p:cNvPr id="13" name="Text 9"/>
+          <p:cNvSpPr/>
+          <p:nvPr/>
+        </p:nvSpPr>
+        <p:spPr>
+          <a:xfrm>
+            <a:off x="4626864" y="3749040"/>
+            <a:ext cx="3584448" cy="320040"/>
+          </a:xfrm>
+          <a:prstGeom prst="rect">
+            <a:avLst/>
+          </a:prstGeom>
+          <a:noFill/>
+          <a:ln/>
+        </p:spPr>
+        <p:txBody>
+          <a:bodyPr wrap="square" rtlCol="0" anchor="ctr"/>
+          <a:lstStyle/>
+          <a:p>
+            <a:pPr marL="0" indent="0" algn="ctr">
+              <a:buNone/>
+            </a:pPr>
+            <a:r>
+              <a:rPr lang="en-US" sz="1100" b="1" kern="0" spc="200" dirty="0">
+                <a:solidFill>
+                  <a:srgbClr val="141A24"/>
+                </a:solidFill>
+                <a:latin typeface="Arial" pitchFamily="34" charset="0"/>
+                <a:ea typeface="Arial" pitchFamily="34" charset="-122"/>
+                <a:cs typeface="Arial" pitchFamily="34" charset="-120"/>
+              </a:rPr>
+              <a:t>PHASE 2</a:t>
+            </a:r>
+            <a:endParaRPr lang="en-US" sz="1100" dirty="0"/>
+          </a:p>
+        </p:txBody>
+      </p:sp>
+      <p:sp>
+        <p:nvSpPr>
+          <p:cNvPr id="14" name="Text 10"/>
+          <p:cNvSpPr/>
+          <p:nvPr/>
+        </p:nvSpPr>
+        <p:spPr>
+          <a:xfrm>
+            <a:off x="4626864" y="4069080"/>
+            <a:ext cx="3584448" cy="457200"/>
+          </a:xfrm>
+          <a:prstGeom prst="rect">
+            <a:avLst/>
+          </a:prstGeom>
+          <a:noFill/>
+          <a:ln/>
+        </p:spPr>
+        <p:txBody>
+          <a:bodyPr wrap="square" rtlCol="0" anchor="ctr"/>
+          <a:lstStyle/>
+          <a:p>
+            <a:pPr marL="0" indent="0" algn="ctr">
+              <a:buNone/>
+            </a:pPr>
+            <a:r>
+              <a:rPr lang="en-US" sz="1700" b="1" dirty="0">
+                <a:solidFill>
+                  <a:srgbClr val="141A24"/>
+                </a:solidFill>
+                <a:latin typeface="Arial" pitchFamily="34" charset="0"/>
+                <a:ea typeface="Arial" pitchFamily="34" charset="-122"/>
+                <a:cs typeface="Arial" pitchFamily="34" charset="-120"/>
+              </a:rPr>
+              <a:t>Search Desk</a:t>
+            </a:r>
+            <a:endParaRPr lang="en-US" sz="1700" dirty="0"/>
+          </a:p>
+        </p:txBody>
+      </p:sp>
+      <p:sp>
+        <p:nvSpPr>
+          <p:cNvPr id="15" name="Text 11"/>
+          <p:cNvSpPr/>
+          <p:nvPr/>
+        </p:nvSpPr>
+        <p:spPr>
+          <a:xfrm>
+            <a:off x="4901184" y="4572000"/>
+            <a:ext cx="3035808" cy="1005840"/>
+          </a:xfrm>
+          <a:prstGeom prst="rect">
+            <a:avLst/>
+          </a:prstGeom>
+          <a:noFill/>
+          <a:ln/>
+        </p:spPr>
+        <p:txBody>
+          <a:bodyPr wrap="square" rtlCol="0" anchor="t"/>
+          <a:lstStyle/>
+          <a:p>
+            <a:pPr marL="0" indent="0" algn="ctr">
+              <a:lnSpc>
+                <a:spcPct val="110000"/>
+              </a:lnSpc>
+              <a:buNone/>
+            </a:pPr>
+            <a:r>
+              <a:rPr lang="en-US" sz="1150" dirty="0">
+                <a:solidFill>
+                  <a:srgbClr val="141A24"/>
+                </a:solidFill>
+                <a:latin typeface="Arial" pitchFamily="34" charset="0"/>
+                <a:ea typeface="Arial" pitchFamily="34" charset="-122"/>
+                <a:cs typeface="Arial" pitchFamily="34" charset="-120"/>
+              </a:rPr>
+              <a:t>Add school-paid searches for mid-major &amp; D-II/III — revenue on both sides of the market.</a:t>
+            </a:r>
+            <a:endParaRPr lang="en-US" sz="1150" dirty="0"/>
+          </a:p>
+        </p:txBody>
+      </p:sp>
+      <p:sp>
+        <p:nvSpPr>
+          <p:cNvPr id="16" name="Shape 12"/>
+          <p:cNvSpPr/>
+          <p:nvPr/>
+        </p:nvSpPr>
+        <p:spPr>
+          <a:xfrm>
+            <a:off x="9857232" y="2560320"/>
+            <a:ext cx="1005840" cy="1005840"/>
+          </a:xfrm>
+          <a:prstGeom prst="ellipse">
+            <a:avLst/>
+          </a:prstGeom>
+          <a:solidFill>
+            <a:srgbClr val="D4A62A"/>
+          </a:solidFill>
+          <a:ln/>
+          <a:effectLst>
+            <a:outerShdw blurRad="101600" dist="25400" dir="5400000" algn="bl" rotWithShape="0">
+              <a:srgbClr val="CDD2D8">
+                <a:alpha val="50000"/>
+              </a:srgbClr>
+            </a:outerShdw>
+          </a:effectLst>
+        </p:spPr>
+      </p:sp>
+      <p:pic>
+        <p:nvPicPr>
+          <p:cNvPr id="17" name="Image 2" descr="preencoded.png"/>
+          <p:cNvPicPr>
+            <a:picLocks noChangeAspect="1"/>
+          </p:cNvPicPr>
+          <p:nvPr/>
+        </p:nvPicPr>
+        <p:blipFill>
+          <a:blip r:embed="rId5"/>
+          <a:stretch>
+            <a:fillRect/>
+          </a:stretch>
+        </p:blipFill>
+        <p:spPr>
+          <a:xfrm>
+            <a:off x="10104120" y="2807208"/>
+            <a:ext cx="512064" cy="512064"/>
+          </a:xfrm>
+          <a:prstGeom prst="rect">
+            <a:avLst/>
+          </a:prstGeom>
+        </p:spPr>
+      </p:pic>
+      <p:sp>
+        <p:nvSpPr>
+          <p:cNvPr id="18" name="Text 13"/>
+          <p:cNvSpPr/>
+          <p:nvPr/>
+        </p:nvSpPr>
+        <p:spPr>
+          <a:xfrm>
+            <a:off x="8567928" y="3749040"/>
+            <a:ext cx="3584448" cy="320040"/>
+          </a:xfrm>
+          <a:prstGeom prst="rect">
+            <a:avLst/>
+          </a:prstGeom>
+          <a:noFill/>
+          <a:ln/>
+        </p:spPr>
+        <p:txBody>
+          <a:bodyPr wrap="square" rtlCol="0" anchor="ctr"/>
+          <a:lstStyle/>
+          <a:p>
+            <a:pPr marL="0" indent="0" algn="ctr">
+              <a:buNone/>
+            </a:pPr>
+            <a:r>
+              <a:rPr lang="en-US" sz="1100" b="1" kern="0" spc="200" dirty="0">
+                <a:solidFill>
+                  <a:srgbClr val="D4A62A"/>
+                </a:solidFill>
+                <a:latin typeface="Arial" pitchFamily="34" charset="0"/>
+                <a:ea typeface="Arial" pitchFamily="34" charset="-122"/>
+                <a:cs typeface="Arial" pitchFamily="34" charset="-120"/>
+              </a:rPr>
+              <a:t>PHASE 3</a:t>
+            </a:r>
+            <a:endParaRPr lang="en-US" sz="1100" dirty="0"/>
+          </a:p>
+        </p:txBody>
+      </p:sp>
+      <p:sp>
+        <p:nvSpPr>
+          <p:cNvPr id="19" name="Text 14"/>
+          <p:cNvSpPr/>
+          <p:nvPr/>
+        </p:nvSpPr>
+        <p:spPr>
+          <a:xfrm>
+            <a:off x="8567928" y="4069080"/>
+            <a:ext cx="3584448" cy="457200"/>
+          </a:xfrm>
+          <a:prstGeom prst="rect">
+            <a:avLst/>
+          </a:prstGeom>
+          <a:noFill/>
+          <a:ln/>
+        </p:spPr>
+        <p:txBody>
+          <a:bodyPr wrap="square" rtlCol="0" anchor="ctr"/>
+          <a:lstStyle/>
+          <a:p>
+            <a:pPr marL="0" indent="0" algn="ctr">
+              <a:buNone/>
+            </a:pPr>
+            <a:r>
+              <a:rPr lang="en-US" sz="1700" b="1" dirty="0">
+                <a:solidFill>
+                  <a:srgbClr val="141A24"/>
+                </a:solidFill>
+                <a:latin typeface="Arial" pitchFamily="34" charset="0"/>
+                <a:ea typeface="Arial" pitchFamily="34" charset="-122"/>
+                <a:cs typeface="Arial" pitchFamily="34" charset="-120"/>
+              </a:rPr>
+              <a:t>NFLPA Agent Rep</a:t>
+            </a:r>
+            <a:endParaRPr lang="en-US" sz="1700" dirty="0"/>
+          </a:p>
+        </p:txBody>
+      </p:sp>
+      <p:sp>
+        <p:nvSpPr>
+          <p:cNvPr id="20" name="Text 15"/>
+          <p:cNvSpPr/>
+          <p:nvPr/>
+        </p:nvSpPr>
+        <p:spPr>
+          <a:xfrm>
+            <a:off x="8842248" y="4572000"/>
+            <a:ext cx="3035808" cy="1005840"/>
+          </a:xfrm>
+          <a:prstGeom prst="rect">
+            <a:avLst/>
+          </a:prstGeom>
+          <a:noFill/>
+          <a:ln/>
+        </p:spPr>
+        <p:txBody>
+          <a:bodyPr wrap="square" rtlCol="0" anchor="t"/>
+          <a:lstStyle/>
+          <a:p>
+            <a:pPr marL="0" indent="0" algn="ctr">
+              <a:lnSpc>
+                <a:spcPct val="110000"/>
+              </a:lnSpc>
+              <a:buNone/>
+            </a:pPr>
+            <a:r>
+              <a:rPr lang="en-US" sz="1150" dirty="0">
+                <a:solidFill>
+                  <a:srgbClr val="141A24"/>
+                </a:solidFill>
+                <a:latin typeface="Arial" pitchFamily="34" charset="0"/>
+                <a:ea typeface="Arial" pitchFamily="34" charset="-122"/>
+                <a:cs typeface="Arial" pitchFamily="34" charset="-120"/>
+              </a:rPr>
               <a:t>Add NFL player representation on certification — the highest-value engagements.</a:t>
             </a:r>
             <a:endParaRPr lang="en-US" sz="1150" dirty="0"/>
@@ -5809,7 +5422,7 @@
           <a:bodyPr wrap="square" rtlCol="0" anchor="ctr"/>
           <a:lstStyle/>
           <a:p>
-            <a:pPr indent="0" marL="0">
+            <a:pPr marL="0" indent="0">
               <a:buNone/>
             </a:pPr>
             <a:r>
@@ -5823,9 +5436,6 @@
               </a:rPr>
               <a:t>Dexter Sports Co.</a:t>
             </a:r>
-            <a:pPr indent="0" marL="0">
-              <a:buNone/>
-            </a:pPr>
             <a:r>
               <a:rPr lang="en-US" sz="850" dirty="0">
                 <a:solidFill>
@@ -5862,11 +5472,11 @@
           <a:bodyPr wrap="square" rtlCol="0" anchor="ctr"/>
           <a:lstStyle/>
           <a:p>
-            <a:pPr algn="r" indent="0" marL="0">
-              <a:buNone/>
-            </a:pPr>
-            <a:r>
-              <a:rPr lang="en-US" sz="750" b="1" spc="100" kern="0" dirty="0">
+            <a:pPr marL="0" indent="0" algn="r">
+              <a:buNone/>
+            </a:pPr>
+            <a:r>
+              <a:rPr lang="en-US" sz="750" b="1" kern="0" spc="100" dirty="0">
                 <a:solidFill>
                   <a:srgbClr val="D4A62A"/>
                 </a:solidFill>
@@ -5896,6 +5506,7 @@
         <a:solidFill>
           <a:srgbClr val="FFFFFF"/>
         </a:solidFill>
+        <a:effectLst/>
       </p:bgPr>
     </p:bg>
     <p:spTree>
@@ -5933,7 +5544,7 @@
           <a:bodyPr wrap="square" rtlCol="0" anchor="ctr"/>
           <a:lstStyle/>
           <a:p>
-            <a:pPr indent="0" marL="0">
+            <a:pPr marL="0" indent="0">
               <a:buNone/>
             </a:pPr>
             <a:r>
@@ -5947,11 +5558,8 @@
               </a:rPr>
               <a:t>● </a:t>
             </a:r>
-            <a:pPr indent="0" marL="0">
-              <a:buNone/>
-            </a:pPr>
-            <a:r>
-              <a:rPr lang="en-US" sz="1100" b="1" spc="300" kern="0" dirty="0">
+            <a:r>
+              <a:rPr lang="en-US" sz="1100" b="1" kern="0" spc="300" dirty="0">
                 <a:solidFill>
                   <a:srgbClr val="2563EB"/>
                 </a:solidFill>
@@ -5986,7 +5594,7 @@
           <a:bodyPr wrap="square" rtlCol="0" anchor="ctr"/>
           <a:lstStyle/>
           <a:p>
-            <a:pPr indent="0" marL="0">
+            <a:pPr marL="0" indent="0">
               <a:buNone/>
             </a:pPr>
             <a:r>
@@ -6000,9 +5608,6 @@
               </a:rPr>
               <a:t>Two scenarios, reaching </a:t>
             </a:r>
-            <a:pPr indent="0" marL="0">
-              <a:buNone/>
-            </a:pPr>
             <a:r>
               <a:rPr lang="en-US" sz="2900" i="1" dirty="0">
                 <a:solidFill>
@@ -6039,7 +5644,7 @@
           <a:bodyPr wrap="square" rtlCol="0" anchor="ctr"/>
           <a:lstStyle/>
           <a:p>
-            <a:pPr indent="0" marL="0">
+            <a:pPr marL="0" indent="0">
               <a:buNone/>
             </a:pPr>
             <a:r>
@@ -6059,7 +5664,7 @@
       </p:sp>
       <p:graphicFrame>
         <p:nvGraphicFramePr>
-          <p:cNvPr id="5" name="Chart 0" descr=""/>
+          <p:cNvPr id="5" name="Chart 0"/>
           <p:cNvGraphicFramePr/>
           <p:nvPr/>
         </p:nvGraphicFramePr>
@@ -6067,9 +5672,9 @@
           <a:off x="548640" y="2057400"/>
           <a:ext cx="6949440" cy="4023360"/>
         </p:xfrm>
-        <a:graphic xmlns:a="http://schemas.openxmlformats.org/drawingml/2006/main">
+        <a:graphic>
           <a:graphicData uri="http://schemas.openxmlformats.org/drawingml/2006/chart">
-            <c:chart xmlns:c="http://schemas.openxmlformats.org/drawingml/2006/chart" r:id="rId1"/>
+            <c:chart xmlns:c="http://schemas.openxmlformats.org/drawingml/2006/chart" xmlns:r="http://schemas.openxmlformats.org/officeDocument/2006/relationships" r:id="rId3"/>
           </a:graphicData>
         </a:graphic>
       </p:graphicFrame>
@@ -6102,14 +5707,14 @@
       </p:sp>
       <p:pic>
         <p:nvPicPr>
-          <p:cNvPr id="7" name="Image 0" descr="preencoded.png">    </p:cNvPr>
+          <p:cNvPr id="7" name="Image 0" descr="preencoded.png"/>
           <p:cNvPicPr>
             <a:picLocks noChangeAspect="1"/>
           </p:cNvPicPr>
           <p:nvPr/>
         </p:nvPicPr>
         <p:blipFill>
-          <a:blip r:embed="rId2"/>
+          <a:blip r:embed="rId4"/>
           <a:stretch>
             <a:fillRect/>
           </a:stretch>
@@ -6145,11 +5750,11 @@
           <a:bodyPr wrap="square" rtlCol="0" anchor="ctr"/>
           <a:lstStyle/>
           <a:p>
-            <a:pPr indent="0" marL="0">
-              <a:buNone/>
-            </a:pPr>
-            <a:r>
-              <a:rPr lang="en-US" sz="1100" b="1" spc="200" kern="0" dirty="0">
+            <a:pPr marL="0" indent="0">
+              <a:buNone/>
+            </a:pPr>
+            <a:r>
+              <a:rPr lang="en-US" sz="1100" b="1" kern="0" spc="200" dirty="0">
                 <a:solidFill>
                   <a:srgbClr val="2563EB"/>
                 </a:solidFill>
@@ -6184,7 +5789,7 @@
           <a:bodyPr wrap="square" rtlCol="0" anchor="ctr"/>
           <a:lstStyle/>
           <a:p>
-            <a:pPr indent="0" marL="0">
+            <a:pPr marL="0" indent="0">
               <a:buNone/>
             </a:pPr>
             <a:r>
@@ -6223,7 +5828,7 @@
           <a:bodyPr wrap="square" rtlCol="0" anchor="ctr"/>
           <a:lstStyle/>
           <a:p>
-            <a:pPr indent="0" marL="0">
+            <a:pPr marL="0" indent="0">
               <a:buNone/>
             </a:pPr>
             <a:r>
@@ -6270,14 +5875,14 @@
       </p:sp>
       <p:pic>
         <p:nvPicPr>
-          <p:cNvPr id="12" name="Image 1" descr="preencoded.png">    </p:cNvPr>
+          <p:cNvPr id="12" name="Image 1" descr="preencoded.png"/>
           <p:cNvPicPr>
             <a:picLocks noChangeAspect="1"/>
           </p:cNvPicPr>
           <p:nvPr/>
         </p:nvPicPr>
         <p:blipFill>
-          <a:blip r:embed="rId3"/>
+          <a:blip r:embed="rId5"/>
           <a:stretch>
             <a:fillRect/>
           </a:stretch>
@@ -6313,11 +5918,11 @@
           <a:bodyPr wrap="square" rtlCol="0" anchor="ctr"/>
           <a:lstStyle/>
           <a:p>
-            <a:pPr indent="0" marL="0">
-              <a:buNone/>
-            </a:pPr>
-            <a:r>
-              <a:rPr lang="en-US" sz="1100" b="1" spc="200" kern="0" dirty="0">
+            <a:pPr marL="0" indent="0">
+              <a:buNone/>
+            </a:pPr>
+            <a:r>
+              <a:rPr lang="en-US" sz="1100" b="1" kern="0" spc="200" dirty="0">
                 <a:solidFill>
                   <a:srgbClr val="D4A62A"/>
                 </a:solidFill>
@@ -6352,7 +5957,7 @@
           <a:bodyPr wrap="square" rtlCol="0" anchor="ctr"/>
           <a:lstStyle/>
           <a:p>
-            <a:pPr indent="0" marL="0">
+            <a:pPr marL="0" indent="0">
               <a:buNone/>
             </a:pPr>
             <a:r>
@@ -6391,7 +5996,7 @@
           <a:bodyPr wrap="square" rtlCol="0" anchor="ctr"/>
           <a:lstStyle/>
           <a:p>
-            <a:pPr indent="0" marL="0">
+            <a:pPr marL="0" indent="0">
               <a:buNone/>
             </a:pPr>
             <a:r>
@@ -6457,7 +6062,7 @@
           <a:bodyPr wrap="square" rtlCol="0" anchor="ctr"/>
           <a:lstStyle/>
           <a:p>
-            <a:pPr indent="0" marL="0">
+            <a:pPr marL="0" indent="0">
               <a:lnSpc>
                 <a:spcPct val="105000"/>
               </a:lnSpc>
@@ -6474,12 +6079,6 @@
               </a:rPr>
               <a:t>Breakeven in Year 5.  </a:t>
             </a:r>
-            <a:pPr indent="0" marL="0">
-              <a:lnSpc>
-                <a:spcPct val="105000"/>
-              </a:lnSpc>
-              <a:buNone/>
-            </a:pPr>
             <a:r>
               <a:rPr lang="en-US" sz="950" dirty="0">
                 <a:solidFill>
@@ -6516,7 +6115,7 @@
           <a:bodyPr wrap="square" rtlCol="0" anchor="ctr"/>
           <a:lstStyle/>
           <a:p>
-            <a:pPr indent="0" marL="0">
+            <a:pPr marL="0" indent="0">
               <a:buNone/>
             </a:pPr>
             <a:r>
@@ -6555,11 +6154,11 @@
           <a:bodyPr wrap="square" rtlCol="0" anchor="ctr"/>
           <a:lstStyle/>
           <a:p>
-            <a:pPr algn="r" indent="0" marL="0">
-              <a:buNone/>
-            </a:pPr>
-            <a:r>
-              <a:rPr lang="en-US" sz="750" b="1" spc="100" kern="0" dirty="0">
+            <a:pPr marL="0" indent="0" algn="r">
+              <a:buNone/>
+            </a:pPr>
+            <a:r>
+              <a:rPr lang="en-US" sz="750" b="1" kern="0" spc="100" dirty="0">
                 <a:solidFill>
                   <a:srgbClr val="D4A62A"/>
                 </a:solidFill>
@@ -6589,6 +6188,7 @@
         <a:solidFill>
           <a:srgbClr val="FFFFFF"/>
         </a:solidFill>
+        <a:effectLst/>
       </p:bgPr>
     </p:bg>
     <p:spTree>
@@ -6626,7 +6226,7 @@
           <a:bodyPr wrap="square" rtlCol="0" anchor="ctr"/>
           <a:lstStyle/>
           <a:p>
-            <a:pPr indent="0" marL="0">
+            <a:pPr marL="0" indent="0">
               <a:buNone/>
             </a:pPr>
             <a:r>
@@ -6640,11 +6240,8 @@
               </a:rPr>
               <a:t>● </a:t>
             </a:r>
-            <a:pPr indent="0" marL="0">
-              <a:buNone/>
-            </a:pPr>
-            <a:r>
-              <a:rPr lang="en-US" sz="1100" b="1" spc="300" kern="0" dirty="0">
+            <a:r>
+              <a:rPr lang="en-US" sz="1100" b="1" kern="0" spc="300" dirty="0">
                 <a:solidFill>
                   <a:srgbClr val="2563EB"/>
                 </a:solidFill>
@@ -6679,7 +6276,7 @@
           <a:bodyPr wrap="square" rtlCol="0" anchor="ctr"/>
           <a:lstStyle/>
           <a:p>
-            <a:pPr indent="0" marL="0">
+            <a:pPr marL="0" indent="0">
               <a:buNone/>
             </a:pPr>
             <a:r>
@@ -6693,9 +6290,6 @@
               </a:rPr>
               <a:t>Built to manage conflicts </a:t>
             </a:r>
-            <a:pPr indent="0" marL="0">
-              <a:buNone/>
-            </a:pPr>
             <a:r>
               <a:rPr lang="en-US" sz="2900" i="1" dirty="0">
                 <a:solidFill>
@@ -6732,7 +6326,7 @@
           <a:bodyPr wrap="square" rtlCol="0" anchor="ctr"/>
           <a:lstStyle/>
           <a:p>
-            <a:pPr indent="0" marL="0">
+            <a:pPr marL="0" indent="0">
               <a:buNone/>
             </a:pPr>
             <a:r>
@@ -6779,14 +6373,14 @@
       </p:sp>
       <p:pic>
         <p:nvPicPr>
-          <p:cNvPr id="6" name="Image 0" descr="preencoded.png">    </p:cNvPr>
+          <p:cNvPr id="6" name="Image 0" descr="preencoded.png"/>
           <p:cNvPicPr>
             <a:picLocks noChangeAspect="1"/>
           </p:cNvPicPr>
           <p:nvPr/>
         </p:nvPicPr>
         <p:blipFill>
-          <a:blip r:embed="rId1"/>
+          <a:blip r:embed="rId3"/>
           <a:stretch>
             <a:fillRect/>
           </a:stretch>
@@ -6822,7 +6416,7 @@
           <a:bodyPr wrap="square" rtlCol="0" anchor="ctr"/>
           <a:lstStyle/>
           <a:p>
-            <a:pPr indent="0" marL="0">
+            <a:pPr marL="0" indent="0">
               <a:buNone/>
             </a:pPr>
             <a:r>
@@ -6861,7 +6455,7 @@
           <a:bodyPr wrap="square" rtlCol="0" anchor="t"/>
           <a:lstStyle/>
           <a:p>
-            <a:pPr indent="0" marL="0">
+            <a:pPr marL="0" indent="0">
               <a:lnSpc>
                 <a:spcPct val="108000"/>
               </a:lnSpc>
@@ -6911,14 +6505,14 @@
       </p:sp>
       <p:pic>
         <p:nvPicPr>
-          <p:cNvPr id="10" name="Image 1" descr="preencoded.png">    </p:cNvPr>
+          <p:cNvPr id="10" name="Image 1" descr="preencoded.png"/>
           <p:cNvPicPr>
             <a:picLocks noChangeAspect="1"/>
           </p:cNvPicPr>
           <p:nvPr/>
         </p:nvPicPr>
         <p:blipFill>
-          <a:blip r:embed="rId2"/>
+          <a:blip r:embed="rId4"/>
           <a:stretch>
             <a:fillRect/>
           </a:stretch>
@@ -6954,7 +6548,7 @@
           <a:bodyPr wrap="square" rtlCol="0" anchor="ctr"/>
           <a:lstStyle/>
           <a:p>
-            <a:pPr indent="0" marL="0">
+            <a:pPr marL="0" indent="0">
               <a:buNone/>
             </a:pPr>
             <a:r>
@@ -6993,7 +6587,7 @@
           <a:bodyPr wrap="square" rtlCol="0" anchor="t"/>
           <a:lstStyle/>
           <a:p>
-            <a:pPr indent="0" marL="0">
+            <a:pPr marL="0" indent="0">
               <a:lnSpc>
                 <a:spcPct val="108000"/>
               </a:lnSpc>
@@ -7043,14 +6637,14 @@
       </p:sp>
       <p:pic>
         <p:nvPicPr>
-          <p:cNvPr id="14" name="Image 2" descr="preencoded.png">    </p:cNvPr>
+          <p:cNvPr id="14" name="Image 2" descr="preencoded.png"/>
           <p:cNvPicPr>
             <a:picLocks noChangeAspect="1"/>
           </p:cNvPicPr>
           <p:nvPr/>
         </p:nvPicPr>
         <p:blipFill>
-          <a:blip r:embed="rId3"/>
+          <a:blip r:embed="rId5"/>
           <a:stretch>
             <a:fillRect/>
           </a:stretch>
@@ -7086,7 +6680,7 @@
           <a:bodyPr wrap="square" rtlCol="0" anchor="ctr"/>
           <a:lstStyle/>
           <a:p>
-            <a:pPr indent="0" marL="0">
+            <a:pPr marL="0" indent="0">
               <a:buNone/>
             </a:pPr>
             <a:r>
@@ -7125,7 +6719,7 @@
           <a:bodyPr wrap="square" rtlCol="0" anchor="t"/>
           <a:lstStyle/>
           <a:p>
-            <a:pPr indent="0" marL="0">
+            <a:pPr marL="0" indent="0">
               <a:lnSpc>
                 <a:spcPct val="108000"/>
               </a:lnSpc>
@@ -7175,14 +6769,14 @@
       </p:sp>
       <p:pic>
         <p:nvPicPr>
-          <p:cNvPr id="18" name="Image 3" descr="preencoded.png">    </p:cNvPr>
+          <p:cNvPr id="18" name="Image 3" descr="preencoded.png"/>
           <p:cNvPicPr>
             <a:picLocks noChangeAspect="1"/>
           </p:cNvPicPr>
           <p:nvPr/>
         </p:nvPicPr>
         <p:blipFill>
-          <a:blip r:embed="rId4"/>
+          <a:blip r:embed="rId6"/>
           <a:stretch>
             <a:fillRect/>
           </a:stretch>
@@ -7218,7 +6812,7 @@
           <a:bodyPr wrap="square" rtlCol="0" anchor="ctr"/>
           <a:lstStyle/>
           <a:p>
-            <a:pPr indent="0" marL="0">
+            <a:pPr marL="0" indent="0">
               <a:buNone/>
             </a:pPr>
             <a:r>
@@ -7257,7 +6851,7 @@
           <a:bodyPr wrap="square" rtlCol="0" anchor="t"/>
           <a:lstStyle/>
           <a:p>
-            <a:pPr indent="0" marL="0">
+            <a:pPr marL="0" indent="0">
               <a:lnSpc>
                 <a:spcPct val="108000"/>
               </a:lnSpc>
@@ -7299,7 +6893,7 @@
           <a:bodyPr wrap="square" rtlCol="0" anchor="ctr"/>
           <a:lstStyle/>
           <a:p>
-            <a:pPr indent="0" marL="0">
+            <a:pPr marL="0" indent="0">
               <a:buNone/>
             </a:pPr>
             <a:r>
@@ -7313,9 +6907,6 @@
               </a:rPr>
               <a:t>Dexter Sports Co.</a:t>
             </a:r>
-            <a:pPr indent="0" marL="0">
-              <a:buNone/>
-            </a:pPr>
             <a:r>
               <a:rPr lang="en-US" sz="850" dirty="0">
                 <a:solidFill>
@@ -7352,11 +6943,11 @@
           <a:bodyPr wrap="square" rtlCol="0" anchor="ctr"/>
           <a:lstStyle/>
           <a:p>
-            <a:pPr algn="r" indent="0" marL="0">
-              <a:buNone/>
-            </a:pPr>
-            <a:r>
-              <a:rPr lang="en-US" sz="750" b="1" spc="100" kern="0" dirty="0">
+            <a:pPr marL="0" indent="0" algn="r">
+              <a:buNone/>
+            </a:pPr>
+            <a:r>
+              <a:rPr lang="en-US" sz="750" b="1" kern="0" spc="100" dirty="0">
                 <a:solidFill>
                   <a:srgbClr val="D4A62A"/>
                 </a:solidFill>
@@ -7386,6 +6977,7 @@
         <a:solidFill>
           <a:srgbClr val="0B1220"/>
         </a:solidFill>
+        <a:effectLst/>
       </p:bgPr>
     </p:bg>
     <p:spTree>
@@ -7423,7 +7015,7 @@
           <a:bodyPr wrap="square" rtlCol="0" anchor="ctr"/>
           <a:lstStyle/>
           <a:p>
-            <a:pPr indent="0" marL="0">
+            <a:pPr marL="0" indent="0">
               <a:buNone/>
             </a:pPr>
             <a:r>
@@ -7437,11 +7029,8 @@
               </a:rPr>
               <a:t>● </a:t>
             </a:r>
-            <a:pPr indent="0" marL="0">
-              <a:buNone/>
-            </a:pPr>
-            <a:r>
-              <a:rPr lang="en-US" sz="1100" b="1" spc="300" kern="0" dirty="0">
+            <a:r>
+              <a:rPr lang="en-US" sz="1100" b="1" kern="0" spc="300" dirty="0">
                 <a:solidFill>
                   <a:srgbClr val="93B4FF"/>
                 </a:solidFill>
@@ -7476,7 +7065,7 @@
           <a:bodyPr wrap="square" rtlCol="0" anchor="ctr"/>
           <a:lstStyle/>
           <a:p>
-            <a:pPr indent="0" marL="0">
+            <a:pPr marL="0" indent="0">
               <a:buNone/>
             </a:pPr>
             <a:r>
@@ -7490,9 +7079,6 @@
               </a:rPr>
               <a:t>Building the base for a </a:t>
             </a:r>
-            <a:pPr indent="0" marL="0">
-              <a:buNone/>
-            </a:pPr>
             <a:r>
               <a:rPr lang="en-US" sz="3000" i="1" dirty="0">
                 <a:solidFill>
@@ -7529,7 +7115,7 @@
           <a:bodyPr wrap="square" rtlCol="0" anchor="ctr"/>
           <a:lstStyle/>
           <a:p>
-            <a:pPr indent="0" marL="0">
+            <a:pPr marL="0" indent="0">
               <a:buNone/>
             </a:pPr>
             <a:r>
@@ -7571,255 +7157,7 @@
       </p:sp>
       <p:pic>
         <p:nvPicPr>
-          <p:cNvPr id="6" name="Image 0" descr="preencoded.png">    </p:cNvPr>
-          <p:cNvPicPr>
-            <a:picLocks noChangeAspect="1"/>
-          </p:cNvPicPr>
-          <p:nvPr/>
-        </p:nvPicPr>
-        <p:blipFill>
-          <a:blip r:embed="rId1"/>
-          <a:stretch>
-            <a:fillRect/>
-          </a:stretch>
-        </p:blipFill>
-        <p:spPr>
-          <a:xfrm>
-            <a:off x="1005840" y="2606040"/>
-            <a:ext cx="502920" cy="502920"/>
-          </a:xfrm>
-          <a:prstGeom prst="rect">
-            <a:avLst/>
-          </a:prstGeom>
-        </p:spPr>
-      </p:pic>
-      <p:sp>
-        <p:nvSpPr>
-          <p:cNvPr id="7" name="Text 4"/>
-          <p:cNvSpPr/>
-          <p:nvPr/>
-        </p:nvSpPr>
-        <p:spPr>
-          <a:xfrm>
-            <a:off x="1691640" y="2560320"/>
-            <a:ext cx="3977640" cy="411480"/>
-          </a:xfrm>
-          <a:prstGeom prst="rect">
-            <a:avLst/>
-          </a:prstGeom>
-          <a:noFill/>
-          <a:ln/>
-        </p:spPr>
-        <p:txBody>
-          <a:bodyPr wrap="square" rtlCol="0" anchor="ctr"/>
-          <a:lstStyle/>
-          <a:p>
-            <a:pPr indent="0" marL="0">
-              <a:buNone/>
-            </a:pPr>
-            <a:r>
-              <a:rPr lang="en-US" sz="1600" b="1" dirty="0">
-                <a:solidFill>
-                  <a:srgbClr val="93B4FF"/>
-                </a:solidFill>
-                <a:latin typeface="Arial" pitchFamily="34" charset="0"/>
-                <a:ea typeface="Arial" pitchFamily="34" charset="-122"/>
-                <a:cs typeface="Arial" pitchFamily="34" charset="-120"/>
-              </a:rPr>
-              <a:t>Team &amp; network</a:t>
-            </a:r>
-            <a:endParaRPr lang="en-US" sz="1600" dirty="0"/>
-          </a:p>
-        </p:txBody>
-      </p:sp>
-      <p:sp>
-        <p:nvSpPr>
-          <p:cNvPr id="8" name="Text 5"/>
-          <p:cNvSpPr/>
-          <p:nvPr/>
-        </p:nvSpPr>
-        <p:spPr>
-          <a:xfrm>
-            <a:off x="1691640" y="2999232"/>
-            <a:ext cx="3977640" cy="685800"/>
-          </a:xfrm>
-          <a:prstGeom prst="rect">
-            <a:avLst/>
-          </a:prstGeom>
-          <a:noFill/>
-          <a:ln/>
-        </p:spPr>
-        <p:txBody>
-          <a:bodyPr wrap="square" rtlCol="0" anchor="t"/>
-          <a:lstStyle/>
-          <a:p>
-            <a:pPr indent="0" marL="0">
-              <a:buNone/>
-            </a:pPr>
-            <a:r>
-              <a:rPr lang="en-US" sz="1200" dirty="0">
-                <a:solidFill>
-                  <a:srgbClr val="C3CAD6"/>
-                </a:solidFill>
-                <a:latin typeface="Arial" pitchFamily="34" charset="0"/>
-                <a:ea typeface="Arial" pitchFamily="34" charset="-122"/>
-                <a:cs typeface="Arial" pitchFamily="34" charset="-120"/>
-              </a:rPr>
-              <a:t>Representation and NIL staff plus the relationships to drive deal flow on both sides of the market.</a:t>
-            </a:r>
-            <a:endParaRPr lang="en-US" sz="1200" dirty="0"/>
-          </a:p>
-        </p:txBody>
-      </p:sp>
-      <p:sp>
-        <p:nvSpPr>
-          <p:cNvPr id="9" name="Shape 6"/>
-          <p:cNvSpPr/>
-          <p:nvPr/>
-        </p:nvSpPr>
-        <p:spPr>
-          <a:xfrm>
-            <a:off x="6272784" y="2286000"/>
-            <a:ext cx="5257800" cy="1508760"/>
-          </a:xfrm>
-          <a:prstGeom prst="roundRect">
-            <a:avLst>
-              <a:gd name="adj" fmla="val 7273"/>
-            </a:avLst>
-          </a:prstGeom>
-          <a:solidFill>
-            <a:srgbClr val="121A2B"/>
-          </a:solidFill>
-          <a:ln/>
-        </p:spPr>
-      </p:sp>
-      <p:pic>
-        <p:nvPicPr>
-          <p:cNvPr id="10" name="Image 1" descr="preencoded.png">    </p:cNvPr>
-          <p:cNvPicPr>
-            <a:picLocks noChangeAspect="1"/>
-          </p:cNvPicPr>
-          <p:nvPr/>
-        </p:nvPicPr>
-        <p:blipFill>
-          <a:blip r:embed="rId2"/>
-          <a:stretch>
-            <a:fillRect/>
-          </a:stretch>
-        </p:blipFill>
-        <p:spPr>
-          <a:xfrm>
-            <a:off x="6592824" y="2606040"/>
-            <a:ext cx="502920" cy="502920"/>
-          </a:xfrm>
-          <a:prstGeom prst="rect">
-            <a:avLst/>
-          </a:prstGeom>
-        </p:spPr>
-      </p:pic>
-      <p:sp>
-        <p:nvSpPr>
-          <p:cNvPr id="11" name="Text 7"/>
-          <p:cNvSpPr/>
-          <p:nvPr/>
-        </p:nvSpPr>
-        <p:spPr>
-          <a:xfrm>
-            <a:off x="7278624" y="2560320"/>
-            <a:ext cx="3977640" cy="411480"/>
-          </a:xfrm>
-          <a:prstGeom prst="rect">
-            <a:avLst/>
-          </a:prstGeom>
-          <a:noFill/>
-          <a:ln/>
-        </p:spPr>
-        <p:txBody>
-          <a:bodyPr wrap="square" rtlCol="0" anchor="ctr"/>
-          <a:lstStyle/>
-          <a:p>
-            <a:pPr indent="0" marL="0">
-              <a:buNone/>
-            </a:pPr>
-            <a:r>
-              <a:rPr lang="en-US" sz="1600" b="1" dirty="0">
-                <a:solidFill>
-                  <a:srgbClr val="93B4FF"/>
-                </a:solidFill>
-                <a:latin typeface="Arial" pitchFamily="34" charset="0"/>
-                <a:ea typeface="Arial" pitchFamily="34" charset="-122"/>
-                <a:cs typeface="Arial" pitchFamily="34" charset="-120"/>
-              </a:rPr>
-              <a:t>NFLPA certification</a:t>
-            </a:r>
-            <a:endParaRPr lang="en-US" sz="1600" dirty="0"/>
-          </a:p>
-        </p:txBody>
-      </p:sp>
-      <p:sp>
-        <p:nvSpPr>
-          <p:cNvPr id="12" name="Text 8"/>
-          <p:cNvSpPr/>
-          <p:nvPr/>
-        </p:nvSpPr>
-        <p:spPr>
-          <a:xfrm>
-            <a:off x="7278624" y="2999232"/>
-            <a:ext cx="3977640" cy="685800"/>
-          </a:xfrm>
-          <a:prstGeom prst="rect">
-            <a:avLst/>
-          </a:prstGeom>
-          <a:noFill/>
-          <a:ln/>
-        </p:spPr>
-        <p:txBody>
-          <a:bodyPr wrap="square" rtlCol="0" anchor="t"/>
-          <a:lstStyle/>
-          <a:p>
-            <a:pPr indent="0" marL="0">
-              <a:buNone/>
-            </a:pPr>
-            <a:r>
-              <a:rPr lang="en-US" sz="1200" dirty="0">
-                <a:solidFill>
-                  <a:srgbClr val="C3CAD6"/>
-                </a:solidFill>
-                <a:latin typeface="Arial" pitchFamily="34" charset="0"/>
-                <a:ea typeface="Arial" pitchFamily="34" charset="-122"/>
-                <a:cs typeface="Arial" pitchFamily="34" charset="-120"/>
-              </a:rPr>
-              <a:t>Fund the path to certified agent status and NFL client acquisition.</a:t>
-            </a:r>
-            <a:endParaRPr lang="en-US" sz="1200" dirty="0"/>
-          </a:p>
-        </p:txBody>
-      </p:sp>
-      <p:sp>
-        <p:nvSpPr>
-          <p:cNvPr id="13" name="Shape 9"/>
-          <p:cNvSpPr/>
-          <p:nvPr/>
-        </p:nvSpPr>
-        <p:spPr>
-          <a:xfrm>
-            <a:off x="685800" y="3977640"/>
-            <a:ext cx="5257800" cy="1508760"/>
-          </a:xfrm>
-          <a:prstGeom prst="roundRect">
-            <a:avLst>
-              <a:gd name="adj" fmla="val 7273"/>
-            </a:avLst>
-          </a:prstGeom>
-          <a:solidFill>
-            <a:srgbClr val="121A2B"/>
-          </a:solidFill>
-          <a:ln/>
-        </p:spPr>
-      </p:sp>
-      <p:pic>
-        <p:nvPicPr>
-          <p:cNvPr id="14" name="Image 2" descr="preencoded.png">    </p:cNvPr>
+          <p:cNvPr id="6" name="Image 0" descr="preencoded.png"/>
           <p:cNvPicPr>
             <a:picLocks noChangeAspect="1"/>
           </p:cNvPicPr>
@@ -7833,7 +7171,7 @@
         </p:blipFill>
         <p:spPr>
           <a:xfrm>
-            <a:off x="1005840" y="4297680"/>
+            <a:off x="1005840" y="2606040"/>
             <a:ext cx="502920" cy="502920"/>
           </a:xfrm>
           <a:prstGeom prst="rect">
@@ -7843,13 +7181,13 @@
       </p:pic>
       <p:sp>
         <p:nvSpPr>
-          <p:cNvPr id="15" name="Text 10"/>
-          <p:cNvSpPr/>
-          <p:nvPr/>
-        </p:nvSpPr>
-        <p:spPr>
-          <a:xfrm>
-            <a:off x="1691640" y="4251960"/>
+          <p:cNvPr id="7" name="Text 4"/>
+          <p:cNvSpPr/>
+          <p:nvPr/>
+        </p:nvSpPr>
+        <p:spPr>
+          <a:xfrm>
+            <a:off x="1691640" y="2560320"/>
             <a:ext cx="3977640" cy="411480"/>
           </a:xfrm>
           <a:prstGeom prst="rect">
@@ -7862,7 +7200,7 @@
           <a:bodyPr wrap="square" rtlCol="0" anchor="ctr"/>
           <a:lstStyle/>
           <a:p>
-            <a:pPr indent="0" marL="0">
+            <a:pPr marL="0" indent="0">
               <a:buNone/>
             </a:pPr>
             <a:r>
@@ -7874,7 +7212,7 @@
                 <a:ea typeface="Arial" pitchFamily="34" charset="-122"/>
                 <a:cs typeface="Arial" pitchFamily="34" charset="-120"/>
               </a:rPr>
-              <a:t>NIL platform</a:t>
+              <a:t>Team &amp; network</a:t>
             </a:r>
             <a:endParaRPr lang="en-US" sz="1600" dirty="0"/>
           </a:p>
@@ -7882,13 +7220,13 @@
       </p:sp>
       <p:sp>
         <p:nvSpPr>
-          <p:cNvPr id="16" name="Text 11"/>
-          <p:cNvSpPr/>
-          <p:nvPr/>
-        </p:nvSpPr>
-        <p:spPr>
-          <a:xfrm>
-            <a:off x="1691640" y="4690872"/>
+          <p:cNvPr id="8" name="Text 5"/>
+          <p:cNvSpPr/>
+          <p:nvPr/>
+        </p:nvSpPr>
+        <p:spPr>
+          <a:xfrm>
+            <a:off x="1691640" y="2999232"/>
             <a:ext cx="3977640" cy="685800"/>
           </a:xfrm>
           <a:prstGeom prst="rect">
@@ -7901,7 +7239,7 @@
           <a:bodyPr wrap="square" rtlCol="0" anchor="t"/>
           <a:lstStyle/>
           <a:p>
-            <a:pPr indent="0" marL="0">
+            <a:pPr marL="0" indent="0">
               <a:buNone/>
             </a:pPr>
             <a:r>
@@ -7913,7 +7251,7 @@
                 <a:ea typeface="Arial" pitchFamily="34" charset="-122"/>
                 <a:cs typeface="Arial" pitchFamily="34" charset="-120"/>
               </a:rPr>
-              <a:t>Compliance, tooling, and BD behind the Before You Sign toolkit and newsletter funnel.</a:t>
+              <a:t>Representation and NIL staff plus the relationships to drive deal flow on both sides of the market.</a:t>
             </a:r>
             <a:endParaRPr lang="en-US" sz="1200" dirty="0"/>
           </a:p>
@@ -7921,13 +7259,13 @@
       </p:sp>
       <p:sp>
         <p:nvSpPr>
-          <p:cNvPr id="17" name="Shape 12"/>
-          <p:cNvSpPr/>
-          <p:nvPr/>
-        </p:nvSpPr>
-        <p:spPr>
-          <a:xfrm>
-            <a:off x="6272784" y="3977640"/>
+          <p:cNvPr id="9" name="Shape 6"/>
+          <p:cNvSpPr/>
+          <p:nvPr/>
+        </p:nvSpPr>
+        <p:spPr>
+          <a:xfrm>
+            <a:off x="6272784" y="2286000"/>
             <a:ext cx="5257800" cy="1508760"/>
           </a:xfrm>
           <a:prstGeom prst="roundRect">
@@ -7943,7 +7281,7 @@
       </p:sp>
       <p:pic>
         <p:nvPicPr>
-          <p:cNvPr id="18" name="Image 3" descr="preencoded.png">    </p:cNvPr>
+          <p:cNvPr id="10" name="Image 1" descr="preencoded.png"/>
           <p:cNvPicPr>
             <a:picLocks noChangeAspect="1"/>
           </p:cNvPicPr>
@@ -7957,7 +7295,7 @@
         </p:blipFill>
         <p:spPr>
           <a:xfrm>
-            <a:off x="6592824" y="4297680"/>
+            <a:off x="6592824" y="2606040"/>
             <a:ext cx="502920" cy="502920"/>
           </a:xfrm>
           <a:prstGeom prst="rect">
@@ -7967,13 +7305,13 @@
       </p:pic>
       <p:sp>
         <p:nvSpPr>
-          <p:cNvPr id="19" name="Text 13"/>
-          <p:cNvSpPr/>
-          <p:nvPr/>
-        </p:nvSpPr>
-        <p:spPr>
-          <a:xfrm>
-            <a:off x="7278624" y="4251960"/>
+          <p:cNvPr id="11" name="Text 7"/>
+          <p:cNvSpPr/>
+          <p:nvPr/>
+        </p:nvSpPr>
+        <p:spPr>
+          <a:xfrm>
+            <a:off x="7278624" y="2560320"/>
             <a:ext cx="3977640" cy="411480"/>
           </a:xfrm>
           <a:prstGeom prst="rect">
@@ -7986,7 +7324,7 @@
           <a:bodyPr wrap="square" rtlCol="0" anchor="ctr"/>
           <a:lstStyle/>
           <a:p>
-            <a:pPr indent="0" marL="0">
+            <a:pPr marL="0" indent="0">
               <a:buNone/>
             </a:pPr>
             <a:r>
@@ -7998,7 +7336,7 @@
                 <a:ea typeface="Arial" pitchFamily="34" charset="-122"/>
                 <a:cs typeface="Arial" pitchFamily="34" charset="-120"/>
               </a:rPr>
-              <a:t>Brand &amp; marketing</a:t>
+              <a:t>NFLPA certification</a:t>
             </a:r>
             <a:endParaRPr lang="en-US" sz="1600" dirty="0"/>
           </a:p>
@@ -8006,13 +7344,13 @@
       </p:sp>
       <p:sp>
         <p:nvSpPr>
-          <p:cNvPr id="20" name="Text 14"/>
-          <p:cNvSpPr/>
-          <p:nvPr/>
-        </p:nvSpPr>
-        <p:spPr>
-          <a:xfrm>
-            <a:off x="7278624" y="4690872"/>
+          <p:cNvPr id="12" name="Text 8"/>
+          <p:cNvSpPr/>
+          <p:nvPr/>
+        </p:nvSpPr>
+        <p:spPr>
+          <a:xfrm>
+            <a:off x="7278624" y="2999232"/>
             <a:ext cx="3977640" cy="685800"/>
           </a:xfrm>
           <a:prstGeom prst="rect">
@@ -8025,7 +7363,7 @@
           <a:bodyPr wrap="square" rtlCol="0" anchor="t"/>
           <a:lstStyle/>
           <a:p>
-            <a:pPr indent="0" marL="0">
+            <a:pPr marL="0" indent="0">
               <a:buNone/>
             </a:pPr>
             <a:r>
@@ -8037,15 +7375,37 @@
                 <a:ea typeface="Arial" pitchFamily="34" charset="-122"/>
                 <a:cs typeface="Arial" pitchFamily="34" charset="-120"/>
               </a:rPr>
-              <a:t>Establish Dexter Sports Co. as the values-aligned name in representation.</a:t>
+              <a:t>Fund the path to certified agent status and NFL client acquisition.</a:t>
             </a:r>
             <a:endParaRPr lang="en-US" sz="1200" dirty="0"/>
           </a:p>
         </p:txBody>
+      </p:sp>
+      <p:sp>
+        <p:nvSpPr>
+          <p:cNvPr id="13" name="Shape 9"/>
+          <p:cNvSpPr/>
+          <p:nvPr/>
+        </p:nvSpPr>
+        <p:spPr>
+          <a:xfrm>
+            <a:off x="685800" y="3977640"/>
+            <a:ext cx="5257800" cy="1508760"/>
+          </a:xfrm>
+          <a:prstGeom prst="roundRect">
+            <a:avLst>
+              <a:gd name="adj" fmla="val 7273"/>
+            </a:avLst>
+          </a:prstGeom>
+          <a:solidFill>
+            <a:srgbClr val="121A2B"/>
+          </a:solidFill>
+          <a:ln/>
+        </p:spPr>
       </p:sp>
       <p:pic>
         <p:nvPicPr>
-          <p:cNvPr id="21" name="Image 4" descr="preencoded.png">    </p:cNvPr>
+          <p:cNvPr id="14" name="Image 2" descr="preencoded.png"/>
           <p:cNvPicPr>
             <a:picLocks noChangeAspect="1"/>
           </p:cNvPicPr>
@@ -8059,6 +7419,232 @@
         </p:blipFill>
         <p:spPr>
           <a:xfrm>
+            <a:off x="1005840" y="4297680"/>
+            <a:ext cx="502920" cy="502920"/>
+          </a:xfrm>
+          <a:prstGeom prst="rect">
+            <a:avLst/>
+          </a:prstGeom>
+        </p:spPr>
+      </p:pic>
+      <p:sp>
+        <p:nvSpPr>
+          <p:cNvPr id="15" name="Text 10"/>
+          <p:cNvSpPr/>
+          <p:nvPr/>
+        </p:nvSpPr>
+        <p:spPr>
+          <a:xfrm>
+            <a:off x="1691640" y="4251960"/>
+            <a:ext cx="3977640" cy="411480"/>
+          </a:xfrm>
+          <a:prstGeom prst="rect">
+            <a:avLst/>
+          </a:prstGeom>
+          <a:noFill/>
+          <a:ln/>
+        </p:spPr>
+        <p:txBody>
+          <a:bodyPr wrap="square" rtlCol="0" anchor="ctr"/>
+          <a:lstStyle/>
+          <a:p>
+            <a:pPr marL="0" indent="0">
+              <a:buNone/>
+            </a:pPr>
+            <a:r>
+              <a:rPr lang="en-US" sz="1600" b="1" dirty="0">
+                <a:solidFill>
+                  <a:srgbClr val="93B4FF"/>
+                </a:solidFill>
+                <a:latin typeface="Arial" pitchFamily="34" charset="0"/>
+                <a:ea typeface="Arial" pitchFamily="34" charset="-122"/>
+                <a:cs typeface="Arial" pitchFamily="34" charset="-120"/>
+              </a:rPr>
+              <a:t>NIL platform</a:t>
+            </a:r>
+            <a:endParaRPr lang="en-US" sz="1600" dirty="0"/>
+          </a:p>
+        </p:txBody>
+      </p:sp>
+      <p:sp>
+        <p:nvSpPr>
+          <p:cNvPr id="16" name="Text 11"/>
+          <p:cNvSpPr/>
+          <p:nvPr/>
+        </p:nvSpPr>
+        <p:spPr>
+          <a:xfrm>
+            <a:off x="1691640" y="4690872"/>
+            <a:ext cx="3977640" cy="685800"/>
+          </a:xfrm>
+          <a:prstGeom prst="rect">
+            <a:avLst/>
+          </a:prstGeom>
+          <a:noFill/>
+          <a:ln/>
+        </p:spPr>
+        <p:txBody>
+          <a:bodyPr wrap="square" rtlCol="0" anchor="t"/>
+          <a:lstStyle/>
+          <a:p>
+            <a:pPr marL="0" indent="0">
+              <a:buNone/>
+            </a:pPr>
+            <a:r>
+              <a:rPr lang="en-US" sz="1200" dirty="0">
+                <a:solidFill>
+                  <a:srgbClr val="C3CAD6"/>
+                </a:solidFill>
+                <a:latin typeface="Arial" pitchFamily="34" charset="0"/>
+                <a:ea typeface="Arial" pitchFamily="34" charset="-122"/>
+                <a:cs typeface="Arial" pitchFamily="34" charset="-120"/>
+              </a:rPr>
+              <a:t>Compliance, tooling, and BD behind the Before You Sign toolkit and newsletter funnel.</a:t>
+            </a:r>
+            <a:endParaRPr lang="en-US" sz="1200" dirty="0"/>
+          </a:p>
+        </p:txBody>
+      </p:sp>
+      <p:sp>
+        <p:nvSpPr>
+          <p:cNvPr id="17" name="Shape 12"/>
+          <p:cNvSpPr/>
+          <p:nvPr/>
+        </p:nvSpPr>
+        <p:spPr>
+          <a:xfrm>
+            <a:off x="6272784" y="3977640"/>
+            <a:ext cx="5257800" cy="1508760"/>
+          </a:xfrm>
+          <a:prstGeom prst="roundRect">
+            <a:avLst>
+              <a:gd name="adj" fmla="val 7273"/>
+            </a:avLst>
+          </a:prstGeom>
+          <a:solidFill>
+            <a:srgbClr val="121A2B"/>
+          </a:solidFill>
+          <a:ln/>
+        </p:spPr>
+      </p:sp>
+      <p:pic>
+        <p:nvPicPr>
+          <p:cNvPr id="18" name="Image 3" descr="preencoded.png"/>
+          <p:cNvPicPr>
+            <a:picLocks noChangeAspect="1"/>
+          </p:cNvPicPr>
+          <p:nvPr/>
+        </p:nvPicPr>
+        <p:blipFill>
+          <a:blip r:embed="rId6"/>
+          <a:stretch>
+            <a:fillRect/>
+          </a:stretch>
+        </p:blipFill>
+        <p:spPr>
+          <a:xfrm>
+            <a:off x="6592824" y="4297680"/>
+            <a:ext cx="502920" cy="502920"/>
+          </a:xfrm>
+          <a:prstGeom prst="rect">
+            <a:avLst/>
+          </a:prstGeom>
+        </p:spPr>
+      </p:pic>
+      <p:sp>
+        <p:nvSpPr>
+          <p:cNvPr id="19" name="Text 13"/>
+          <p:cNvSpPr/>
+          <p:nvPr/>
+        </p:nvSpPr>
+        <p:spPr>
+          <a:xfrm>
+            <a:off x="7278624" y="4251960"/>
+            <a:ext cx="3977640" cy="411480"/>
+          </a:xfrm>
+          <a:prstGeom prst="rect">
+            <a:avLst/>
+          </a:prstGeom>
+          <a:noFill/>
+          <a:ln/>
+        </p:spPr>
+        <p:txBody>
+          <a:bodyPr wrap="square" rtlCol="0" anchor="ctr"/>
+          <a:lstStyle/>
+          <a:p>
+            <a:pPr marL="0" indent="0">
+              <a:buNone/>
+            </a:pPr>
+            <a:r>
+              <a:rPr lang="en-US" sz="1600" b="1" dirty="0">
+                <a:solidFill>
+                  <a:srgbClr val="93B4FF"/>
+                </a:solidFill>
+                <a:latin typeface="Arial" pitchFamily="34" charset="0"/>
+                <a:ea typeface="Arial" pitchFamily="34" charset="-122"/>
+                <a:cs typeface="Arial" pitchFamily="34" charset="-120"/>
+              </a:rPr>
+              <a:t>Brand &amp; marketing</a:t>
+            </a:r>
+            <a:endParaRPr lang="en-US" sz="1600" dirty="0"/>
+          </a:p>
+        </p:txBody>
+      </p:sp>
+      <p:sp>
+        <p:nvSpPr>
+          <p:cNvPr id="20" name="Text 14"/>
+          <p:cNvSpPr/>
+          <p:nvPr/>
+        </p:nvSpPr>
+        <p:spPr>
+          <a:xfrm>
+            <a:off x="7278624" y="4690872"/>
+            <a:ext cx="3977640" cy="685800"/>
+          </a:xfrm>
+          <a:prstGeom prst="rect">
+            <a:avLst/>
+          </a:prstGeom>
+          <a:noFill/>
+          <a:ln/>
+        </p:spPr>
+        <p:txBody>
+          <a:bodyPr wrap="square" rtlCol="0" anchor="t"/>
+          <a:lstStyle/>
+          <a:p>
+            <a:pPr marL="0" indent="0">
+              <a:buNone/>
+            </a:pPr>
+            <a:r>
+              <a:rPr lang="en-US" sz="1200" dirty="0">
+                <a:solidFill>
+                  <a:srgbClr val="C3CAD6"/>
+                </a:solidFill>
+                <a:latin typeface="Arial" pitchFamily="34" charset="0"/>
+                <a:ea typeface="Arial" pitchFamily="34" charset="-122"/>
+                <a:cs typeface="Arial" pitchFamily="34" charset="-120"/>
+              </a:rPr>
+              <a:t>Establish Dexter Sports Co. as the values-aligned name in representation.</a:t>
+            </a:r>
+            <a:endParaRPr lang="en-US" sz="1200" dirty="0"/>
+          </a:p>
+        </p:txBody>
+      </p:sp>
+      <p:pic>
+        <p:nvPicPr>
+          <p:cNvPr id="21" name="Image 4" descr="preencoded.png"/>
+          <p:cNvPicPr>
+            <a:picLocks noChangeAspect="1"/>
+          </p:cNvPicPr>
+          <p:nvPr/>
+        </p:nvPicPr>
+        <p:blipFill>
+          <a:blip r:embed="rId7"/>
+          <a:stretch>
+            <a:fillRect/>
+          </a:stretch>
+        </p:blipFill>
+        <p:spPr>
+          <a:xfrm>
             <a:off x="685800" y="5989320"/>
             <a:ext cx="292608" cy="292608"/>
           </a:xfrm>
@@ -8088,7 +7674,7 @@
           <a:bodyPr wrap="square" rtlCol="0" anchor="ctr"/>
           <a:lstStyle/>
           <a:p>
-            <a:pPr indent="0" marL="0">
+            <a:pPr marL="0" indent="0">
               <a:buNone/>
             </a:pPr>
             <a:r>
@@ -8127,7 +7713,7 @@
           <a:bodyPr wrap="square" rtlCol="0" anchor="ctr"/>
           <a:lstStyle/>
           <a:p>
-            <a:pPr algn="r" indent="0" marL="0">
+            <a:pPr marL="0" indent="0" algn="r">
               <a:buNone/>
             </a:pPr>
             <a:r>
@@ -8166,11 +7752,11 @@
           <a:bodyPr wrap="square" rtlCol="0" anchor="ctr"/>
           <a:lstStyle/>
           <a:p>
-            <a:pPr algn="r" indent="0" marL="0">
-              <a:buNone/>
-            </a:pPr>
-            <a:r>
-              <a:rPr lang="en-US" sz="750" b="1" spc="100" kern="0" dirty="0">
+            <a:pPr marL="0" indent="0" algn="r">
+              <a:buNone/>
+            </a:pPr>
+            <a:r>
+              <a:rPr lang="en-US" sz="750" b="1" kern="0" spc="100" dirty="0">
                 <a:solidFill>
                   <a:srgbClr val="D4A62A"/>
                 </a:solidFill>
@@ -8200,6 +7786,7 @@
         <a:solidFill>
           <a:srgbClr val="FFFFFF"/>
         </a:solidFill>
+        <a:effectLst/>
       </p:bgPr>
     </p:bg>
     <p:spTree>
@@ -8237,7 +7824,7 @@
           <a:bodyPr wrap="square" rtlCol="0" anchor="ctr"/>
           <a:lstStyle/>
           <a:p>
-            <a:pPr indent="0" marL="0">
+            <a:pPr marL="0" indent="0">
               <a:buNone/>
             </a:pPr>
             <a:r>
@@ -8251,11 +7838,8 @@
               </a:rPr>
               <a:t>● </a:t>
             </a:r>
-            <a:pPr indent="0" marL="0">
-              <a:buNone/>
-            </a:pPr>
-            <a:r>
-              <a:rPr lang="en-US" sz="1100" b="1" spc="300" kern="0" dirty="0">
+            <a:r>
+              <a:rPr lang="en-US" sz="1100" b="1" kern="0" spc="300" dirty="0">
                 <a:solidFill>
                   <a:srgbClr val="2563EB"/>
                 </a:solidFill>
@@ -8290,7 +7874,7 @@
           <a:bodyPr wrap="square" rtlCol="0" anchor="ctr"/>
           <a:lstStyle/>
           <a:p>
-            <a:pPr indent="0" marL="0">
+            <a:pPr marL="0" indent="0">
               <a:buNone/>
             </a:pPr>
             <a:r>
@@ -8304,9 +7888,6 @@
               </a:rPr>
               <a:t>The coaches the big agencies </a:t>
             </a:r>
-            <a:pPr indent="0" marL="0">
-              <a:buNone/>
-            </a:pPr>
             <a:r>
               <a:rPr lang="en-US" sz="2900" i="1" dirty="0">
                 <a:solidFill>
@@ -8346,273 +7927,7 @@
       </p:sp>
       <p:pic>
         <p:nvPicPr>
-          <p:cNvPr id="5" name="Image 0" descr="preencoded.png">    </p:cNvPr>
-          <p:cNvPicPr>
-            <a:picLocks noChangeAspect="1"/>
-          </p:cNvPicPr>
-          <p:nvPr/>
-        </p:nvPicPr>
-        <p:blipFill>
-          <a:blip r:embed="rId1"/>
-          <a:stretch>
-            <a:fillRect/>
-          </a:stretch>
-        </p:blipFill>
-        <p:spPr>
-          <a:xfrm>
-            <a:off x="1051560" y="2331720"/>
-            <a:ext cx="548640" cy="548640"/>
-          </a:xfrm>
-          <a:prstGeom prst="rect">
-            <a:avLst/>
-          </a:prstGeom>
-        </p:spPr>
-      </p:pic>
-      <p:sp>
-        <p:nvSpPr>
-          <p:cNvPr id="6" name="Text 3"/>
-          <p:cNvSpPr/>
-          <p:nvPr/>
-        </p:nvSpPr>
-        <p:spPr>
-          <a:xfrm>
-            <a:off x="1005840" y="3063240"/>
-            <a:ext cx="3108960" cy="731520"/>
-          </a:xfrm>
-          <a:prstGeom prst="rect">
-            <a:avLst/>
-          </a:prstGeom>
-          <a:noFill/>
-          <a:ln/>
-        </p:spPr>
-        <p:txBody>
-          <a:bodyPr wrap="square" rtlCol="0" anchor="ctr"/>
-          <a:lstStyle/>
-          <a:p>
-            <a:pPr indent="0" marL="0">
-              <a:buNone/>
-            </a:pPr>
-            <a:r>
-              <a:rPr lang="en-US" sz="3300" b="1" dirty="0">
-                <a:solidFill>
-                  <a:srgbClr val="FFFFFF"/>
-                </a:solidFill>
-                <a:latin typeface="Arial" pitchFamily="34" charset="0"/>
-                <a:ea typeface="Arial" pitchFamily="34" charset="-122"/>
-                <a:cs typeface="Arial" pitchFamily="34" charset="-120"/>
-              </a:rPr>
-              <a:t>$500K–$5M+</a:t>
-            </a:r>
-            <a:endParaRPr lang="en-US" sz="3300" dirty="0"/>
-          </a:p>
-        </p:txBody>
-      </p:sp>
-      <p:sp>
-        <p:nvSpPr>
-          <p:cNvPr id="7" name="Text 4"/>
-          <p:cNvSpPr/>
-          <p:nvPr/>
-        </p:nvSpPr>
-        <p:spPr>
-          <a:xfrm>
-            <a:off x="1005840" y="3840480"/>
-            <a:ext cx="3017520" cy="731520"/>
-          </a:xfrm>
-          <a:prstGeom prst="rect">
-            <a:avLst/>
-          </a:prstGeom>
-          <a:noFill/>
-          <a:ln/>
-        </p:spPr>
-        <p:txBody>
-          <a:bodyPr wrap="square" rtlCol="0" anchor="t"/>
-          <a:lstStyle/>
-          <a:p>
-            <a:pPr indent="0" marL="0">
-              <a:buNone/>
-            </a:pPr>
-            <a:r>
-              <a:rPr lang="en-US" sz="1300" dirty="0">
-                <a:solidFill>
-                  <a:srgbClr val="93B4FF"/>
-                </a:solidFill>
-                <a:latin typeface="Arial" pitchFamily="34" charset="0"/>
-                <a:ea typeface="Arial" pitchFamily="34" charset="-122"/>
-                <a:cs typeface="Arial" pitchFamily="34" charset="-120"/>
-              </a:rPr>
-              <a:t>Typical collegiate head-coaching salary range.</a:t>
-            </a:r>
-            <a:endParaRPr lang="en-US" sz="1300" dirty="0"/>
-          </a:p>
-        </p:txBody>
-      </p:sp>
-      <p:sp>
-        <p:nvSpPr>
-          <p:cNvPr id="8" name="Text 5"/>
-          <p:cNvSpPr/>
-          <p:nvPr/>
-        </p:nvSpPr>
-        <p:spPr>
-          <a:xfrm>
-            <a:off x="1005840" y="4892040"/>
-            <a:ext cx="3017520" cy="914400"/>
-          </a:xfrm>
-          <a:prstGeom prst="rect">
-            <a:avLst/>
-          </a:prstGeom>
-          <a:noFill/>
-          <a:ln/>
-        </p:spPr>
-        <p:txBody>
-          <a:bodyPr wrap="square" rtlCol="0" anchor="t"/>
-          <a:lstStyle/>
-          <a:p>
-            <a:pPr indent="0" marL="0">
-              <a:buNone/>
-            </a:pPr>
-            <a:r>
-              <a:rPr lang="en-US" sz="1250" i="1" dirty="0">
-                <a:solidFill>
-                  <a:srgbClr val="D4A62A"/>
-                </a:solidFill>
-                <a:latin typeface="Georgia" pitchFamily="34" charset="0"/>
-                <a:ea typeface="Georgia" pitchFamily="34" charset="-122"/>
-                <a:cs typeface="Georgia" pitchFamily="34" charset="-120"/>
-              </a:rPr>
-              <a:t>A single placement at up to 3% is a meaningful, repeatable fee.</a:t>
-            </a:r>
-            <a:endParaRPr lang="en-US" sz="1250" dirty="0"/>
-          </a:p>
-        </p:txBody>
-      </p:sp>
-      <p:pic>
-        <p:nvPicPr>
-          <p:cNvPr id="9" name="Image 1" descr="preencoded.png">    </p:cNvPr>
-          <p:cNvPicPr>
-            <a:picLocks noChangeAspect="1"/>
-          </p:cNvPicPr>
-          <p:nvPr/>
-        </p:nvPicPr>
-        <p:blipFill>
-          <a:blip r:embed="rId2"/>
-          <a:stretch>
-            <a:fillRect/>
-          </a:stretch>
-        </p:blipFill>
-        <p:spPr>
-          <a:xfrm>
-            <a:off x="4709160" y="2011680"/>
-            <a:ext cx="475488" cy="475488"/>
-          </a:xfrm>
-          <a:prstGeom prst="rect">
-            <a:avLst/>
-          </a:prstGeom>
-        </p:spPr>
-      </p:pic>
-      <p:sp>
-        <p:nvSpPr>
-          <p:cNvPr id="10" name="Text 6"/>
-          <p:cNvSpPr/>
-          <p:nvPr/>
-        </p:nvSpPr>
-        <p:spPr>
-          <a:xfrm>
-            <a:off x="5440680" y="1947672"/>
-            <a:ext cx="6035040" cy="411480"/>
-          </a:xfrm>
-          <a:prstGeom prst="rect">
-            <a:avLst/>
-          </a:prstGeom>
-          <a:noFill/>
-          <a:ln/>
-        </p:spPr>
-        <p:txBody>
-          <a:bodyPr wrap="square" rtlCol="0" anchor="ctr"/>
-          <a:lstStyle/>
-          <a:p>
-            <a:pPr indent="0" marL="0">
-              <a:buNone/>
-            </a:pPr>
-            <a:r>
-              <a:rPr lang="en-US" sz="1650" b="1" dirty="0">
-                <a:solidFill>
-                  <a:srgbClr val="141A24"/>
-                </a:solidFill>
-                <a:latin typeface="Arial" pitchFamily="34" charset="0"/>
-                <a:ea typeface="Arial" pitchFamily="34" charset="-122"/>
-                <a:cs typeface="Arial" pitchFamily="34" charset="-120"/>
-              </a:rPr>
-              <a:t>Female coaches are underrepresented</a:t>
-            </a:r>
-            <a:endParaRPr lang="en-US" sz="1650" dirty="0"/>
-          </a:p>
-        </p:txBody>
-      </p:sp>
-      <p:sp>
-        <p:nvSpPr>
-          <p:cNvPr id="11" name="Text 7"/>
-          <p:cNvSpPr/>
-          <p:nvPr/>
-        </p:nvSpPr>
-        <p:spPr>
-          <a:xfrm>
-            <a:off x="5440680" y="2377440"/>
-            <a:ext cx="5989320" cy="822960"/>
-          </a:xfrm>
-          <a:prstGeom prst="rect">
-            <a:avLst/>
-          </a:prstGeom>
-          <a:noFill/>
-          <a:ln/>
-        </p:spPr>
-        <p:txBody>
-          <a:bodyPr wrap="square" rtlCol="0" anchor="t"/>
-          <a:lstStyle/>
-          <a:p>
-            <a:pPr indent="0" marL="0">
-              <a:buNone/>
-            </a:pPr>
-            <a:r>
-              <a:rPr lang="en-US" sz="1200" dirty="0">
-                <a:solidFill>
-                  <a:srgbClr val="141A24"/>
-                </a:solidFill>
-                <a:latin typeface="Arial" pitchFamily="34" charset="0"/>
-                <a:ea typeface="Arial" pitchFamily="34" charset="-122"/>
-                <a:cs typeface="Arial" pitchFamily="34" charset="-120"/>
-              </a:rPr>
-              <a:t>Women fill the assistant pipeline but rarely reach the top jobs. Dedicated, outcomes-focused representation is scarce.</a:t>
-            </a:r>
-            <a:endParaRPr lang="en-US" sz="1200" dirty="0"/>
-          </a:p>
-        </p:txBody>
-      </p:sp>
-      <p:sp>
-        <p:nvSpPr>
-          <p:cNvPr id="12" name="Shape 8"/>
-          <p:cNvSpPr/>
-          <p:nvPr/>
-        </p:nvSpPr>
-        <p:spPr>
-          <a:xfrm>
-            <a:off x="4709160" y="3172968"/>
-            <a:ext cx="6766560" cy="0"/>
-          </a:xfrm>
-          <a:prstGeom prst="line">
-            <a:avLst/>
-          </a:prstGeom>
-          <a:noFill/>
-          <a:ln w="12700">
-            <a:solidFill>
-              <a:srgbClr val="E4E7EC"/>
-            </a:solidFill>
-            <a:prstDash val="solid"/>
-          </a:ln>
-        </p:spPr>
-      </p:sp>
-      <p:pic>
-        <p:nvPicPr>
-          <p:cNvPr id="13" name="Image 2" descr="preencoded.png">    </p:cNvPr>
+          <p:cNvPr id="5" name="Image 0" descr="preencoded.png"/>
           <p:cNvPicPr>
             <a:picLocks noChangeAspect="1"/>
           </p:cNvPicPr>
@@ -8626,8 +7941,8 @@
         </p:blipFill>
         <p:spPr>
           <a:xfrm>
-            <a:off x="4709160" y="3383280"/>
-            <a:ext cx="475488" cy="475488"/>
+            <a:off x="1051560" y="2331720"/>
+            <a:ext cx="548640" cy="548640"/>
           </a:xfrm>
           <a:prstGeom prst="rect">
             <a:avLst/>
@@ -8636,53 +7951,53 @@
       </p:pic>
       <p:sp>
         <p:nvSpPr>
-          <p:cNvPr id="14" name="Text 9"/>
-          <p:cNvSpPr/>
-          <p:nvPr/>
-        </p:nvSpPr>
-        <p:spPr>
-          <a:xfrm>
-            <a:off x="5440680" y="3319272"/>
-            <a:ext cx="6035040" cy="411480"/>
-          </a:xfrm>
-          <a:prstGeom prst="rect">
-            <a:avLst/>
-          </a:prstGeom>
-          <a:noFill/>
-          <a:ln/>
-        </p:spPr>
-        <p:txBody>
-          <a:bodyPr wrap="square" rtlCol="0" anchor="ctr"/>
-          <a:lstStyle/>
-          <a:p>
-            <a:pPr indent="0" marL="0">
-              <a:buNone/>
-            </a:pPr>
-            <a:r>
-              <a:rPr lang="en-US" sz="1650" b="1" dirty="0">
-                <a:solidFill>
-                  <a:srgbClr val="141A24"/>
-                </a:solidFill>
-                <a:latin typeface="Arial" pitchFamily="34" charset="0"/>
-                <a:ea typeface="Arial" pitchFamily="34" charset="-122"/>
-                <a:cs typeface="Arial" pitchFamily="34" charset="-120"/>
-              </a:rPr>
-              <a:t>NIL has reached high school</a:t>
-            </a:r>
-            <a:endParaRPr lang="en-US" sz="1650" dirty="0"/>
-          </a:p>
-        </p:txBody>
-      </p:sp>
-      <p:sp>
-        <p:nvSpPr>
-          <p:cNvPr id="15" name="Text 10"/>
-          <p:cNvSpPr/>
-          <p:nvPr/>
-        </p:nvSpPr>
-        <p:spPr>
-          <a:xfrm>
-            <a:off x="5440680" y="3749040"/>
-            <a:ext cx="5989320" cy="822960"/>
+          <p:cNvPr id="6" name="Text 3"/>
+          <p:cNvSpPr/>
+          <p:nvPr/>
+        </p:nvSpPr>
+        <p:spPr>
+          <a:xfrm>
+            <a:off x="1005840" y="3063240"/>
+            <a:ext cx="3108960" cy="731520"/>
+          </a:xfrm>
+          <a:prstGeom prst="rect">
+            <a:avLst/>
+          </a:prstGeom>
+          <a:noFill/>
+          <a:ln/>
+        </p:spPr>
+        <p:txBody>
+          <a:bodyPr wrap="square" rtlCol="0" anchor="ctr"/>
+          <a:lstStyle/>
+          <a:p>
+            <a:pPr marL="0" indent="0">
+              <a:buNone/>
+            </a:pPr>
+            <a:r>
+              <a:rPr lang="en-US" sz="3300" b="1" dirty="0">
+                <a:solidFill>
+                  <a:srgbClr val="FFFFFF"/>
+                </a:solidFill>
+                <a:latin typeface="Arial" pitchFamily="34" charset="0"/>
+                <a:ea typeface="Arial" pitchFamily="34" charset="-122"/>
+                <a:cs typeface="Arial" pitchFamily="34" charset="-120"/>
+              </a:rPr>
+              <a:t>$500K–$5M+</a:t>
+            </a:r>
+            <a:endParaRPr lang="en-US" sz="3300" dirty="0"/>
+          </a:p>
+        </p:txBody>
+      </p:sp>
+      <p:sp>
+        <p:nvSpPr>
+          <p:cNvPr id="7" name="Text 4"/>
+          <p:cNvSpPr/>
+          <p:nvPr/>
+        </p:nvSpPr>
+        <p:spPr>
+          <a:xfrm>
+            <a:off x="1005840" y="3840480"/>
+            <a:ext cx="3017520" cy="731520"/>
           </a:xfrm>
           <a:prstGeom prst="rect">
             <a:avLst/>
@@ -8694,50 +8009,66 @@
           <a:bodyPr wrap="square" rtlCol="0" anchor="t"/>
           <a:lstStyle/>
           <a:p>
-            <a:pPr indent="0" marL="0">
-              <a:buNone/>
-            </a:pPr>
-            <a:r>
-              <a:rPr lang="en-US" sz="1200" dirty="0">
-                <a:solidFill>
-                  <a:srgbClr val="141A24"/>
-                </a:solidFill>
-                <a:latin typeface="Arial" pitchFamily="34" charset="0"/>
-                <a:ea typeface="Arial" pitchFamily="34" charset="-122"/>
-                <a:cs typeface="Arial" pitchFamily="34" charset="-120"/>
-              </a:rPr>
-              <a:t>North and South Carolina now permit HS NIL — a first-mover market for athletes and families navigating offers.</a:t>
-            </a:r>
-            <a:endParaRPr lang="en-US" sz="1200" dirty="0"/>
-          </a:p>
-        </p:txBody>
-      </p:sp>
-      <p:sp>
-        <p:nvSpPr>
-          <p:cNvPr id="16" name="Shape 11"/>
-          <p:cNvSpPr/>
-          <p:nvPr/>
-        </p:nvSpPr>
-        <p:spPr>
-          <a:xfrm>
-            <a:off x="4709160" y="4544568"/>
-            <a:ext cx="6766560" cy="0"/>
-          </a:xfrm>
-          <a:prstGeom prst="line">
-            <a:avLst/>
-          </a:prstGeom>
-          <a:noFill/>
-          <a:ln w="12700">
-            <a:solidFill>
-              <a:srgbClr val="E4E7EC"/>
-            </a:solidFill>
-            <a:prstDash val="solid"/>
-          </a:ln>
-        </p:spPr>
+            <a:pPr marL="0" indent="0">
+              <a:buNone/>
+            </a:pPr>
+            <a:r>
+              <a:rPr lang="en-US" sz="1300" dirty="0">
+                <a:solidFill>
+                  <a:srgbClr val="93B4FF"/>
+                </a:solidFill>
+                <a:latin typeface="Arial" pitchFamily="34" charset="0"/>
+                <a:ea typeface="Arial" pitchFamily="34" charset="-122"/>
+                <a:cs typeface="Arial" pitchFamily="34" charset="-120"/>
+              </a:rPr>
+              <a:t>Typical collegiate head-coaching salary range.</a:t>
+            </a:r>
+            <a:endParaRPr lang="en-US" sz="1300" dirty="0"/>
+          </a:p>
+        </p:txBody>
+      </p:sp>
+      <p:sp>
+        <p:nvSpPr>
+          <p:cNvPr id="8" name="Text 5"/>
+          <p:cNvSpPr/>
+          <p:nvPr/>
+        </p:nvSpPr>
+        <p:spPr>
+          <a:xfrm>
+            <a:off x="1005840" y="4892040"/>
+            <a:ext cx="3017520" cy="914400"/>
+          </a:xfrm>
+          <a:prstGeom prst="rect">
+            <a:avLst/>
+          </a:prstGeom>
+          <a:noFill/>
+          <a:ln/>
+        </p:spPr>
+        <p:txBody>
+          <a:bodyPr wrap="square" rtlCol="0" anchor="t"/>
+          <a:lstStyle/>
+          <a:p>
+            <a:pPr marL="0" indent="0">
+              <a:buNone/>
+            </a:pPr>
+            <a:r>
+              <a:rPr lang="en-US" sz="1250" i="1" dirty="0">
+                <a:solidFill>
+                  <a:srgbClr val="D4A62A"/>
+                </a:solidFill>
+                <a:latin typeface="Georgia" pitchFamily="34" charset="0"/>
+                <a:ea typeface="Georgia" pitchFamily="34" charset="-122"/>
+                <a:cs typeface="Georgia" pitchFamily="34" charset="-120"/>
+              </a:rPr>
+              <a:t>A single placement at up to 3% is a meaningful, repeatable fee.</a:t>
+            </a:r>
+            <a:endParaRPr lang="en-US" sz="1250" dirty="0"/>
+          </a:p>
+        </p:txBody>
       </p:sp>
       <p:pic>
         <p:nvPicPr>
-          <p:cNvPr id="17" name="Image 3" descr="preencoded.png">    </p:cNvPr>
+          <p:cNvPr id="9" name="Image 1" descr="preencoded.png"/>
           <p:cNvPicPr>
             <a:picLocks noChangeAspect="1"/>
           </p:cNvPicPr>
@@ -8751,6 +8082,256 @@
         </p:blipFill>
         <p:spPr>
           <a:xfrm>
+            <a:off x="4709160" y="2011680"/>
+            <a:ext cx="475488" cy="475488"/>
+          </a:xfrm>
+          <a:prstGeom prst="rect">
+            <a:avLst/>
+          </a:prstGeom>
+        </p:spPr>
+      </p:pic>
+      <p:sp>
+        <p:nvSpPr>
+          <p:cNvPr id="10" name="Text 6"/>
+          <p:cNvSpPr/>
+          <p:nvPr/>
+        </p:nvSpPr>
+        <p:spPr>
+          <a:xfrm>
+            <a:off x="5440680" y="1947672"/>
+            <a:ext cx="6035040" cy="411480"/>
+          </a:xfrm>
+          <a:prstGeom prst="rect">
+            <a:avLst/>
+          </a:prstGeom>
+          <a:noFill/>
+          <a:ln/>
+        </p:spPr>
+        <p:txBody>
+          <a:bodyPr wrap="square" rtlCol="0" anchor="ctr"/>
+          <a:lstStyle/>
+          <a:p>
+            <a:pPr marL="0" indent="0">
+              <a:buNone/>
+            </a:pPr>
+            <a:r>
+              <a:rPr lang="en-US" sz="1650" b="1" dirty="0">
+                <a:solidFill>
+                  <a:srgbClr val="141A24"/>
+                </a:solidFill>
+                <a:latin typeface="Arial" pitchFamily="34" charset="0"/>
+                <a:ea typeface="Arial" pitchFamily="34" charset="-122"/>
+                <a:cs typeface="Arial" pitchFamily="34" charset="-120"/>
+              </a:rPr>
+              <a:t>Female coaches are underrepresented</a:t>
+            </a:r>
+            <a:endParaRPr lang="en-US" sz="1650" dirty="0"/>
+          </a:p>
+        </p:txBody>
+      </p:sp>
+      <p:sp>
+        <p:nvSpPr>
+          <p:cNvPr id="11" name="Text 7"/>
+          <p:cNvSpPr/>
+          <p:nvPr/>
+        </p:nvSpPr>
+        <p:spPr>
+          <a:xfrm>
+            <a:off x="5440680" y="2377440"/>
+            <a:ext cx="5989320" cy="822960"/>
+          </a:xfrm>
+          <a:prstGeom prst="rect">
+            <a:avLst/>
+          </a:prstGeom>
+          <a:noFill/>
+          <a:ln/>
+        </p:spPr>
+        <p:txBody>
+          <a:bodyPr wrap="square" rtlCol="0" anchor="t"/>
+          <a:lstStyle/>
+          <a:p>
+            <a:pPr marL="0" indent="0">
+              <a:buNone/>
+            </a:pPr>
+            <a:r>
+              <a:rPr lang="en-US" sz="1200" dirty="0">
+                <a:solidFill>
+                  <a:srgbClr val="141A24"/>
+                </a:solidFill>
+                <a:latin typeface="Arial" pitchFamily="34" charset="0"/>
+                <a:ea typeface="Arial" pitchFamily="34" charset="-122"/>
+                <a:cs typeface="Arial" pitchFamily="34" charset="-120"/>
+              </a:rPr>
+              <a:t>Women fill the assistant pipeline but rarely reach the top jobs. Dedicated, outcomes-focused representation is scarce.</a:t>
+            </a:r>
+            <a:endParaRPr lang="en-US" sz="1200" dirty="0"/>
+          </a:p>
+        </p:txBody>
+      </p:sp>
+      <p:sp>
+        <p:nvSpPr>
+          <p:cNvPr id="12" name="Shape 8"/>
+          <p:cNvSpPr/>
+          <p:nvPr/>
+        </p:nvSpPr>
+        <p:spPr>
+          <a:xfrm>
+            <a:off x="4709160" y="3172968"/>
+            <a:ext cx="6766560" cy="0"/>
+          </a:xfrm>
+          <a:prstGeom prst="line">
+            <a:avLst/>
+          </a:prstGeom>
+          <a:noFill/>
+          <a:ln w="12700">
+            <a:solidFill>
+              <a:srgbClr val="E4E7EC"/>
+            </a:solidFill>
+            <a:prstDash val="solid"/>
+          </a:ln>
+        </p:spPr>
+      </p:sp>
+      <p:pic>
+        <p:nvPicPr>
+          <p:cNvPr id="13" name="Image 2" descr="preencoded.png"/>
+          <p:cNvPicPr>
+            <a:picLocks noChangeAspect="1"/>
+          </p:cNvPicPr>
+          <p:nvPr/>
+        </p:nvPicPr>
+        <p:blipFill>
+          <a:blip r:embed="rId5"/>
+          <a:stretch>
+            <a:fillRect/>
+          </a:stretch>
+        </p:blipFill>
+        <p:spPr>
+          <a:xfrm>
+            <a:off x="4709160" y="3383280"/>
+            <a:ext cx="475488" cy="475488"/>
+          </a:xfrm>
+          <a:prstGeom prst="rect">
+            <a:avLst/>
+          </a:prstGeom>
+        </p:spPr>
+      </p:pic>
+      <p:sp>
+        <p:nvSpPr>
+          <p:cNvPr id="14" name="Text 9"/>
+          <p:cNvSpPr/>
+          <p:nvPr/>
+        </p:nvSpPr>
+        <p:spPr>
+          <a:xfrm>
+            <a:off x="5440680" y="3319272"/>
+            <a:ext cx="6035040" cy="411480"/>
+          </a:xfrm>
+          <a:prstGeom prst="rect">
+            <a:avLst/>
+          </a:prstGeom>
+          <a:noFill/>
+          <a:ln/>
+        </p:spPr>
+        <p:txBody>
+          <a:bodyPr wrap="square" rtlCol="0" anchor="ctr"/>
+          <a:lstStyle/>
+          <a:p>
+            <a:pPr marL="0" indent="0">
+              <a:buNone/>
+            </a:pPr>
+            <a:r>
+              <a:rPr lang="en-US" sz="1650" b="1" dirty="0">
+                <a:solidFill>
+                  <a:srgbClr val="141A24"/>
+                </a:solidFill>
+                <a:latin typeface="Arial" pitchFamily="34" charset="0"/>
+                <a:ea typeface="Arial" pitchFamily="34" charset="-122"/>
+                <a:cs typeface="Arial" pitchFamily="34" charset="-120"/>
+              </a:rPr>
+              <a:t>NIL has reached high school</a:t>
+            </a:r>
+            <a:endParaRPr lang="en-US" sz="1650" dirty="0"/>
+          </a:p>
+        </p:txBody>
+      </p:sp>
+      <p:sp>
+        <p:nvSpPr>
+          <p:cNvPr id="15" name="Text 10"/>
+          <p:cNvSpPr/>
+          <p:nvPr/>
+        </p:nvSpPr>
+        <p:spPr>
+          <a:xfrm>
+            <a:off x="5440680" y="3749040"/>
+            <a:ext cx="5989320" cy="822960"/>
+          </a:xfrm>
+          <a:prstGeom prst="rect">
+            <a:avLst/>
+          </a:prstGeom>
+          <a:noFill/>
+          <a:ln/>
+        </p:spPr>
+        <p:txBody>
+          <a:bodyPr wrap="square" rtlCol="0" anchor="t"/>
+          <a:lstStyle/>
+          <a:p>
+            <a:pPr marL="0" indent="0">
+              <a:buNone/>
+            </a:pPr>
+            <a:r>
+              <a:rPr lang="en-US" sz="1200" dirty="0">
+                <a:solidFill>
+                  <a:srgbClr val="141A24"/>
+                </a:solidFill>
+                <a:latin typeface="Arial" pitchFamily="34" charset="0"/>
+                <a:ea typeface="Arial" pitchFamily="34" charset="-122"/>
+                <a:cs typeface="Arial" pitchFamily="34" charset="-120"/>
+              </a:rPr>
+              <a:t>North and South Carolina now permit HS NIL — a first-mover market for athletes and families navigating offers.</a:t>
+            </a:r>
+            <a:endParaRPr lang="en-US" sz="1200" dirty="0"/>
+          </a:p>
+        </p:txBody>
+      </p:sp>
+      <p:sp>
+        <p:nvSpPr>
+          <p:cNvPr id="16" name="Shape 11"/>
+          <p:cNvSpPr/>
+          <p:nvPr/>
+        </p:nvSpPr>
+        <p:spPr>
+          <a:xfrm>
+            <a:off x="4709160" y="4544568"/>
+            <a:ext cx="6766560" cy="0"/>
+          </a:xfrm>
+          <a:prstGeom prst="line">
+            <a:avLst/>
+          </a:prstGeom>
+          <a:noFill/>
+          <a:ln w="12700">
+            <a:solidFill>
+              <a:srgbClr val="E4E7EC"/>
+            </a:solidFill>
+            <a:prstDash val="solid"/>
+          </a:ln>
+        </p:spPr>
+      </p:sp>
+      <p:pic>
+        <p:nvPicPr>
+          <p:cNvPr id="17" name="Image 3" descr="preencoded.png"/>
+          <p:cNvPicPr>
+            <a:picLocks noChangeAspect="1"/>
+          </p:cNvPicPr>
+          <p:nvPr/>
+        </p:nvPicPr>
+        <p:blipFill>
+          <a:blip r:embed="rId6"/>
+          <a:stretch>
+            <a:fillRect/>
+          </a:stretch>
+        </p:blipFill>
+        <p:spPr>
+          <a:xfrm>
             <a:off x="4709160" y="4754880"/>
             <a:ext cx="475488" cy="475488"/>
           </a:xfrm>
@@ -8780,7 +8361,7 @@
           <a:bodyPr wrap="square" rtlCol="0" anchor="ctr"/>
           <a:lstStyle/>
           <a:p>
-            <a:pPr indent="0" marL="0">
+            <a:pPr marL="0" indent="0">
               <a:buNone/>
             </a:pPr>
             <a:r>
@@ -8819,7 +8400,7 @@
           <a:bodyPr wrap="square" rtlCol="0" anchor="t"/>
           <a:lstStyle/>
           <a:p>
-            <a:pPr indent="0" marL="0">
+            <a:pPr marL="0" indent="0">
               <a:buNone/>
             </a:pPr>
             <a:r>
@@ -8858,7 +8439,7 @@
           <a:bodyPr wrap="square" rtlCol="0" anchor="ctr"/>
           <a:lstStyle/>
           <a:p>
-            <a:pPr indent="0" marL="0">
+            <a:pPr marL="0" indent="0">
               <a:buNone/>
             </a:pPr>
             <a:r>
@@ -8872,9 +8453,6 @@
               </a:rPr>
               <a:t>Dexter Sports Co.</a:t>
             </a:r>
-            <a:pPr indent="0" marL="0">
-              <a:buNone/>
-            </a:pPr>
             <a:r>
               <a:rPr lang="en-US" sz="850" dirty="0">
                 <a:solidFill>
@@ -8911,11 +8489,11 @@
           <a:bodyPr wrap="square" rtlCol="0" anchor="ctr"/>
           <a:lstStyle/>
           <a:p>
-            <a:pPr algn="r" indent="0" marL="0">
-              <a:buNone/>
-            </a:pPr>
-            <a:r>
-              <a:rPr lang="en-US" sz="750" b="1" spc="100" kern="0" dirty="0">
+            <a:pPr marL="0" indent="0" algn="r">
+              <a:buNone/>
+            </a:pPr>
+            <a:r>
+              <a:rPr lang="en-US" sz="750" b="1" kern="0" spc="100" dirty="0">
                 <a:solidFill>
                   <a:srgbClr val="D4A62A"/>
                 </a:solidFill>
@@ -8945,6 +8523,7 @@
         <a:solidFill>
           <a:srgbClr val="FFFFFF"/>
         </a:solidFill>
+        <a:effectLst/>
       </p:bgPr>
     </p:bg>
     <p:spTree>
@@ -8982,7 +8561,7 @@
           <a:bodyPr wrap="square" rtlCol="0" anchor="ctr"/>
           <a:lstStyle/>
           <a:p>
-            <a:pPr indent="0" marL="0">
+            <a:pPr marL="0" indent="0">
               <a:buNone/>
             </a:pPr>
             <a:r>
@@ -8996,11 +8575,8 @@
               </a:rPr>
               <a:t>● </a:t>
             </a:r>
-            <a:pPr indent="0" marL="0">
-              <a:buNone/>
-            </a:pPr>
-            <a:r>
-              <a:rPr lang="en-US" sz="1100" b="1" spc="300" kern="0" dirty="0">
+            <a:r>
+              <a:rPr lang="en-US" sz="1100" b="1" kern="0" spc="300" dirty="0">
                 <a:solidFill>
                   <a:srgbClr val="2563EB"/>
                 </a:solidFill>
@@ -9035,7 +8611,7 @@
           <a:bodyPr wrap="square" rtlCol="0" anchor="ctr"/>
           <a:lstStyle/>
           <a:p>
-            <a:pPr indent="0" marL="0">
+            <a:pPr marL="0" indent="0">
               <a:buNone/>
             </a:pPr>
             <a:r>
@@ -9049,9 +8625,6 @@
               </a:rPr>
               <a:t>A full pipeline that </a:t>
             </a:r>
-            <a:pPr indent="0" marL="0">
-              <a:buNone/>
-            </a:pPr>
             <a:r>
               <a:rPr lang="en-US" sz="2900" i="1" dirty="0">
                 <a:solidFill>
@@ -9088,7 +8661,7 @@
           <a:bodyPr wrap="square" rtlCol="0" anchor="ctr"/>
           <a:lstStyle/>
           <a:p>
-            <a:pPr indent="0" marL="0">
+            <a:pPr marL="0" indent="0">
               <a:buNone/>
             </a:pPr>
             <a:r>
@@ -9135,14 +8708,14 @@
       </p:sp>
       <p:pic>
         <p:nvPicPr>
-          <p:cNvPr id="6" name="Image 0" descr="preencoded.png">    </p:cNvPr>
+          <p:cNvPr id="6" name="Image 0" descr="preencoded.png"/>
           <p:cNvPicPr>
             <a:picLocks noChangeAspect="1"/>
           </p:cNvPicPr>
           <p:nvPr/>
         </p:nvPicPr>
         <p:blipFill>
-          <a:blip r:embed="rId1"/>
+          <a:blip r:embed="rId3"/>
           <a:stretch>
             <a:fillRect/>
           </a:stretch>
@@ -9178,7 +8751,7 @@
           <a:bodyPr wrap="square" rtlCol="0" anchor="ctr"/>
           <a:lstStyle/>
           <a:p>
-            <a:pPr indent="0" marL="0">
+            <a:pPr marL="0" indent="0">
               <a:buNone/>
             </a:pPr>
             <a:r>
@@ -9192,9 +8765,6 @@
               </a:rPr>
               <a:t>~2/3</a:t>
             </a:r>
-            <a:pPr indent="0" marL="0">
-              <a:buNone/>
-            </a:pPr>
             <a:r>
               <a:rPr lang="en-US" sz="1400" b="1" dirty="0">
                 <a:solidFill>
@@ -9231,7 +8801,7 @@
           <a:bodyPr wrap="square" rtlCol="0" anchor="t"/>
           <a:lstStyle/>
           <a:p>
-            <a:pPr indent="0" marL="0">
+            <a:pPr marL="0" indent="0">
               <a:lnSpc>
                 <a:spcPct val="105000"/>
               </a:lnSpc>
@@ -9281,14 +8851,14 @@
       </p:sp>
       <p:pic>
         <p:nvPicPr>
-          <p:cNvPr id="10" name="Image 1" descr="preencoded.png">    </p:cNvPr>
+          <p:cNvPr id="10" name="Image 1" descr="preencoded.png"/>
           <p:cNvPicPr>
             <a:picLocks noChangeAspect="1"/>
           </p:cNvPicPr>
           <p:nvPr/>
         </p:nvPicPr>
         <p:blipFill>
-          <a:blip r:embed="rId2"/>
+          <a:blip r:embed="rId4"/>
           <a:stretch>
             <a:fillRect/>
           </a:stretch>
@@ -9324,7 +8894,7 @@
           <a:bodyPr wrap="square" rtlCol="0" anchor="ctr"/>
           <a:lstStyle/>
           <a:p>
-            <a:pPr indent="0" marL="0">
+            <a:pPr marL="0" indent="0">
               <a:buNone/>
             </a:pPr>
             <a:r>
@@ -9338,9 +8908,6 @@
               </a:rPr>
               <a:t>46%</a:t>
             </a:r>
-            <a:pPr indent="0" marL="0">
-              <a:buNone/>
-            </a:pPr>
             <a:r>
               <a:rPr lang="en-US" sz="1400" b="1" dirty="0">
                 <a:solidFill>
@@ -9377,7 +8944,7 @@
           <a:bodyPr wrap="square" rtlCol="0" anchor="t"/>
           <a:lstStyle/>
           <a:p>
-            <a:pPr indent="0" marL="0">
+            <a:pPr marL="0" indent="0">
               <a:lnSpc>
                 <a:spcPct val="105000"/>
               </a:lnSpc>
@@ -9427,14 +8994,14 @@
       </p:sp>
       <p:pic>
         <p:nvPicPr>
-          <p:cNvPr id="14" name="Image 2" descr="preencoded.png">    </p:cNvPr>
+          <p:cNvPr id="14" name="Image 2" descr="preencoded.png"/>
           <p:cNvPicPr>
             <a:picLocks noChangeAspect="1"/>
           </p:cNvPicPr>
           <p:nvPr/>
         </p:nvPicPr>
         <p:blipFill>
-          <a:blip r:embed="rId3"/>
+          <a:blip r:embed="rId5"/>
           <a:stretch>
             <a:fillRect/>
           </a:stretch>
@@ -9470,7 +9037,7 @@
           <a:bodyPr wrap="square" rtlCol="0" anchor="ctr"/>
           <a:lstStyle/>
           <a:p>
-            <a:pPr indent="0" marL="0">
+            <a:pPr marL="0" indent="0">
               <a:buNone/>
             </a:pPr>
             <a:r>
@@ -9484,9 +9051,6 @@
               </a:rPr>
               <a:t>7.3%</a:t>
             </a:r>
-            <a:pPr indent="0" marL="0">
-              <a:buNone/>
-            </a:pPr>
             <a:r>
               <a:rPr lang="en-US" sz="1400" b="1" dirty="0">
                 <a:solidFill>
@@ -9523,7 +9087,7 @@
           <a:bodyPr wrap="square" rtlCol="0" anchor="t"/>
           <a:lstStyle/>
           <a:p>
-            <a:pPr indent="0" marL="0">
+            <a:pPr marL="0" indent="0">
               <a:lnSpc>
                 <a:spcPct val="105000"/>
               </a:lnSpc>
@@ -9573,14 +9137,14 @@
       </p:sp>
       <p:pic>
         <p:nvPicPr>
-          <p:cNvPr id="18" name="Image 3" descr="preencoded.png">    </p:cNvPr>
+          <p:cNvPr id="18" name="Image 3" descr="preencoded.png"/>
           <p:cNvPicPr>
             <a:picLocks noChangeAspect="1"/>
           </p:cNvPicPr>
           <p:nvPr/>
         </p:nvPicPr>
         <p:blipFill>
-          <a:blip r:embed="rId4"/>
+          <a:blip r:embed="rId6"/>
           <a:stretch>
             <a:fillRect/>
           </a:stretch>
@@ -9616,7 +9180,7 @@
           <a:bodyPr wrap="square" rtlCol="0" anchor="ctr"/>
           <a:lstStyle/>
           <a:p>
-            <a:pPr indent="0" marL="0">
+            <a:pPr marL="0" indent="0">
               <a:buNone/>
             </a:pPr>
             <a:r>
@@ -9630,9 +9194,6 @@
               </a:rPr>
               <a:t>43 / 55%</a:t>
             </a:r>
-            <a:pPr indent="0" marL="0">
-              <a:buNone/>
-            </a:pPr>
             <a:r>
               <a:rPr lang="en-US" sz="1400" b="1" dirty="0">
                 <a:solidFill>
@@ -9669,7 +9230,7 @@
           <a:bodyPr wrap="square" rtlCol="0" anchor="t"/>
           <a:lstStyle/>
           <a:p>
-            <a:pPr indent="0" marL="0">
+            <a:pPr marL="0" indent="0">
               <a:lnSpc>
                 <a:spcPct val="105000"/>
               </a:lnSpc>
@@ -9714,14 +9275,14 @@
       </p:sp>
       <p:pic>
         <p:nvPicPr>
-          <p:cNvPr id="22" name="Image 4" descr="preencoded.png">    </p:cNvPr>
+          <p:cNvPr id="22" name="Image 4" descr="preencoded.png"/>
           <p:cNvPicPr>
             <a:picLocks noChangeAspect="1"/>
           </p:cNvPicPr>
           <p:nvPr/>
         </p:nvPicPr>
         <p:blipFill>
-          <a:blip r:embed="rId5"/>
+          <a:blip r:embed="rId7"/>
           <a:stretch>
             <a:fillRect/>
           </a:stretch>
@@ -9757,7 +9318,7 @@
           <a:bodyPr wrap="square" rtlCol="0" anchor="ctr"/>
           <a:lstStyle/>
           <a:p>
-            <a:pPr indent="0" marL="0">
+            <a:pPr marL="0" indent="0">
               <a:lnSpc>
                 <a:spcPct val="106000"/>
               </a:lnSpc>
@@ -9774,12 +9335,6 @@
               </a:rPr>
               <a:t>A full pipeline, a narrow top.  </a:t>
             </a:r>
-            <a:pPr indent="0" marL="0">
-              <a:lnSpc>
-                <a:spcPct val="106000"/>
-              </a:lnSpc>
-              <a:buNone/>
-            </a:pPr>
             <a:r>
               <a:rPr lang="en-US" sz="1150" dirty="0">
                 <a:solidFill>
@@ -9816,7 +9371,7 @@
           <a:bodyPr wrap="square" rtlCol="0" anchor="ctr"/>
           <a:lstStyle/>
           <a:p>
-            <a:pPr indent="0" marL="0">
+            <a:pPr marL="0" indent="0">
               <a:buNone/>
             </a:pPr>
             <a:r>
@@ -9855,11 +9410,11 @@
           <a:bodyPr wrap="square" rtlCol="0" anchor="ctr"/>
           <a:lstStyle/>
           <a:p>
-            <a:pPr algn="r" indent="0" marL="0">
-              <a:buNone/>
-            </a:pPr>
-            <a:r>
-              <a:rPr lang="en-US" sz="750" b="1" spc="100" kern="0" dirty="0">
+            <a:pPr marL="0" indent="0" algn="r">
+              <a:buNone/>
+            </a:pPr>
+            <a:r>
+              <a:rPr lang="en-US" sz="750" b="1" kern="0" spc="100" dirty="0">
                 <a:solidFill>
                   <a:srgbClr val="D4A62A"/>
                 </a:solidFill>
@@ -9889,6 +9444,7 @@
         <a:solidFill>
           <a:srgbClr val="FFFFFF"/>
         </a:solidFill>
+        <a:effectLst/>
       </p:bgPr>
     </p:bg>
     <p:spTree>
@@ -9926,7 +9482,7 @@
           <a:bodyPr wrap="square" rtlCol="0" anchor="ctr"/>
           <a:lstStyle/>
           <a:p>
-            <a:pPr indent="0" marL="0">
+            <a:pPr marL="0" indent="0">
               <a:buNone/>
             </a:pPr>
             <a:r>
@@ -9940,11 +9496,8 @@
               </a:rPr>
               <a:t>● </a:t>
             </a:r>
-            <a:pPr indent="0" marL="0">
-              <a:buNone/>
-            </a:pPr>
-            <a:r>
-              <a:rPr lang="en-US" sz="1100" b="1" spc="300" kern="0" dirty="0">
+            <a:r>
+              <a:rPr lang="en-US" sz="1100" b="1" kern="0" spc="300" dirty="0">
                 <a:solidFill>
                   <a:srgbClr val="2563EB"/>
                 </a:solidFill>
@@ -9979,7 +9532,7 @@
           <a:bodyPr wrap="square" rtlCol="0" anchor="ctr"/>
           <a:lstStyle/>
           <a:p>
-            <a:pPr indent="0" marL="0">
+            <a:pPr marL="0" indent="0">
               <a:buNone/>
             </a:pPr>
             <a:r>
@@ -9993,9 +9546,6 @@
               </a:rPr>
               <a:t>The middle of the market is </a:t>
             </a:r>
-            <a:pPr indent="0" marL="0">
-              <a:buNone/>
-            </a:pPr>
             <a:r>
               <a:rPr lang="en-US" sz="2900" i="1" dirty="0">
                 <a:solidFill>
@@ -10032,7 +9582,7 @@
           <a:bodyPr wrap="square" rtlCol="0" anchor="ctr"/>
           <a:lstStyle/>
           <a:p>
-            <a:pPr indent="0" marL="0">
+            <a:pPr marL="0" indent="0">
               <a:buNone/>
             </a:pPr>
             <a:r>
@@ -10120,7 +9670,7 @@
           <a:bodyPr wrap="square" rtlCol="0" anchor="ctr"/>
           <a:lstStyle/>
           <a:p>
-            <a:pPr algn="ctr" indent="0" marL="0">
+            <a:pPr marL="0" indent="0" algn="ctr">
               <a:buNone/>
             </a:pPr>
             <a:r>
@@ -10159,7 +9709,7 @@
           <a:bodyPr wrap="square" rtlCol="0" anchor="ctr"/>
           <a:lstStyle/>
           <a:p>
-            <a:pPr algn="ctr" indent="0" marL="0">
+            <a:pPr marL="0" indent="0" algn="ctr">
               <a:buNone/>
             </a:pPr>
             <a:r>
@@ -10198,7 +9748,7 @@
           <a:bodyPr wrap="square" rtlCol="0" anchor="ctr"/>
           <a:lstStyle/>
           <a:p>
-            <a:pPr algn="ctr" indent="0" marL="0">
+            <a:pPr marL="0" indent="0" algn="ctr">
               <a:lnSpc>
                 <a:spcPct val="115000"/>
               </a:lnSpc>
@@ -10214,60 +9764,9 @@
                 <a:cs typeface="Arial" pitchFamily="34" charset="-120"/>
               </a:rPr>
               <a:t>CAA
-</a:t>
-            </a:r>
-            <a:pPr algn="ctr" indent="0" marL="0">
-              <a:lnSpc>
-                <a:spcPct val="115000"/>
-              </a:lnSpc>
-              <a:buNone/>
-            </a:pPr>
-            <a:r>
-              <a:rPr lang="en-US" sz="1150" dirty="0">
-                <a:solidFill>
-                  <a:srgbClr val="141A24"/>
-                </a:solidFill>
-                <a:latin typeface="Arial" pitchFamily="34" charset="0"/>
-                <a:ea typeface="Arial" pitchFamily="34" charset="-122"/>
-                <a:cs typeface="Arial" pitchFamily="34" charset="-120"/>
-              </a:rPr>
-              <a:t>Athletes First
-</a:t>
-            </a:r>
-            <a:pPr algn="ctr" indent="0" marL="0">
-              <a:lnSpc>
-                <a:spcPct val="115000"/>
-              </a:lnSpc>
-              <a:buNone/>
-            </a:pPr>
-            <a:r>
-              <a:rPr lang="en-US" sz="1150" dirty="0">
-                <a:solidFill>
-                  <a:srgbClr val="141A24"/>
-                </a:solidFill>
-                <a:latin typeface="Arial" pitchFamily="34" charset="0"/>
-                <a:ea typeface="Arial" pitchFamily="34" charset="-122"/>
-                <a:cs typeface="Arial" pitchFamily="34" charset="-120"/>
-              </a:rPr>
-              <a:t>Octagon
-</a:t>
-            </a:r>
-            <a:pPr algn="ctr" indent="0" marL="0">
-              <a:lnSpc>
-                <a:spcPct val="115000"/>
-              </a:lnSpc>
-              <a:buNone/>
-            </a:pPr>
-            <a:r>
-              <a:rPr lang="en-US" sz="1150" dirty="0">
-                <a:solidFill>
-                  <a:srgbClr val="141A24"/>
-                </a:solidFill>
-                <a:latin typeface="Arial" pitchFamily="34" charset="0"/>
-                <a:ea typeface="Arial" pitchFamily="34" charset="-122"/>
-                <a:cs typeface="Arial" pitchFamily="34" charset="-120"/>
-              </a:rPr>
-              <a:t>Excel
+Athletes First
+Octagon
+Excel
 </a:t>
             </a:r>
             <a:endParaRPr lang="en-US" sz="1150" dirty="0"/>
@@ -10344,7 +9843,7 @@
           <a:bodyPr wrap="square" rtlCol="0" anchor="ctr"/>
           <a:lstStyle/>
           <a:p>
-            <a:pPr algn="ctr" indent="0" marL="0">
+            <a:pPr marL="0" indent="0" algn="ctr">
               <a:buNone/>
             </a:pPr>
             <a:r>
@@ -10383,7 +9882,7 @@
           <a:bodyPr wrap="square" rtlCol="0" anchor="ctr"/>
           <a:lstStyle/>
           <a:p>
-            <a:pPr algn="ctr" indent="0" marL="0">
+            <a:pPr marL="0" indent="0" algn="ctr">
               <a:buNone/>
             </a:pPr>
             <a:r>
@@ -10422,7 +9921,7 @@
           <a:bodyPr wrap="square" rtlCol="0" anchor="ctr"/>
           <a:lstStyle/>
           <a:p>
-            <a:pPr algn="ctr" indent="0" marL="0">
+            <a:pPr marL="0" indent="0" algn="ctr">
               <a:lnSpc>
                 <a:spcPct val="115000"/>
               </a:lnSpc>
@@ -10438,60 +9937,9 @@
                 <a:cs typeface="Arial" pitchFamily="34" charset="-120"/>
               </a:rPr>
               <a:t>KMM Sports
-</a:t>
-            </a:r>
-            <a:pPr algn="ctr" indent="0" marL="0">
-              <a:lnSpc>
-                <a:spcPct val="115000"/>
-              </a:lnSpc>
-              <a:buNone/>
-            </a:pPr>
-            <a:r>
-              <a:rPr lang="en-US" sz="1150" dirty="0">
-                <a:solidFill>
-                  <a:srgbClr val="141A24"/>
-                </a:solidFill>
-                <a:latin typeface="Arial" pitchFamily="34" charset="0"/>
-                <a:ea typeface="Arial" pitchFamily="34" charset="-122"/>
-                <a:cs typeface="Arial" pitchFamily="34" charset="-120"/>
-              </a:rPr>
-              <a:t>OneForOne
-</a:t>
-            </a:r>
-            <a:pPr algn="ctr" indent="0" marL="0">
-              <a:lnSpc>
-                <a:spcPct val="115000"/>
-              </a:lnSpc>
-              <a:buNone/>
-            </a:pPr>
-            <a:r>
-              <a:rPr lang="en-US" sz="1150" dirty="0">
-                <a:solidFill>
-                  <a:srgbClr val="141A24"/>
-                </a:solidFill>
-                <a:latin typeface="Arial" pitchFamily="34" charset="0"/>
-                <a:ea typeface="Arial" pitchFamily="34" charset="-122"/>
-                <a:cs typeface="Arial" pitchFamily="34" charset="-120"/>
-              </a:rPr>
-              <a:t>Spisak
-</a:t>
-            </a:r>
-            <a:pPr algn="ctr" indent="0" marL="0">
-              <a:lnSpc>
-                <a:spcPct val="115000"/>
-              </a:lnSpc>
-              <a:buNone/>
-            </a:pPr>
-            <a:r>
-              <a:rPr lang="en-US" sz="1150" dirty="0">
-                <a:solidFill>
-                  <a:srgbClr val="141A24"/>
-                </a:solidFill>
-                <a:latin typeface="Arial" pitchFamily="34" charset="0"/>
-                <a:ea typeface="Arial" pitchFamily="34" charset="-122"/>
-                <a:cs typeface="Arial" pitchFamily="34" charset="-120"/>
-              </a:rPr>
-              <a:t>BDS Agency
+OneForOne
+Spisak
+BDS Agency
 </a:t>
             </a:r>
             <a:endParaRPr lang="en-US" sz="1150" dirty="0"/>
@@ -10568,7 +10016,7 @@
           <a:bodyPr wrap="square" rtlCol="0" anchor="ctr"/>
           <a:lstStyle/>
           <a:p>
-            <a:pPr algn="ctr" indent="0" marL="0">
+            <a:pPr marL="0" indent="0" algn="ctr">
               <a:buNone/>
             </a:pPr>
             <a:r>
@@ -10607,7 +10055,7 @@
           <a:bodyPr wrap="square" rtlCol="0" anchor="ctr"/>
           <a:lstStyle/>
           <a:p>
-            <a:pPr algn="ctr" indent="0" marL="0">
+            <a:pPr marL="0" indent="0" algn="ctr">
               <a:buNone/>
             </a:pPr>
             <a:r>
@@ -10646,7 +10094,7 @@
           <a:bodyPr wrap="square" rtlCol="0" anchor="ctr"/>
           <a:lstStyle/>
           <a:p>
-            <a:pPr algn="ctr" indent="0" marL="0">
+            <a:pPr marL="0" indent="0" algn="ctr">
               <a:lnSpc>
                 <a:spcPct val="115000"/>
               </a:lnSpc>
@@ -10662,42 +10110,8 @@
                 <a:cs typeface="Arial" pitchFamily="34" charset="-120"/>
               </a:rPr>
               <a:t>Parker
-</a:t>
-            </a:r>
-            <a:pPr algn="ctr" indent="0" marL="0">
-              <a:lnSpc>
-                <a:spcPct val="115000"/>
-              </a:lnSpc>
-              <a:buNone/>
-            </a:pPr>
-            <a:r>
-              <a:rPr lang="en-US" sz="1150" dirty="0">
-                <a:solidFill>
-                  <a:srgbClr val="141A24"/>
-                </a:solidFill>
-                <a:latin typeface="Arial" pitchFamily="34" charset="0"/>
-                <a:ea typeface="Arial" pitchFamily="34" charset="-122"/>
-                <a:cs typeface="Arial" pitchFamily="34" charset="-120"/>
-              </a:rPr>
-              <a:t>TurnkeyZRG
-</a:t>
-            </a:r>
-            <a:pPr algn="ctr" indent="0" marL="0">
-              <a:lnSpc>
-                <a:spcPct val="115000"/>
-              </a:lnSpc>
-              <a:buNone/>
-            </a:pPr>
-            <a:r>
-              <a:rPr lang="en-US" sz="1150" dirty="0">
-                <a:solidFill>
-                  <a:srgbClr val="141A24"/>
-                </a:solidFill>
-                <a:latin typeface="Arial" pitchFamily="34" charset="0"/>
-                <a:ea typeface="Arial" pitchFamily="34" charset="-122"/>
-                <a:cs typeface="Arial" pitchFamily="34" charset="-120"/>
-              </a:rPr>
-              <a:t>Collegiate Sports
+TurnkeyZRG
+Collegiate Sports
 </a:t>
             </a:r>
             <a:endParaRPr lang="en-US" sz="1150" dirty="0"/>
@@ -10733,189 +10147,7 @@
       </p:sp>
       <p:pic>
         <p:nvPicPr>
-          <p:cNvPr id="21" name="Image 0" descr="preencoded.png">    </p:cNvPr>
-          <p:cNvPicPr>
-            <a:picLocks noChangeAspect="1"/>
-          </p:cNvPicPr>
-          <p:nvPr/>
-        </p:nvPicPr>
-        <p:blipFill>
-          <a:blip r:embed="rId1"/>
-          <a:stretch>
-            <a:fillRect/>
-          </a:stretch>
-        </p:blipFill>
-        <p:spPr>
-          <a:xfrm>
-            <a:off x="10360152" y="2331720"/>
-            <a:ext cx="384048" cy="384048"/>
-          </a:xfrm>
-          <a:prstGeom prst="rect">
-            <a:avLst/>
-          </a:prstGeom>
-        </p:spPr>
-      </p:pic>
-      <p:sp>
-        <p:nvSpPr>
-          <p:cNvPr id="22" name="Text 19"/>
-          <p:cNvSpPr/>
-          <p:nvPr/>
-        </p:nvSpPr>
-        <p:spPr>
-          <a:xfrm>
-            <a:off x="9601200" y="2788920"/>
-            <a:ext cx="1901952" cy="320040"/>
-          </a:xfrm>
-          <a:prstGeom prst="rect">
-            <a:avLst/>
-          </a:prstGeom>
-          <a:noFill/>
-          <a:ln/>
-        </p:spPr>
-        <p:txBody>
-          <a:bodyPr wrap="square" rtlCol="0" anchor="ctr"/>
-          <a:lstStyle/>
-          <a:p>
-            <a:pPr algn="ctr" indent="0" marL="0">
-              <a:buNone/>
-            </a:pPr>
-            <a:r>
-              <a:rPr lang="en-US" sz="1300" b="1" spc="100" kern="0" dirty="0">
-                <a:solidFill>
-                  <a:srgbClr val="D4A62A"/>
-                </a:solidFill>
-                <a:latin typeface="Arial" pitchFamily="34" charset="0"/>
-                <a:ea typeface="Arial" pitchFamily="34" charset="-122"/>
-                <a:cs typeface="Arial" pitchFamily="34" charset="-120"/>
-              </a:rPr>
-              <a:t>DEXTER</a:t>
-            </a:r>
-            <a:endParaRPr lang="en-US" sz="1300" dirty="0"/>
-          </a:p>
-        </p:txBody>
-      </p:sp>
-      <p:sp>
-        <p:nvSpPr>
-          <p:cNvPr id="23" name="Text 20"/>
-          <p:cNvSpPr/>
-          <p:nvPr/>
-        </p:nvSpPr>
-        <p:spPr>
-          <a:xfrm>
-            <a:off x="9710928" y="3154680"/>
-            <a:ext cx="1682496" cy="1097280"/>
-          </a:xfrm>
-          <a:prstGeom prst="rect">
-            <a:avLst/>
-          </a:prstGeom>
-          <a:noFill/>
-          <a:ln/>
-        </p:spPr>
-        <p:txBody>
-          <a:bodyPr wrap="square" rtlCol="0" anchor="t"/>
-          <a:lstStyle/>
-          <a:p>
-            <a:pPr algn="ctr" indent="0" marL="0">
-              <a:lnSpc>
-                <a:spcPct val="108000"/>
-              </a:lnSpc>
-              <a:buNone/>
-            </a:pPr>
-            <a:r>
-              <a:rPr lang="en-US" sz="1000" dirty="0">
-                <a:solidFill>
-                  <a:srgbClr val="93B4FF"/>
-                </a:solidFill>
-                <a:latin typeface="Arial" pitchFamily="34" charset="0"/>
-                <a:ea typeface="Arial" pitchFamily="34" charset="-122"/>
-                <a:cs typeface="Arial" pitchFamily="34" charset="-120"/>
-              </a:rPr>
-              <a:t>Women coaches &amp; assistants, all sports, mid-major → D-III</a:t>
-            </a:r>
-            <a:endParaRPr lang="en-US" sz="1000" dirty="0"/>
-          </a:p>
-        </p:txBody>
-      </p:sp>
-      <p:pic>
-        <p:nvPicPr>
-          <p:cNvPr id="24" name="Image 1" descr="preencoded.png">    </p:cNvPr>
-          <p:cNvPicPr>
-            <a:picLocks noChangeAspect="1"/>
-          </p:cNvPicPr>
-          <p:nvPr/>
-        </p:nvPicPr>
-        <p:blipFill>
-          <a:blip r:embed="rId2"/>
-          <a:stretch>
-            <a:fillRect/>
-          </a:stretch>
-        </p:blipFill>
-        <p:spPr>
-          <a:xfrm>
-            <a:off x="777240" y="4681728"/>
-            <a:ext cx="365760" cy="365760"/>
-          </a:xfrm>
-          <a:prstGeom prst="rect">
-            <a:avLst/>
-          </a:prstGeom>
-        </p:spPr>
-      </p:pic>
-      <p:sp>
-        <p:nvSpPr>
-          <p:cNvPr id="25" name="Text 21"/>
-          <p:cNvSpPr/>
-          <p:nvPr/>
-        </p:nvSpPr>
-        <p:spPr>
-          <a:xfrm>
-            <a:off x="1280160" y="4663440"/>
-            <a:ext cx="10058400" cy="411480"/>
-          </a:xfrm>
-          <a:prstGeom prst="rect">
-            <a:avLst/>
-          </a:prstGeom>
-          <a:noFill/>
-          <a:ln/>
-        </p:spPr>
-        <p:txBody>
-          <a:bodyPr wrap="square" rtlCol="0" anchor="ctr"/>
-          <a:lstStyle/>
-          <a:p>
-            <a:pPr indent="0" marL="0">
-              <a:buNone/>
-            </a:pPr>
-            <a:r>
-              <a:rPr lang="en-US" sz="1300" dirty="0">
-                <a:solidFill>
-                  <a:srgbClr val="6B7280"/>
-                </a:solidFill>
-                <a:latin typeface="Arial" pitchFamily="34" charset="0"/>
-                <a:ea typeface="Arial" pitchFamily="34" charset="-122"/>
-                <a:cs typeface="Arial" pitchFamily="34" charset="-120"/>
-              </a:rPr>
-              <a:t>Power-5 heads &amp; men's-led  </a:t>
-            </a:r>
-            <a:pPr indent="0" marL="0">
-              <a:buNone/>
-            </a:pPr>
-            <a:r>
-              <a:rPr lang="en-US" sz="1300" b="1" dirty="0">
-                <a:solidFill>
-                  <a:srgbClr val="141A24"/>
-                </a:solidFill>
-                <a:latin typeface="Arial" pitchFamily="34" charset="0"/>
-                <a:ea typeface="Arial" pitchFamily="34" charset="-122"/>
-                <a:cs typeface="Arial" pitchFamily="34" charset="-120"/>
-              </a:rPr>
-              <a:t>→  assistants, mid-major, D-II/III</a:t>
-            </a:r>
-            <a:endParaRPr lang="en-US" sz="1300" dirty="0"/>
-          </a:p>
-        </p:txBody>
-      </p:sp>
-      <p:pic>
-        <p:nvPicPr>
-          <p:cNvPr id="26" name="Image 2" descr="preencoded.png">    </p:cNvPr>
+          <p:cNvPr id="21" name="Image 0" descr="preencoded.png"/>
           <p:cNvPicPr>
             <a:picLocks noChangeAspect="1"/>
           </p:cNvPicPr>
@@ -10929,6 +10161,185 @@
         </p:blipFill>
         <p:spPr>
           <a:xfrm>
+            <a:off x="10360152" y="2331720"/>
+            <a:ext cx="384048" cy="384048"/>
+          </a:xfrm>
+          <a:prstGeom prst="rect">
+            <a:avLst/>
+          </a:prstGeom>
+        </p:spPr>
+      </p:pic>
+      <p:sp>
+        <p:nvSpPr>
+          <p:cNvPr id="22" name="Text 19"/>
+          <p:cNvSpPr/>
+          <p:nvPr/>
+        </p:nvSpPr>
+        <p:spPr>
+          <a:xfrm>
+            <a:off x="9601200" y="2788920"/>
+            <a:ext cx="1901952" cy="320040"/>
+          </a:xfrm>
+          <a:prstGeom prst="rect">
+            <a:avLst/>
+          </a:prstGeom>
+          <a:noFill/>
+          <a:ln/>
+        </p:spPr>
+        <p:txBody>
+          <a:bodyPr wrap="square" rtlCol="0" anchor="ctr"/>
+          <a:lstStyle/>
+          <a:p>
+            <a:pPr marL="0" indent="0" algn="ctr">
+              <a:buNone/>
+            </a:pPr>
+            <a:r>
+              <a:rPr lang="en-US" sz="1300" b="1" kern="0" spc="100" dirty="0">
+                <a:solidFill>
+                  <a:srgbClr val="D4A62A"/>
+                </a:solidFill>
+                <a:latin typeface="Arial" pitchFamily="34" charset="0"/>
+                <a:ea typeface="Arial" pitchFamily="34" charset="-122"/>
+                <a:cs typeface="Arial" pitchFamily="34" charset="-120"/>
+              </a:rPr>
+              <a:t>DEXTER</a:t>
+            </a:r>
+            <a:endParaRPr lang="en-US" sz="1300" dirty="0"/>
+          </a:p>
+        </p:txBody>
+      </p:sp>
+      <p:sp>
+        <p:nvSpPr>
+          <p:cNvPr id="23" name="Text 20"/>
+          <p:cNvSpPr/>
+          <p:nvPr/>
+        </p:nvSpPr>
+        <p:spPr>
+          <a:xfrm>
+            <a:off x="9710928" y="3154680"/>
+            <a:ext cx="1682496" cy="1097280"/>
+          </a:xfrm>
+          <a:prstGeom prst="rect">
+            <a:avLst/>
+          </a:prstGeom>
+          <a:noFill/>
+          <a:ln/>
+        </p:spPr>
+        <p:txBody>
+          <a:bodyPr wrap="square" rtlCol="0" anchor="t"/>
+          <a:lstStyle/>
+          <a:p>
+            <a:pPr marL="0" indent="0" algn="ctr">
+              <a:lnSpc>
+                <a:spcPct val="108000"/>
+              </a:lnSpc>
+              <a:buNone/>
+            </a:pPr>
+            <a:r>
+              <a:rPr lang="en-US" sz="1000" dirty="0">
+                <a:solidFill>
+                  <a:srgbClr val="93B4FF"/>
+                </a:solidFill>
+                <a:latin typeface="Arial" pitchFamily="34" charset="0"/>
+                <a:ea typeface="Arial" pitchFamily="34" charset="-122"/>
+                <a:cs typeface="Arial" pitchFamily="34" charset="-120"/>
+              </a:rPr>
+              <a:t>Women coaches &amp; assistants, all sports, mid-major → D-III</a:t>
+            </a:r>
+            <a:endParaRPr lang="en-US" sz="1000" dirty="0"/>
+          </a:p>
+        </p:txBody>
+      </p:sp>
+      <p:pic>
+        <p:nvPicPr>
+          <p:cNvPr id="24" name="Image 1" descr="preencoded.png"/>
+          <p:cNvPicPr>
+            <a:picLocks noChangeAspect="1"/>
+          </p:cNvPicPr>
+          <p:nvPr/>
+        </p:nvPicPr>
+        <p:blipFill>
+          <a:blip r:embed="rId4"/>
+          <a:stretch>
+            <a:fillRect/>
+          </a:stretch>
+        </p:blipFill>
+        <p:spPr>
+          <a:xfrm>
+            <a:off x="777240" y="4681728"/>
+            <a:ext cx="365760" cy="365760"/>
+          </a:xfrm>
+          <a:prstGeom prst="rect">
+            <a:avLst/>
+          </a:prstGeom>
+        </p:spPr>
+      </p:pic>
+      <p:sp>
+        <p:nvSpPr>
+          <p:cNvPr id="25" name="Text 21"/>
+          <p:cNvSpPr/>
+          <p:nvPr/>
+        </p:nvSpPr>
+        <p:spPr>
+          <a:xfrm>
+            <a:off x="1280160" y="4663440"/>
+            <a:ext cx="10058400" cy="411480"/>
+          </a:xfrm>
+          <a:prstGeom prst="rect">
+            <a:avLst/>
+          </a:prstGeom>
+          <a:noFill/>
+          <a:ln/>
+        </p:spPr>
+        <p:txBody>
+          <a:bodyPr wrap="square" rtlCol="0" anchor="ctr"/>
+          <a:lstStyle/>
+          <a:p>
+            <a:pPr marL="0" indent="0">
+              <a:buNone/>
+            </a:pPr>
+            <a:r>
+              <a:rPr lang="en-US" sz="1300" dirty="0">
+                <a:solidFill>
+                  <a:srgbClr val="6B7280"/>
+                </a:solidFill>
+                <a:latin typeface="Arial" pitchFamily="34" charset="0"/>
+                <a:ea typeface="Arial" pitchFamily="34" charset="-122"/>
+                <a:cs typeface="Arial" pitchFamily="34" charset="-120"/>
+              </a:rPr>
+              <a:t>Power-5 heads &amp; men's-led  </a:t>
+            </a:r>
+            <a:r>
+              <a:rPr lang="en-US" sz="1300" b="1" dirty="0">
+                <a:solidFill>
+                  <a:srgbClr val="141A24"/>
+                </a:solidFill>
+                <a:latin typeface="Arial" pitchFamily="34" charset="0"/>
+                <a:ea typeface="Arial" pitchFamily="34" charset="-122"/>
+                <a:cs typeface="Arial" pitchFamily="34" charset="-120"/>
+              </a:rPr>
+              <a:t>→  assistants, mid-major, D-II/III</a:t>
+            </a:r>
+            <a:endParaRPr lang="en-US" sz="1300" dirty="0"/>
+          </a:p>
+        </p:txBody>
+      </p:sp>
+      <p:pic>
+        <p:nvPicPr>
+          <p:cNvPr id="26" name="Image 2" descr="preencoded.png"/>
+          <p:cNvPicPr>
+            <a:picLocks noChangeAspect="1"/>
+          </p:cNvPicPr>
+          <p:nvPr/>
+        </p:nvPicPr>
+        <p:blipFill>
+          <a:blip r:embed="rId4"/>
+          <a:stretch>
+            <a:fillRect/>
+          </a:stretch>
+        </p:blipFill>
+        <p:spPr>
+          <a:xfrm>
             <a:off x="777240" y="5340096"/>
             <a:ext cx="365760" cy="365760"/>
           </a:xfrm>
@@ -10958,7 +10369,7 @@
           <a:bodyPr wrap="square" rtlCol="0" anchor="ctr"/>
           <a:lstStyle/>
           <a:p>
-            <a:pPr indent="0" marL="0">
+            <a:pPr marL="0" indent="0">
               <a:buNone/>
             </a:pPr>
             <a:r>
@@ -10972,9 +10383,6 @@
               </a:rPr>
               <a:t>Football &amp; basketball  </a:t>
             </a:r>
-            <a:pPr indent="0" marL="0">
-              <a:buNone/>
-            </a:pPr>
             <a:r>
               <a:rPr lang="en-US" sz="1300" b="1" dirty="0">
                 <a:solidFill>
@@ -11011,7 +10419,7 @@
           <a:bodyPr wrap="square" rtlCol="0" anchor="ctr"/>
           <a:lstStyle/>
           <a:p>
-            <a:pPr indent="0" marL="0">
+            <a:pPr marL="0" indent="0">
               <a:buNone/>
             </a:pPr>
             <a:r>
@@ -11050,11 +10458,11 @@
           <a:bodyPr wrap="square" rtlCol="0" anchor="ctr"/>
           <a:lstStyle/>
           <a:p>
-            <a:pPr algn="r" indent="0" marL="0">
-              <a:buNone/>
-            </a:pPr>
-            <a:r>
-              <a:rPr lang="en-US" sz="750" b="1" spc="100" kern="0" dirty="0">
+            <a:pPr marL="0" indent="0" algn="r">
+              <a:buNone/>
+            </a:pPr>
+            <a:r>
+              <a:rPr lang="en-US" sz="750" b="1" kern="0" spc="100" dirty="0">
                 <a:solidFill>
                   <a:srgbClr val="D4A62A"/>
                 </a:solidFill>
@@ -11084,6 +10492,7 @@
         <a:solidFill>
           <a:srgbClr val="FFFFFF"/>
         </a:solidFill>
+        <a:effectLst/>
       </p:bgPr>
     </p:bg>
     <p:spTree>
@@ -11121,7 +10530,7 @@
           <a:bodyPr wrap="square" rtlCol="0" anchor="ctr"/>
           <a:lstStyle/>
           <a:p>
-            <a:pPr indent="0" marL="0">
+            <a:pPr marL="0" indent="0">
               <a:buNone/>
             </a:pPr>
             <a:r>
@@ -11135,11 +10544,8 @@
               </a:rPr>
               <a:t>● </a:t>
             </a:r>
-            <a:pPr indent="0" marL="0">
-              <a:buNone/>
-            </a:pPr>
-            <a:r>
-              <a:rPr lang="en-US" sz="1100" b="1" spc="300" kern="0" dirty="0">
+            <a:r>
+              <a:rPr lang="en-US" sz="1100" b="1" kern="0" spc="300" dirty="0">
                 <a:solidFill>
                   <a:srgbClr val="2563EB"/>
                 </a:solidFill>
@@ -11174,7 +10580,7 @@
           <a:bodyPr wrap="square" rtlCol="0" anchor="ctr"/>
           <a:lstStyle/>
           <a:p>
-            <a:pPr indent="0" marL="0">
+            <a:pPr marL="0" indent="0">
               <a:buNone/>
             </a:pPr>
             <a:r>
@@ -11188,9 +10594,6 @@
               </a:rPr>
               <a:t>Capital is flowing into </a:t>
             </a:r>
-            <a:pPr indent="0" marL="0">
-              <a:buNone/>
-            </a:pPr>
             <a:r>
               <a:rPr lang="en-US" sz="2900" i="1" dirty="0">
                 <a:solidFill>
@@ -11227,7 +10630,7 @@
           <a:bodyPr wrap="square" rtlCol="0" anchor="ctr"/>
           <a:lstStyle/>
           <a:p>
-            <a:pPr indent="0" marL="0">
+            <a:pPr marL="0" indent="0">
               <a:buNone/>
             </a:pPr>
             <a:r>
@@ -11291,7 +10694,7 @@
           <a:bodyPr wrap="square" rtlCol="0" anchor="ctr"/>
           <a:lstStyle/>
           <a:p>
-            <a:pPr algn="l" indent="0" marL="0">
+            <a:pPr marL="0" indent="0" algn="l">
               <a:buNone/>
             </a:pPr>
             <a:r>
@@ -11355,7 +10758,7 @@
           <a:bodyPr wrap="square" rtlCol="0" anchor="ctr"/>
           <a:lstStyle/>
           <a:p>
-            <a:pPr algn="l" indent="0" marL="0">
+            <a:pPr marL="0" indent="0" algn="l">
               <a:buNone/>
             </a:pPr>
             <a:r>
@@ -11419,7 +10822,7 @@
           <a:bodyPr wrap="square" rtlCol="0" anchor="ctr"/>
           <a:lstStyle/>
           <a:p>
-            <a:pPr algn="l" indent="0" marL="0">
+            <a:pPr marL="0" indent="0" algn="l">
               <a:buNone/>
             </a:pPr>
             <a:r>
@@ -11483,7 +10886,7 @@
           <a:bodyPr wrap="square" rtlCol="0" anchor="ctr"/>
           <a:lstStyle/>
           <a:p>
-            <a:pPr algn="l" indent="0" marL="0">
+            <a:pPr marL="0" indent="0" algn="l">
               <a:buNone/>
             </a:pPr>
             <a:r>
@@ -11547,7 +10950,7 @@
           <a:bodyPr wrap="square" rtlCol="0" anchor="ctr"/>
           <a:lstStyle/>
           <a:p>
-            <a:pPr algn="l" indent="0" marL="0">
+            <a:pPr marL="0" indent="0" algn="l">
               <a:buNone/>
             </a:pPr>
             <a:r>
@@ -11611,7 +11014,7 @@
           <a:bodyPr wrap="square" rtlCol="0" anchor="ctr"/>
           <a:lstStyle/>
           <a:p>
-            <a:pPr algn="l" indent="0" marL="0">
+            <a:pPr marL="0" indent="0" algn="l">
               <a:buNone/>
             </a:pPr>
             <a:r>
@@ -11675,7 +11078,7 @@
           <a:bodyPr wrap="square" rtlCol="0" anchor="ctr"/>
           <a:lstStyle/>
           <a:p>
-            <a:pPr algn="l" indent="0" marL="0">
+            <a:pPr marL="0" indent="0" algn="l">
               <a:buNone/>
             </a:pPr>
             <a:r>
@@ -11739,7 +11142,7 @@
           <a:bodyPr wrap="square" rtlCol="0" anchor="ctr"/>
           <a:lstStyle/>
           <a:p>
-            <a:pPr algn="l" indent="0" marL="0">
+            <a:pPr marL="0" indent="0" algn="l">
               <a:buNone/>
             </a:pPr>
             <a:r>
@@ -11803,7 +11206,7 @@
           <a:bodyPr wrap="square" rtlCol="0" anchor="ctr"/>
           <a:lstStyle/>
           <a:p>
-            <a:pPr algn="l" indent="0" marL="0">
+            <a:pPr marL="0" indent="0" algn="l">
               <a:buNone/>
             </a:pPr>
             <a:r>
@@ -11867,7 +11270,7 @@
           <a:bodyPr wrap="square" rtlCol="0" anchor="ctr"/>
           <a:lstStyle/>
           <a:p>
-            <a:pPr algn="l" indent="0" marL="0">
+            <a:pPr marL="0" indent="0" algn="l">
               <a:buNone/>
             </a:pPr>
             <a:r>
@@ -11931,7 +11334,7 @@
           <a:bodyPr wrap="square" rtlCol="0" anchor="ctr"/>
           <a:lstStyle/>
           <a:p>
-            <a:pPr algn="l" indent="0" marL="0">
+            <a:pPr marL="0" indent="0" algn="l">
               <a:buNone/>
             </a:pPr>
             <a:r>
@@ -11995,7 +11398,7 @@
           <a:bodyPr wrap="square" rtlCol="0" anchor="ctr"/>
           <a:lstStyle/>
           <a:p>
-            <a:pPr algn="l" indent="0" marL="0">
+            <a:pPr marL="0" indent="0" algn="l">
               <a:buNone/>
             </a:pPr>
             <a:r>
@@ -12059,7 +11462,7 @@
           <a:bodyPr wrap="square" rtlCol="0" anchor="ctr"/>
           <a:lstStyle/>
           <a:p>
-            <a:pPr algn="l" indent="0" marL="0">
+            <a:pPr marL="0" indent="0" algn="l">
               <a:buNone/>
             </a:pPr>
             <a:r>
@@ -12123,7 +11526,7 @@
           <a:bodyPr wrap="square" rtlCol="0" anchor="ctr"/>
           <a:lstStyle/>
           <a:p>
-            <a:pPr algn="l" indent="0" marL="0">
+            <a:pPr marL="0" indent="0" algn="l">
               <a:buNone/>
             </a:pPr>
             <a:r>
@@ -12187,7 +11590,7 @@
           <a:bodyPr wrap="square" rtlCol="0" anchor="ctr"/>
           <a:lstStyle/>
           <a:p>
-            <a:pPr algn="l" indent="0" marL="0">
+            <a:pPr marL="0" indent="0" algn="l">
               <a:buNone/>
             </a:pPr>
             <a:r>
@@ -12251,7 +11654,7 @@
           <a:bodyPr wrap="square" rtlCol="0" anchor="ctr"/>
           <a:lstStyle/>
           <a:p>
-            <a:pPr algn="l" indent="0" marL="0">
+            <a:pPr marL="0" indent="0" algn="l">
               <a:buNone/>
             </a:pPr>
             <a:r>
@@ -12315,7 +11718,7 @@
           <a:bodyPr wrap="square" rtlCol="0" anchor="ctr"/>
           <a:lstStyle/>
           <a:p>
-            <a:pPr algn="l" indent="0" marL="0">
+            <a:pPr marL="0" indent="0" algn="l">
               <a:buNone/>
             </a:pPr>
             <a:r>
@@ -12379,7 +11782,7 @@
           <a:bodyPr wrap="square" rtlCol="0" anchor="ctr"/>
           <a:lstStyle/>
           <a:p>
-            <a:pPr algn="l" indent="0" marL="0">
+            <a:pPr marL="0" indent="0" algn="l">
               <a:buNone/>
             </a:pPr>
             <a:r>
@@ -12443,7 +11846,7 @@
           <a:bodyPr wrap="square" rtlCol="0" anchor="ctr"/>
           <a:lstStyle/>
           <a:p>
-            <a:pPr algn="l" indent="0" marL="0">
+            <a:pPr marL="0" indent="0" algn="l">
               <a:buNone/>
             </a:pPr>
             <a:r>
@@ -12507,7 +11910,7 @@
           <a:bodyPr wrap="square" rtlCol="0" anchor="ctr"/>
           <a:lstStyle/>
           <a:p>
-            <a:pPr algn="l" indent="0" marL="0">
+            <a:pPr marL="0" indent="0" algn="l">
               <a:buNone/>
             </a:pPr>
             <a:r>
@@ -12571,7 +11974,7 @@
           <a:bodyPr wrap="square" rtlCol="0" anchor="ctr"/>
           <a:lstStyle/>
           <a:p>
-            <a:pPr algn="l" indent="0" marL="0">
+            <a:pPr marL="0" indent="0" algn="l">
               <a:buNone/>
             </a:pPr>
             <a:r>
@@ -12635,7 +12038,7 @@
           <a:bodyPr wrap="square" rtlCol="0" anchor="ctr"/>
           <a:lstStyle/>
           <a:p>
-            <a:pPr algn="l" indent="0" marL="0">
+            <a:pPr marL="0" indent="0" algn="l">
               <a:buNone/>
             </a:pPr>
             <a:r>
@@ -12699,7 +12102,7 @@
           <a:bodyPr wrap="square" rtlCol="0" anchor="ctr"/>
           <a:lstStyle/>
           <a:p>
-            <a:pPr algn="l" indent="0" marL="0">
+            <a:pPr marL="0" indent="0" algn="l">
               <a:buNone/>
             </a:pPr>
             <a:r>
@@ -12763,7 +12166,7 @@
           <a:bodyPr wrap="square" rtlCol="0" anchor="ctr"/>
           <a:lstStyle/>
           <a:p>
-            <a:pPr algn="l" indent="0" marL="0">
+            <a:pPr marL="0" indent="0" algn="l">
               <a:buNone/>
             </a:pPr>
             <a:r>
@@ -12827,7 +12230,7 @@
           <a:bodyPr wrap="square" rtlCol="0" anchor="ctr"/>
           <a:lstStyle/>
           <a:p>
-            <a:pPr algn="l" indent="0" marL="0">
+            <a:pPr marL="0" indent="0" algn="l">
               <a:buNone/>
             </a:pPr>
             <a:r>
@@ -12891,7 +12294,7 @@
           <a:bodyPr wrap="square" rtlCol="0" anchor="ctr"/>
           <a:lstStyle/>
           <a:p>
-            <a:pPr algn="l" indent="0" marL="0">
+            <a:pPr marL="0" indent="0" algn="l">
               <a:buNone/>
             </a:pPr>
             <a:r>
@@ -12955,7 +12358,7 @@
           <a:bodyPr wrap="square" rtlCol="0" anchor="ctr"/>
           <a:lstStyle/>
           <a:p>
-            <a:pPr algn="l" indent="0" marL="0">
+            <a:pPr marL="0" indent="0" algn="l">
               <a:buNone/>
             </a:pPr>
             <a:r>
@@ -13019,7 +12422,7 @@
           <a:bodyPr wrap="square" rtlCol="0" anchor="ctr"/>
           <a:lstStyle/>
           <a:p>
-            <a:pPr algn="l" indent="0" marL="0">
+            <a:pPr marL="0" indent="0" algn="l">
               <a:buNone/>
             </a:pPr>
             <a:r>
@@ -13083,7 +12486,7 @@
           <a:bodyPr wrap="square" rtlCol="0" anchor="ctr"/>
           <a:lstStyle/>
           <a:p>
-            <a:pPr algn="l" indent="0" marL="0">
+            <a:pPr marL="0" indent="0" algn="l">
               <a:buNone/>
             </a:pPr>
             <a:r>
@@ -13147,7 +12550,7 @@
           <a:bodyPr wrap="square" rtlCol="0" anchor="ctr"/>
           <a:lstStyle/>
           <a:p>
-            <a:pPr algn="l" indent="0" marL="0">
+            <a:pPr marL="0" indent="0" algn="l">
               <a:buNone/>
             </a:pPr>
             <a:r>
@@ -13211,7 +12614,7 @@
           <a:bodyPr wrap="square" rtlCol="0" anchor="ctr"/>
           <a:lstStyle/>
           <a:p>
-            <a:pPr algn="l" indent="0" marL="0">
+            <a:pPr marL="0" indent="0" algn="l">
               <a:buNone/>
             </a:pPr>
             <a:r>
@@ -13275,7 +12678,7 @@
           <a:bodyPr wrap="square" rtlCol="0" anchor="ctr"/>
           <a:lstStyle/>
           <a:p>
-            <a:pPr algn="l" indent="0" marL="0">
+            <a:pPr marL="0" indent="0" algn="l">
               <a:buNone/>
             </a:pPr>
             <a:r>
@@ -13314,7 +12717,7 @@
           <a:bodyPr wrap="square" rtlCol="0" anchor="t"/>
           <a:lstStyle/>
           <a:p>
-            <a:pPr indent="0" marL="0">
+            <a:pPr marL="0" indent="0">
               <a:buNone/>
             </a:pPr>
             <a:r>
@@ -13353,7 +12756,7 @@
           <a:bodyPr wrap="square" rtlCol="0" anchor="ctr"/>
           <a:lstStyle/>
           <a:p>
-            <a:pPr indent="0" marL="0">
+            <a:pPr marL="0" indent="0">
               <a:buNone/>
             </a:pPr>
             <a:r>
@@ -13392,11 +12795,11 @@
           <a:bodyPr wrap="square" rtlCol="0" anchor="ctr"/>
           <a:lstStyle/>
           <a:p>
-            <a:pPr algn="r" indent="0" marL="0">
-              <a:buNone/>
-            </a:pPr>
-            <a:r>
-              <a:rPr lang="en-US" sz="750" b="1" spc="100" kern="0" dirty="0">
+            <a:pPr marL="0" indent="0" algn="r">
+              <a:buNone/>
+            </a:pPr>
+            <a:r>
+              <a:rPr lang="en-US" sz="750" b="1" kern="0" spc="100" dirty="0">
                 <a:solidFill>
                   <a:srgbClr val="D4A62A"/>
                 </a:solidFill>
@@ -13426,6 +12829,7 @@
         <a:solidFill>
           <a:srgbClr val="FFFFFF"/>
         </a:solidFill>
+        <a:effectLst/>
       </p:bgPr>
     </p:bg>
     <p:spTree>
@@ -13463,7 +12867,7 @@
           <a:bodyPr wrap="square" rtlCol="0" anchor="ctr"/>
           <a:lstStyle/>
           <a:p>
-            <a:pPr indent="0" marL="0">
+            <a:pPr marL="0" indent="0">
               <a:buNone/>
             </a:pPr>
             <a:r>
@@ -13477,11 +12881,8 @@
               </a:rPr>
               <a:t>● </a:t>
             </a:r>
-            <a:pPr indent="0" marL="0">
-              <a:buNone/>
-            </a:pPr>
-            <a:r>
-              <a:rPr lang="en-US" sz="1100" b="1" spc="300" kern="0" dirty="0">
+            <a:r>
+              <a:rPr lang="en-US" sz="1100" b="1" kern="0" spc="300" dirty="0">
                 <a:solidFill>
                   <a:srgbClr val="2563EB"/>
                 </a:solidFill>
@@ -13516,7 +12917,7 @@
           <a:bodyPr wrap="square" rtlCol="0" anchor="ctr"/>
           <a:lstStyle/>
           <a:p>
-            <a:pPr indent="0" marL="0">
+            <a:pPr marL="0" indent="0">
               <a:buNone/>
             </a:pPr>
             <a:r>
@@ -13530,9 +12931,6 @@
               </a:rPr>
               <a:t>A small cohort of </a:t>
             </a:r>
-            <a:pPr indent="0" marL="0">
-              <a:buNone/>
-            </a:pPr>
             <a:r>
               <a:rPr lang="en-US" sz="2900" i="1" dirty="0">
                 <a:solidFill>
@@ -13569,7 +12967,7 @@
           <a:bodyPr wrap="square" rtlCol="0" anchor="ctr"/>
           <a:lstStyle/>
           <a:p>
-            <a:pPr indent="0" marL="0">
+            <a:pPr marL="0" indent="0">
               <a:buNone/>
             </a:pPr>
             <a:r>
@@ -13616,14 +13014,14 @@
       </p:sp>
       <p:pic>
         <p:nvPicPr>
-          <p:cNvPr id="6" name="Image 0" descr="preencoded.png">    </p:cNvPr>
+          <p:cNvPr id="6" name="Image 0" descr="preencoded.png"/>
           <p:cNvPicPr>
             <a:picLocks noChangeAspect="1"/>
           </p:cNvPicPr>
           <p:nvPr/>
         </p:nvPicPr>
         <p:blipFill>
-          <a:blip r:embed="rId1"/>
+          <a:blip r:embed="rId3"/>
           <a:stretch>
             <a:fillRect/>
           </a:stretch>
@@ -13659,7 +13057,7 @@
           <a:bodyPr wrap="square" rtlCol="0" anchor="ctr"/>
           <a:lstStyle/>
           <a:p>
-            <a:pPr indent="0" marL="0">
+            <a:pPr marL="0" indent="0">
               <a:buNone/>
             </a:pPr>
             <a:r>
@@ -13698,7 +13096,7 @@
           <a:bodyPr wrap="square" rtlCol="0" anchor="ctr"/>
           <a:lstStyle/>
           <a:p>
-            <a:pPr indent="0" marL="0">
+            <a:pPr marL="0" indent="0">
               <a:buNone/>
             </a:pPr>
             <a:r>
@@ -13737,7 +13135,7 @@
           <a:bodyPr wrap="square" rtlCol="0" anchor="t"/>
           <a:lstStyle/>
           <a:p>
-            <a:pPr indent="0" marL="0">
+            <a:pPr marL="0" indent="0">
               <a:lnSpc>
                 <a:spcPct val="110000"/>
               </a:lnSpc>
@@ -13806,7 +13204,7 @@
           <a:bodyPr wrap="square" rtlCol="0" anchor="ctr"/>
           <a:lstStyle/>
           <a:p>
-            <a:pPr algn="ctr" indent="0" marL="0">
+            <a:pPr marL="0" indent="0" algn="ctr">
               <a:buNone/>
             </a:pPr>
             <a:r>
@@ -13853,14 +13251,14 @@
       </p:sp>
       <p:pic>
         <p:nvPicPr>
-          <p:cNvPr id="13" name="Image 1" descr="preencoded.png">    </p:cNvPr>
+          <p:cNvPr id="13" name="Image 1" descr="preencoded.png"/>
           <p:cNvPicPr>
             <a:picLocks noChangeAspect="1"/>
           </p:cNvPicPr>
           <p:nvPr/>
         </p:nvPicPr>
         <p:blipFill>
-          <a:blip r:embed="rId2"/>
+          <a:blip r:embed="rId4"/>
           <a:stretch>
             <a:fillRect/>
           </a:stretch>
@@ -13896,7 +13294,7 @@
           <a:bodyPr wrap="square" rtlCol="0" anchor="ctr"/>
           <a:lstStyle/>
           <a:p>
-            <a:pPr indent="0" marL="0">
+            <a:pPr marL="0" indent="0">
               <a:buNone/>
             </a:pPr>
             <a:r>
@@ -13935,7 +13333,7 @@
           <a:bodyPr wrap="square" rtlCol="0" anchor="ctr"/>
           <a:lstStyle/>
           <a:p>
-            <a:pPr indent="0" marL="0">
+            <a:pPr marL="0" indent="0">
               <a:buNone/>
             </a:pPr>
             <a:r>
@@ -13974,7 +13372,7 @@
           <a:bodyPr wrap="square" rtlCol="0" anchor="t"/>
           <a:lstStyle/>
           <a:p>
-            <a:pPr indent="0" marL="0">
+            <a:pPr marL="0" indent="0">
               <a:lnSpc>
                 <a:spcPct val="110000"/>
               </a:lnSpc>
@@ -14043,7 +13441,7 @@
           <a:bodyPr wrap="square" rtlCol="0" anchor="ctr"/>
           <a:lstStyle/>
           <a:p>
-            <a:pPr algn="ctr" indent="0" marL="0">
+            <a:pPr marL="0" indent="0" algn="ctr">
               <a:buNone/>
             </a:pPr>
             <a:r>
@@ -14090,14 +13488,14 @@
       </p:sp>
       <p:pic>
         <p:nvPicPr>
-          <p:cNvPr id="20" name="Image 2" descr="preencoded.png">    </p:cNvPr>
+          <p:cNvPr id="20" name="Image 2" descr="preencoded.png"/>
           <p:cNvPicPr>
             <a:picLocks noChangeAspect="1"/>
           </p:cNvPicPr>
           <p:nvPr/>
         </p:nvPicPr>
         <p:blipFill>
-          <a:blip r:embed="rId3"/>
+          <a:blip r:embed="rId5"/>
           <a:stretch>
             <a:fillRect/>
           </a:stretch>
@@ -14133,7 +13531,7 @@
           <a:bodyPr wrap="square" rtlCol="0" anchor="ctr"/>
           <a:lstStyle/>
           <a:p>
-            <a:pPr indent="0" marL="0">
+            <a:pPr marL="0" indent="0">
               <a:buNone/>
             </a:pPr>
             <a:r>
@@ -14172,7 +13570,7 @@
           <a:bodyPr wrap="square" rtlCol="0" anchor="ctr"/>
           <a:lstStyle/>
           <a:p>
-            <a:pPr indent="0" marL="0">
+            <a:pPr marL="0" indent="0">
               <a:buNone/>
             </a:pPr>
             <a:r>
@@ -14211,7 +13609,7 @@
           <a:bodyPr wrap="square" rtlCol="0" anchor="t"/>
           <a:lstStyle/>
           <a:p>
-            <a:pPr indent="0" marL="0">
+            <a:pPr marL="0" indent="0">
               <a:lnSpc>
                 <a:spcPct val="110000"/>
               </a:lnSpc>
@@ -14280,7 +13678,7 @@
           <a:bodyPr wrap="square" rtlCol="0" anchor="ctr"/>
           <a:lstStyle/>
           <a:p>
-            <a:pPr algn="ctr" indent="0" marL="0">
+            <a:pPr marL="0" indent="0" algn="ctr">
               <a:buNone/>
             </a:pPr>
             <a:r>
@@ -14322,14 +13720,14 @@
       </p:sp>
       <p:pic>
         <p:nvPicPr>
-          <p:cNvPr id="27" name="Image 3" descr="preencoded.png">    </p:cNvPr>
+          <p:cNvPr id="27" name="Image 3" descr="preencoded.png"/>
           <p:cNvPicPr>
             <a:picLocks noChangeAspect="1"/>
           </p:cNvPicPr>
           <p:nvPr/>
         </p:nvPicPr>
         <p:blipFill>
-          <a:blip r:embed="rId4"/>
+          <a:blip r:embed="rId6"/>
           <a:stretch>
             <a:fillRect/>
           </a:stretch>
@@ -14365,7 +13763,7 @@
           <a:bodyPr wrap="square" rtlCol="0" anchor="ctr"/>
           <a:lstStyle/>
           <a:p>
-            <a:pPr indent="0" marL="0">
+            <a:pPr marL="0" indent="0">
               <a:lnSpc>
                 <a:spcPct val="106000"/>
               </a:lnSpc>
@@ -14382,12 +13780,6 @@
               </a:rPr>
               <a:t>Dexter's open lane:  </a:t>
             </a:r>
-            <a:pPr indent="0" marL="0">
-              <a:lnSpc>
-                <a:spcPct val="106000"/>
-              </a:lnSpc>
-              <a:buNone/>
-            </a:pPr>
             <a:r>
               <a:rPr lang="en-US" sz="1150" dirty="0">
                 <a:solidFill>
@@ -14424,7 +13816,7 @@
           <a:bodyPr wrap="square" rtlCol="0" anchor="ctr"/>
           <a:lstStyle/>
           <a:p>
-            <a:pPr indent="0" marL="0">
+            <a:pPr marL="0" indent="0">
               <a:buNone/>
             </a:pPr>
             <a:r>
@@ -14463,11 +13855,11 @@
           <a:bodyPr wrap="square" rtlCol="0" anchor="ctr"/>
           <a:lstStyle/>
           <a:p>
-            <a:pPr algn="r" indent="0" marL="0">
-              <a:buNone/>
-            </a:pPr>
-            <a:r>
-              <a:rPr lang="en-US" sz="750" b="1" spc="100" kern="0" dirty="0">
+            <a:pPr marL="0" indent="0" algn="r">
+              <a:buNone/>
+            </a:pPr>
+            <a:r>
+              <a:rPr lang="en-US" sz="750" b="1" kern="0" spc="100" dirty="0">
                 <a:solidFill>
                   <a:srgbClr val="D4A62A"/>
                 </a:solidFill>
@@ -14497,6 +13889,7 @@
         <a:solidFill>
           <a:srgbClr val="FFFFFF"/>
         </a:solidFill>
+        <a:effectLst/>
       </p:bgPr>
     </p:bg>
     <p:spTree>
@@ -14534,11 +13927,11 @@
           <a:bodyPr wrap="square" rtlCol="0" anchor="ctr"/>
           <a:lstStyle/>
           <a:p>
-            <a:pPr indent="0" marL="0">
-              <a:buNone/>
-            </a:pPr>
-            <a:r>
-              <a:rPr lang="en-US" sz="800" dirty="0">
+            <a:pPr marL="0" indent="0">
+              <a:buNone/>
+            </a:pPr>
+            <a:r>
+              <a:rPr lang="en-US" sz="800">
                 <a:solidFill>
                   <a:srgbClr val="2563EB"/>
                 </a:solidFill>
@@ -14548,11 +13941,8 @@
               </a:rPr>
               <a:t>● </a:t>
             </a:r>
-            <a:pPr indent="0" marL="0">
-              <a:buNone/>
-            </a:pPr>
-            <a:r>
-              <a:rPr lang="en-US" sz="1100" b="1" spc="300" kern="0" dirty="0">
+            <a:r>
+              <a:rPr lang="en-US" sz="1100" b="1" kern="0" spc="300">
                 <a:solidFill>
                   <a:srgbClr val="2563EB"/>
                 </a:solidFill>
@@ -14560,7 +13950,7 @@
                 <a:ea typeface="Arial" pitchFamily="34" charset="-122"/>
                 <a:cs typeface="Arial" pitchFamily="34" charset="-120"/>
               </a:rPr>
-              <a:t>REGIONS OF FOCUS</a:t>
+              <a:t>HEADQUARTERS</a:t>
             </a:r>
             <a:endParaRPr lang="en-US" sz="1100" dirty="0"/>
           </a:p>
@@ -14587,11 +13977,11 @@
           <a:bodyPr wrap="square" rtlCol="0" anchor="ctr"/>
           <a:lstStyle/>
           <a:p>
-            <a:pPr indent="0" marL="0">
-              <a:buNone/>
-            </a:pPr>
-            <a:r>
-              <a:rPr lang="en-US" sz="2900" b="1" dirty="0">
+            <a:pPr marL="0" indent="0">
+              <a:buNone/>
+            </a:pPr>
+            <a:r>
+              <a:rPr lang="en-US" sz="2900" b="1">
                 <a:solidFill>
                   <a:srgbClr val="141A24"/>
                 </a:solidFill>
@@ -14599,21 +13989,7 @@
                 <a:ea typeface="Arial" pitchFamily="34" charset="-122"/>
                 <a:cs typeface="Arial" pitchFamily="34" charset="-120"/>
               </a:rPr>
-              <a:t>Where the peers sit — and where </a:t>
-            </a:r>
-            <a:pPr indent="0" marL="0">
-              <a:buNone/>
-            </a:pPr>
-            <a:r>
-              <a:rPr lang="en-US" sz="2900" i="1" dirty="0">
-                <a:solidFill>
-                  <a:srgbClr val="2563EB"/>
-                </a:solidFill>
-                <a:latin typeface="Georgia" pitchFamily="34" charset="0"/>
-                <a:ea typeface="Georgia" pitchFamily="34" charset="-122"/>
-                <a:cs typeface="Georgia" pitchFamily="34" charset="-120"/>
-              </a:rPr>
-              <a:t>we focus.</a:t>
+              <a:t>Where each agency is headquartered.</a:t>
             </a:r>
             <a:endParaRPr lang="en-US" sz="2900" dirty="0"/>
           </a:p>
@@ -14640,11 +14016,11 @@
           <a:bodyPr wrap="square" rtlCol="0" anchor="ctr"/>
           <a:lstStyle/>
           <a:p>
-            <a:pPr indent="0" marL="0">
-              <a:buNone/>
-            </a:pPr>
-            <a:r>
-              <a:rPr lang="en-US" sz="1350" i="1" dirty="0">
+            <a:pPr marL="0" indent="0">
+              <a:buNone/>
+            </a:pPr>
+            <a:r>
+              <a:rPr lang="en-US" sz="1350" i="1">
                 <a:solidFill>
                   <a:srgbClr val="6B7280"/>
                 </a:solidFill>
@@ -14652,7 +14028,7 @@
                 <a:ea typeface="Arial" pitchFamily="34" charset="-122"/>
                 <a:cs typeface="Arial" pitchFamily="34" charset="-120"/>
               </a:rPr>
-              <a:t>The women-founded peers are coastal and pro-oriented. Dexter anchors the Carolinas and the Southeast college market.</a:t>
+              <a:t>Founder-led, women-built agencies are based across the country. Dexter Sports Co. is headquartered in Charlotte, NC.</a:t>
             </a:r>
             <a:endParaRPr lang="en-US" sz="1350" dirty="0"/>
           </a:p>
@@ -14660,14 +14036,20 @@
       </p:sp>
       <p:pic>
         <p:nvPicPr>
-          <p:cNvPr id="5" name="Image 0" descr="/home/claude/us_map.png">    </p:cNvPr>
+          <p:cNvPr id="27" name="Picture 26">
+            <a:extLst>
+              <a:ext uri="{FF2B5EF4-FFF2-40B4-BE49-F238E27FC236}">
+                <a16:creationId xmlns:a16="http://schemas.microsoft.com/office/drawing/2014/main" id="{DA80812D-B2F8-3957-26E6-2890F9E3D24B}"/>
+              </a:ext>
+            </a:extLst>
+          </p:cNvPr>
           <p:cNvPicPr>
-            <a:picLocks noChangeAspect="1"/>
+            <a:picLocks/>
           </p:cNvPicPr>
           <p:nvPr/>
         </p:nvPicPr>
         <p:blipFill>
-          <a:blip r:embed="rId1"/>
+          <a:blip r:embed="rId3"/>
           <a:stretch>
             <a:fillRect/>
           </a:stretch>
@@ -14703,11 +14085,11 @@
           <a:bodyPr wrap="square" rtlCol="0" anchor="ctr"/>
           <a:lstStyle/>
           <a:p>
-            <a:pPr indent="0" marL="0">
-              <a:buNone/>
-            </a:pPr>
-            <a:r>
-              <a:rPr lang="en-US" sz="1000" b="1" spc="200" kern="0" dirty="0">
+            <a:pPr marL="0" indent="0">
+              <a:buNone/>
+            </a:pPr>
+            <a:r>
+              <a:rPr lang="en-US" sz="1000" b="1" kern="0" spc="200">
                 <a:solidFill>
                   <a:srgbClr val="6B7280"/>
                 </a:solidFill>
@@ -14715,7 +14097,7 @@
                 <a:ea typeface="Arial" pitchFamily="34" charset="-122"/>
                 <a:cs typeface="Arial" pitchFamily="34" charset="-120"/>
               </a:rPr>
-              <a:t>HOME BASE</a:t>
+              <a:t>HEADQUARTERS</a:t>
             </a:r>
             <a:endParaRPr lang="en-US" sz="1000" dirty="0"/>
           </a:p>
@@ -14740,6 +14122,13 @@
           </a:solidFill>
           <a:ln/>
         </p:spPr>
+        <p:txBody>
+          <a:bodyPr/>
+          <a:lstStyle/>
+          <a:p>
+            <a:endParaRPr lang="en-US"/>
+          </a:p>
+        </p:txBody>
       </p:sp>
       <p:sp>
         <p:nvSpPr>
@@ -14762,7 +14151,7 @@
           <a:bodyPr wrap="square" rtlCol="0" anchor="ctr"/>
           <a:lstStyle/>
           <a:p>
-            <a:pPr indent="0" marL="0">
+            <a:pPr marL="0" indent="0">
               <a:buNone/>
             </a:pPr>
             <a:r>
@@ -14801,7 +14190,7 @@
           <a:bodyPr wrap="square" rtlCol="0" anchor="ctr"/>
           <a:lstStyle/>
           <a:p>
-            <a:pPr indent="0" marL="0">
+            <a:pPr marL="0" indent="0">
               <a:buNone/>
             </a:pPr>
             <a:r>
@@ -14838,6 +14227,13 @@
           </a:solidFill>
           <a:ln/>
         </p:spPr>
+        <p:txBody>
+          <a:bodyPr/>
+          <a:lstStyle/>
+          <a:p>
+            <a:endParaRPr lang="en-US"/>
+          </a:p>
+        </p:txBody>
       </p:sp>
       <p:sp>
         <p:nvSpPr>
@@ -14860,7 +14256,7 @@
           <a:bodyPr wrap="square" rtlCol="0" anchor="ctr"/>
           <a:lstStyle/>
           <a:p>
-            <a:pPr indent="0" marL="0">
+            <a:pPr marL="0" indent="0">
               <a:buNone/>
             </a:pPr>
             <a:r>
@@ -14899,7 +14295,7 @@
           <a:bodyPr wrap="square" rtlCol="0" anchor="ctr"/>
           <a:lstStyle/>
           <a:p>
-            <a:pPr indent="0" marL="0">
+            <a:pPr marL="0" indent="0">
               <a:buNone/>
             </a:pPr>
             <a:r>
@@ -14936,6 +14332,13 @@
           </a:solidFill>
           <a:ln/>
         </p:spPr>
+        <p:txBody>
+          <a:bodyPr/>
+          <a:lstStyle/>
+          <a:p>
+            <a:endParaRPr lang="en-US"/>
+          </a:p>
+        </p:txBody>
       </p:sp>
       <p:sp>
         <p:nvSpPr>
@@ -14958,7 +14361,7 @@
           <a:bodyPr wrap="square" rtlCol="0" anchor="ctr"/>
           <a:lstStyle/>
           <a:p>
-            <a:pPr indent="0" marL="0">
+            <a:pPr marL="0" indent="0">
               <a:buNone/>
             </a:pPr>
             <a:r>
@@ -14997,7 +14400,7 @@
           <a:bodyPr wrap="square" rtlCol="0" anchor="ctr"/>
           <a:lstStyle/>
           <a:p>
-            <a:pPr indent="0" marL="0">
+            <a:pPr marL="0" indent="0">
               <a:buNone/>
             </a:pPr>
             <a:r>
@@ -15034,6 +14437,13 @@
           </a:solidFill>
           <a:ln/>
         </p:spPr>
+        <p:txBody>
+          <a:bodyPr/>
+          <a:lstStyle/>
+          <a:p>
+            <a:endParaRPr lang="en-US"/>
+          </a:p>
+        </p:txBody>
       </p:sp>
       <p:sp>
         <p:nvSpPr>
@@ -15056,7 +14466,7 @@
           <a:bodyPr wrap="square" rtlCol="0" anchor="ctr"/>
           <a:lstStyle/>
           <a:p>
-            <a:pPr indent="0" marL="0">
+            <a:pPr marL="0" indent="0">
               <a:buNone/>
             </a:pPr>
             <a:r>
@@ -15095,7 +14505,7 @@
           <a:bodyPr wrap="square" rtlCol="0" anchor="ctr"/>
           <a:lstStyle/>
           <a:p>
-            <a:pPr indent="0" marL="0">
+            <a:pPr marL="0" indent="0">
               <a:buNone/>
             </a:pPr>
             <a:r>
@@ -15132,6 +14542,13 @@
           </a:solidFill>
           <a:ln/>
         </p:spPr>
+        <p:txBody>
+          <a:bodyPr/>
+          <a:lstStyle/>
+          <a:p>
+            <a:endParaRPr lang="en-US"/>
+          </a:p>
+        </p:txBody>
       </p:sp>
       <p:sp>
         <p:nvSpPr>
@@ -15154,7 +14571,7 @@
           <a:bodyPr wrap="square" rtlCol="0" anchor="ctr"/>
           <a:lstStyle/>
           <a:p>
-            <a:pPr indent="0" marL="0">
+            <a:pPr marL="0" indent="0">
               <a:buNone/>
             </a:pPr>
             <a:r>
@@ -15193,7 +14610,7 @@
           <a:bodyPr wrap="square" rtlCol="0" anchor="ctr"/>
           <a:lstStyle/>
           <a:p>
-            <a:pPr indent="0" marL="0">
+            <a:pPr marL="0" indent="0">
               <a:buNone/>
             </a:pPr>
             <a:r>
@@ -15232,6 +14649,13 @@
           </a:solidFill>
           <a:ln/>
         </p:spPr>
+        <p:txBody>
+          <a:bodyPr/>
+          <a:lstStyle/>
+          <a:p>
+            <a:endParaRPr lang="en-US"/>
+          </a:p>
+        </p:txBody>
       </p:sp>
       <p:sp>
         <p:nvSpPr>
@@ -15254,14 +14678,14 @@
           <a:bodyPr wrap="square" rtlCol="0" anchor="ctr"/>
           <a:lstStyle/>
           <a:p>
-            <a:pPr indent="0" marL="0">
+            <a:pPr marL="0" indent="0">
               <a:lnSpc>
                 <a:spcPct val="105000"/>
               </a:lnSpc>
               <a:buNone/>
             </a:pPr>
             <a:r>
-              <a:rPr lang="en-US" sz="950" b="1" dirty="0">
+              <a:rPr lang="en-US" sz="950" b="1">
                 <a:solidFill>
                   <a:srgbClr val="D4A62A"/>
                 </a:solidFill>
@@ -15269,24 +14693,7 @@
                 <a:ea typeface="Arial" pitchFamily="34" charset="-122"/>
                 <a:cs typeface="Arial" pitchFamily="34" charset="-120"/>
               </a:rPr>
-              <a:t>Our edge: </a:t>
-            </a:r>
-            <a:pPr indent="0" marL="0">
-              <a:lnSpc>
-                <a:spcPct val="105000"/>
-              </a:lnSpc>
-              <a:buNone/>
-            </a:pPr>
-            <a:r>
-              <a:rPr lang="en-US" sz="950" dirty="0">
-                <a:solidFill>
-                  <a:srgbClr val="93B4FF"/>
-                </a:solidFill>
-                <a:latin typeface="Arial" pitchFamily="34" charset="0"/>
-                <a:ea typeface="Arial" pitchFamily="34" charset="-122"/>
-                <a:cs typeface="Arial" pitchFamily="34" charset="-120"/>
-              </a:rPr>
-              <a:t>we own the Carolinas and the ACC/SEC/HBCU footprint no peer sits in.</a:t>
+              <a:t>Dexter Sports Co.: the only agency in this group headquartered in the Carolinas.</a:t>
             </a:r>
             <a:endParaRPr lang="en-US" sz="950" dirty="0"/>
           </a:p>
@@ -15313,7 +14720,7 @@
           <a:bodyPr wrap="square" rtlCol="0" anchor="ctr"/>
           <a:lstStyle/>
           <a:p>
-            <a:pPr indent="0" marL="0">
+            <a:pPr marL="0" indent="0">
               <a:buNone/>
             </a:pPr>
             <a:r>
@@ -15325,7 +14732,18 @@
                 <a:ea typeface="Arial" pitchFamily="34" charset="-122"/>
                 <a:cs typeface="Arial" pitchFamily="34" charset="-120"/>
               </a:rPr>
-              <a:t>HQ locations per company sites, LinkedIn, and press. OneForOne publishes no single HQ. Shading marks each agency's home state, not its only market.</a:t>
+              <a:t>HQ locations per company sites, LinkedIn, and press. OneForOne publishes no single HQ</a:t>
+            </a:r>
+            <a:r>
+              <a:rPr lang="en-US" sz="700" i="1">
+                <a:solidFill>
+                  <a:srgbClr val="6B7280"/>
+                </a:solidFill>
+                <a:latin typeface="Arial" pitchFamily="34" charset="0"/>
+                <a:ea typeface="Arial" pitchFamily="34" charset="-122"/>
+                <a:cs typeface="Arial" pitchFamily="34" charset="-120"/>
+              </a:rPr>
+              <a:t>. Shading marks each agency's headquarters state.</a:t>
             </a:r>
             <a:endParaRPr lang="en-US" sz="700" dirty="0"/>
           </a:p>
@@ -15352,11 +14770,11 @@
           <a:bodyPr wrap="square" rtlCol="0" anchor="ctr"/>
           <a:lstStyle/>
           <a:p>
-            <a:pPr algn="r" indent="0" marL="0">
-              <a:buNone/>
-            </a:pPr>
-            <a:r>
-              <a:rPr lang="en-US" sz="750" b="1" spc="100" kern="0" dirty="0">
+            <a:pPr marL="0" indent="0" algn="r">
+              <a:buNone/>
+            </a:pPr>
+            <a:r>
+              <a:rPr lang="en-US" sz="750" b="1" kern="0" spc="100" dirty="0">
                 <a:solidFill>
                   <a:srgbClr val="D4A62A"/>
                 </a:solidFill>
@@ -15386,6 +14804,7 @@
         <a:solidFill>
           <a:srgbClr val="0B1220"/>
         </a:solidFill>
+        <a:effectLst/>
       </p:bgPr>
     </p:bg>
     <p:spTree>
@@ -15423,7 +14842,7 @@
           <a:bodyPr wrap="square" rtlCol="0" anchor="ctr"/>
           <a:lstStyle/>
           <a:p>
-            <a:pPr indent="0" marL="0">
+            <a:pPr marL="0" indent="0">
               <a:buNone/>
             </a:pPr>
             <a:r>
@@ -15437,11 +14856,8 @@
               </a:rPr>
               <a:t>● </a:t>
             </a:r>
-            <a:pPr indent="0" marL="0">
-              <a:buNone/>
-            </a:pPr>
-            <a:r>
-              <a:rPr lang="en-US" sz="1100" b="1" spc="300" kern="0" dirty="0">
+            <a:r>
+              <a:rPr lang="en-US" sz="1100" b="1" kern="0" spc="300" dirty="0">
                 <a:solidFill>
                   <a:srgbClr val="93B4FF"/>
                 </a:solidFill>
@@ -15476,7 +14892,7 @@
           <a:bodyPr wrap="square" rtlCol="0" anchor="ctr"/>
           <a:lstStyle/>
           <a:p>
-            <a:pPr indent="0" marL="0">
+            <a:pPr marL="0" indent="0">
               <a:buNone/>
             </a:pPr>
             <a:r>
@@ -15490,9 +14906,6 @@
               </a:rPr>
               <a:t>Led by a former </a:t>
             </a:r>
-            <a:pPr indent="0" marL="0">
-              <a:buNone/>
-            </a:pPr>
             <a:r>
               <a:rPr lang="en-US" sz="2900" i="1" dirty="0">
                 <a:solidFill>
@@ -15529,7 +14942,7 @@
           <a:bodyPr wrap="square" rtlCol="0" anchor="ctr"/>
           <a:lstStyle/>
           <a:p>
-            <a:pPr indent="0" marL="0">
+            <a:pPr marL="0" indent="0">
               <a:buNone/>
             </a:pPr>
             <a:r>
@@ -15568,7 +14981,7 @@
           <a:bodyPr wrap="square" rtlCol="0" anchor="ctr"/>
           <a:lstStyle/>
           <a:p>
-            <a:pPr indent="0" marL="0">
+            <a:pPr marL="0" indent="0">
               <a:buNone/>
             </a:pPr>
             <a:r>
@@ -15607,7 +15020,7 @@
           <a:bodyPr wrap="square" rtlCol="0" anchor="ctr"/>
           <a:lstStyle/>
           <a:p>
-            <a:pPr indent="0" marL="0">
+            <a:pPr marL="0" indent="0">
               <a:buNone/>
             </a:pPr>
             <a:r>
@@ -15673,11 +15086,11 @@
           <a:bodyPr wrap="square" rtlCol="0" anchor="ctr"/>
           <a:lstStyle/>
           <a:p>
-            <a:pPr algn="ctr" indent="0" marL="0">
-              <a:buNone/>
-            </a:pPr>
-            <a:r>
-              <a:rPr lang="en-US" sz="1050" b="1" spc="100" kern="0" dirty="0">
+            <a:pPr marL="0" indent="0" algn="ctr">
+              <a:buNone/>
+            </a:pPr>
+            <a:r>
+              <a:rPr lang="en-US" sz="1050" b="1" kern="0" spc="100" dirty="0">
                 <a:solidFill>
                   <a:srgbClr val="93B4FF"/>
                 </a:solidFill>
@@ -15739,11 +15152,11 @@
           <a:bodyPr wrap="square" rtlCol="0" anchor="ctr"/>
           <a:lstStyle/>
           <a:p>
-            <a:pPr algn="ctr" indent="0" marL="0">
-              <a:buNone/>
-            </a:pPr>
-            <a:r>
-              <a:rPr lang="en-US" sz="1050" b="1" spc="100" kern="0" dirty="0">
+            <a:pPr marL="0" indent="0" algn="ctr">
+              <a:buNone/>
+            </a:pPr>
+            <a:r>
+              <a:rPr lang="en-US" sz="1050" b="1" kern="0" spc="100" dirty="0">
                 <a:solidFill>
                   <a:srgbClr val="93B4FF"/>
                 </a:solidFill>
@@ -15805,11 +15218,11 @@
           <a:bodyPr wrap="square" rtlCol="0" anchor="ctr"/>
           <a:lstStyle/>
           <a:p>
-            <a:pPr algn="ctr" indent="0" marL="0">
-              <a:buNone/>
-            </a:pPr>
-            <a:r>
-              <a:rPr lang="en-US" sz="1050" b="1" spc="100" kern="0" dirty="0">
+            <a:pPr marL="0" indent="0" algn="ctr">
+              <a:buNone/>
+            </a:pPr>
+            <a:r>
+              <a:rPr lang="en-US" sz="1050" b="1" kern="0" spc="100" dirty="0">
                 <a:solidFill>
                   <a:srgbClr val="93B4FF"/>
                 </a:solidFill>
@@ -15847,261 +15260,7 @@
       </p:sp>
       <p:pic>
         <p:nvPicPr>
-          <p:cNvPr id="14" name="Image 0" descr="preencoded.png">    </p:cNvPr>
-          <p:cNvPicPr>
-            <a:picLocks noChangeAspect="1"/>
-          </p:cNvPicPr>
-          <p:nvPr/>
-        </p:nvPicPr>
-        <p:blipFill>
-          <a:blip r:embed="rId1"/>
-          <a:stretch>
-            <a:fillRect/>
-          </a:stretch>
-        </p:blipFill>
-        <p:spPr>
-          <a:xfrm>
-            <a:off x="6062472" y="2359152"/>
-            <a:ext cx="420624" cy="420624"/>
-          </a:xfrm>
-          <a:prstGeom prst="rect">
-            <a:avLst/>
-          </a:prstGeom>
-        </p:spPr>
-      </p:pic>
-      <p:sp>
-        <p:nvSpPr>
-          <p:cNvPr id="15" name="Text 12"/>
-          <p:cNvSpPr/>
-          <p:nvPr/>
-        </p:nvSpPr>
-        <p:spPr>
-          <a:xfrm>
-            <a:off x="6062472" y="2852928"/>
-            <a:ext cx="2468880" cy="365760"/>
-          </a:xfrm>
-          <a:prstGeom prst="rect">
-            <a:avLst/>
-          </a:prstGeom>
-          <a:noFill/>
-          <a:ln/>
-        </p:spPr>
-        <p:txBody>
-          <a:bodyPr wrap="square" rtlCol="0" anchor="ctr"/>
-          <a:lstStyle/>
-          <a:p>
-            <a:pPr indent="0" marL="0">
-              <a:buNone/>
-            </a:pPr>
-            <a:r>
-              <a:rPr lang="en-US" sz="1350" b="1" dirty="0">
-                <a:solidFill>
-                  <a:srgbClr val="93B4FF"/>
-                </a:solidFill>
-                <a:latin typeface="Arial" pitchFamily="34" charset="0"/>
-                <a:ea typeface="Arial" pitchFamily="34" charset="-122"/>
-                <a:cs typeface="Arial" pitchFamily="34" charset="-120"/>
-              </a:rPr>
-              <a:t>Legal &amp; contracting</a:t>
-            </a:r>
-            <a:endParaRPr lang="en-US" sz="1350" dirty="0"/>
-          </a:p>
-        </p:txBody>
-      </p:sp>
-      <p:sp>
-        <p:nvSpPr>
-          <p:cNvPr id="16" name="Text 13"/>
-          <p:cNvSpPr/>
-          <p:nvPr/>
-        </p:nvSpPr>
-        <p:spPr>
-          <a:xfrm>
-            <a:off x="6062472" y="3200400"/>
-            <a:ext cx="2414016" cy="640080"/>
-          </a:xfrm>
-          <a:prstGeom prst="rect">
-            <a:avLst/>
-          </a:prstGeom>
-          <a:noFill/>
-          <a:ln/>
-        </p:spPr>
-        <p:txBody>
-          <a:bodyPr wrap="square" rtlCol="0" anchor="t"/>
-          <a:lstStyle/>
-          <a:p>
-            <a:pPr indent="0" marL="0">
-              <a:lnSpc>
-                <a:spcPct val="105000"/>
-              </a:lnSpc>
-              <a:buNone/>
-            </a:pPr>
-            <a:r>
-              <a:rPr lang="en-US" sz="980" dirty="0">
-                <a:solidFill>
-                  <a:srgbClr val="C3CAD6"/>
-                </a:solidFill>
-                <a:latin typeface="Arial" pitchFamily="34" charset="0"/>
-                <a:ea typeface="Arial" pitchFamily="34" charset="-122"/>
-                <a:cs typeface="Arial" pitchFamily="34" charset="-120"/>
-              </a:rPr>
-              <a:t>A Juris Master in risk management and compliance — she reviews and negotiates contracts, buyouts and NIL deals directly.</a:t>
-            </a:r>
-            <a:endParaRPr lang="en-US" sz="980" dirty="0"/>
-          </a:p>
-        </p:txBody>
-      </p:sp>
-      <p:sp>
-        <p:nvSpPr>
-          <p:cNvPr id="17" name="Shape 14"/>
-          <p:cNvSpPr/>
-          <p:nvPr/>
-        </p:nvSpPr>
-        <p:spPr>
-          <a:xfrm>
-            <a:off x="9052560" y="2103120"/>
-            <a:ext cx="2926080" cy="1783080"/>
-          </a:xfrm>
-          <a:prstGeom prst="roundRect">
-            <a:avLst>
-              <a:gd name="adj" fmla="val 5128"/>
-            </a:avLst>
-          </a:prstGeom>
-          <a:solidFill>
-            <a:srgbClr val="121A2B"/>
-          </a:solidFill>
-          <a:ln/>
-        </p:spPr>
-      </p:sp>
-      <p:pic>
-        <p:nvPicPr>
-          <p:cNvPr id="18" name="Image 1" descr="preencoded.png">    </p:cNvPr>
-          <p:cNvPicPr>
-            <a:picLocks noChangeAspect="1"/>
-          </p:cNvPicPr>
-          <p:nvPr/>
-        </p:nvPicPr>
-        <p:blipFill>
-          <a:blip r:embed="rId2"/>
-          <a:stretch>
-            <a:fillRect/>
-          </a:stretch>
-        </p:blipFill>
-        <p:spPr>
-          <a:xfrm>
-            <a:off x="9308592" y="2359152"/>
-            <a:ext cx="420624" cy="420624"/>
-          </a:xfrm>
-          <a:prstGeom prst="rect">
-            <a:avLst/>
-          </a:prstGeom>
-        </p:spPr>
-      </p:pic>
-      <p:sp>
-        <p:nvSpPr>
-          <p:cNvPr id="19" name="Text 15"/>
-          <p:cNvSpPr/>
-          <p:nvPr/>
-        </p:nvSpPr>
-        <p:spPr>
-          <a:xfrm>
-            <a:off x="9308592" y="2852928"/>
-            <a:ext cx="2468880" cy="365760"/>
-          </a:xfrm>
-          <a:prstGeom prst="rect">
-            <a:avLst/>
-          </a:prstGeom>
-          <a:noFill/>
-          <a:ln/>
-        </p:spPr>
-        <p:txBody>
-          <a:bodyPr wrap="square" rtlCol="0" anchor="ctr"/>
-          <a:lstStyle/>
-          <a:p>
-            <a:pPr indent="0" marL="0">
-              <a:buNone/>
-            </a:pPr>
-            <a:r>
-              <a:rPr lang="en-US" sz="1350" b="1" dirty="0">
-                <a:solidFill>
-                  <a:srgbClr val="93B4FF"/>
-                </a:solidFill>
-                <a:latin typeface="Arial" pitchFamily="34" charset="0"/>
-                <a:ea typeface="Arial" pitchFamily="34" charset="-122"/>
-                <a:cs typeface="Arial" pitchFamily="34" charset="-120"/>
-              </a:rPr>
-              <a:t>Partnerships &amp; gifts</a:t>
-            </a:r>
-            <a:endParaRPr lang="en-US" sz="1350" dirty="0"/>
-          </a:p>
-        </p:txBody>
-      </p:sp>
-      <p:sp>
-        <p:nvSpPr>
-          <p:cNvPr id="20" name="Text 16"/>
-          <p:cNvSpPr/>
-          <p:nvPr/>
-        </p:nvSpPr>
-        <p:spPr>
-          <a:xfrm>
-            <a:off x="9308592" y="3200400"/>
-            <a:ext cx="2414016" cy="640080"/>
-          </a:xfrm>
-          <a:prstGeom prst="rect">
-            <a:avLst/>
-          </a:prstGeom>
-          <a:noFill/>
-          <a:ln/>
-        </p:spPr>
-        <p:txBody>
-          <a:bodyPr wrap="square" rtlCol="0" anchor="t"/>
-          <a:lstStyle/>
-          <a:p>
-            <a:pPr indent="0" marL="0">
-              <a:lnSpc>
-                <a:spcPct val="105000"/>
-              </a:lnSpc>
-              <a:buNone/>
-            </a:pPr>
-            <a:r>
-              <a:rPr lang="en-US" sz="980" dirty="0">
-                <a:solidFill>
-                  <a:srgbClr val="C3CAD6"/>
-                </a:solidFill>
-                <a:latin typeface="Arial" pitchFamily="34" charset="0"/>
-                <a:ea typeface="Arial" pitchFamily="34" charset="-122"/>
-                <a:cs typeface="Arial" pitchFamily="34" charset="-120"/>
-              </a:rPr>
-              <a:t>CFRE with 10+ years in major gifts, corporate partnerships and sponsorship — the second revenue line, as a core skill.</a:t>
-            </a:r>
-            <a:endParaRPr lang="en-US" sz="980" dirty="0"/>
-          </a:p>
-        </p:txBody>
-      </p:sp>
-      <p:sp>
-        <p:nvSpPr>
-          <p:cNvPr id="21" name="Shape 17"/>
-          <p:cNvSpPr/>
-          <p:nvPr/>
-        </p:nvSpPr>
-        <p:spPr>
-          <a:xfrm>
-            <a:off x="5806440" y="4069080"/>
-            <a:ext cx="2926080" cy="1783080"/>
-          </a:xfrm>
-          <a:prstGeom prst="roundRect">
-            <a:avLst>
-              <a:gd name="adj" fmla="val 5128"/>
-            </a:avLst>
-          </a:prstGeom>
-          <a:solidFill>
-            <a:srgbClr val="121A2B"/>
-          </a:solidFill>
-          <a:ln/>
-        </p:spPr>
-      </p:sp>
-      <p:pic>
-        <p:nvPicPr>
-          <p:cNvPr id="22" name="Image 2" descr="preencoded.png">    </p:cNvPr>
+          <p:cNvPr id="14" name="Image 0" descr="preencoded.png"/>
           <p:cNvPicPr>
             <a:picLocks noChangeAspect="1"/>
           </p:cNvPicPr>
@@ -16115,7 +15274,7 @@
         </p:blipFill>
         <p:spPr>
           <a:xfrm>
-            <a:off x="6062472" y="4325112"/>
+            <a:off x="6062472" y="2359152"/>
             <a:ext cx="420624" cy="420624"/>
           </a:xfrm>
           <a:prstGeom prst="rect">
@@ -16125,13 +15284,13 @@
       </p:pic>
       <p:sp>
         <p:nvSpPr>
-          <p:cNvPr id="23" name="Text 18"/>
-          <p:cNvSpPr/>
-          <p:nvPr/>
-        </p:nvSpPr>
-        <p:spPr>
-          <a:xfrm>
-            <a:off x="6062472" y="4818888"/>
+          <p:cNvPr id="15" name="Text 12"/>
+          <p:cNvSpPr/>
+          <p:nvPr/>
+        </p:nvSpPr>
+        <p:spPr>
+          <a:xfrm>
+            <a:off x="6062472" y="2852928"/>
             <a:ext cx="2468880" cy="365760"/>
           </a:xfrm>
           <a:prstGeom prst="rect">
@@ -16144,7 +15303,7 @@
           <a:bodyPr wrap="square" rtlCol="0" anchor="ctr"/>
           <a:lstStyle/>
           <a:p>
-            <a:pPr indent="0" marL="0">
+            <a:pPr marL="0" indent="0">
               <a:buNone/>
             </a:pPr>
             <a:r>
@@ -16156,7 +15315,7 @@
                 <a:ea typeface="Arial" pitchFamily="34" charset="-122"/>
                 <a:cs typeface="Arial" pitchFamily="34" charset="-120"/>
               </a:rPr>
-              <a:t>Inside a Power-5</a:t>
+              <a:t>Legal &amp; contracting</a:t>
             </a:r>
             <a:endParaRPr lang="en-US" sz="1350" dirty="0"/>
           </a:p>
@@ -16164,13 +15323,13 @@
       </p:sp>
       <p:sp>
         <p:nvSpPr>
-          <p:cNvPr id="24" name="Text 19"/>
-          <p:cNvSpPr/>
-          <p:nvPr/>
-        </p:nvSpPr>
-        <p:spPr>
-          <a:xfrm>
-            <a:off x="6062472" y="5166360"/>
+          <p:cNvPr id="16" name="Text 13"/>
+          <p:cNvSpPr/>
+          <p:nvPr/>
+        </p:nvSpPr>
+        <p:spPr>
+          <a:xfrm>
+            <a:off x="6062472" y="3200400"/>
             <a:ext cx="2414016" cy="640080"/>
           </a:xfrm>
           <a:prstGeom prst="rect">
@@ -16183,7 +15342,7 @@
           <a:bodyPr wrap="square" rtlCol="0" anchor="t"/>
           <a:lstStyle/>
           <a:p>
-            <a:pPr indent="0" marL="0">
+            <a:pPr marL="0" indent="0">
               <a:lnSpc>
                 <a:spcPct val="105000"/>
               </a:lnSpc>
@@ -16198,7 +15357,7 @@
                 <a:ea typeface="Arial" pitchFamily="34" charset="-122"/>
                 <a:cs typeface="Arial" pitchFamily="34" charset="-120"/>
               </a:rPr>
-              <a:t>Associate Director of Development at Arkansas (SEC) — she knows how advancement, donors and ADs actually operate.</a:t>
+              <a:t>A Juris Master in risk management and compliance — she reviews and negotiates contracts, buyouts and NIL deals directly.</a:t>
             </a:r>
             <a:endParaRPr lang="en-US" sz="980" dirty="0"/>
           </a:p>
@@ -16206,13 +15365,13 @@
       </p:sp>
       <p:sp>
         <p:nvSpPr>
-          <p:cNvPr id="25" name="Shape 20"/>
-          <p:cNvSpPr/>
-          <p:nvPr/>
-        </p:nvSpPr>
-        <p:spPr>
-          <a:xfrm>
-            <a:off x="9052560" y="4069080"/>
+          <p:cNvPr id="17" name="Shape 14"/>
+          <p:cNvSpPr/>
+          <p:nvPr/>
+        </p:nvSpPr>
+        <p:spPr>
+          <a:xfrm>
+            <a:off x="9052560" y="2103120"/>
             <a:ext cx="2926080" cy="1783080"/>
           </a:xfrm>
           <a:prstGeom prst="roundRect">
@@ -16228,7 +15387,7 @@
       </p:sp>
       <p:pic>
         <p:nvPicPr>
-          <p:cNvPr id="26" name="Image 3" descr="preencoded.png">    </p:cNvPr>
+          <p:cNvPr id="18" name="Image 1" descr="preencoded.png"/>
           <p:cNvPicPr>
             <a:picLocks noChangeAspect="1"/>
           </p:cNvPicPr>
@@ -16242,7 +15401,7 @@
         </p:blipFill>
         <p:spPr>
           <a:xfrm>
-            <a:off x="9308592" y="4325112"/>
+            <a:off x="9308592" y="2359152"/>
             <a:ext cx="420624" cy="420624"/>
           </a:xfrm>
           <a:prstGeom prst="rect">
@@ -16252,13 +15411,13 @@
       </p:pic>
       <p:sp>
         <p:nvSpPr>
-          <p:cNvPr id="27" name="Text 21"/>
-          <p:cNvSpPr/>
-          <p:nvPr/>
-        </p:nvSpPr>
-        <p:spPr>
-          <a:xfrm>
-            <a:off x="9308592" y="4818888"/>
+          <p:cNvPr id="19" name="Text 15"/>
+          <p:cNvSpPr/>
+          <p:nvPr/>
+        </p:nvSpPr>
+        <p:spPr>
+          <a:xfrm>
+            <a:off x="9308592" y="2852928"/>
             <a:ext cx="2468880" cy="365760"/>
           </a:xfrm>
           <a:prstGeom prst="rect">
@@ -16271,7 +15430,7 @@
           <a:bodyPr wrap="square" rtlCol="0" anchor="ctr"/>
           <a:lstStyle/>
           <a:p>
-            <a:pPr indent="0" marL="0">
+            <a:pPr marL="0" indent="0">
               <a:buNone/>
             </a:pPr>
             <a:r>
@@ -16283,7 +15442,7 @@
                 <a:ea typeface="Arial" pitchFamily="34" charset="-122"/>
                 <a:cs typeface="Arial" pitchFamily="34" charset="-120"/>
               </a:rPr>
-              <a:t>Athlete credibility</a:t>
+              <a:t>Partnerships &amp; gifts</a:t>
             </a:r>
             <a:endParaRPr lang="en-US" sz="1350" dirty="0"/>
           </a:p>
@@ -16291,13 +15450,13 @@
       </p:sp>
       <p:sp>
         <p:nvSpPr>
-          <p:cNvPr id="28" name="Text 22"/>
-          <p:cNvSpPr/>
-          <p:nvPr/>
-        </p:nvSpPr>
-        <p:spPr>
-          <a:xfrm>
-            <a:off x="9308592" y="5166360"/>
+          <p:cNvPr id="20" name="Text 16"/>
+          <p:cNvSpPr/>
+          <p:nvPr/>
+        </p:nvSpPr>
+        <p:spPr>
+          <a:xfrm>
+            <a:off x="9308592" y="3200400"/>
             <a:ext cx="2414016" cy="640080"/>
           </a:xfrm>
           <a:prstGeom prst="rect">
@@ -16310,7 +15469,7 @@
           <a:bodyPr wrap="square" rtlCol="0" anchor="t"/>
           <a:lstStyle/>
           <a:p>
-            <a:pPr indent="0" marL="0">
+            <a:pPr marL="0" indent="0">
               <a:lnSpc>
                 <a:spcPct val="105000"/>
               </a:lnSpc>
@@ -16325,6 +15484,260 @@
                 <a:ea typeface="Arial" pitchFamily="34" charset="-122"/>
                 <a:cs typeface="Arial" pitchFamily="34" charset="-120"/>
               </a:rPr>
+              <a:t>CFRE with 10+ years in major gifts, corporate partnerships and sponsorship — the second revenue line, as a core skill.</a:t>
+            </a:r>
+            <a:endParaRPr lang="en-US" sz="980" dirty="0"/>
+          </a:p>
+        </p:txBody>
+      </p:sp>
+      <p:sp>
+        <p:nvSpPr>
+          <p:cNvPr id="21" name="Shape 17"/>
+          <p:cNvSpPr/>
+          <p:nvPr/>
+        </p:nvSpPr>
+        <p:spPr>
+          <a:xfrm>
+            <a:off x="5806440" y="4069080"/>
+            <a:ext cx="2926080" cy="1783080"/>
+          </a:xfrm>
+          <a:prstGeom prst="roundRect">
+            <a:avLst>
+              <a:gd name="adj" fmla="val 5128"/>
+            </a:avLst>
+          </a:prstGeom>
+          <a:solidFill>
+            <a:srgbClr val="121A2B"/>
+          </a:solidFill>
+          <a:ln/>
+        </p:spPr>
+      </p:sp>
+      <p:pic>
+        <p:nvPicPr>
+          <p:cNvPr id="22" name="Image 2" descr="preencoded.png"/>
+          <p:cNvPicPr>
+            <a:picLocks noChangeAspect="1"/>
+          </p:cNvPicPr>
+          <p:nvPr/>
+        </p:nvPicPr>
+        <p:blipFill>
+          <a:blip r:embed="rId5"/>
+          <a:stretch>
+            <a:fillRect/>
+          </a:stretch>
+        </p:blipFill>
+        <p:spPr>
+          <a:xfrm>
+            <a:off x="6062472" y="4325112"/>
+            <a:ext cx="420624" cy="420624"/>
+          </a:xfrm>
+          <a:prstGeom prst="rect">
+            <a:avLst/>
+          </a:prstGeom>
+        </p:spPr>
+      </p:pic>
+      <p:sp>
+        <p:nvSpPr>
+          <p:cNvPr id="23" name="Text 18"/>
+          <p:cNvSpPr/>
+          <p:nvPr/>
+        </p:nvSpPr>
+        <p:spPr>
+          <a:xfrm>
+            <a:off x="6062472" y="4818888"/>
+            <a:ext cx="2468880" cy="365760"/>
+          </a:xfrm>
+          <a:prstGeom prst="rect">
+            <a:avLst/>
+          </a:prstGeom>
+          <a:noFill/>
+          <a:ln/>
+        </p:spPr>
+        <p:txBody>
+          <a:bodyPr wrap="square" rtlCol="0" anchor="ctr"/>
+          <a:lstStyle/>
+          <a:p>
+            <a:pPr marL="0" indent="0">
+              <a:buNone/>
+            </a:pPr>
+            <a:r>
+              <a:rPr lang="en-US" sz="1350" b="1" dirty="0">
+                <a:solidFill>
+                  <a:srgbClr val="93B4FF"/>
+                </a:solidFill>
+                <a:latin typeface="Arial" pitchFamily="34" charset="0"/>
+                <a:ea typeface="Arial" pitchFamily="34" charset="-122"/>
+                <a:cs typeface="Arial" pitchFamily="34" charset="-120"/>
+              </a:rPr>
+              <a:t>Inside a Power-5</a:t>
+            </a:r>
+            <a:endParaRPr lang="en-US" sz="1350" dirty="0"/>
+          </a:p>
+        </p:txBody>
+      </p:sp>
+      <p:sp>
+        <p:nvSpPr>
+          <p:cNvPr id="24" name="Text 19"/>
+          <p:cNvSpPr/>
+          <p:nvPr/>
+        </p:nvSpPr>
+        <p:spPr>
+          <a:xfrm>
+            <a:off x="6062472" y="5166360"/>
+            <a:ext cx="2414016" cy="640080"/>
+          </a:xfrm>
+          <a:prstGeom prst="rect">
+            <a:avLst/>
+          </a:prstGeom>
+          <a:noFill/>
+          <a:ln/>
+        </p:spPr>
+        <p:txBody>
+          <a:bodyPr wrap="square" rtlCol="0" anchor="t"/>
+          <a:lstStyle/>
+          <a:p>
+            <a:pPr marL="0" indent="0">
+              <a:lnSpc>
+                <a:spcPct val="105000"/>
+              </a:lnSpc>
+              <a:buNone/>
+            </a:pPr>
+            <a:r>
+              <a:rPr lang="en-US" sz="980" dirty="0">
+                <a:solidFill>
+                  <a:srgbClr val="C3CAD6"/>
+                </a:solidFill>
+                <a:latin typeface="Arial" pitchFamily="34" charset="0"/>
+                <a:ea typeface="Arial" pitchFamily="34" charset="-122"/>
+                <a:cs typeface="Arial" pitchFamily="34" charset="-120"/>
+              </a:rPr>
+              <a:t>Associate Director of Development at Arkansas (SEC) — she knows how advancement, donors and ADs actually operate.</a:t>
+            </a:r>
+            <a:endParaRPr lang="en-US" sz="980" dirty="0"/>
+          </a:p>
+        </p:txBody>
+      </p:sp>
+      <p:sp>
+        <p:nvSpPr>
+          <p:cNvPr id="25" name="Shape 20"/>
+          <p:cNvSpPr/>
+          <p:nvPr/>
+        </p:nvSpPr>
+        <p:spPr>
+          <a:xfrm>
+            <a:off x="9052560" y="4069080"/>
+            <a:ext cx="2926080" cy="1783080"/>
+          </a:xfrm>
+          <a:prstGeom prst="roundRect">
+            <a:avLst>
+              <a:gd name="adj" fmla="val 5128"/>
+            </a:avLst>
+          </a:prstGeom>
+          <a:solidFill>
+            <a:srgbClr val="121A2B"/>
+          </a:solidFill>
+          <a:ln/>
+        </p:spPr>
+      </p:sp>
+      <p:pic>
+        <p:nvPicPr>
+          <p:cNvPr id="26" name="Image 3" descr="preencoded.png"/>
+          <p:cNvPicPr>
+            <a:picLocks noChangeAspect="1"/>
+          </p:cNvPicPr>
+          <p:nvPr/>
+        </p:nvPicPr>
+        <p:blipFill>
+          <a:blip r:embed="rId6"/>
+          <a:stretch>
+            <a:fillRect/>
+          </a:stretch>
+        </p:blipFill>
+        <p:spPr>
+          <a:xfrm>
+            <a:off x="9308592" y="4325112"/>
+            <a:ext cx="420624" cy="420624"/>
+          </a:xfrm>
+          <a:prstGeom prst="rect">
+            <a:avLst/>
+          </a:prstGeom>
+        </p:spPr>
+      </p:pic>
+      <p:sp>
+        <p:nvSpPr>
+          <p:cNvPr id="27" name="Text 21"/>
+          <p:cNvSpPr/>
+          <p:nvPr/>
+        </p:nvSpPr>
+        <p:spPr>
+          <a:xfrm>
+            <a:off x="9308592" y="4818888"/>
+            <a:ext cx="2468880" cy="365760"/>
+          </a:xfrm>
+          <a:prstGeom prst="rect">
+            <a:avLst/>
+          </a:prstGeom>
+          <a:noFill/>
+          <a:ln/>
+        </p:spPr>
+        <p:txBody>
+          <a:bodyPr wrap="square" rtlCol="0" anchor="ctr"/>
+          <a:lstStyle/>
+          <a:p>
+            <a:pPr marL="0" indent="0">
+              <a:buNone/>
+            </a:pPr>
+            <a:r>
+              <a:rPr lang="en-US" sz="1350" b="1" dirty="0">
+                <a:solidFill>
+                  <a:srgbClr val="93B4FF"/>
+                </a:solidFill>
+                <a:latin typeface="Arial" pitchFamily="34" charset="0"/>
+                <a:ea typeface="Arial" pitchFamily="34" charset="-122"/>
+                <a:cs typeface="Arial" pitchFamily="34" charset="-120"/>
+              </a:rPr>
+              <a:t>Athlete credibility</a:t>
+            </a:r>
+            <a:endParaRPr lang="en-US" sz="1350" dirty="0"/>
+          </a:p>
+        </p:txBody>
+      </p:sp>
+      <p:sp>
+        <p:nvSpPr>
+          <p:cNvPr id="28" name="Text 22"/>
+          <p:cNvSpPr/>
+          <p:nvPr/>
+        </p:nvSpPr>
+        <p:spPr>
+          <a:xfrm>
+            <a:off x="9308592" y="5166360"/>
+            <a:ext cx="2414016" cy="640080"/>
+          </a:xfrm>
+          <a:prstGeom prst="rect">
+            <a:avLst/>
+          </a:prstGeom>
+          <a:noFill/>
+          <a:ln/>
+        </p:spPr>
+        <p:txBody>
+          <a:bodyPr wrap="square" rtlCol="0" anchor="t"/>
+          <a:lstStyle/>
+          <a:p>
+            <a:pPr marL="0" indent="0">
+              <a:lnSpc>
+                <a:spcPct val="105000"/>
+              </a:lnSpc>
+              <a:buNone/>
+            </a:pPr>
+            <a:r>
+              <a:rPr lang="en-US" sz="980" dirty="0">
+                <a:solidFill>
+                  <a:srgbClr val="C3CAD6"/>
+                </a:solidFill>
+                <a:latin typeface="Arial" pitchFamily="34" charset="0"/>
+                <a:ea typeface="Arial" pitchFamily="34" charset="-122"/>
+                <a:cs typeface="Arial" pitchFamily="34" charset="-120"/>
+              </a:rPr>
               <a:t>A former Howard volleyball student-athlete with a natural HBCU and women's-sports network the giants don't prioritize.</a:t>
             </a:r>
             <a:endParaRPr lang="en-US" sz="980" dirty="0"/>
@@ -16352,7 +15765,7 @@
           <a:bodyPr wrap="square" rtlCol="0" anchor="ctr"/>
           <a:lstStyle/>
           <a:p>
-            <a:pPr indent="0" marL="0">
+            <a:pPr marL="0" indent="0">
               <a:buNone/>
             </a:pPr>
             <a:r>
@@ -16366,9 +15779,6 @@
               </a:rPr>
               <a:t>Dexter Sports Co.</a:t>
             </a:r>
-            <a:pPr indent="0" marL="0">
-              <a:buNone/>
-            </a:pPr>
             <a:r>
               <a:rPr lang="en-US" sz="850" dirty="0">
                 <a:solidFill>
@@ -16405,11 +15815,11 @@
           <a:bodyPr wrap="square" rtlCol="0" anchor="ctr"/>
           <a:lstStyle/>
           <a:p>
-            <a:pPr algn="r" indent="0" marL="0">
-              <a:buNone/>
-            </a:pPr>
-            <a:r>
-              <a:rPr lang="en-US" sz="750" b="1" spc="100" kern="0" dirty="0">
+            <a:pPr marL="0" indent="0" algn="r">
+              <a:buNone/>
+            </a:pPr>
+            <a:r>
+              <a:rPr lang="en-US" sz="750" b="1" kern="0" spc="100" dirty="0">
                 <a:solidFill>
                   <a:srgbClr val="D4A62A"/>
                 </a:solidFill>
@@ -16439,6 +15849,7 @@
         <a:solidFill>
           <a:srgbClr val="FFFFFF"/>
         </a:solidFill>
+        <a:effectLst/>
       </p:bgPr>
     </p:bg>
     <p:spTree>
@@ -16476,7 +15887,7 @@
           <a:bodyPr wrap="square" rtlCol="0" anchor="ctr"/>
           <a:lstStyle/>
           <a:p>
-            <a:pPr indent="0" marL="0">
+            <a:pPr marL="0" indent="0">
               <a:buNone/>
             </a:pPr>
             <a:r>
@@ -16490,11 +15901,8 @@
               </a:rPr>
               <a:t>● </a:t>
             </a:r>
-            <a:pPr indent="0" marL="0">
-              <a:buNone/>
-            </a:pPr>
-            <a:r>
-              <a:rPr lang="en-US" sz="1100" b="1" spc="300" kern="0" dirty="0">
+            <a:r>
+              <a:rPr lang="en-US" sz="1100" b="1" kern="0" spc="300" dirty="0">
                 <a:solidFill>
                   <a:srgbClr val="2563EB"/>
                 </a:solidFill>
@@ -16529,7 +15937,7 @@
           <a:bodyPr wrap="square" rtlCol="0" anchor="ctr"/>
           <a:lstStyle/>
           <a:p>
-            <a:pPr indent="0" marL="0">
+            <a:pPr marL="0" indent="0">
               <a:buNone/>
             </a:pPr>
             <a:r>
@@ -16543,9 +15951,6 @@
               </a:rPr>
               <a:t>Two specialties. </a:t>
             </a:r>
-            <a:pPr indent="0" marL="0">
-              <a:buNone/>
-            </a:pPr>
             <a:r>
               <a:rPr lang="en-US" sz="2900" i="1" dirty="0">
                 <a:solidFill>
@@ -16582,7 +15987,7 @@
           <a:bodyPr wrap="square" rtlCol="0" anchor="ctr"/>
           <a:lstStyle/>
           <a:p>
-            <a:pPr indent="0" marL="0">
+            <a:pPr marL="0" indent="0">
               <a:buNone/>
             </a:pPr>
             <a:r>
@@ -16646,14 +16051,14 @@
       </p:sp>
       <p:pic>
         <p:nvPicPr>
-          <p:cNvPr id="7" name="Image 0" descr="preencoded.png">    </p:cNvPr>
+          <p:cNvPr id="7" name="Image 0" descr="preencoded.png"/>
           <p:cNvPicPr>
             <a:picLocks noChangeAspect="1"/>
           </p:cNvPicPr>
           <p:nvPr/>
         </p:nvPicPr>
         <p:blipFill>
-          <a:blip r:embed="rId1"/>
+          <a:blip r:embed="rId3"/>
           <a:stretch>
             <a:fillRect/>
           </a:stretch>
@@ -16689,7 +16094,7 @@
           <a:bodyPr wrap="square" rtlCol="0" anchor="ctr"/>
           <a:lstStyle/>
           <a:p>
-            <a:pPr indent="0" marL="0">
+            <a:pPr marL="0" indent="0">
               <a:buNone/>
             </a:pPr>
             <a:r>
@@ -16728,7 +16133,7 @@
           <a:bodyPr wrap="square" rtlCol="0" anchor="t"/>
           <a:lstStyle/>
           <a:p>
-            <a:pPr indent="0" marL="0">
+            <a:pPr marL="0" indent="0">
               <a:lnSpc>
                 <a:spcPct val="108000"/>
               </a:lnSpc>
@@ -16800,14 +16205,14 @@
       </p:sp>
       <p:pic>
         <p:nvPicPr>
-          <p:cNvPr id="12" name="Image 1" descr="preencoded.png">    </p:cNvPr>
+          <p:cNvPr id="12" name="Image 1" descr="preencoded.png"/>
           <p:cNvPicPr>
             <a:picLocks noChangeAspect="1"/>
           </p:cNvPicPr>
           <p:nvPr/>
         </p:nvPicPr>
         <p:blipFill>
-          <a:blip r:embed="rId2"/>
+          <a:blip r:embed="rId4"/>
           <a:stretch>
             <a:fillRect/>
           </a:stretch>
@@ -16843,7 +16248,7 @@
           <a:bodyPr wrap="square" rtlCol="0" anchor="ctr"/>
           <a:lstStyle/>
           <a:p>
-            <a:pPr indent="0" marL="0">
+            <a:pPr marL="0" indent="0">
               <a:buNone/>
             </a:pPr>
             <a:r>
@@ -16882,7 +16287,7 @@
           <a:bodyPr wrap="square" rtlCol="0" anchor="t"/>
           <a:lstStyle/>
           <a:p>
-            <a:pPr indent="0" marL="0">
+            <a:pPr marL="0" indent="0">
               <a:lnSpc>
                 <a:spcPct val="108000"/>
               </a:lnSpc>
@@ -16924,11 +16329,11 @@
           <a:bodyPr wrap="square" rtlCol="0" anchor="ctr"/>
           <a:lstStyle/>
           <a:p>
-            <a:pPr indent="0" marL="0">
-              <a:buNone/>
-            </a:pPr>
-            <a:r>
-              <a:rPr lang="en-US" sz="1000" b="1" spc="200" kern="0" dirty="0">
+            <a:pPr marL="0" indent="0">
+              <a:buNone/>
+            </a:pPr>
+            <a:r>
+              <a:rPr lang="en-US" sz="1000" b="1" kern="0" spc="200" dirty="0">
                 <a:solidFill>
                   <a:srgbClr val="6B7280"/>
                 </a:solidFill>
@@ -16993,14 +16398,14 @@
       </p:sp>
       <p:pic>
         <p:nvPicPr>
-          <p:cNvPr id="18" name="Image 2" descr="preencoded.png">    </p:cNvPr>
+          <p:cNvPr id="18" name="Image 2" descr="preencoded.png"/>
           <p:cNvPicPr>
             <a:picLocks noChangeAspect="1"/>
           </p:cNvPicPr>
           <p:nvPr/>
         </p:nvPicPr>
         <p:blipFill>
-          <a:blip r:embed="rId3"/>
+          <a:blip r:embed="rId5"/>
           <a:stretch>
             <a:fillRect/>
           </a:stretch>
@@ -17036,7 +16441,7 @@
           <a:bodyPr wrap="square" rtlCol="0" anchor="ctr"/>
           <a:lstStyle/>
           <a:p>
-            <a:pPr indent="0" marL="0">
+            <a:pPr marL="0" indent="0">
               <a:buNone/>
             </a:pPr>
             <a:r>
@@ -17075,7 +16480,7 @@
           <a:bodyPr wrap="square" rtlCol="0" anchor="t"/>
           <a:lstStyle/>
           <a:p>
-            <a:pPr indent="0" marL="0">
+            <a:pPr marL="0" indent="0">
               <a:buNone/>
             </a:pPr>
             <a:r>
@@ -17144,14 +16549,14 @@
       </p:sp>
       <p:pic>
         <p:nvPicPr>
-          <p:cNvPr id="23" name="Image 3" descr="preencoded.png">    </p:cNvPr>
+          <p:cNvPr id="23" name="Image 3" descr="preencoded.png"/>
           <p:cNvPicPr>
             <a:picLocks noChangeAspect="1"/>
           </p:cNvPicPr>
           <p:nvPr/>
         </p:nvPicPr>
         <p:blipFill>
-          <a:blip r:embed="rId4"/>
+          <a:blip r:embed="rId6"/>
           <a:stretch>
             <a:fillRect/>
           </a:stretch>
@@ -17187,7 +16592,7 @@
           <a:bodyPr wrap="square" rtlCol="0" anchor="ctr"/>
           <a:lstStyle/>
           <a:p>
-            <a:pPr indent="0" marL="0">
+            <a:pPr marL="0" indent="0">
               <a:buNone/>
             </a:pPr>
             <a:r>
@@ -17226,7 +16631,7 @@
           <a:bodyPr wrap="square" rtlCol="0" anchor="t"/>
           <a:lstStyle/>
           <a:p>
-            <a:pPr indent="0" marL="0">
+            <a:pPr marL="0" indent="0">
               <a:buNone/>
             </a:pPr>
             <a:r>
@@ -17265,7 +16670,7 @@
           <a:bodyPr wrap="square" rtlCol="0" anchor="ctr"/>
           <a:lstStyle/>
           <a:p>
-            <a:pPr indent="0" marL="0">
+            <a:pPr marL="0" indent="0">
               <a:buNone/>
             </a:pPr>
             <a:r>
@@ -17279,9 +16684,6 @@
               </a:rPr>
               <a:t>Dexter Sports Co.</a:t>
             </a:r>
-            <a:pPr indent="0" marL="0">
-              <a:buNone/>
-            </a:pPr>
             <a:r>
               <a:rPr lang="en-US" sz="850" dirty="0">
                 <a:solidFill>
@@ -17318,11 +16720,11 @@
           <a:bodyPr wrap="square" rtlCol="0" anchor="ctr"/>
           <a:lstStyle/>
           <a:p>
-            <a:pPr algn="r" indent="0" marL="0">
-              <a:buNone/>
-            </a:pPr>
-            <a:r>
-              <a:rPr lang="en-US" sz="750" b="1" spc="100" kern="0" dirty="0">
+            <a:pPr marL="0" indent="0" algn="r">
+              <a:buNone/>
+            </a:pPr>
+            <a:r>
+              <a:rPr lang="en-US" sz="750" b="1" kern="0" spc="100" dirty="0">
                 <a:solidFill>
                   <a:srgbClr val="D4A62A"/>
                 </a:solidFill>
@@ -17637,4 +17039,319 @@
     </a:ext>
   </a:extLst>
 </a:theme>
+</file>
+
+<file path=ppt/theme/theme2.xml><?xml version="1.0" encoding="utf-8"?>
+<a:theme xmlns:a="http://schemas.openxmlformats.org/drawingml/2006/main" name="Office Theme">
+  <a:themeElements>
+    <a:clrScheme name="Office">
+      <a:dk1>
+        <a:sysClr val="windowText" lastClr="000000"/>
+      </a:dk1>
+      <a:lt1>
+        <a:sysClr val="window" lastClr="FFFFFF"/>
+      </a:lt1>
+      <a:dk2>
+        <a:srgbClr val="0E2841"/>
+      </a:dk2>
+      <a:lt2>
+        <a:srgbClr val="E8E8E8"/>
+      </a:lt2>
+      <a:accent1>
+        <a:srgbClr val="156082"/>
+      </a:accent1>
+      <a:accent2>
+        <a:srgbClr val="E97132"/>
+      </a:accent2>
+      <a:accent3>
+        <a:srgbClr val="196B24"/>
+      </a:accent3>
+      <a:accent4>
+        <a:srgbClr val="0F9ED5"/>
+      </a:accent4>
+      <a:accent5>
+        <a:srgbClr val="A02B93"/>
+      </a:accent5>
+      <a:accent6>
+        <a:srgbClr val="4EA72E"/>
+      </a:accent6>
+      <a:hlink>
+        <a:srgbClr val="467886"/>
+      </a:hlink>
+      <a:folHlink>
+        <a:srgbClr val="96607D"/>
+      </a:folHlink>
+    </a:clrScheme>
+    <a:fontScheme name="Office">
+      <a:majorFont>
+        <a:latin typeface="Aptos Display" panose="02110004020202020204"/>
+        <a:ea typeface=""/>
+        <a:cs typeface=""/>
+        <a:font script="Jpan" typeface="游ゴシック Light"/>
+        <a:font script="Hang" typeface="맑은 고딕"/>
+        <a:font script="Hans" typeface="等线 Light"/>
+        <a:font script="Hant" typeface="新細明體"/>
+        <a:font script="Arab" typeface="Times New Roman"/>
+        <a:font script="Hebr" typeface="Times New Roman"/>
+        <a:font script="Thai" typeface="Angsana New"/>
+        <a:font script="Ethi" typeface="Nyala"/>
+        <a:font script="Beng" typeface="Vrinda"/>
+        <a:font script="Gujr" typeface="Shruti"/>
+        <a:font script="Khmr" typeface="MoolBoran"/>
+        <a:font script="Knda" typeface="Tunga"/>
+        <a:font script="Guru" typeface="Raavi"/>
+        <a:font script="Cans" typeface="Euphemia"/>
+        <a:font script="Cher" typeface="Plantagenet Cherokee"/>
+        <a:font script="Yiii" typeface="Microsoft Yi Baiti"/>
+        <a:font script="Tibt" typeface="Microsoft Himalaya"/>
+        <a:font script="Thaa" typeface="MV Boli"/>
+        <a:font script="Deva" typeface="Mangal"/>
+        <a:font script="Telu" typeface="Gautami"/>
+        <a:font script="Taml" typeface="Latha"/>
+        <a:font script="Syrc" typeface="Estrangelo Edessa"/>
+        <a:font script="Orya" typeface="Kalinga"/>
+        <a:font script="Mlym" typeface="Kartika"/>
+        <a:font script="Laoo" typeface="DokChampa"/>
+        <a:font script="Sinh" typeface="Iskoola Pota"/>
+        <a:font script="Mong" typeface="Mongolian Baiti"/>
+        <a:font script="Viet" typeface="Times New Roman"/>
+        <a:font script="Uigh" typeface="Microsoft Uighur"/>
+        <a:font script="Geor" typeface="Sylfaen"/>
+        <a:font script="Armn" typeface="Arial"/>
+        <a:font script="Bugi" typeface="Leelawadee UI"/>
+        <a:font script="Bopo" typeface="Microsoft JhengHei"/>
+        <a:font script="Java" typeface="Javanese Text"/>
+        <a:font script="Lisu" typeface="Segoe UI"/>
+        <a:font script="Mymr" typeface="Myanmar Text"/>
+        <a:font script="Nkoo" typeface="Ebrima"/>
+        <a:font script="Olck" typeface="Nirmala UI"/>
+        <a:font script="Osma" typeface="Ebrima"/>
+        <a:font script="Phag" typeface="Phagspa"/>
+        <a:font script="Syrn" typeface="Estrangelo Edessa"/>
+        <a:font script="Syrj" typeface="Estrangelo Edessa"/>
+        <a:font script="Syre" typeface="Estrangelo Edessa"/>
+        <a:font script="Sora" typeface="Nirmala UI"/>
+        <a:font script="Tale" typeface="Microsoft Tai Le"/>
+        <a:font script="Talu" typeface="Microsoft New Tai Lue"/>
+        <a:font script="Tfng" typeface="Ebrima"/>
+      </a:majorFont>
+      <a:minorFont>
+        <a:latin typeface="Aptos" panose="02110004020202020204"/>
+        <a:ea typeface=""/>
+        <a:cs typeface=""/>
+        <a:font script="Jpan" typeface="游ゴシック"/>
+        <a:font script="Hang" typeface="맑은 고딕"/>
+        <a:font script="Hans" typeface="等线"/>
+        <a:font script="Hant" typeface="新細明體"/>
+        <a:font script="Arab" typeface="Arial"/>
+        <a:font script="Hebr" typeface="Arial"/>
+        <a:font script="Thai" typeface="Cordia New"/>
+        <a:font script="Ethi" typeface="Nyala"/>
+        <a:font script="Beng" typeface="Vrinda"/>
+        <a:font script="Gujr" typeface="Shruti"/>
+        <a:font script="Khmr" typeface="DaunPenh"/>
+        <a:font script="Knda" typeface="Tunga"/>
+        <a:font script="Guru" typeface="Raavi"/>
+        <a:font script="Cans" typeface="Euphemia"/>
+        <a:font script="Cher" typeface="Plantagenet Cherokee"/>
+        <a:font script="Yiii" typeface="Microsoft Yi Baiti"/>
+        <a:font script="Tibt" typeface="Microsoft Himalaya"/>
+        <a:font script="Thaa" typeface="MV Boli"/>
+        <a:font script="Deva" typeface="Mangal"/>
+        <a:font script="Telu" typeface="Gautami"/>
+        <a:font script="Taml" typeface="Latha"/>
+        <a:font script="Syrc" typeface="Estrangelo Edessa"/>
+        <a:font script="Orya" typeface="Kalinga"/>
+        <a:font script="Mlym" typeface="Kartika"/>
+        <a:font script="Laoo" typeface="DokChampa"/>
+        <a:font script="Sinh" typeface="Iskoola Pota"/>
+        <a:font script="Mong" typeface="Mongolian Baiti"/>
+        <a:font script="Viet" typeface="Arial"/>
+        <a:font script="Uigh" typeface="Microsoft Uighur"/>
+        <a:font script="Geor" typeface="Sylfaen"/>
+        <a:font script="Armn" typeface="Arial"/>
+        <a:font script="Bugi" typeface="Leelawadee UI"/>
+        <a:font script="Bopo" typeface="Microsoft JhengHei"/>
+        <a:font script="Java" typeface="Javanese Text"/>
+        <a:font script="Lisu" typeface="Segoe UI"/>
+        <a:font script="Mymr" typeface="Myanmar Text"/>
+        <a:font script="Nkoo" typeface="Ebrima"/>
+        <a:font script="Olck" typeface="Nirmala UI"/>
+        <a:font script="Osma" typeface="Ebrima"/>
+        <a:font script="Phag" typeface="Phagspa"/>
+        <a:font script="Syrn" typeface="Estrangelo Edessa"/>
+        <a:font script="Syrj" typeface="Estrangelo Edessa"/>
+        <a:font script="Syre" typeface="Estrangelo Edessa"/>
+        <a:font script="Sora" typeface="Nirmala UI"/>
+        <a:font script="Tale" typeface="Microsoft Tai Le"/>
+        <a:font script="Talu" typeface="Microsoft New Tai Lue"/>
+        <a:font script="Tfng" typeface="Ebrima"/>
+      </a:minorFont>
+    </a:fontScheme>
+    <a:fmtScheme name="Office">
+      <a:fillStyleLst>
+        <a:solidFill>
+          <a:schemeClr val="phClr"/>
+        </a:solidFill>
+        <a:gradFill rotWithShape="1">
+          <a:gsLst>
+            <a:gs pos="0">
+              <a:schemeClr val="phClr">
+                <a:lumMod val="110000"/>
+                <a:satMod val="105000"/>
+                <a:tint val="67000"/>
+              </a:schemeClr>
+            </a:gs>
+            <a:gs pos="50000">
+              <a:schemeClr val="phClr">
+                <a:lumMod val="105000"/>
+                <a:satMod val="103000"/>
+                <a:tint val="73000"/>
+              </a:schemeClr>
+            </a:gs>
+            <a:gs pos="100000">
+              <a:schemeClr val="phClr">
+                <a:lumMod val="105000"/>
+                <a:satMod val="109000"/>
+                <a:tint val="81000"/>
+              </a:schemeClr>
+            </a:gs>
+          </a:gsLst>
+          <a:lin ang="5400000" scaled="0"/>
+        </a:gradFill>
+        <a:gradFill rotWithShape="1">
+          <a:gsLst>
+            <a:gs pos="0">
+              <a:schemeClr val="phClr">
+                <a:satMod val="103000"/>
+                <a:lumMod val="102000"/>
+                <a:tint val="94000"/>
+              </a:schemeClr>
+            </a:gs>
+            <a:gs pos="50000">
+              <a:schemeClr val="phClr">
+                <a:satMod val="110000"/>
+                <a:lumMod val="100000"/>
+                <a:shade val="100000"/>
+              </a:schemeClr>
+            </a:gs>
+            <a:gs pos="100000">
+              <a:schemeClr val="phClr">
+                <a:lumMod val="99000"/>
+                <a:satMod val="120000"/>
+                <a:shade val="78000"/>
+              </a:schemeClr>
+            </a:gs>
+          </a:gsLst>
+          <a:lin ang="5400000" scaled="0"/>
+        </a:gradFill>
+      </a:fillStyleLst>
+      <a:lnStyleLst>
+        <a:ln w="12700" cap="flat" cmpd="sng" algn="ctr">
+          <a:solidFill>
+            <a:schemeClr val="phClr"/>
+          </a:solidFill>
+          <a:prstDash val="solid"/>
+          <a:miter lim="800000"/>
+        </a:ln>
+        <a:ln w="19050" cap="flat" cmpd="sng" algn="ctr">
+          <a:solidFill>
+            <a:schemeClr val="phClr"/>
+          </a:solidFill>
+          <a:prstDash val="solid"/>
+          <a:miter lim="800000"/>
+        </a:ln>
+        <a:ln w="25400" cap="flat" cmpd="sng" algn="ctr">
+          <a:solidFill>
+            <a:schemeClr val="phClr"/>
+          </a:solidFill>
+          <a:prstDash val="solid"/>
+          <a:miter lim="800000"/>
+        </a:ln>
+      </a:lnStyleLst>
+      <a:effectStyleLst>
+        <a:effectStyle>
+          <a:effectLst/>
+        </a:effectStyle>
+        <a:effectStyle>
+          <a:effectLst/>
+        </a:effectStyle>
+        <a:effectStyle>
+          <a:effectLst>
+            <a:outerShdw blurRad="57150" dist="19050" dir="5400000" algn="ctr" rotWithShape="0">
+              <a:srgbClr val="000000">
+                <a:alpha val="63000"/>
+              </a:srgbClr>
+            </a:outerShdw>
+          </a:effectLst>
+        </a:effectStyle>
+      </a:effectStyleLst>
+      <a:bgFillStyleLst>
+        <a:solidFill>
+          <a:schemeClr val="phClr"/>
+        </a:solidFill>
+        <a:solidFill>
+          <a:schemeClr val="phClr">
+            <a:tint val="95000"/>
+            <a:satMod val="170000"/>
+          </a:schemeClr>
+        </a:solidFill>
+        <a:gradFill rotWithShape="1">
+          <a:gsLst>
+            <a:gs pos="0">
+              <a:schemeClr val="phClr">
+                <a:tint val="93000"/>
+                <a:satMod val="150000"/>
+                <a:shade val="98000"/>
+                <a:lumMod val="102000"/>
+              </a:schemeClr>
+            </a:gs>
+            <a:gs pos="50000">
+              <a:schemeClr val="phClr">
+                <a:tint val="98000"/>
+                <a:satMod val="130000"/>
+                <a:shade val="90000"/>
+                <a:lumMod val="103000"/>
+              </a:schemeClr>
+            </a:gs>
+            <a:gs pos="100000">
+              <a:schemeClr val="phClr">
+                <a:shade val="63000"/>
+                <a:satMod val="120000"/>
+              </a:schemeClr>
+            </a:gs>
+          </a:gsLst>
+          <a:lin ang="5400000" scaled="0"/>
+        </a:gradFill>
+      </a:bgFillStyleLst>
+    </a:fmtScheme>
+  </a:themeElements>
+  <a:objectDefaults>
+    <a:lnDef>
+      <a:spPr/>
+      <a:bodyPr/>
+      <a:lstStyle/>
+      <a:style>
+        <a:lnRef idx="2">
+          <a:schemeClr val="accent1"/>
+        </a:lnRef>
+        <a:fillRef idx="0">
+          <a:schemeClr val="accent1"/>
+        </a:fillRef>
+        <a:effectRef idx="1">
+          <a:schemeClr val="accent1"/>
+        </a:effectRef>
+        <a:fontRef idx="minor">
+          <a:schemeClr val="tx1"/>
+        </a:fontRef>
+      </a:style>
+    </a:lnDef>
+  </a:objectDefaults>
+  <a:extraClrSchemeLst/>
+  <a:extLst>
+    <a:ext uri="{05A4C25C-085E-4340-85A3-A5531E510DB2}">
+      <thm15:themeFamily xmlns:thm15="http://schemas.microsoft.com/office/thememl/2012/main" name="Office Theme" id="{2E142A2C-CD16-42D6-873A-C26D2A0506FA}" vid="{1BDDFF52-6CD6-40A5-AB3C-68EB2F1E4D0A}"/>
+    </a:ext>
+  </a:extLst>
+</a:theme>
 </file>
--- a/_strategy/Dexter_Sports_Investor_Deck_INTERNAL.pptx
+++ b/_strategy/Dexter_Sports_Investor_Deck_INTERNAL.pptx
@@ -5,24 +5,25 @@
     <p:sldMasterId id="2147483648" r:id="rId1"/>
   </p:sldMasterIdLst>
   <p:notesMasterIdLst>
-    <p:notesMasterId r:id="rId17"/>
+    <p:notesMasterId r:id="rId18"/>
   </p:notesMasterIdLst>
   <p:sldIdLst>
     <p:sldId id="256" r:id="rId2"/>
     <p:sldId id="257" r:id="rId3"/>
     <p:sldId id="258" r:id="rId4"/>
-    <p:sldId id="259" r:id="rId5"/>
-    <p:sldId id="260" r:id="rId6"/>
-    <p:sldId id="261" r:id="rId7"/>
-    <p:sldId id="262" r:id="rId8"/>
-    <p:sldId id="263" r:id="rId9"/>
-    <p:sldId id="264" r:id="rId10"/>
-    <p:sldId id="265" r:id="rId11"/>
-    <p:sldId id="266" r:id="rId12"/>
-    <p:sldId id="267" r:id="rId13"/>
-    <p:sldId id="268" r:id="rId14"/>
-    <p:sldId id="269" r:id="rId15"/>
-    <p:sldId id="270" r:id="rId16"/>
+    <p:sldId id="271" r:id="rId5"/>
+    <p:sldId id="259" r:id="rId6"/>
+    <p:sldId id="260" r:id="rId7"/>
+    <p:sldId id="261" r:id="rId8"/>
+    <p:sldId id="262" r:id="rId9"/>
+    <p:sldId id="263" r:id="rId10"/>
+    <p:sldId id="264" r:id="rId11"/>
+    <p:sldId id="265" r:id="rId12"/>
+    <p:sldId id="266" r:id="rId13"/>
+    <p:sldId id="267" r:id="rId14"/>
+    <p:sldId id="268" r:id="rId15"/>
+    <p:sldId id="269" r:id="rId16"/>
+    <p:sldId id="270" r:id="rId17"/>
   </p:sldIdLst>
   <p:sldSz cx="12192000" cy="6858000"/>
   <p:notesSz cx="6858000" cy="12192000"/>
@@ -1186,6 +1187,90 @@
             <a:fld id="{F7021451-1387-4CA6-816F-3879F97B5CBC}" type="slidenum">
               <a:rPr lang="en-US"/>
               <a:t>15</a:t>
+            </a:fld>
+            <a:endParaRPr lang="en-US"/>
+          </a:p>
+        </p:txBody>
+      </p:sp>
+    </p:spTree>
+    <p:extLst>
+      <p:ext uri="{BB962C8B-B14F-4D97-AF65-F5344CB8AC3E}">
+        <p14:creationId xmlns:p14="http://schemas.microsoft.com/office/powerpoint/2010/main" val="1024086991"/>
+      </p:ext>
+    </p:extLst>
+  </p:cSld>
+  <p:clrMapOvr>
+    <a:masterClrMapping/>
+  </p:clrMapOvr>
+</p:notes>
+</file>
+
+<file path=ppt/notesSlides/notesSlide16.xml><?xml version="1.0" encoding="utf-8"?>
+<p:notes xmlns:a="http://schemas.openxmlformats.org/drawingml/2006/main" xmlns:r="http://schemas.openxmlformats.org/officeDocument/2006/relationships" xmlns:p="http://schemas.openxmlformats.org/presentationml/2006/main">
+  <p:cSld>
+    <p:spTree>
+      <p:nvGrpSpPr>
+        <p:cNvPr id="1" name=""/>
+        <p:cNvGrpSpPr/>
+        <p:nvPr/>
+      </p:nvGrpSpPr>
+      <p:grpSpPr>
+        <a:xfrm>
+          <a:off x="0" y="0"/>
+          <a:ext cx="0" cy="0"/>
+          <a:chOff x="0" y="0"/>
+          <a:chExt cx="0" cy="0"/>
+        </a:xfrm>
+      </p:grpSpPr>
+      <p:sp>
+        <p:nvSpPr>
+          <p:cNvPr id="2" name="Slide Image Placeholder 1"/>
+          <p:cNvSpPr>
+            <a:spLocks noGrp="1" noRot="1" noChangeAspect="1"/>
+          </p:cNvSpPr>
+          <p:nvPr>
+            <p:ph type="sldImg"/>
+          </p:nvPr>
+        </p:nvSpPr>
+        <p:spPr/>
+      </p:sp>
+      <p:sp>
+        <p:nvSpPr>
+          <p:cNvPr id="3" name="Notes Placeholder 2"/>
+          <p:cNvSpPr>
+            <a:spLocks noGrp="1"/>
+          </p:cNvSpPr>
+          <p:nvPr>
+            <p:ph type="body" idx="1"/>
+          </p:nvPr>
+        </p:nvSpPr>
+        <p:spPr/>
+        <p:txBody>
+          <a:bodyPr/>
+          <a:lstStyle/>
+          <a:p>
+            <a:endParaRPr lang="en-US" dirty="0"/>
+          </a:p>
+        </p:txBody>
+      </p:sp>
+      <p:sp>
+        <p:nvSpPr>
+          <p:cNvPr id="4" name="Slide Number Placeholder 3"/>
+          <p:cNvSpPr>
+            <a:spLocks noGrp="1"/>
+          </p:cNvSpPr>
+          <p:nvPr>
+            <p:ph type="sldNum" sz="quarter" idx="10"/>
+          </p:nvPr>
+        </p:nvSpPr>
+        <p:spPr/>
+        <p:txBody>
+          <a:bodyPr/>
+          <a:lstStyle/>
+          <a:p>
+            <a:fld id="{F7021451-1387-4CA6-816F-3879F97B5CBC}" type="slidenum">
+              <a:rPr lang="en-US"/>
+              <a:t>16</a:t>
             </a:fld>
             <a:endParaRPr lang="en-US"/>
           </a:p>
@@ -2659,6 +2744,911 @@
 
 <file path=ppt/slides/slide10.xml><?xml version="1.0" encoding="utf-8"?>
 <p:sld xmlns:a="http://schemas.openxmlformats.org/drawingml/2006/main" xmlns:r="http://schemas.openxmlformats.org/officeDocument/2006/relationships" xmlns:p="http://schemas.openxmlformats.org/presentationml/2006/main">
+  <p:cSld name="Slide 9">
+    <p:bg>
+      <p:bgPr>
+        <a:solidFill>
+          <a:srgbClr val="FFFFFF"/>
+        </a:solidFill>
+        <a:effectLst/>
+      </p:bgPr>
+    </p:bg>
+    <p:spTree>
+      <p:nvGrpSpPr>
+        <p:cNvPr id="1" name=""/>
+        <p:cNvGrpSpPr/>
+        <p:nvPr/>
+      </p:nvGrpSpPr>
+      <p:grpSpPr>
+        <a:xfrm>
+          <a:off x="0" y="0"/>
+          <a:ext cx="0" cy="0"/>
+          <a:chOff x="0" y="0"/>
+          <a:chExt cx="0" cy="0"/>
+        </a:xfrm>
+      </p:grpSpPr>
+      <p:sp>
+        <p:nvSpPr>
+          <p:cNvPr id="2" name="Text 0"/>
+          <p:cNvSpPr/>
+          <p:nvPr/>
+        </p:nvSpPr>
+        <p:spPr>
+          <a:xfrm>
+            <a:off x="685800" y="548640"/>
+            <a:ext cx="9144000" cy="274320"/>
+          </a:xfrm>
+          <a:prstGeom prst="rect">
+            <a:avLst/>
+          </a:prstGeom>
+          <a:noFill/>
+          <a:ln/>
+        </p:spPr>
+        <p:txBody>
+          <a:bodyPr wrap="square" rtlCol="0" anchor="ctr"/>
+          <a:lstStyle/>
+          <a:p>
+            <a:pPr marL="0" indent="0">
+              <a:buNone/>
+            </a:pPr>
+            <a:r>
+              <a:rPr lang="en-US" sz="800" dirty="0">
+                <a:solidFill>
+                  <a:srgbClr val="2563EB"/>
+                </a:solidFill>
+                <a:latin typeface="Arial" pitchFamily="34" charset="0"/>
+                <a:ea typeface="Arial" pitchFamily="34" charset="-122"/>
+                <a:cs typeface="Arial" pitchFamily="34" charset="-120"/>
+              </a:rPr>
+              <a:t>● </a:t>
+            </a:r>
+            <a:r>
+              <a:rPr lang="en-US" sz="1100" b="1" kern="0" spc="300" dirty="0">
+                <a:solidFill>
+                  <a:srgbClr val="2563EB"/>
+                </a:solidFill>
+                <a:latin typeface="Arial" pitchFamily="34" charset="0"/>
+                <a:ea typeface="Arial" pitchFamily="34" charset="-122"/>
+                <a:cs typeface="Arial" pitchFamily="34" charset="-120"/>
+              </a:rPr>
+              <a:t>WHAT WE DO</a:t>
+            </a:r>
+            <a:endParaRPr lang="en-US" sz="1100" dirty="0"/>
+          </a:p>
+        </p:txBody>
+      </p:sp>
+      <p:sp>
+        <p:nvSpPr>
+          <p:cNvPr id="3" name="Text 1"/>
+          <p:cNvSpPr/>
+          <p:nvPr/>
+        </p:nvSpPr>
+        <p:spPr>
+          <a:xfrm>
+            <a:off x="685800" y="868680"/>
+            <a:ext cx="10789920" cy="640080"/>
+          </a:xfrm>
+          <a:prstGeom prst="rect">
+            <a:avLst/>
+          </a:prstGeom>
+          <a:noFill/>
+          <a:ln/>
+        </p:spPr>
+        <p:txBody>
+          <a:bodyPr wrap="square" rtlCol="0" anchor="ctr"/>
+          <a:lstStyle/>
+          <a:p>
+            <a:pPr marL="0" indent="0">
+              <a:buNone/>
+            </a:pPr>
+            <a:r>
+              <a:rPr lang="en-US" sz="2900" b="1" dirty="0">
+                <a:solidFill>
+                  <a:srgbClr val="141A24"/>
+                </a:solidFill>
+                <a:latin typeface="Arial" pitchFamily="34" charset="0"/>
+                <a:ea typeface="Arial" pitchFamily="34" charset="-122"/>
+                <a:cs typeface="Arial" pitchFamily="34" charset="-120"/>
+              </a:rPr>
+              <a:t>Two specialties. </a:t>
+            </a:r>
+            <a:r>
+              <a:rPr lang="en-US" sz="2900" i="1" dirty="0">
+                <a:solidFill>
+                  <a:srgbClr val="2563EB"/>
+                </a:solidFill>
+                <a:latin typeface="Georgia" pitchFamily="34" charset="0"/>
+                <a:ea typeface="Georgia" pitchFamily="34" charset="-122"/>
+                <a:cs typeface="Georgia" pitchFamily="34" charset="-120"/>
+              </a:rPr>
+              <a:t>One advocate.</a:t>
+            </a:r>
+            <a:endParaRPr lang="en-US" sz="2900" dirty="0"/>
+          </a:p>
+        </p:txBody>
+      </p:sp>
+      <p:sp>
+        <p:nvSpPr>
+          <p:cNvPr id="4" name="Text 2"/>
+          <p:cNvSpPr/>
+          <p:nvPr/>
+        </p:nvSpPr>
+        <p:spPr>
+          <a:xfrm>
+            <a:off x="685800" y="1481328"/>
+            <a:ext cx="10789920" cy="365760"/>
+          </a:xfrm>
+          <a:prstGeom prst="rect">
+            <a:avLst/>
+          </a:prstGeom>
+          <a:noFill/>
+          <a:ln/>
+        </p:spPr>
+        <p:txBody>
+          <a:bodyPr wrap="square" rtlCol="0" anchor="ctr"/>
+          <a:lstStyle/>
+          <a:p>
+            <a:pPr marL="0" indent="0">
+              <a:buNone/>
+            </a:pPr>
+            <a:r>
+              <a:rPr lang="en-US" sz="1350" i="1" dirty="0">
+                <a:solidFill>
+                  <a:srgbClr val="6B7280"/>
+                </a:solidFill>
+                <a:latin typeface="Arial" pitchFamily="34" charset="0"/>
+                <a:ea typeface="Arial" pitchFamily="34" charset="-122"/>
+                <a:cs typeface="Arial" pitchFamily="34" charset="-120"/>
+              </a:rPr>
+              <a:t>From the next contract to the first NIL offer — coach representation and NIL guidance are the co-equal core.</a:t>
+            </a:r>
+            <a:endParaRPr lang="en-US" sz="1350" dirty="0"/>
+          </a:p>
+        </p:txBody>
+      </p:sp>
+      <p:sp>
+        <p:nvSpPr>
+          <p:cNvPr id="5" name="Shape 3"/>
+          <p:cNvSpPr/>
+          <p:nvPr/>
+        </p:nvSpPr>
+        <p:spPr>
+          <a:xfrm>
+            <a:off x="685800" y="2103120"/>
+            <a:ext cx="5230368" cy="2331720"/>
+          </a:xfrm>
+          <a:prstGeom prst="roundRect">
+            <a:avLst>
+              <a:gd name="adj" fmla="val 4706"/>
+            </a:avLst>
+          </a:prstGeom>
+          <a:solidFill>
+            <a:srgbClr val="0B1220"/>
+          </a:solidFill>
+          <a:ln/>
+        </p:spPr>
+      </p:sp>
+      <p:sp>
+        <p:nvSpPr>
+          <p:cNvPr id="6" name="Shape 4"/>
+          <p:cNvSpPr/>
+          <p:nvPr/>
+        </p:nvSpPr>
+        <p:spPr>
+          <a:xfrm>
+            <a:off x="960120" y="2377440"/>
+            <a:ext cx="777240" cy="777240"/>
+          </a:xfrm>
+          <a:prstGeom prst="roundRect">
+            <a:avLst>
+              <a:gd name="adj" fmla="val 18824"/>
+            </a:avLst>
+          </a:prstGeom>
+          <a:solidFill>
+            <a:srgbClr val="2563EB"/>
+          </a:solidFill>
+          <a:ln/>
+        </p:spPr>
+      </p:sp>
+      <p:pic>
+        <p:nvPicPr>
+          <p:cNvPr id="7" name="Image 0" descr="preencoded.png"/>
+          <p:cNvPicPr>
+            <a:picLocks noChangeAspect="1"/>
+          </p:cNvPicPr>
+          <p:nvPr/>
+        </p:nvPicPr>
+        <p:blipFill>
+          <a:blip r:embed="rId3"/>
+          <a:stretch>
+            <a:fillRect/>
+          </a:stretch>
+        </p:blipFill>
+        <p:spPr>
+          <a:xfrm>
+            <a:off x="1133856" y="2551176"/>
+            <a:ext cx="429768" cy="429768"/>
+          </a:xfrm>
+          <a:prstGeom prst="rect">
+            <a:avLst/>
+          </a:prstGeom>
+        </p:spPr>
+      </p:pic>
+      <p:sp>
+        <p:nvSpPr>
+          <p:cNvPr id="8" name="Text 5"/>
+          <p:cNvSpPr/>
+          <p:nvPr/>
+        </p:nvSpPr>
+        <p:spPr>
+          <a:xfrm>
+            <a:off x="960120" y="3291840"/>
+            <a:ext cx="4663440" cy="365760"/>
+          </a:xfrm>
+          <a:prstGeom prst="rect">
+            <a:avLst/>
+          </a:prstGeom>
+          <a:noFill/>
+          <a:ln/>
+        </p:spPr>
+        <p:txBody>
+          <a:bodyPr wrap="square" rtlCol="0" anchor="ctr"/>
+          <a:lstStyle/>
+          <a:p>
+            <a:pPr marL="0" indent="0">
+              <a:buNone/>
+            </a:pPr>
+            <a:r>
+              <a:rPr lang="en-US" sz="1800" b="1" dirty="0">
+                <a:solidFill>
+                  <a:srgbClr val="FFFFFF"/>
+                </a:solidFill>
+                <a:latin typeface="Arial" pitchFamily="34" charset="0"/>
+                <a:ea typeface="Arial" pitchFamily="34" charset="-122"/>
+                <a:cs typeface="Arial" pitchFamily="34" charset="-120"/>
+              </a:rPr>
+              <a:t>Coach Representation</a:t>
+            </a:r>
+            <a:endParaRPr lang="en-US" sz="1800" dirty="0"/>
+          </a:p>
+        </p:txBody>
+      </p:sp>
+      <p:sp>
+        <p:nvSpPr>
+          <p:cNvPr id="9" name="Text 6"/>
+          <p:cNvSpPr/>
+          <p:nvPr/>
+        </p:nvSpPr>
+        <p:spPr>
+          <a:xfrm>
+            <a:off x="960120" y="3675888"/>
+            <a:ext cx="4754880" cy="685800"/>
+          </a:xfrm>
+          <a:prstGeom prst="rect">
+            <a:avLst/>
+          </a:prstGeom>
+          <a:noFill/>
+          <a:ln/>
+        </p:spPr>
+        <p:txBody>
+          <a:bodyPr wrap="square" rtlCol="0" anchor="t"/>
+          <a:lstStyle/>
+          <a:p>
+            <a:pPr marL="0" indent="0">
+              <a:lnSpc>
+                <a:spcPct val="108000"/>
+              </a:lnSpc>
+              <a:buNone/>
+            </a:pPr>
+            <a:r>
+              <a:rPr lang="en-US" sz="1100" dirty="0">
+                <a:solidFill>
+                  <a:srgbClr val="C3CAD6"/>
+                </a:solidFill>
+                <a:latin typeface="Arial" pitchFamily="34" charset="0"/>
+                <a:ea typeface="Arial" pitchFamily="34" charset="-122"/>
+                <a:cs typeface="Arial" pitchFamily="34" charset="-120"/>
+              </a:rPr>
+              <a:t>Contract and career representation for head and assistant coaches in every sport — focused on the women and mid-career assistants the big agencies overlook.</a:t>
+            </a:r>
+            <a:endParaRPr lang="en-US" sz="1100" dirty="0"/>
+          </a:p>
+        </p:txBody>
+      </p:sp>
+      <p:sp>
+        <p:nvSpPr>
+          <p:cNvPr id="10" name="Shape 7"/>
+          <p:cNvSpPr/>
+          <p:nvPr/>
+        </p:nvSpPr>
+        <p:spPr>
+          <a:xfrm>
+            <a:off x="6272784" y="2103120"/>
+            <a:ext cx="5230368" cy="2331720"/>
+          </a:xfrm>
+          <a:prstGeom prst="roundRect">
+            <a:avLst>
+              <a:gd name="adj" fmla="val 4706"/>
+            </a:avLst>
+          </a:prstGeom>
+          <a:solidFill>
+            <a:srgbClr val="2563EB"/>
+          </a:solidFill>
+          <a:ln/>
+        </p:spPr>
+      </p:sp>
+      <p:sp>
+        <p:nvSpPr>
+          <p:cNvPr id="11" name="Shape 8"/>
+          <p:cNvSpPr/>
+          <p:nvPr/>
+        </p:nvSpPr>
+        <p:spPr>
+          <a:xfrm>
+            <a:off x="6547104" y="2377440"/>
+            <a:ext cx="777240" cy="777240"/>
+          </a:xfrm>
+          <a:prstGeom prst="roundRect">
+            <a:avLst>
+              <a:gd name="adj" fmla="val 18824"/>
+            </a:avLst>
+          </a:prstGeom>
+          <a:solidFill>
+            <a:srgbClr val="1D4FD7"/>
+          </a:solidFill>
+          <a:ln w="12700">
+            <a:solidFill>
+              <a:srgbClr val="FFFFFF"/>
+            </a:solidFill>
+            <a:prstDash val="solid"/>
+          </a:ln>
+        </p:spPr>
+      </p:sp>
+      <p:pic>
+        <p:nvPicPr>
+          <p:cNvPr id="12" name="Image 1" descr="preencoded.png"/>
+          <p:cNvPicPr>
+            <a:picLocks noChangeAspect="1"/>
+          </p:cNvPicPr>
+          <p:nvPr/>
+        </p:nvPicPr>
+        <p:blipFill>
+          <a:blip r:embed="rId4"/>
+          <a:stretch>
+            <a:fillRect/>
+          </a:stretch>
+        </p:blipFill>
+        <p:spPr>
+          <a:xfrm>
+            <a:off x="6720840" y="2551176"/>
+            <a:ext cx="429768" cy="429768"/>
+          </a:xfrm>
+          <a:prstGeom prst="rect">
+            <a:avLst/>
+          </a:prstGeom>
+        </p:spPr>
+      </p:pic>
+      <p:sp>
+        <p:nvSpPr>
+          <p:cNvPr id="13" name="Text 9"/>
+          <p:cNvSpPr/>
+          <p:nvPr/>
+        </p:nvSpPr>
+        <p:spPr>
+          <a:xfrm>
+            <a:off x="6547104" y="3291840"/>
+            <a:ext cx="4663440" cy="365760"/>
+          </a:xfrm>
+          <a:prstGeom prst="rect">
+            <a:avLst/>
+          </a:prstGeom>
+          <a:noFill/>
+          <a:ln/>
+        </p:spPr>
+        <p:txBody>
+          <a:bodyPr wrap="square" rtlCol="0" anchor="ctr"/>
+          <a:lstStyle/>
+          <a:p>
+            <a:pPr marL="0" indent="0">
+              <a:buNone/>
+            </a:pPr>
+            <a:r>
+              <a:rPr lang="en-US" sz="1800" b="1" dirty="0">
+                <a:solidFill>
+                  <a:srgbClr val="FFFFFF"/>
+                </a:solidFill>
+                <a:latin typeface="Arial" pitchFamily="34" charset="0"/>
+                <a:ea typeface="Arial" pitchFamily="34" charset="-122"/>
+                <a:cs typeface="Arial" pitchFamily="34" charset="-120"/>
+              </a:rPr>
+              <a:t>NIL &amp; Brand Partnerships</a:t>
+            </a:r>
+            <a:endParaRPr lang="en-US" sz="1800" dirty="0"/>
+          </a:p>
+        </p:txBody>
+      </p:sp>
+      <p:sp>
+        <p:nvSpPr>
+          <p:cNvPr id="14" name="Text 10"/>
+          <p:cNvSpPr/>
+          <p:nvPr/>
+        </p:nvSpPr>
+        <p:spPr>
+          <a:xfrm>
+            <a:off x="6547104" y="3675888"/>
+            <a:ext cx="4754880" cy="685800"/>
+          </a:xfrm>
+          <a:prstGeom prst="rect">
+            <a:avLst/>
+          </a:prstGeom>
+          <a:noFill/>
+          <a:ln/>
+        </p:spPr>
+        <p:txBody>
+          <a:bodyPr wrap="square" rtlCol="0" anchor="t"/>
+          <a:lstStyle/>
+          <a:p>
+            <a:pPr marL="0" indent="0">
+              <a:lnSpc>
+                <a:spcPct val="108000"/>
+              </a:lnSpc>
+              <a:buNone/>
+            </a:pPr>
+            <a:r>
+              <a:rPr lang="en-US" sz="1100" dirty="0">
+                <a:solidFill>
+                  <a:srgbClr val="E7EDFF"/>
+                </a:solidFill>
+                <a:latin typeface="Arial" pitchFamily="34" charset="0"/>
+                <a:ea typeface="Arial" pitchFamily="34" charset="-122"/>
+                <a:cs typeface="Arial" pitchFamily="34" charset="-120"/>
+              </a:rPr>
+              <a:t>Guidance and deal management for athletes and families navigating NIL — a co-equal specialty and the lead engine for the Before You Sign toolkit.</a:t>
+            </a:r>
+            <a:endParaRPr lang="en-US" sz="1100" dirty="0"/>
+          </a:p>
+        </p:txBody>
+      </p:sp>
+      <p:sp>
+        <p:nvSpPr>
+          <p:cNvPr id="15" name="Text 11"/>
+          <p:cNvSpPr/>
+          <p:nvPr/>
+        </p:nvSpPr>
+        <p:spPr>
+          <a:xfrm>
+            <a:off x="685800" y="4709160"/>
+            <a:ext cx="3657600" cy="274320"/>
+          </a:xfrm>
+          <a:prstGeom prst="rect">
+            <a:avLst/>
+          </a:prstGeom>
+          <a:noFill/>
+          <a:ln/>
+        </p:spPr>
+        <p:txBody>
+          <a:bodyPr wrap="square" rtlCol="0" anchor="ctr"/>
+          <a:lstStyle/>
+          <a:p>
+            <a:pPr marL="0" indent="0">
+              <a:buNone/>
+            </a:pPr>
+            <a:r>
+              <a:rPr lang="en-US" sz="1000" b="1" kern="0" spc="200" dirty="0">
+                <a:solidFill>
+                  <a:srgbClr val="6B7280"/>
+                </a:solidFill>
+                <a:latin typeface="Arial" pitchFamily="34" charset="0"/>
+                <a:ea typeface="Arial" pitchFamily="34" charset="-122"/>
+                <a:cs typeface="Arial" pitchFamily="34" charset="-120"/>
+              </a:rPr>
+              <a:t>EXPANSION LINES</a:t>
+            </a:r>
+            <a:endParaRPr lang="en-US" sz="1000" dirty="0"/>
+          </a:p>
+        </p:txBody>
+      </p:sp>
+      <p:sp>
+        <p:nvSpPr>
+          <p:cNvPr id="16" name="Shape 12"/>
+          <p:cNvSpPr/>
+          <p:nvPr/>
+        </p:nvSpPr>
+        <p:spPr>
+          <a:xfrm>
+            <a:off x="685800" y="5029200"/>
+            <a:ext cx="5230368" cy="1051560"/>
+          </a:xfrm>
+          <a:prstGeom prst="roundRect">
+            <a:avLst>
+              <a:gd name="adj" fmla="val 8696"/>
+            </a:avLst>
+          </a:prstGeom>
+          <a:solidFill>
+            <a:srgbClr val="F3F1EA"/>
+          </a:solidFill>
+          <a:ln w="12700">
+            <a:solidFill>
+              <a:srgbClr val="E4E7EC"/>
+            </a:solidFill>
+            <a:prstDash val="solid"/>
+          </a:ln>
+        </p:spPr>
+      </p:sp>
+      <p:sp>
+        <p:nvSpPr>
+          <p:cNvPr id="17" name="Shape 13"/>
+          <p:cNvSpPr/>
+          <p:nvPr/>
+        </p:nvSpPr>
+        <p:spPr>
+          <a:xfrm>
+            <a:off x="914400" y="5239512"/>
+            <a:ext cx="548640" cy="548640"/>
+          </a:xfrm>
+          <a:prstGeom prst="roundRect">
+            <a:avLst>
+              <a:gd name="adj" fmla="val 20000"/>
+            </a:avLst>
+          </a:prstGeom>
+          <a:solidFill>
+            <a:srgbClr val="0B1220"/>
+          </a:solidFill>
+          <a:ln/>
+        </p:spPr>
+      </p:sp>
+      <p:pic>
+        <p:nvPicPr>
+          <p:cNvPr id="18" name="Image 2" descr="preencoded.png"/>
+          <p:cNvPicPr>
+            <a:picLocks noChangeAspect="1"/>
+          </p:cNvPicPr>
+          <p:nvPr/>
+        </p:nvPicPr>
+        <p:blipFill>
+          <a:blip r:embed="rId5"/>
+          <a:stretch>
+            <a:fillRect/>
+          </a:stretch>
+        </p:blipFill>
+        <p:spPr>
+          <a:xfrm>
+            <a:off x="1042416" y="5367528"/>
+            <a:ext cx="292608" cy="292608"/>
+          </a:xfrm>
+          <a:prstGeom prst="rect">
+            <a:avLst/>
+          </a:prstGeom>
+        </p:spPr>
+      </p:pic>
+      <p:sp>
+        <p:nvSpPr>
+          <p:cNvPr id="19" name="Text 14"/>
+          <p:cNvSpPr/>
+          <p:nvPr/>
+        </p:nvSpPr>
+        <p:spPr>
+          <a:xfrm>
+            <a:off x="1645920" y="5230368"/>
+            <a:ext cx="4041648" cy="347472"/>
+          </a:xfrm>
+          <a:prstGeom prst="rect">
+            <a:avLst/>
+          </a:prstGeom>
+          <a:noFill/>
+          <a:ln/>
+        </p:spPr>
+        <p:txBody>
+          <a:bodyPr wrap="square" rtlCol="0" anchor="ctr"/>
+          <a:lstStyle/>
+          <a:p>
+            <a:pPr marL="0" indent="0">
+              <a:buNone/>
+            </a:pPr>
+            <a:r>
+              <a:rPr lang="en-US" sz="1400" b="1" dirty="0">
+                <a:solidFill>
+                  <a:srgbClr val="141A24"/>
+                </a:solidFill>
+                <a:latin typeface="Arial" pitchFamily="34" charset="0"/>
+                <a:ea typeface="Arial" pitchFamily="34" charset="-122"/>
+                <a:cs typeface="Arial" pitchFamily="34" charset="-120"/>
+              </a:rPr>
+              <a:t>Search Desk</a:t>
+            </a:r>
+            <a:endParaRPr lang="en-US" sz="1400" dirty="0"/>
+          </a:p>
+        </p:txBody>
+      </p:sp>
+      <p:sp>
+        <p:nvSpPr>
+          <p:cNvPr id="20" name="Text 15"/>
+          <p:cNvSpPr/>
+          <p:nvPr/>
+        </p:nvSpPr>
+        <p:spPr>
+          <a:xfrm>
+            <a:off x="1645920" y="5577840"/>
+            <a:ext cx="4041648" cy="411480"/>
+          </a:xfrm>
+          <a:prstGeom prst="rect">
+            <a:avLst/>
+          </a:prstGeom>
+          <a:noFill/>
+          <a:ln/>
+        </p:spPr>
+        <p:txBody>
+          <a:bodyPr wrap="square" rtlCol="0" anchor="t"/>
+          <a:lstStyle/>
+          <a:p>
+            <a:pPr marL="0" indent="0">
+              <a:buNone/>
+            </a:pPr>
+            <a:r>
+              <a:rPr lang="en-US" sz="1050" dirty="0">
+                <a:solidFill>
+                  <a:srgbClr val="141A24"/>
+                </a:solidFill>
+                <a:latin typeface="Arial" pitchFamily="34" charset="0"/>
+                <a:ea typeface="Arial" pitchFamily="34" charset="-122"/>
+                <a:cs typeface="Arial" pitchFamily="34" charset="-120"/>
+              </a:rPr>
+              <a:t>Flat-fee searches for mid-major &amp; D-II/III — paid by the school.</a:t>
+            </a:r>
+            <a:endParaRPr lang="en-US" sz="1050" dirty="0"/>
+          </a:p>
+        </p:txBody>
+      </p:sp>
+      <p:sp>
+        <p:nvSpPr>
+          <p:cNvPr id="21" name="Shape 16"/>
+          <p:cNvSpPr/>
+          <p:nvPr/>
+        </p:nvSpPr>
+        <p:spPr>
+          <a:xfrm>
+            <a:off x="6272784" y="5029200"/>
+            <a:ext cx="5230368" cy="1051560"/>
+          </a:xfrm>
+          <a:prstGeom prst="roundRect">
+            <a:avLst>
+              <a:gd name="adj" fmla="val 8696"/>
+            </a:avLst>
+          </a:prstGeom>
+          <a:solidFill>
+            <a:srgbClr val="F3F1EA"/>
+          </a:solidFill>
+          <a:ln w="12700">
+            <a:solidFill>
+              <a:srgbClr val="E4E7EC"/>
+            </a:solidFill>
+            <a:prstDash val="solid"/>
+          </a:ln>
+        </p:spPr>
+      </p:sp>
+      <p:sp>
+        <p:nvSpPr>
+          <p:cNvPr id="22" name="Shape 17"/>
+          <p:cNvSpPr/>
+          <p:nvPr/>
+        </p:nvSpPr>
+        <p:spPr>
+          <a:xfrm>
+            <a:off x="6501384" y="5239512"/>
+            <a:ext cx="548640" cy="548640"/>
+          </a:xfrm>
+          <a:prstGeom prst="roundRect">
+            <a:avLst>
+              <a:gd name="adj" fmla="val 20000"/>
+            </a:avLst>
+          </a:prstGeom>
+          <a:solidFill>
+            <a:srgbClr val="0B1220"/>
+          </a:solidFill>
+          <a:ln/>
+        </p:spPr>
+      </p:sp>
+      <p:pic>
+        <p:nvPicPr>
+          <p:cNvPr id="23" name="Image 3" descr="preencoded.png"/>
+          <p:cNvPicPr>
+            <a:picLocks noChangeAspect="1"/>
+          </p:cNvPicPr>
+          <p:nvPr/>
+        </p:nvPicPr>
+        <p:blipFill>
+          <a:blip r:embed="rId6"/>
+          <a:stretch>
+            <a:fillRect/>
+          </a:stretch>
+        </p:blipFill>
+        <p:spPr>
+          <a:xfrm>
+            <a:off x="6629400" y="5367528"/>
+            <a:ext cx="292608" cy="292608"/>
+          </a:xfrm>
+          <a:prstGeom prst="rect">
+            <a:avLst/>
+          </a:prstGeom>
+        </p:spPr>
+      </p:pic>
+      <p:sp>
+        <p:nvSpPr>
+          <p:cNvPr id="24" name="Text 18"/>
+          <p:cNvSpPr/>
+          <p:nvPr/>
+        </p:nvSpPr>
+        <p:spPr>
+          <a:xfrm>
+            <a:off x="7232904" y="5230368"/>
+            <a:ext cx="4041648" cy="347472"/>
+          </a:xfrm>
+          <a:prstGeom prst="rect">
+            <a:avLst/>
+          </a:prstGeom>
+          <a:noFill/>
+          <a:ln/>
+        </p:spPr>
+        <p:txBody>
+          <a:bodyPr wrap="square" rtlCol="0" anchor="ctr"/>
+          <a:lstStyle/>
+          <a:p>
+            <a:pPr marL="0" indent="0">
+              <a:buNone/>
+            </a:pPr>
+            <a:r>
+              <a:rPr lang="en-US" sz="1400" b="1" dirty="0">
+                <a:solidFill>
+                  <a:srgbClr val="141A24"/>
+                </a:solidFill>
+                <a:latin typeface="Arial" pitchFamily="34" charset="0"/>
+                <a:ea typeface="Arial" pitchFamily="34" charset="-122"/>
+                <a:cs typeface="Arial" pitchFamily="34" charset="-120"/>
+              </a:rPr>
+              <a:t>NFLPA Agent Rep</a:t>
+            </a:r>
+            <a:endParaRPr lang="en-US" sz="1400" dirty="0"/>
+          </a:p>
+        </p:txBody>
+      </p:sp>
+      <p:sp>
+        <p:nvSpPr>
+          <p:cNvPr id="25" name="Text 19"/>
+          <p:cNvSpPr/>
+          <p:nvPr/>
+        </p:nvSpPr>
+        <p:spPr>
+          <a:xfrm>
+            <a:off x="7232904" y="5577840"/>
+            <a:ext cx="4041648" cy="411480"/>
+          </a:xfrm>
+          <a:prstGeom prst="rect">
+            <a:avLst/>
+          </a:prstGeom>
+          <a:noFill/>
+          <a:ln/>
+        </p:spPr>
+        <p:txBody>
+          <a:bodyPr wrap="square" rtlCol="0" anchor="t"/>
+          <a:lstStyle/>
+          <a:p>
+            <a:pPr marL="0" indent="0">
+              <a:buNone/>
+            </a:pPr>
+            <a:r>
+              <a:rPr lang="en-US" sz="1050" dirty="0">
+                <a:solidFill>
+                  <a:srgbClr val="141A24"/>
+                </a:solidFill>
+                <a:latin typeface="Arial" pitchFamily="34" charset="0"/>
+                <a:ea typeface="Arial" pitchFamily="34" charset="-122"/>
+                <a:cs typeface="Arial" pitchFamily="34" charset="-120"/>
+              </a:rPr>
+              <a:t>Represent NFL players once Kim is certified — 3% of contract.</a:t>
+            </a:r>
+            <a:endParaRPr lang="en-US" sz="1050" dirty="0"/>
+          </a:p>
+        </p:txBody>
+      </p:sp>
+      <p:sp>
+        <p:nvSpPr>
+          <p:cNvPr id="26" name="Text 20"/>
+          <p:cNvSpPr/>
+          <p:nvPr/>
+        </p:nvSpPr>
+        <p:spPr>
+          <a:xfrm>
+            <a:off x="685800" y="6400800"/>
+            <a:ext cx="7315200" cy="274320"/>
+          </a:xfrm>
+          <a:prstGeom prst="rect">
+            <a:avLst/>
+          </a:prstGeom>
+          <a:noFill/>
+          <a:ln/>
+        </p:spPr>
+        <p:txBody>
+          <a:bodyPr wrap="square" rtlCol="0" anchor="ctr"/>
+          <a:lstStyle/>
+          <a:p>
+            <a:pPr marL="0" indent="0">
+              <a:buNone/>
+            </a:pPr>
+            <a:r>
+              <a:rPr lang="en-US" sz="850" b="1" dirty="0">
+                <a:solidFill>
+                  <a:srgbClr val="6B7280"/>
+                </a:solidFill>
+                <a:latin typeface="Arial" pitchFamily="34" charset="0"/>
+                <a:ea typeface="Arial" pitchFamily="34" charset="-122"/>
+                <a:cs typeface="Arial" pitchFamily="34" charset="-120"/>
+              </a:rPr>
+              <a:t>Dexter Sports Co.</a:t>
+            </a:r>
+            <a:r>
+              <a:rPr lang="en-US" sz="850" dirty="0">
+                <a:solidFill>
+                  <a:srgbClr val="AEB4BC"/>
+                </a:solidFill>
+                <a:latin typeface="Arial" pitchFamily="34" charset="0"/>
+                <a:ea typeface="Arial" pitchFamily="34" charset="-122"/>
+                <a:cs typeface="Arial" pitchFamily="34" charset="-120"/>
+              </a:rPr>
+              <a:t>   ·   What We Do</a:t>
+            </a:r>
+            <a:endParaRPr lang="en-US" sz="850" dirty="0"/>
+          </a:p>
+        </p:txBody>
+      </p:sp>
+      <p:sp>
+        <p:nvSpPr>
+          <p:cNvPr id="27" name="Text 21"/>
+          <p:cNvSpPr/>
+          <p:nvPr/>
+        </p:nvSpPr>
+        <p:spPr>
+          <a:xfrm>
+            <a:off x="9174175" y="164592"/>
+            <a:ext cx="2788920" cy="228600"/>
+          </a:xfrm>
+          <a:prstGeom prst="rect">
+            <a:avLst/>
+          </a:prstGeom>
+          <a:noFill/>
+          <a:ln/>
+        </p:spPr>
+        <p:txBody>
+          <a:bodyPr wrap="square" rtlCol="0" anchor="ctr"/>
+          <a:lstStyle/>
+          <a:p>
+            <a:pPr marL="0" indent="0" algn="r">
+              <a:buNone/>
+            </a:pPr>
+            <a:r>
+              <a:rPr lang="en-US" sz="750" b="1" kern="0" spc="100" dirty="0">
+                <a:solidFill>
+                  <a:srgbClr val="D4A62A"/>
+                </a:solidFill>
+                <a:latin typeface="Arial" pitchFamily="34" charset="0"/>
+                <a:ea typeface="Arial" pitchFamily="34" charset="-122"/>
+                <a:cs typeface="Arial" pitchFamily="34" charset="-120"/>
+              </a:rPr>
+              <a:t>CONFIDENTIAL · INTERNAL</a:t>
+            </a:r>
+            <a:endParaRPr lang="en-US" sz="750" dirty="0"/>
+          </a:p>
+        </p:txBody>
+      </p:sp>
+    </p:spTree>
+  </p:cSld>
+  <p:clrMapOvr>
+    <a:masterClrMapping/>
+  </p:clrMapOvr>
+</p:sld>
+</file>
+
+<file path=ppt/slides/slide11.xml><?xml version="1.0" encoding="utf-8"?>
+<p:sld xmlns:a="http://schemas.openxmlformats.org/drawingml/2006/main" xmlns:r="http://schemas.openxmlformats.org/officeDocument/2006/relationships" xmlns:p="http://schemas.openxmlformats.org/presentationml/2006/main">
   <p:cSld name="Slide 10">
     <p:bg>
       <p:bgPr>
@@ -3426,7 +4416,7 @@
 </p:sld>
 </file>
 
-<file path=ppt/slides/slide11.xml><?xml version="1.0" encoding="utf-8"?>
+<file path=ppt/slides/slide12.xml><?xml version="1.0" encoding="utf-8"?>
 <p:sld xmlns:a="http://schemas.openxmlformats.org/drawingml/2006/main" xmlns:r="http://schemas.openxmlformats.org/officeDocument/2006/relationships" xmlns:p="http://schemas.openxmlformats.org/presentationml/2006/main">
   <p:cSld name="Slide 11">
     <p:bg>
@@ -4701,7 +5691,7 @@
 </p:sld>
 </file>
 
-<file path=ppt/slides/slide12.xml><?xml version="1.0" encoding="utf-8"?>
+<file path=ppt/slides/slide13.xml><?xml version="1.0" encoding="utf-8"?>
 <p:sld xmlns:a="http://schemas.openxmlformats.org/drawingml/2006/main" xmlns:r="http://schemas.openxmlformats.org/officeDocument/2006/relationships" xmlns:p="http://schemas.openxmlformats.org/presentationml/2006/main">
   <p:cSld name="Slide 12">
     <p:bg>
@@ -5498,7 +6488,7 @@
 </p:sld>
 </file>
 
-<file path=ppt/slides/slide13.xml><?xml version="1.0" encoding="utf-8"?>
+<file path=ppt/slides/slide14.xml><?xml version="1.0" encoding="utf-8"?>
 <p:sld xmlns:a="http://schemas.openxmlformats.org/drawingml/2006/main" xmlns:r="http://schemas.openxmlformats.org/officeDocument/2006/relationships" xmlns:p="http://schemas.openxmlformats.org/presentationml/2006/main">
   <p:cSld name="Slide 13">
     <p:bg>
@@ -6180,7 +7170,7 @@
 </p:sld>
 </file>
 
-<file path=ppt/slides/slide14.xml><?xml version="1.0" encoding="utf-8"?>
+<file path=ppt/slides/slide15.xml><?xml version="1.0" encoding="utf-8"?>
 <p:sld xmlns:a="http://schemas.openxmlformats.org/drawingml/2006/main" xmlns:r="http://schemas.openxmlformats.org/officeDocument/2006/relationships" xmlns:p="http://schemas.openxmlformats.org/presentationml/2006/main">
   <p:cSld name="Slide 14">
     <p:bg>
@@ -6969,7 +7959,7 @@
 </p:sld>
 </file>
 
-<file path=ppt/slides/slide15.xml><?xml version="1.0" encoding="utf-8"?>
+<file path=ppt/slides/slide16.xml><?xml version="1.0" encoding="utf-8"?>
 <p:sld xmlns:a="http://schemas.openxmlformats.org/drawingml/2006/main" xmlns:r="http://schemas.openxmlformats.org/officeDocument/2006/relationships" xmlns:p="http://schemas.openxmlformats.org/presentationml/2006/main">
   <p:cSld name="Slide 15">
     <p:bg>
@@ -9041,7 +10031,7 @@
               <a:buNone/>
             </a:pPr>
             <a:r>
-              <a:rPr lang="en-US" sz="3100" b="1" dirty="0">
+              <a:rPr lang="en-US" sz="3100" b="1">
                 <a:solidFill>
                   <a:srgbClr val="141A24"/>
                 </a:solidFill>
@@ -9049,18 +10039,7 @@
                 <a:ea typeface="Arial" pitchFamily="34" charset="-122"/>
                 <a:cs typeface="Arial" pitchFamily="34" charset="-120"/>
               </a:rPr>
-              <a:t>7.3%</a:t>
-            </a:r>
-            <a:r>
-              <a:rPr lang="en-US" sz="1400" b="1" dirty="0">
-                <a:solidFill>
-                  <a:srgbClr val="6B7280"/>
-                </a:solidFill>
-                <a:latin typeface="Arial" pitchFamily="34" charset="0"/>
-                <a:ea typeface="Arial" pitchFamily="34" charset="-122"/>
-                <a:cs typeface="Arial" pitchFamily="34" charset="-120"/>
-              </a:rPr>
-              <a:t> *</a:t>
+              <a:t>7.3% **</a:t>
             </a:r>
             <a:endParaRPr lang="en-US" sz="3100" dirty="0"/>
           </a:p>
@@ -9437,6 +10416,901 @@
 </file>
 
 <file path=ppt/slides/slide4.xml><?xml version="1.0" encoding="utf-8"?>
+<p:sld xmlns:a="http://schemas.openxmlformats.org/drawingml/2006/main" xmlns:r="http://schemas.openxmlformats.org/officeDocument/2006/relationships" xmlns:p="http://schemas.openxmlformats.org/presentationml/2006/main">
+  <p:cSld name="Slide 3">
+    <p:bg>
+      <p:bgPr>
+        <a:solidFill>
+          <a:srgbClr val="FFFFFF"/>
+        </a:solidFill>
+        <a:effectLst/>
+      </p:bgPr>
+    </p:bg>
+    <p:spTree>
+      <p:nvGrpSpPr>
+        <p:cNvPr id="1" name=""/>
+        <p:cNvGrpSpPr/>
+        <p:nvPr/>
+      </p:nvGrpSpPr>
+      <p:grpSpPr>
+        <a:xfrm>
+          <a:off x="0" y="0"/>
+          <a:ext cx="0" cy="0"/>
+          <a:chOff x="0" y="0"/>
+          <a:chExt cx="0" cy="0"/>
+        </a:xfrm>
+      </p:grpSpPr>
+      <p:sp>
+        <p:nvSpPr>
+          <p:cNvPr id="2" name="Text 0"/>
+          <p:cNvSpPr/>
+          <p:nvPr/>
+        </p:nvSpPr>
+        <p:spPr>
+          <a:xfrm>
+            <a:off x="685800" y="548640"/>
+            <a:ext cx="9144000" cy="274320"/>
+          </a:xfrm>
+          <a:prstGeom prst="rect">
+            <a:avLst/>
+          </a:prstGeom>
+          <a:noFill/>
+          <a:ln/>
+        </p:spPr>
+        <p:txBody>
+          <a:bodyPr wrap="square" rtlCol="0" anchor="ctr"/>
+          <a:lstStyle/>
+          <a:p>
+            <a:pPr marL="0" indent="0">
+              <a:buNone/>
+            </a:pPr>
+            <a:r>
+              <a:rPr lang="en-US" sz="800">
+                <a:solidFill>
+                  <a:srgbClr val="2563EB"/>
+                </a:solidFill>
+                <a:latin typeface="Arial" pitchFamily="34" charset="0"/>
+                <a:ea typeface="Arial" pitchFamily="34" charset="-122"/>
+                <a:cs typeface="Arial" pitchFamily="34" charset="-120"/>
+              </a:rPr>
+              <a:t>● BY THE NUMBERS</a:t>
+            </a:r>
+            <a:endParaRPr lang="en-US" sz="1100" dirty="0"/>
+          </a:p>
+        </p:txBody>
+      </p:sp>
+      <p:sp>
+        <p:nvSpPr>
+          <p:cNvPr id="3" name="Text 1"/>
+          <p:cNvSpPr/>
+          <p:nvPr/>
+        </p:nvSpPr>
+        <p:spPr>
+          <a:xfrm>
+            <a:off x="685800" y="868680"/>
+            <a:ext cx="10789920" cy="640080"/>
+          </a:xfrm>
+          <a:prstGeom prst="rect">
+            <a:avLst/>
+          </a:prstGeom>
+          <a:noFill/>
+          <a:ln/>
+        </p:spPr>
+        <p:txBody>
+          <a:bodyPr wrap="square" rtlCol="0" anchor="ctr"/>
+          <a:lstStyle/>
+          <a:p>
+            <a:pPr marL="0" indent="0">
+              <a:buNone/>
+            </a:pPr>
+            <a:r>
+              <a:rPr lang="en-US" sz="2900" b="1">
+                <a:solidFill>
+                  <a:srgbClr val="141A24"/>
+                </a:solidFill>
+                <a:latin typeface="Arial" pitchFamily="34" charset="0"/>
+                <a:ea typeface="Arial" pitchFamily="34" charset="-122"/>
+                <a:cs typeface="Arial" pitchFamily="34" charset="-120"/>
+              </a:rPr>
+              <a:t>More women in the game than ever.</a:t>
+            </a:r>
+            <a:endParaRPr lang="en-US" sz="2900" dirty="0"/>
+          </a:p>
+        </p:txBody>
+      </p:sp>
+      <p:sp>
+        <p:nvSpPr>
+          <p:cNvPr id="4" name="Text 2"/>
+          <p:cNvSpPr/>
+          <p:nvPr/>
+        </p:nvSpPr>
+        <p:spPr>
+          <a:xfrm>
+            <a:off x="685800" y="1481328"/>
+            <a:ext cx="10789920" cy="365760"/>
+          </a:xfrm>
+          <a:prstGeom prst="rect">
+            <a:avLst/>
+          </a:prstGeom>
+          <a:noFill/>
+          <a:ln/>
+        </p:spPr>
+        <p:txBody>
+          <a:bodyPr wrap="square" rtlCol="0" anchor="ctr"/>
+          <a:lstStyle/>
+          <a:p>
+            <a:pPr marL="0" indent="0">
+              <a:buNone/>
+            </a:pPr>
+            <a:r>
+              <a:rPr lang="en-US" sz="1350" i="1">
+                <a:solidFill>
+                  <a:srgbClr val="6B7280"/>
+                </a:solidFill>
+                <a:latin typeface="Arial" pitchFamily="34" charset="0"/>
+                <a:ea typeface="Arial" pitchFamily="34" charset="-122"/>
+                <a:cs typeface="Arial" pitchFamily="34" charset="-120"/>
+              </a:rPr>
+              <a:t>Record participation and a fast-growing NIL market mean more opportunities, and more contracts and offers that need a careful advocate.</a:t>
+            </a:r>
+            <a:endParaRPr lang="en-US" sz="1350" dirty="0"/>
+          </a:p>
+        </p:txBody>
+      </p:sp>
+      <p:sp>
+        <p:nvSpPr>
+          <p:cNvPr id="5" name="Shape 3"/>
+          <p:cNvSpPr/>
+          <p:nvPr/>
+        </p:nvSpPr>
+        <p:spPr>
+          <a:xfrm>
+            <a:off x="685800" y="2148840"/>
+            <a:ext cx="2606040" cy="2148840"/>
+          </a:xfrm>
+          <a:prstGeom prst="roundRect">
+            <a:avLst>
+              <a:gd name="adj" fmla="val 5106"/>
+            </a:avLst>
+          </a:prstGeom>
+          <a:solidFill>
+            <a:srgbClr val="F3F1EA"/>
+          </a:solidFill>
+          <a:ln w="12700">
+            <a:solidFill>
+              <a:srgbClr val="E4E7EC"/>
+            </a:solidFill>
+            <a:prstDash val="solid"/>
+          </a:ln>
+        </p:spPr>
+        <p:txBody>
+          <a:bodyPr/>
+          <a:lstStyle/>
+          <a:p>
+            <a:endParaRPr lang="en-US"/>
+          </a:p>
+        </p:txBody>
+      </p:sp>
+      <p:pic>
+        <p:nvPicPr>
+          <p:cNvPr id="6" name="Image 0" descr="preencoded.png"/>
+          <p:cNvPicPr>
+            <a:picLocks noChangeAspect="1"/>
+          </p:cNvPicPr>
+          <p:nvPr/>
+        </p:nvPicPr>
+        <p:blipFill>
+          <a:blip r:embed="rId3"/>
+          <a:stretch>
+            <a:fillRect/>
+          </a:stretch>
+        </p:blipFill>
+        <p:spPr>
+          <a:xfrm>
+            <a:off x="960120" y="2423160"/>
+            <a:ext cx="457200" cy="457200"/>
+          </a:xfrm>
+          <a:prstGeom prst="rect">
+            <a:avLst/>
+          </a:prstGeom>
+        </p:spPr>
+      </p:pic>
+      <p:sp>
+        <p:nvSpPr>
+          <p:cNvPr id="7" name="Text 4"/>
+          <p:cNvSpPr/>
+          <p:nvPr/>
+        </p:nvSpPr>
+        <p:spPr>
+          <a:xfrm>
+            <a:off x="914400" y="2926080"/>
+            <a:ext cx="2148840" cy="548640"/>
+          </a:xfrm>
+          <a:prstGeom prst="rect">
+            <a:avLst/>
+          </a:prstGeom>
+          <a:noFill/>
+          <a:ln/>
+        </p:spPr>
+        <p:txBody>
+          <a:bodyPr wrap="square" rtlCol="0" anchor="ctr"/>
+          <a:lstStyle/>
+          <a:p>
+            <a:pPr marL="0" indent="0">
+              <a:buNone/>
+            </a:pPr>
+            <a:r>
+              <a:rPr lang="en-US" sz="3100" b="1">
+                <a:solidFill>
+                  <a:srgbClr val="141A24"/>
+                </a:solidFill>
+                <a:latin typeface="Arial" pitchFamily="34" charset="0"/>
+                <a:ea typeface="Arial" pitchFamily="34" charset="-122"/>
+                <a:cs typeface="Arial" pitchFamily="34" charset="-120"/>
+              </a:rPr>
+              <a:t>242,341 *</a:t>
+            </a:r>
+            <a:endParaRPr lang="en-US" sz="3100" dirty="0"/>
+          </a:p>
+        </p:txBody>
+      </p:sp>
+      <p:sp>
+        <p:nvSpPr>
+          <p:cNvPr id="8" name="Text 5"/>
+          <p:cNvSpPr/>
+          <p:nvPr/>
+        </p:nvSpPr>
+        <p:spPr>
+          <a:xfrm>
+            <a:off x="941832" y="3520440"/>
+            <a:ext cx="2103120" cy="685800"/>
+          </a:xfrm>
+          <a:prstGeom prst="rect">
+            <a:avLst/>
+          </a:prstGeom>
+          <a:noFill/>
+          <a:ln/>
+        </p:spPr>
+        <p:txBody>
+          <a:bodyPr wrap="square" rtlCol="0" anchor="t"/>
+          <a:lstStyle/>
+          <a:p>
+            <a:pPr marL="0" indent="0">
+              <a:lnSpc>
+                <a:spcPct val="105000"/>
+              </a:lnSpc>
+              <a:buNone/>
+            </a:pPr>
+            <a:r>
+              <a:rPr lang="en-US" sz="1050">
+                <a:solidFill>
+                  <a:srgbClr val="141A24"/>
+                </a:solidFill>
+                <a:latin typeface="Arial" pitchFamily="34" charset="0"/>
+                <a:ea typeface="Arial" pitchFamily="34" charset="-122"/>
+                <a:cs typeface="Arial" pitchFamily="34" charset="-120"/>
+              </a:rPr>
+              <a:t>women competed in NCAA sports in 2024–25, a record</a:t>
+            </a:r>
+            <a:endParaRPr lang="en-US" sz="1050" dirty="0"/>
+          </a:p>
+        </p:txBody>
+      </p:sp>
+      <p:sp>
+        <p:nvSpPr>
+          <p:cNvPr id="9" name="Shape 6"/>
+          <p:cNvSpPr/>
+          <p:nvPr/>
+        </p:nvSpPr>
+        <p:spPr>
+          <a:xfrm>
+            <a:off x="3529584" y="2148840"/>
+            <a:ext cx="2606040" cy="2148840"/>
+          </a:xfrm>
+          <a:prstGeom prst="roundRect">
+            <a:avLst>
+              <a:gd name="adj" fmla="val 5106"/>
+            </a:avLst>
+          </a:prstGeom>
+          <a:solidFill>
+            <a:srgbClr val="F3F1EA"/>
+          </a:solidFill>
+          <a:ln w="12700">
+            <a:solidFill>
+              <a:srgbClr val="E4E7EC"/>
+            </a:solidFill>
+            <a:prstDash val="solid"/>
+          </a:ln>
+        </p:spPr>
+        <p:txBody>
+          <a:bodyPr/>
+          <a:lstStyle/>
+          <a:p>
+            <a:endParaRPr lang="en-US"/>
+          </a:p>
+        </p:txBody>
+      </p:sp>
+      <p:pic>
+        <p:nvPicPr>
+          <p:cNvPr id="10" name="Image 1" descr="preencoded.png"/>
+          <p:cNvPicPr>
+            <a:picLocks noChangeAspect="1"/>
+          </p:cNvPicPr>
+          <p:nvPr/>
+        </p:nvPicPr>
+        <p:blipFill>
+          <a:blip r:embed="rId4"/>
+          <a:stretch>
+            <a:fillRect/>
+          </a:stretch>
+        </p:blipFill>
+        <p:spPr>
+          <a:xfrm>
+            <a:off x="3803904" y="2423160"/>
+            <a:ext cx="457200" cy="457200"/>
+          </a:xfrm>
+          <a:prstGeom prst="rect">
+            <a:avLst/>
+          </a:prstGeom>
+        </p:spPr>
+      </p:pic>
+      <p:sp>
+        <p:nvSpPr>
+          <p:cNvPr id="11" name="Text 7"/>
+          <p:cNvSpPr/>
+          <p:nvPr/>
+        </p:nvSpPr>
+        <p:spPr>
+          <a:xfrm>
+            <a:off x="3758184" y="2926080"/>
+            <a:ext cx="2148840" cy="548640"/>
+          </a:xfrm>
+          <a:prstGeom prst="rect">
+            <a:avLst/>
+          </a:prstGeom>
+          <a:noFill/>
+          <a:ln/>
+        </p:spPr>
+        <p:txBody>
+          <a:bodyPr wrap="square" rtlCol="0" anchor="ctr"/>
+          <a:lstStyle/>
+          <a:p>
+            <a:pPr marL="0" indent="0">
+              <a:buNone/>
+            </a:pPr>
+            <a:r>
+              <a:rPr lang="en-US" sz="3100" b="1">
+                <a:solidFill>
+                  <a:srgbClr val="141A24"/>
+                </a:solidFill>
+                <a:latin typeface="Arial" pitchFamily="34" charset="0"/>
+                <a:ea typeface="Arial" pitchFamily="34" charset="-122"/>
+                <a:cs typeface="Arial" pitchFamily="34" charset="-120"/>
+              </a:rPr>
+              <a:t>3.54M **</a:t>
+            </a:r>
+            <a:endParaRPr lang="en-US" sz="3100" dirty="0"/>
+          </a:p>
+        </p:txBody>
+      </p:sp>
+      <p:sp>
+        <p:nvSpPr>
+          <p:cNvPr id="12" name="Text 8"/>
+          <p:cNvSpPr/>
+          <p:nvPr/>
+        </p:nvSpPr>
+        <p:spPr>
+          <a:xfrm>
+            <a:off x="3785616" y="3520440"/>
+            <a:ext cx="2103120" cy="685800"/>
+          </a:xfrm>
+          <a:prstGeom prst="rect">
+            <a:avLst/>
+          </a:prstGeom>
+          <a:noFill/>
+          <a:ln/>
+        </p:spPr>
+        <p:txBody>
+          <a:bodyPr wrap="square" rtlCol="0" anchor="t"/>
+          <a:lstStyle/>
+          <a:p>
+            <a:pPr marL="0" indent="0">
+              <a:lnSpc>
+                <a:spcPct val="105000"/>
+              </a:lnSpc>
+              <a:buNone/>
+            </a:pPr>
+            <a:r>
+              <a:rPr lang="en-US" sz="1050">
+                <a:solidFill>
+                  <a:srgbClr val="141A24"/>
+                </a:solidFill>
+                <a:latin typeface="Arial" pitchFamily="34" charset="0"/>
+                <a:ea typeface="Arial" pitchFamily="34" charset="-122"/>
+                <a:cs typeface="Arial" pitchFamily="34" charset="-120"/>
+              </a:rPr>
+              <a:t>girls played high school sports in 2024–25, also a record</a:t>
+            </a:r>
+            <a:endParaRPr lang="en-US" sz="1050" dirty="0"/>
+          </a:p>
+        </p:txBody>
+      </p:sp>
+      <p:sp>
+        <p:nvSpPr>
+          <p:cNvPr id="13" name="Shape 9"/>
+          <p:cNvSpPr/>
+          <p:nvPr/>
+        </p:nvSpPr>
+        <p:spPr>
+          <a:xfrm>
+            <a:off x="6373368" y="2148840"/>
+            <a:ext cx="2606040" cy="2148840"/>
+          </a:xfrm>
+          <a:prstGeom prst="roundRect">
+            <a:avLst>
+              <a:gd name="adj" fmla="val 5106"/>
+            </a:avLst>
+          </a:prstGeom>
+          <a:solidFill>
+            <a:srgbClr val="F3F1EA"/>
+          </a:solidFill>
+          <a:ln w="12700">
+            <a:solidFill>
+              <a:srgbClr val="E4E7EC"/>
+            </a:solidFill>
+            <a:prstDash val="solid"/>
+          </a:ln>
+        </p:spPr>
+        <p:txBody>
+          <a:bodyPr/>
+          <a:lstStyle/>
+          <a:p>
+            <a:endParaRPr lang="en-US"/>
+          </a:p>
+        </p:txBody>
+      </p:sp>
+      <p:pic>
+        <p:nvPicPr>
+          <p:cNvPr id="14" name="Image 2" descr="preencoded.png"/>
+          <p:cNvPicPr>
+            <a:picLocks noChangeAspect="1"/>
+          </p:cNvPicPr>
+          <p:nvPr/>
+        </p:nvPicPr>
+        <p:blipFill>
+          <a:blip r:embed="rId5"/>
+          <a:stretch>
+            <a:fillRect/>
+          </a:stretch>
+        </p:blipFill>
+        <p:spPr>
+          <a:xfrm>
+            <a:off x="6647688" y="2423160"/>
+            <a:ext cx="457200" cy="457200"/>
+          </a:xfrm>
+          <a:prstGeom prst="rect">
+            <a:avLst/>
+          </a:prstGeom>
+        </p:spPr>
+      </p:pic>
+      <p:sp>
+        <p:nvSpPr>
+          <p:cNvPr id="15" name="Text 10"/>
+          <p:cNvSpPr/>
+          <p:nvPr/>
+        </p:nvSpPr>
+        <p:spPr>
+          <a:xfrm>
+            <a:off x="6601968" y="2926080"/>
+            <a:ext cx="2148840" cy="548640"/>
+          </a:xfrm>
+          <a:prstGeom prst="rect">
+            <a:avLst/>
+          </a:prstGeom>
+          <a:noFill/>
+          <a:ln/>
+        </p:spPr>
+        <p:txBody>
+          <a:bodyPr wrap="square" rtlCol="0" anchor="ctr"/>
+          <a:lstStyle/>
+          <a:p>
+            <a:pPr marL="0" indent="0">
+              <a:buNone/>
+            </a:pPr>
+            <a:r>
+              <a:rPr lang="en-US" sz="3100" b="1">
+                <a:solidFill>
+                  <a:srgbClr val="141A24"/>
+                </a:solidFill>
+                <a:latin typeface="Arial" pitchFamily="34" charset="0"/>
+                <a:ea typeface="Arial" pitchFamily="34" charset="-122"/>
+                <a:cs typeface="Arial" pitchFamily="34" charset="-120"/>
+              </a:rPr>
+              <a:t>$1.67B ***</a:t>
+            </a:r>
+            <a:endParaRPr lang="en-US" sz="3100" dirty="0"/>
+          </a:p>
+        </p:txBody>
+      </p:sp>
+      <p:sp>
+        <p:nvSpPr>
+          <p:cNvPr id="16" name="Text 11"/>
+          <p:cNvSpPr/>
+          <p:nvPr/>
+        </p:nvSpPr>
+        <p:spPr>
+          <a:xfrm>
+            <a:off x="6629400" y="3520440"/>
+            <a:ext cx="2103120" cy="685800"/>
+          </a:xfrm>
+          <a:prstGeom prst="rect">
+            <a:avLst/>
+          </a:prstGeom>
+          <a:noFill/>
+          <a:ln/>
+        </p:spPr>
+        <p:txBody>
+          <a:bodyPr wrap="square" rtlCol="0" anchor="t"/>
+          <a:lstStyle/>
+          <a:p>
+            <a:pPr marL="0" indent="0">
+              <a:lnSpc>
+                <a:spcPct val="105000"/>
+              </a:lnSpc>
+              <a:buNone/>
+            </a:pPr>
+            <a:r>
+              <a:rPr lang="en-US" sz="1050">
+                <a:solidFill>
+                  <a:srgbClr val="141A24"/>
+                </a:solidFill>
+                <a:latin typeface="Arial" pitchFamily="34" charset="0"/>
+                <a:ea typeface="Arial" pitchFamily="34" charset="-122"/>
+                <a:cs typeface="Arial" pitchFamily="34" charset="-120"/>
+              </a:rPr>
+              <a:t>projected NIL market in 2024–25, up from $917M in 2021–22</a:t>
+            </a:r>
+            <a:endParaRPr lang="en-US" sz="1050" dirty="0"/>
+          </a:p>
+        </p:txBody>
+      </p:sp>
+      <p:sp>
+        <p:nvSpPr>
+          <p:cNvPr id="17" name="Shape 12"/>
+          <p:cNvSpPr/>
+          <p:nvPr/>
+        </p:nvSpPr>
+        <p:spPr>
+          <a:xfrm>
+            <a:off x="9217152" y="2148840"/>
+            <a:ext cx="2606040" cy="2148840"/>
+          </a:xfrm>
+          <a:prstGeom prst="roundRect">
+            <a:avLst>
+              <a:gd name="adj" fmla="val 5106"/>
+            </a:avLst>
+          </a:prstGeom>
+          <a:solidFill>
+            <a:srgbClr val="F3F1EA"/>
+          </a:solidFill>
+          <a:ln w="12700">
+            <a:solidFill>
+              <a:srgbClr val="E4E7EC"/>
+            </a:solidFill>
+            <a:prstDash val="solid"/>
+          </a:ln>
+        </p:spPr>
+        <p:txBody>
+          <a:bodyPr/>
+          <a:lstStyle/>
+          <a:p>
+            <a:endParaRPr lang="en-US"/>
+          </a:p>
+        </p:txBody>
+      </p:sp>
+      <p:pic>
+        <p:nvPicPr>
+          <p:cNvPr id="18" name="Image 3" descr="preencoded.png"/>
+          <p:cNvPicPr>
+            <a:picLocks noChangeAspect="1"/>
+          </p:cNvPicPr>
+          <p:nvPr/>
+        </p:nvPicPr>
+        <p:blipFill>
+          <a:blip r:embed="rId6"/>
+          <a:stretch>
+            <a:fillRect/>
+          </a:stretch>
+        </p:blipFill>
+        <p:spPr>
+          <a:xfrm>
+            <a:off x="9491472" y="2423160"/>
+            <a:ext cx="457200" cy="457200"/>
+          </a:xfrm>
+          <a:prstGeom prst="rect">
+            <a:avLst/>
+          </a:prstGeom>
+        </p:spPr>
+      </p:pic>
+      <p:sp>
+        <p:nvSpPr>
+          <p:cNvPr id="19" name="Text 13"/>
+          <p:cNvSpPr/>
+          <p:nvPr/>
+        </p:nvSpPr>
+        <p:spPr>
+          <a:xfrm>
+            <a:off x="9445752" y="2926080"/>
+            <a:ext cx="2148840" cy="548640"/>
+          </a:xfrm>
+          <a:prstGeom prst="rect">
+            <a:avLst/>
+          </a:prstGeom>
+          <a:noFill/>
+          <a:ln/>
+        </p:spPr>
+        <p:txBody>
+          <a:bodyPr wrap="square" rtlCol="0" anchor="ctr"/>
+          <a:lstStyle/>
+          <a:p>
+            <a:pPr marL="0" indent="0">
+              <a:buNone/>
+            </a:pPr>
+            <a:r>
+              <a:rPr lang="en-US" sz="3100" b="1">
+                <a:solidFill>
+                  <a:srgbClr val="141A24"/>
+                </a:solidFill>
+                <a:latin typeface="Arial" pitchFamily="34" charset="0"/>
+                <a:ea typeface="Arial" pitchFamily="34" charset="-122"/>
+                <a:cs typeface="Arial" pitchFamily="34" charset="-120"/>
+              </a:rPr>
+              <a:t>10.2% ***</a:t>
+            </a:r>
+            <a:endParaRPr lang="en-US" sz="3100" dirty="0"/>
+          </a:p>
+        </p:txBody>
+      </p:sp>
+      <p:sp>
+        <p:nvSpPr>
+          <p:cNvPr id="20" name="Text 14"/>
+          <p:cNvSpPr/>
+          <p:nvPr/>
+        </p:nvSpPr>
+        <p:spPr>
+          <a:xfrm>
+            <a:off x="9473184" y="3520440"/>
+            <a:ext cx="2103120" cy="685800"/>
+          </a:xfrm>
+          <a:prstGeom prst="rect">
+            <a:avLst/>
+          </a:prstGeom>
+          <a:noFill/>
+          <a:ln/>
+        </p:spPr>
+        <p:txBody>
+          <a:bodyPr wrap="square" rtlCol="0" anchor="t"/>
+          <a:lstStyle/>
+          <a:p>
+            <a:pPr marL="0" indent="0">
+              <a:lnSpc>
+                <a:spcPct val="105000"/>
+              </a:lnSpc>
+              <a:buNone/>
+            </a:pPr>
+            <a:r>
+              <a:rPr lang="en-US" sz="1050">
+                <a:solidFill>
+                  <a:srgbClr val="141A24"/>
+                </a:solidFill>
+                <a:latin typeface="Arial" pitchFamily="34" charset="0"/>
+                <a:ea typeface="Arial" pitchFamily="34" charset="-122"/>
+                <a:cs typeface="Arial" pitchFamily="34" charset="-120"/>
+              </a:rPr>
+              <a:t>of commercial NIL pay went to women's basketball, passing men's basketball (8.6%)</a:t>
+            </a:r>
+            <a:endParaRPr lang="en-US" sz="1050" dirty="0"/>
+          </a:p>
+        </p:txBody>
+      </p:sp>
+      <p:sp>
+        <p:nvSpPr>
+          <p:cNvPr id="21" name="Shape 15"/>
+          <p:cNvSpPr/>
+          <p:nvPr/>
+        </p:nvSpPr>
+        <p:spPr>
+          <a:xfrm>
+            <a:off x="685800" y="4617720"/>
+            <a:ext cx="10817352" cy="1280160"/>
+          </a:xfrm>
+          <a:prstGeom prst="roundRect">
+            <a:avLst>
+              <a:gd name="adj" fmla="val 8571"/>
+            </a:avLst>
+          </a:prstGeom>
+          <a:solidFill>
+            <a:srgbClr val="0B1220"/>
+          </a:solidFill>
+          <a:ln/>
+        </p:spPr>
+        <p:txBody>
+          <a:bodyPr/>
+          <a:lstStyle/>
+          <a:p>
+            <a:endParaRPr lang="en-US"/>
+          </a:p>
+        </p:txBody>
+      </p:sp>
+      <p:pic>
+        <p:nvPicPr>
+          <p:cNvPr id="22" name="Image 4" descr="preencoded.png"/>
+          <p:cNvPicPr>
+            <a:picLocks noChangeAspect="1"/>
+          </p:cNvPicPr>
+          <p:nvPr/>
+        </p:nvPicPr>
+        <p:blipFill>
+          <a:blip r:embed="rId7"/>
+          <a:stretch>
+            <a:fillRect/>
+          </a:stretch>
+        </p:blipFill>
+        <p:spPr>
+          <a:xfrm>
+            <a:off x="1051560" y="4956048"/>
+            <a:ext cx="566928" cy="566928"/>
+          </a:xfrm>
+          <a:prstGeom prst="rect">
+            <a:avLst/>
+          </a:prstGeom>
+        </p:spPr>
+      </p:pic>
+      <p:sp>
+        <p:nvSpPr>
+          <p:cNvPr id="23" name="Text 16"/>
+          <p:cNvSpPr/>
+          <p:nvPr/>
+        </p:nvSpPr>
+        <p:spPr>
+          <a:xfrm>
+            <a:off x="1874520" y="4773168"/>
+            <a:ext cx="9326880" cy="1005840"/>
+          </a:xfrm>
+          <a:prstGeom prst="rect">
+            <a:avLst/>
+          </a:prstGeom>
+          <a:noFill/>
+          <a:ln/>
+        </p:spPr>
+        <p:txBody>
+          <a:bodyPr wrap="square" rtlCol="0" anchor="ctr"/>
+          <a:lstStyle/>
+          <a:p>
+            <a:pPr marL="0" indent="0">
+              <a:lnSpc>
+                <a:spcPct val="106000"/>
+              </a:lnSpc>
+              <a:buNone/>
+            </a:pPr>
+            <a:r>
+              <a:rPr lang="en-US" sz="1150" b="1">
+                <a:solidFill>
+                  <a:srgbClr val="FFFFFF"/>
+                </a:solidFill>
+                <a:latin typeface="Arial" pitchFamily="34" charset="0"/>
+                <a:ea typeface="Arial" pitchFamily="34" charset="-122"/>
+                <a:cs typeface="Arial" pitchFamily="34" charset="-120"/>
+              </a:rPr>
+              <a:t>Bigger market, uneven share.  </a:t>
+            </a:r>
+            <a:r>
+              <a:rPr lang="en-US" sz="1150">
+                <a:solidFill>
+                  <a:srgbClr val="93B4FF"/>
+                </a:solidFill>
+                <a:latin typeface="Arial" pitchFamily="34" charset="0"/>
+                <a:ea typeface="Arial" pitchFamily="34" charset="-122"/>
+                <a:cs typeface="Arial" pitchFamily="34" charset="-120"/>
+              </a:rPr>
+              <a:t>Brand deals reward women athletes, but donor-funded collectives still send most of their money to football and men's basketball (women's volleyball gets under 1%). Women head coaches grew 13% in a decade to 5,126.* Demand for a careful advocate is growing on both sides.</a:t>
+            </a:r>
+            <a:endParaRPr lang="en-US" sz="1150" dirty="0"/>
+          </a:p>
+        </p:txBody>
+      </p:sp>
+      <p:sp>
+        <p:nvSpPr>
+          <p:cNvPr id="24" name="Text 17"/>
+          <p:cNvSpPr/>
+          <p:nvPr/>
+        </p:nvSpPr>
+        <p:spPr>
+          <a:xfrm>
+            <a:off x="685800" y="6455664"/>
+            <a:ext cx="10789920" cy="274320"/>
+          </a:xfrm>
+          <a:prstGeom prst="rect">
+            <a:avLst/>
+          </a:prstGeom>
+          <a:noFill/>
+          <a:ln/>
+        </p:spPr>
+        <p:txBody>
+          <a:bodyPr wrap="square" rtlCol="0" anchor="ctr"/>
+          <a:lstStyle/>
+          <a:p>
+            <a:pPr marL="0" indent="0">
+              <a:buNone/>
+            </a:pPr>
+            <a:r>
+              <a:rPr lang="en-US" sz="700" i="1">
+                <a:solidFill>
+                  <a:srgbClr val="6B7280"/>
+                </a:solidFill>
+                <a:latin typeface="Arial" pitchFamily="34" charset="0"/>
+                <a:ea typeface="Arial" pitchFamily="34" charset="-122"/>
+                <a:cs typeface="Arial" pitchFamily="34" charset="-120"/>
+              </a:rPr>
+              <a:t>* NCAA, Sports Sponsorship and Participation Rates Report (2024–25) and Demographics Database (2025), via NCAA.org.  ** NFHS, High School Athletics Participation Survey 2024–25 (Sept 2025).  *** Opendorse, NIL at 3: The Annual Opendorse Report (July 2024); market figures are Opendorse projections.</a:t>
+            </a:r>
+            <a:endParaRPr lang="en-US" sz="700" dirty="0"/>
+          </a:p>
+        </p:txBody>
+      </p:sp>
+      <p:sp>
+        <p:nvSpPr>
+          <p:cNvPr id="25" name="Text 18"/>
+          <p:cNvSpPr/>
+          <p:nvPr/>
+        </p:nvSpPr>
+        <p:spPr>
+          <a:xfrm>
+            <a:off x="9174175" y="164592"/>
+            <a:ext cx="2788920" cy="228600"/>
+          </a:xfrm>
+          <a:prstGeom prst="rect">
+            <a:avLst/>
+          </a:prstGeom>
+          <a:noFill/>
+          <a:ln/>
+        </p:spPr>
+        <p:txBody>
+          <a:bodyPr wrap="square" rtlCol="0" anchor="ctr"/>
+          <a:lstStyle/>
+          <a:p>
+            <a:pPr marL="0" indent="0" algn="r">
+              <a:buNone/>
+            </a:pPr>
+            <a:r>
+              <a:rPr lang="en-US" sz="750" b="1" kern="0" spc="100" dirty="0">
+                <a:solidFill>
+                  <a:srgbClr val="D4A62A"/>
+                </a:solidFill>
+                <a:latin typeface="Arial" pitchFamily="34" charset="0"/>
+                <a:ea typeface="Arial" pitchFamily="34" charset="-122"/>
+                <a:cs typeface="Arial" pitchFamily="34" charset="-120"/>
+              </a:rPr>
+              <a:t>CONFIDENTIAL · INTERNAL</a:t>
+            </a:r>
+            <a:endParaRPr lang="en-US" sz="750" dirty="0"/>
+          </a:p>
+        </p:txBody>
+      </p:sp>
+    </p:spTree>
+    <p:extLst>
+      <p:ext uri="{BB962C8B-B14F-4D97-AF65-F5344CB8AC3E}">
+        <p14:creationId xmlns:p14="http://schemas.microsoft.com/office/powerpoint/2010/main" val="484646047"/>
+      </p:ext>
+    </p:extLst>
+  </p:cSld>
+  <p:clrMapOvr>
+    <a:masterClrMapping/>
+  </p:clrMapOvr>
+</p:sld>
+</file>
+
+<file path=ppt/slides/slide5.xml><?xml version="1.0" encoding="utf-8"?>
 <p:sld xmlns:a="http://schemas.openxmlformats.org/drawingml/2006/main" xmlns:r="http://schemas.openxmlformats.org/officeDocument/2006/relationships" xmlns:p="http://schemas.openxmlformats.org/presentationml/2006/main">
   <p:cSld name="Slide 4">
     <p:bg>
@@ -10484,7 +12358,7 @@
 </p:sld>
 </file>
 
-<file path=ppt/slides/slide5.xml><?xml version="1.0" encoding="utf-8"?>
+<file path=ppt/slides/slide6.xml><?xml version="1.0" encoding="utf-8"?>
 <p:sld xmlns:a="http://schemas.openxmlformats.org/drawingml/2006/main" xmlns:r="http://schemas.openxmlformats.org/officeDocument/2006/relationships" xmlns:p="http://schemas.openxmlformats.org/presentationml/2006/main">
   <p:cSld name="Slide 5">
     <p:bg>
@@ -12821,7 +14695,7 @@
 </p:sld>
 </file>
 
-<file path=ppt/slides/slide6.xml><?xml version="1.0" encoding="utf-8"?>
+<file path=ppt/slides/slide7.xml><?xml version="1.0" encoding="utf-8"?>
 <p:sld xmlns:a="http://schemas.openxmlformats.org/drawingml/2006/main" xmlns:r="http://schemas.openxmlformats.org/officeDocument/2006/relationships" xmlns:p="http://schemas.openxmlformats.org/presentationml/2006/main">
   <p:cSld name="Slide 6">
     <p:bg>
@@ -13881,7 +15755,7 @@
 </p:sld>
 </file>
 
-<file path=ppt/slides/slide7.xml><?xml version="1.0" encoding="utf-8"?>
+<file path=ppt/slides/slide8.xml><?xml version="1.0" encoding="utf-8"?>
 <p:sld xmlns:a="http://schemas.openxmlformats.org/drawingml/2006/main" xmlns:r="http://schemas.openxmlformats.org/officeDocument/2006/relationships" xmlns:p="http://schemas.openxmlformats.org/presentationml/2006/main">
   <p:cSld name="Slide 7">
     <p:bg>
@@ -14796,7 +16670,7 @@
 </p:sld>
 </file>
 
-<file path=ppt/slides/slide8.xml><?xml version="1.0" encoding="utf-8"?>
+<file path=ppt/slides/slide9.xml><?xml version="1.0" encoding="utf-8"?>
 <p:sld xmlns:a="http://schemas.openxmlformats.org/drawingml/2006/main" xmlns:r="http://schemas.openxmlformats.org/officeDocument/2006/relationships" xmlns:p="http://schemas.openxmlformats.org/presentationml/2006/main">
   <p:cSld name="Slide 8">
     <p:bg>
@@ -15797,911 +17671,6 @@
       <p:sp>
         <p:nvSpPr>
           <p:cNvPr id="30" name="Text 24"/>
-          <p:cNvSpPr/>
-          <p:nvPr/>
-        </p:nvSpPr>
-        <p:spPr>
-          <a:xfrm>
-            <a:off x="9174175" y="164592"/>
-            <a:ext cx="2788920" cy="228600"/>
-          </a:xfrm>
-          <a:prstGeom prst="rect">
-            <a:avLst/>
-          </a:prstGeom>
-          <a:noFill/>
-          <a:ln/>
-        </p:spPr>
-        <p:txBody>
-          <a:bodyPr wrap="square" rtlCol="0" anchor="ctr"/>
-          <a:lstStyle/>
-          <a:p>
-            <a:pPr marL="0" indent="0" algn="r">
-              <a:buNone/>
-            </a:pPr>
-            <a:r>
-              <a:rPr lang="en-US" sz="750" b="1" kern="0" spc="100" dirty="0">
-                <a:solidFill>
-                  <a:srgbClr val="D4A62A"/>
-                </a:solidFill>
-                <a:latin typeface="Arial" pitchFamily="34" charset="0"/>
-                <a:ea typeface="Arial" pitchFamily="34" charset="-122"/>
-                <a:cs typeface="Arial" pitchFamily="34" charset="-120"/>
-              </a:rPr>
-              <a:t>CONFIDENTIAL · INTERNAL</a:t>
-            </a:r>
-            <a:endParaRPr lang="en-US" sz="750" dirty="0"/>
-          </a:p>
-        </p:txBody>
-      </p:sp>
-    </p:spTree>
-  </p:cSld>
-  <p:clrMapOvr>
-    <a:masterClrMapping/>
-  </p:clrMapOvr>
-</p:sld>
-</file>
-
-<file path=ppt/slides/slide9.xml><?xml version="1.0" encoding="utf-8"?>
-<p:sld xmlns:a="http://schemas.openxmlformats.org/drawingml/2006/main" xmlns:r="http://schemas.openxmlformats.org/officeDocument/2006/relationships" xmlns:p="http://schemas.openxmlformats.org/presentationml/2006/main">
-  <p:cSld name="Slide 9">
-    <p:bg>
-      <p:bgPr>
-        <a:solidFill>
-          <a:srgbClr val="FFFFFF"/>
-        </a:solidFill>
-        <a:effectLst/>
-      </p:bgPr>
-    </p:bg>
-    <p:spTree>
-      <p:nvGrpSpPr>
-        <p:cNvPr id="1" name=""/>
-        <p:cNvGrpSpPr/>
-        <p:nvPr/>
-      </p:nvGrpSpPr>
-      <p:grpSpPr>
-        <a:xfrm>
-          <a:off x="0" y="0"/>
-          <a:ext cx="0" cy="0"/>
-          <a:chOff x="0" y="0"/>
-          <a:chExt cx="0" cy="0"/>
-        </a:xfrm>
-      </p:grpSpPr>
-      <p:sp>
-        <p:nvSpPr>
-          <p:cNvPr id="2" name="Text 0"/>
-          <p:cNvSpPr/>
-          <p:nvPr/>
-        </p:nvSpPr>
-        <p:spPr>
-          <a:xfrm>
-            <a:off x="685800" y="548640"/>
-            <a:ext cx="9144000" cy="274320"/>
-          </a:xfrm>
-          <a:prstGeom prst="rect">
-            <a:avLst/>
-          </a:prstGeom>
-          <a:noFill/>
-          <a:ln/>
-        </p:spPr>
-        <p:txBody>
-          <a:bodyPr wrap="square" rtlCol="0" anchor="ctr"/>
-          <a:lstStyle/>
-          <a:p>
-            <a:pPr marL="0" indent="0">
-              <a:buNone/>
-            </a:pPr>
-            <a:r>
-              <a:rPr lang="en-US" sz="800" dirty="0">
-                <a:solidFill>
-                  <a:srgbClr val="2563EB"/>
-                </a:solidFill>
-                <a:latin typeface="Arial" pitchFamily="34" charset="0"/>
-                <a:ea typeface="Arial" pitchFamily="34" charset="-122"/>
-                <a:cs typeface="Arial" pitchFamily="34" charset="-120"/>
-              </a:rPr>
-              <a:t>● </a:t>
-            </a:r>
-            <a:r>
-              <a:rPr lang="en-US" sz="1100" b="1" kern="0" spc="300" dirty="0">
-                <a:solidFill>
-                  <a:srgbClr val="2563EB"/>
-                </a:solidFill>
-                <a:latin typeface="Arial" pitchFamily="34" charset="0"/>
-                <a:ea typeface="Arial" pitchFamily="34" charset="-122"/>
-                <a:cs typeface="Arial" pitchFamily="34" charset="-120"/>
-              </a:rPr>
-              <a:t>WHAT WE DO</a:t>
-            </a:r>
-            <a:endParaRPr lang="en-US" sz="1100" dirty="0"/>
-          </a:p>
-        </p:txBody>
-      </p:sp>
-      <p:sp>
-        <p:nvSpPr>
-          <p:cNvPr id="3" name="Text 1"/>
-          <p:cNvSpPr/>
-          <p:nvPr/>
-        </p:nvSpPr>
-        <p:spPr>
-          <a:xfrm>
-            <a:off x="685800" y="868680"/>
-            <a:ext cx="10789920" cy="640080"/>
-          </a:xfrm>
-          <a:prstGeom prst="rect">
-            <a:avLst/>
-          </a:prstGeom>
-          <a:noFill/>
-          <a:ln/>
-        </p:spPr>
-        <p:txBody>
-          <a:bodyPr wrap="square" rtlCol="0" anchor="ctr"/>
-          <a:lstStyle/>
-          <a:p>
-            <a:pPr marL="0" indent="0">
-              <a:buNone/>
-            </a:pPr>
-            <a:r>
-              <a:rPr lang="en-US" sz="2900" b="1" dirty="0">
-                <a:solidFill>
-                  <a:srgbClr val="141A24"/>
-                </a:solidFill>
-                <a:latin typeface="Arial" pitchFamily="34" charset="0"/>
-                <a:ea typeface="Arial" pitchFamily="34" charset="-122"/>
-                <a:cs typeface="Arial" pitchFamily="34" charset="-120"/>
-              </a:rPr>
-              <a:t>Two specialties. </a:t>
-            </a:r>
-            <a:r>
-              <a:rPr lang="en-US" sz="2900" i="1" dirty="0">
-                <a:solidFill>
-                  <a:srgbClr val="2563EB"/>
-                </a:solidFill>
-                <a:latin typeface="Georgia" pitchFamily="34" charset="0"/>
-                <a:ea typeface="Georgia" pitchFamily="34" charset="-122"/>
-                <a:cs typeface="Georgia" pitchFamily="34" charset="-120"/>
-              </a:rPr>
-              <a:t>One advocate.</a:t>
-            </a:r>
-            <a:endParaRPr lang="en-US" sz="2900" dirty="0"/>
-          </a:p>
-        </p:txBody>
-      </p:sp>
-      <p:sp>
-        <p:nvSpPr>
-          <p:cNvPr id="4" name="Text 2"/>
-          <p:cNvSpPr/>
-          <p:nvPr/>
-        </p:nvSpPr>
-        <p:spPr>
-          <a:xfrm>
-            <a:off x="685800" y="1481328"/>
-            <a:ext cx="10789920" cy="365760"/>
-          </a:xfrm>
-          <a:prstGeom prst="rect">
-            <a:avLst/>
-          </a:prstGeom>
-          <a:noFill/>
-          <a:ln/>
-        </p:spPr>
-        <p:txBody>
-          <a:bodyPr wrap="square" rtlCol="0" anchor="ctr"/>
-          <a:lstStyle/>
-          <a:p>
-            <a:pPr marL="0" indent="0">
-              <a:buNone/>
-            </a:pPr>
-            <a:r>
-              <a:rPr lang="en-US" sz="1350" i="1" dirty="0">
-                <a:solidFill>
-                  <a:srgbClr val="6B7280"/>
-                </a:solidFill>
-                <a:latin typeface="Arial" pitchFamily="34" charset="0"/>
-                <a:ea typeface="Arial" pitchFamily="34" charset="-122"/>
-                <a:cs typeface="Arial" pitchFamily="34" charset="-120"/>
-              </a:rPr>
-              <a:t>From the next contract to the first NIL offer — coach representation and NIL guidance are the co-equal core.</a:t>
-            </a:r>
-            <a:endParaRPr lang="en-US" sz="1350" dirty="0"/>
-          </a:p>
-        </p:txBody>
-      </p:sp>
-      <p:sp>
-        <p:nvSpPr>
-          <p:cNvPr id="5" name="Shape 3"/>
-          <p:cNvSpPr/>
-          <p:nvPr/>
-        </p:nvSpPr>
-        <p:spPr>
-          <a:xfrm>
-            <a:off x="685800" y="2103120"/>
-            <a:ext cx="5230368" cy="2331720"/>
-          </a:xfrm>
-          <a:prstGeom prst="roundRect">
-            <a:avLst>
-              <a:gd name="adj" fmla="val 4706"/>
-            </a:avLst>
-          </a:prstGeom>
-          <a:solidFill>
-            <a:srgbClr val="0B1220"/>
-          </a:solidFill>
-          <a:ln/>
-        </p:spPr>
-      </p:sp>
-      <p:sp>
-        <p:nvSpPr>
-          <p:cNvPr id="6" name="Shape 4"/>
-          <p:cNvSpPr/>
-          <p:nvPr/>
-        </p:nvSpPr>
-        <p:spPr>
-          <a:xfrm>
-            <a:off x="960120" y="2377440"/>
-            <a:ext cx="777240" cy="777240"/>
-          </a:xfrm>
-          <a:prstGeom prst="roundRect">
-            <a:avLst>
-              <a:gd name="adj" fmla="val 18824"/>
-            </a:avLst>
-          </a:prstGeom>
-          <a:solidFill>
-            <a:srgbClr val="2563EB"/>
-          </a:solidFill>
-          <a:ln/>
-        </p:spPr>
-      </p:sp>
-      <p:pic>
-        <p:nvPicPr>
-          <p:cNvPr id="7" name="Image 0" descr="preencoded.png"/>
-          <p:cNvPicPr>
-            <a:picLocks noChangeAspect="1"/>
-          </p:cNvPicPr>
-          <p:nvPr/>
-        </p:nvPicPr>
-        <p:blipFill>
-          <a:blip r:embed="rId3"/>
-          <a:stretch>
-            <a:fillRect/>
-          </a:stretch>
-        </p:blipFill>
-        <p:spPr>
-          <a:xfrm>
-            <a:off x="1133856" y="2551176"/>
-            <a:ext cx="429768" cy="429768"/>
-          </a:xfrm>
-          <a:prstGeom prst="rect">
-            <a:avLst/>
-          </a:prstGeom>
-        </p:spPr>
-      </p:pic>
-      <p:sp>
-        <p:nvSpPr>
-          <p:cNvPr id="8" name="Text 5"/>
-          <p:cNvSpPr/>
-          <p:nvPr/>
-        </p:nvSpPr>
-        <p:spPr>
-          <a:xfrm>
-            <a:off x="960120" y="3291840"/>
-            <a:ext cx="4663440" cy="365760"/>
-          </a:xfrm>
-          <a:prstGeom prst="rect">
-            <a:avLst/>
-          </a:prstGeom>
-          <a:noFill/>
-          <a:ln/>
-        </p:spPr>
-        <p:txBody>
-          <a:bodyPr wrap="square" rtlCol="0" anchor="ctr"/>
-          <a:lstStyle/>
-          <a:p>
-            <a:pPr marL="0" indent="0">
-              <a:buNone/>
-            </a:pPr>
-            <a:r>
-              <a:rPr lang="en-US" sz="1800" b="1" dirty="0">
-                <a:solidFill>
-                  <a:srgbClr val="FFFFFF"/>
-                </a:solidFill>
-                <a:latin typeface="Arial" pitchFamily="34" charset="0"/>
-                <a:ea typeface="Arial" pitchFamily="34" charset="-122"/>
-                <a:cs typeface="Arial" pitchFamily="34" charset="-120"/>
-              </a:rPr>
-              <a:t>Coach Representation</a:t>
-            </a:r>
-            <a:endParaRPr lang="en-US" sz="1800" dirty="0"/>
-          </a:p>
-        </p:txBody>
-      </p:sp>
-      <p:sp>
-        <p:nvSpPr>
-          <p:cNvPr id="9" name="Text 6"/>
-          <p:cNvSpPr/>
-          <p:nvPr/>
-        </p:nvSpPr>
-        <p:spPr>
-          <a:xfrm>
-            <a:off x="960120" y="3675888"/>
-            <a:ext cx="4754880" cy="685800"/>
-          </a:xfrm>
-          <a:prstGeom prst="rect">
-            <a:avLst/>
-          </a:prstGeom>
-          <a:noFill/>
-          <a:ln/>
-        </p:spPr>
-        <p:txBody>
-          <a:bodyPr wrap="square" rtlCol="0" anchor="t"/>
-          <a:lstStyle/>
-          <a:p>
-            <a:pPr marL="0" indent="0">
-              <a:lnSpc>
-                <a:spcPct val="108000"/>
-              </a:lnSpc>
-              <a:buNone/>
-            </a:pPr>
-            <a:r>
-              <a:rPr lang="en-US" sz="1100" dirty="0">
-                <a:solidFill>
-                  <a:srgbClr val="C3CAD6"/>
-                </a:solidFill>
-                <a:latin typeface="Arial" pitchFamily="34" charset="0"/>
-                <a:ea typeface="Arial" pitchFamily="34" charset="-122"/>
-                <a:cs typeface="Arial" pitchFamily="34" charset="-120"/>
-              </a:rPr>
-              <a:t>Contract and career representation for head and assistant coaches in every sport — focused on the women and mid-career assistants the big agencies overlook.</a:t>
-            </a:r>
-            <a:endParaRPr lang="en-US" sz="1100" dirty="0"/>
-          </a:p>
-        </p:txBody>
-      </p:sp>
-      <p:sp>
-        <p:nvSpPr>
-          <p:cNvPr id="10" name="Shape 7"/>
-          <p:cNvSpPr/>
-          <p:nvPr/>
-        </p:nvSpPr>
-        <p:spPr>
-          <a:xfrm>
-            <a:off x="6272784" y="2103120"/>
-            <a:ext cx="5230368" cy="2331720"/>
-          </a:xfrm>
-          <a:prstGeom prst="roundRect">
-            <a:avLst>
-              <a:gd name="adj" fmla="val 4706"/>
-            </a:avLst>
-          </a:prstGeom>
-          <a:solidFill>
-            <a:srgbClr val="2563EB"/>
-          </a:solidFill>
-          <a:ln/>
-        </p:spPr>
-      </p:sp>
-      <p:sp>
-        <p:nvSpPr>
-          <p:cNvPr id="11" name="Shape 8"/>
-          <p:cNvSpPr/>
-          <p:nvPr/>
-        </p:nvSpPr>
-        <p:spPr>
-          <a:xfrm>
-            <a:off x="6547104" y="2377440"/>
-            <a:ext cx="777240" cy="777240"/>
-          </a:xfrm>
-          <a:prstGeom prst="roundRect">
-            <a:avLst>
-              <a:gd name="adj" fmla="val 18824"/>
-            </a:avLst>
-          </a:prstGeom>
-          <a:solidFill>
-            <a:srgbClr val="1D4FD7"/>
-          </a:solidFill>
-          <a:ln w="12700">
-            <a:solidFill>
-              <a:srgbClr val="FFFFFF"/>
-            </a:solidFill>
-            <a:prstDash val="solid"/>
-          </a:ln>
-        </p:spPr>
-      </p:sp>
-      <p:pic>
-        <p:nvPicPr>
-          <p:cNvPr id="12" name="Image 1" descr="preencoded.png"/>
-          <p:cNvPicPr>
-            <a:picLocks noChangeAspect="1"/>
-          </p:cNvPicPr>
-          <p:nvPr/>
-        </p:nvPicPr>
-        <p:blipFill>
-          <a:blip r:embed="rId4"/>
-          <a:stretch>
-            <a:fillRect/>
-          </a:stretch>
-        </p:blipFill>
-        <p:spPr>
-          <a:xfrm>
-            <a:off x="6720840" y="2551176"/>
-            <a:ext cx="429768" cy="429768"/>
-          </a:xfrm>
-          <a:prstGeom prst="rect">
-            <a:avLst/>
-          </a:prstGeom>
-        </p:spPr>
-      </p:pic>
-      <p:sp>
-        <p:nvSpPr>
-          <p:cNvPr id="13" name="Text 9"/>
-          <p:cNvSpPr/>
-          <p:nvPr/>
-        </p:nvSpPr>
-        <p:spPr>
-          <a:xfrm>
-            <a:off x="6547104" y="3291840"/>
-            <a:ext cx="4663440" cy="365760"/>
-          </a:xfrm>
-          <a:prstGeom prst="rect">
-            <a:avLst/>
-          </a:prstGeom>
-          <a:noFill/>
-          <a:ln/>
-        </p:spPr>
-        <p:txBody>
-          <a:bodyPr wrap="square" rtlCol="0" anchor="ctr"/>
-          <a:lstStyle/>
-          <a:p>
-            <a:pPr marL="0" indent="0">
-              <a:buNone/>
-            </a:pPr>
-            <a:r>
-              <a:rPr lang="en-US" sz="1800" b="1" dirty="0">
-                <a:solidFill>
-                  <a:srgbClr val="FFFFFF"/>
-                </a:solidFill>
-                <a:latin typeface="Arial" pitchFamily="34" charset="0"/>
-                <a:ea typeface="Arial" pitchFamily="34" charset="-122"/>
-                <a:cs typeface="Arial" pitchFamily="34" charset="-120"/>
-              </a:rPr>
-              <a:t>NIL &amp; Brand Partnerships</a:t>
-            </a:r>
-            <a:endParaRPr lang="en-US" sz="1800" dirty="0"/>
-          </a:p>
-        </p:txBody>
-      </p:sp>
-      <p:sp>
-        <p:nvSpPr>
-          <p:cNvPr id="14" name="Text 10"/>
-          <p:cNvSpPr/>
-          <p:nvPr/>
-        </p:nvSpPr>
-        <p:spPr>
-          <a:xfrm>
-            <a:off x="6547104" y="3675888"/>
-            <a:ext cx="4754880" cy="685800"/>
-          </a:xfrm>
-          <a:prstGeom prst="rect">
-            <a:avLst/>
-          </a:prstGeom>
-          <a:noFill/>
-          <a:ln/>
-        </p:spPr>
-        <p:txBody>
-          <a:bodyPr wrap="square" rtlCol="0" anchor="t"/>
-          <a:lstStyle/>
-          <a:p>
-            <a:pPr marL="0" indent="0">
-              <a:lnSpc>
-                <a:spcPct val="108000"/>
-              </a:lnSpc>
-              <a:buNone/>
-            </a:pPr>
-            <a:r>
-              <a:rPr lang="en-US" sz="1100" dirty="0">
-                <a:solidFill>
-                  <a:srgbClr val="E7EDFF"/>
-                </a:solidFill>
-                <a:latin typeface="Arial" pitchFamily="34" charset="0"/>
-                <a:ea typeface="Arial" pitchFamily="34" charset="-122"/>
-                <a:cs typeface="Arial" pitchFamily="34" charset="-120"/>
-              </a:rPr>
-              <a:t>Guidance and deal management for athletes and families navigating NIL — a co-equal specialty and the lead engine for the Before You Sign toolkit.</a:t>
-            </a:r>
-            <a:endParaRPr lang="en-US" sz="1100" dirty="0"/>
-          </a:p>
-        </p:txBody>
-      </p:sp>
-      <p:sp>
-        <p:nvSpPr>
-          <p:cNvPr id="15" name="Text 11"/>
-          <p:cNvSpPr/>
-          <p:nvPr/>
-        </p:nvSpPr>
-        <p:spPr>
-          <a:xfrm>
-            <a:off x="685800" y="4709160"/>
-            <a:ext cx="3657600" cy="274320"/>
-          </a:xfrm>
-          <a:prstGeom prst="rect">
-            <a:avLst/>
-          </a:prstGeom>
-          <a:noFill/>
-          <a:ln/>
-        </p:spPr>
-        <p:txBody>
-          <a:bodyPr wrap="square" rtlCol="0" anchor="ctr"/>
-          <a:lstStyle/>
-          <a:p>
-            <a:pPr marL="0" indent="0">
-              <a:buNone/>
-            </a:pPr>
-            <a:r>
-              <a:rPr lang="en-US" sz="1000" b="1" kern="0" spc="200" dirty="0">
-                <a:solidFill>
-                  <a:srgbClr val="6B7280"/>
-                </a:solidFill>
-                <a:latin typeface="Arial" pitchFamily="34" charset="0"/>
-                <a:ea typeface="Arial" pitchFamily="34" charset="-122"/>
-                <a:cs typeface="Arial" pitchFamily="34" charset="-120"/>
-              </a:rPr>
-              <a:t>EXPANSION LINES</a:t>
-            </a:r>
-            <a:endParaRPr lang="en-US" sz="1000" dirty="0"/>
-          </a:p>
-        </p:txBody>
-      </p:sp>
-      <p:sp>
-        <p:nvSpPr>
-          <p:cNvPr id="16" name="Shape 12"/>
-          <p:cNvSpPr/>
-          <p:nvPr/>
-        </p:nvSpPr>
-        <p:spPr>
-          <a:xfrm>
-            <a:off x="685800" y="5029200"/>
-            <a:ext cx="5230368" cy="1051560"/>
-          </a:xfrm>
-          <a:prstGeom prst="roundRect">
-            <a:avLst>
-              <a:gd name="adj" fmla="val 8696"/>
-            </a:avLst>
-          </a:prstGeom>
-          <a:solidFill>
-            <a:srgbClr val="F3F1EA"/>
-          </a:solidFill>
-          <a:ln w="12700">
-            <a:solidFill>
-              <a:srgbClr val="E4E7EC"/>
-            </a:solidFill>
-            <a:prstDash val="solid"/>
-          </a:ln>
-        </p:spPr>
-      </p:sp>
-      <p:sp>
-        <p:nvSpPr>
-          <p:cNvPr id="17" name="Shape 13"/>
-          <p:cNvSpPr/>
-          <p:nvPr/>
-        </p:nvSpPr>
-        <p:spPr>
-          <a:xfrm>
-            <a:off x="914400" y="5239512"/>
-            <a:ext cx="548640" cy="548640"/>
-          </a:xfrm>
-          <a:prstGeom prst="roundRect">
-            <a:avLst>
-              <a:gd name="adj" fmla="val 20000"/>
-            </a:avLst>
-          </a:prstGeom>
-          <a:solidFill>
-            <a:srgbClr val="0B1220"/>
-          </a:solidFill>
-          <a:ln/>
-        </p:spPr>
-      </p:sp>
-      <p:pic>
-        <p:nvPicPr>
-          <p:cNvPr id="18" name="Image 2" descr="preencoded.png"/>
-          <p:cNvPicPr>
-            <a:picLocks noChangeAspect="1"/>
-          </p:cNvPicPr>
-          <p:nvPr/>
-        </p:nvPicPr>
-        <p:blipFill>
-          <a:blip r:embed="rId5"/>
-          <a:stretch>
-            <a:fillRect/>
-          </a:stretch>
-        </p:blipFill>
-        <p:spPr>
-          <a:xfrm>
-            <a:off x="1042416" y="5367528"/>
-            <a:ext cx="292608" cy="292608"/>
-          </a:xfrm>
-          <a:prstGeom prst="rect">
-            <a:avLst/>
-          </a:prstGeom>
-        </p:spPr>
-      </p:pic>
-      <p:sp>
-        <p:nvSpPr>
-          <p:cNvPr id="19" name="Text 14"/>
-          <p:cNvSpPr/>
-          <p:nvPr/>
-        </p:nvSpPr>
-        <p:spPr>
-          <a:xfrm>
-            <a:off x="1645920" y="5230368"/>
-            <a:ext cx="4041648" cy="347472"/>
-          </a:xfrm>
-          <a:prstGeom prst="rect">
-            <a:avLst/>
-          </a:prstGeom>
-          <a:noFill/>
-          <a:ln/>
-        </p:spPr>
-        <p:txBody>
-          <a:bodyPr wrap="square" rtlCol="0" anchor="ctr"/>
-          <a:lstStyle/>
-          <a:p>
-            <a:pPr marL="0" indent="0">
-              <a:buNone/>
-            </a:pPr>
-            <a:r>
-              <a:rPr lang="en-US" sz="1400" b="1" dirty="0">
-                <a:solidFill>
-                  <a:srgbClr val="141A24"/>
-                </a:solidFill>
-                <a:latin typeface="Arial" pitchFamily="34" charset="0"/>
-                <a:ea typeface="Arial" pitchFamily="34" charset="-122"/>
-                <a:cs typeface="Arial" pitchFamily="34" charset="-120"/>
-              </a:rPr>
-              <a:t>Search Desk</a:t>
-            </a:r>
-            <a:endParaRPr lang="en-US" sz="1400" dirty="0"/>
-          </a:p>
-        </p:txBody>
-      </p:sp>
-      <p:sp>
-        <p:nvSpPr>
-          <p:cNvPr id="20" name="Text 15"/>
-          <p:cNvSpPr/>
-          <p:nvPr/>
-        </p:nvSpPr>
-        <p:spPr>
-          <a:xfrm>
-            <a:off x="1645920" y="5577840"/>
-            <a:ext cx="4041648" cy="411480"/>
-          </a:xfrm>
-          <a:prstGeom prst="rect">
-            <a:avLst/>
-          </a:prstGeom>
-          <a:noFill/>
-          <a:ln/>
-        </p:spPr>
-        <p:txBody>
-          <a:bodyPr wrap="square" rtlCol="0" anchor="t"/>
-          <a:lstStyle/>
-          <a:p>
-            <a:pPr marL="0" indent="0">
-              <a:buNone/>
-            </a:pPr>
-            <a:r>
-              <a:rPr lang="en-US" sz="1050" dirty="0">
-                <a:solidFill>
-                  <a:srgbClr val="141A24"/>
-                </a:solidFill>
-                <a:latin typeface="Arial" pitchFamily="34" charset="0"/>
-                <a:ea typeface="Arial" pitchFamily="34" charset="-122"/>
-                <a:cs typeface="Arial" pitchFamily="34" charset="-120"/>
-              </a:rPr>
-              <a:t>Flat-fee searches for mid-major &amp; D-II/III — paid by the school.</a:t>
-            </a:r>
-            <a:endParaRPr lang="en-US" sz="1050" dirty="0"/>
-          </a:p>
-        </p:txBody>
-      </p:sp>
-      <p:sp>
-        <p:nvSpPr>
-          <p:cNvPr id="21" name="Shape 16"/>
-          <p:cNvSpPr/>
-          <p:nvPr/>
-        </p:nvSpPr>
-        <p:spPr>
-          <a:xfrm>
-            <a:off x="6272784" y="5029200"/>
-            <a:ext cx="5230368" cy="1051560"/>
-          </a:xfrm>
-          <a:prstGeom prst="roundRect">
-            <a:avLst>
-              <a:gd name="adj" fmla="val 8696"/>
-            </a:avLst>
-          </a:prstGeom>
-          <a:solidFill>
-            <a:srgbClr val="F3F1EA"/>
-          </a:solidFill>
-          <a:ln w="12700">
-            <a:solidFill>
-              <a:srgbClr val="E4E7EC"/>
-            </a:solidFill>
-            <a:prstDash val="solid"/>
-          </a:ln>
-        </p:spPr>
-      </p:sp>
-      <p:sp>
-        <p:nvSpPr>
-          <p:cNvPr id="22" name="Shape 17"/>
-          <p:cNvSpPr/>
-          <p:nvPr/>
-        </p:nvSpPr>
-        <p:spPr>
-          <a:xfrm>
-            <a:off x="6501384" y="5239512"/>
-            <a:ext cx="548640" cy="548640"/>
-          </a:xfrm>
-          <a:prstGeom prst="roundRect">
-            <a:avLst>
-              <a:gd name="adj" fmla="val 20000"/>
-            </a:avLst>
-          </a:prstGeom>
-          <a:solidFill>
-            <a:srgbClr val="0B1220"/>
-          </a:solidFill>
-          <a:ln/>
-        </p:spPr>
-      </p:sp>
-      <p:pic>
-        <p:nvPicPr>
-          <p:cNvPr id="23" name="Image 3" descr="preencoded.png"/>
-          <p:cNvPicPr>
-            <a:picLocks noChangeAspect="1"/>
-          </p:cNvPicPr>
-          <p:nvPr/>
-        </p:nvPicPr>
-        <p:blipFill>
-          <a:blip r:embed="rId6"/>
-          <a:stretch>
-            <a:fillRect/>
-          </a:stretch>
-        </p:blipFill>
-        <p:spPr>
-          <a:xfrm>
-            <a:off x="6629400" y="5367528"/>
-            <a:ext cx="292608" cy="292608"/>
-          </a:xfrm>
-          <a:prstGeom prst="rect">
-            <a:avLst/>
-          </a:prstGeom>
-        </p:spPr>
-      </p:pic>
-      <p:sp>
-        <p:nvSpPr>
-          <p:cNvPr id="24" name="Text 18"/>
-          <p:cNvSpPr/>
-          <p:nvPr/>
-        </p:nvSpPr>
-        <p:spPr>
-          <a:xfrm>
-            <a:off x="7232904" y="5230368"/>
-            <a:ext cx="4041648" cy="347472"/>
-          </a:xfrm>
-          <a:prstGeom prst="rect">
-            <a:avLst/>
-          </a:prstGeom>
-          <a:noFill/>
-          <a:ln/>
-        </p:spPr>
-        <p:txBody>
-          <a:bodyPr wrap="square" rtlCol="0" anchor="ctr"/>
-          <a:lstStyle/>
-          <a:p>
-            <a:pPr marL="0" indent="0">
-              <a:buNone/>
-            </a:pPr>
-            <a:r>
-              <a:rPr lang="en-US" sz="1400" b="1" dirty="0">
-                <a:solidFill>
-                  <a:srgbClr val="141A24"/>
-                </a:solidFill>
-                <a:latin typeface="Arial" pitchFamily="34" charset="0"/>
-                <a:ea typeface="Arial" pitchFamily="34" charset="-122"/>
-                <a:cs typeface="Arial" pitchFamily="34" charset="-120"/>
-              </a:rPr>
-              <a:t>NFLPA Agent Rep</a:t>
-            </a:r>
-            <a:endParaRPr lang="en-US" sz="1400" dirty="0"/>
-          </a:p>
-        </p:txBody>
-      </p:sp>
-      <p:sp>
-        <p:nvSpPr>
-          <p:cNvPr id="25" name="Text 19"/>
-          <p:cNvSpPr/>
-          <p:nvPr/>
-        </p:nvSpPr>
-        <p:spPr>
-          <a:xfrm>
-            <a:off x="7232904" y="5577840"/>
-            <a:ext cx="4041648" cy="411480"/>
-          </a:xfrm>
-          <a:prstGeom prst="rect">
-            <a:avLst/>
-          </a:prstGeom>
-          <a:noFill/>
-          <a:ln/>
-        </p:spPr>
-        <p:txBody>
-          <a:bodyPr wrap="square" rtlCol="0" anchor="t"/>
-          <a:lstStyle/>
-          <a:p>
-            <a:pPr marL="0" indent="0">
-              <a:buNone/>
-            </a:pPr>
-            <a:r>
-              <a:rPr lang="en-US" sz="1050" dirty="0">
-                <a:solidFill>
-                  <a:srgbClr val="141A24"/>
-                </a:solidFill>
-                <a:latin typeface="Arial" pitchFamily="34" charset="0"/>
-                <a:ea typeface="Arial" pitchFamily="34" charset="-122"/>
-                <a:cs typeface="Arial" pitchFamily="34" charset="-120"/>
-              </a:rPr>
-              <a:t>Represent NFL players once Kim is certified — 3% of contract.</a:t>
-            </a:r>
-            <a:endParaRPr lang="en-US" sz="1050" dirty="0"/>
-          </a:p>
-        </p:txBody>
-      </p:sp>
-      <p:sp>
-        <p:nvSpPr>
-          <p:cNvPr id="26" name="Text 20"/>
-          <p:cNvSpPr/>
-          <p:nvPr/>
-        </p:nvSpPr>
-        <p:spPr>
-          <a:xfrm>
-            <a:off x="685800" y="6400800"/>
-            <a:ext cx="7315200" cy="274320"/>
-          </a:xfrm>
-          <a:prstGeom prst="rect">
-            <a:avLst/>
-          </a:prstGeom>
-          <a:noFill/>
-          <a:ln/>
-        </p:spPr>
-        <p:txBody>
-          <a:bodyPr wrap="square" rtlCol="0" anchor="ctr"/>
-          <a:lstStyle/>
-          <a:p>
-            <a:pPr marL="0" indent="0">
-              <a:buNone/>
-            </a:pPr>
-            <a:r>
-              <a:rPr lang="en-US" sz="850" b="1" dirty="0">
-                <a:solidFill>
-                  <a:srgbClr val="6B7280"/>
-                </a:solidFill>
-                <a:latin typeface="Arial" pitchFamily="34" charset="0"/>
-                <a:ea typeface="Arial" pitchFamily="34" charset="-122"/>
-                <a:cs typeface="Arial" pitchFamily="34" charset="-120"/>
-              </a:rPr>
-              <a:t>Dexter Sports Co.</a:t>
-            </a:r>
-            <a:r>
-              <a:rPr lang="en-US" sz="850" dirty="0">
-                <a:solidFill>
-                  <a:srgbClr val="AEB4BC"/>
-                </a:solidFill>
-                <a:latin typeface="Arial" pitchFamily="34" charset="0"/>
-                <a:ea typeface="Arial" pitchFamily="34" charset="-122"/>
-                <a:cs typeface="Arial" pitchFamily="34" charset="-120"/>
-              </a:rPr>
-              <a:t>   ·   What We Do</a:t>
-            </a:r>
-            <a:endParaRPr lang="en-US" sz="850" dirty="0"/>
-          </a:p>
-        </p:txBody>
-      </p:sp>
-      <p:sp>
-        <p:nvSpPr>
-          <p:cNvPr id="27" name="Text 21"/>
           <p:cNvSpPr/>
           <p:nvPr/>
         </p:nvSpPr>
